--- a/skills/presentation-template-library/skills/artifact-template-noir-field-pictorial/assets/reference.pptx
+++ b/skills/presentation-template-library/skills/artifact-template-noir-field-pictorial/assets/reference.pptx
@@ -224,7 +224,7 @@
           <p:nvPr/>
         </p:nvPicPr>
         <p:blipFill>
-          <a:blip xmlns:r="http://schemas.openxmlformats.org/officeDocument/2006/relationships" xmlns:a="http://schemas.openxmlformats.org/drawingml/2006/main" r:embed="rIdOfficeKitImage59ee3aa5202fd02f_1"/>
+          <a:blip xmlns:r="http://schemas.openxmlformats.org/officeDocument/2006/relationships" xmlns:a="http://schemas.openxmlformats.org/drawingml/2006/main" r:embed="rIdOfficeKitImage7790b68b5d8fcd92_1"/>
           <a:srcRect xmlns:a="http://schemas.openxmlformats.org/drawingml/2006/main" l="0" t="34180" r="0" b="34180"/>
           <a:stretch xmlns:a="http://schemas.openxmlformats.org/drawingml/2006/main">
             <a:fillRect/>
@@ -573,8 +573,8 @@
           <p:nvPr/>
         </p:nvPicPr>
         <p:blipFill>
-          <a:blip xmlns:r="http://schemas.openxmlformats.org/officeDocument/2006/relationships" xmlns:a="http://schemas.openxmlformats.org/drawingml/2006/main" r:embed="rIdOfficeKitImageaeb6f74d36d260d0_1"/>
-          <a:srcRect xmlns:a="http://schemas.openxmlformats.org/drawingml/2006/main" l="0" t="34180" r="0" b="34180"/>
+          <a:blip xmlns:r="http://schemas.openxmlformats.org/officeDocument/2006/relationships" xmlns:a="http://schemas.openxmlformats.org/drawingml/2006/main" r:embed="rIdOfficeKitImage31956823b229fb66_1"/>
+          <a:srcRect xmlns:a="http://schemas.openxmlformats.org/drawingml/2006/main" l="0" t="34171" r="0" b="34171"/>
           <a:stretch xmlns:a="http://schemas.openxmlformats.org/drawingml/2006/main">
             <a:fillRect/>
           </a:stretch>
@@ -671,7 +671,7 @@
         </p:nvSpPr>
         <p:spPr>
           <a:xfrm xmlns:a="http://schemas.openxmlformats.org/drawingml/2006/main">
-            <a:off x="914400" y="2628900"/>
+            <a:off x="914400" y="1752600"/>
             <a:ext cx="1516380" cy="209550"/>
           </a:xfrm>
           <a:prstGeom xmlns:a="http://schemas.openxmlformats.org/drawingml/2006/main" prst="rect">
@@ -707,7 +707,7 @@
         </p:nvSpPr>
         <p:spPr>
           <a:xfrm xmlns:a="http://schemas.openxmlformats.org/drawingml/2006/main">
-            <a:off x="990600" y="2667000"/>
+            <a:off x="990600" y="1790700"/>
             <a:ext cx="1363980" cy="133350"/>
           </a:xfrm>
           <a:prstGeom xmlns:a="http://schemas.openxmlformats.org/drawingml/2006/main" prst="rect">
@@ -745,7 +745,7 @@
         </p:nvSpPr>
         <p:spPr>
           <a:xfrm xmlns:a="http://schemas.openxmlformats.org/drawingml/2006/main">
-            <a:off x="2487930" y="2628900"/>
+            <a:off x="2487930" y="1752600"/>
             <a:ext cx="1516380" cy="209550"/>
           </a:xfrm>
           <a:prstGeom xmlns:a="http://schemas.openxmlformats.org/drawingml/2006/main" prst="rect">
@@ -781,7 +781,7 @@
         </p:nvSpPr>
         <p:spPr>
           <a:xfrm xmlns:a="http://schemas.openxmlformats.org/drawingml/2006/main">
-            <a:off x="2564130" y="2667000"/>
+            <a:off x="2564130" y="1790700"/>
             <a:ext cx="1363980" cy="133350"/>
           </a:xfrm>
           <a:prstGeom xmlns:a="http://schemas.openxmlformats.org/drawingml/2006/main" prst="rect">
@@ -819,7 +819,7 @@
         </p:nvSpPr>
         <p:spPr>
           <a:xfrm xmlns:a="http://schemas.openxmlformats.org/drawingml/2006/main">
-            <a:off x="4061460" y="2628900"/>
+            <a:off x="4061460" y="1752600"/>
             <a:ext cx="1516380" cy="209550"/>
           </a:xfrm>
           <a:prstGeom xmlns:a="http://schemas.openxmlformats.org/drawingml/2006/main" prst="rect">
@@ -855,7 +855,7 @@
         </p:nvSpPr>
         <p:spPr>
           <a:xfrm xmlns:a="http://schemas.openxmlformats.org/drawingml/2006/main">
-            <a:off x="4137660" y="2667000"/>
+            <a:off x="4137660" y="1790700"/>
             <a:ext cx="1363980" cy="133350"/>
           </a:xfrm>
           <a:prstGeom xmlns:a="http://schemas.openxmlformats.org/drawingml/2006/main" prst="rect">
@@ -893,7 +893,7 @@
         </p:nvSpPr>
         <p:spPr>
           <a:xfrm xmlns:a="http://schemas.openxmlformats.org/drawingml/2006/main">
-            <a:off x="5634990" y="2628900"/>
+            <a:off x="5634990" y="1752600"/>
             <a:ext cx="1516380" cy="209550"/>
           </a:xfrm>
           <a:prstGeom xmlns:a="http://schemas.openxmlformats.org/drawingml/2006/main" prst="rect">
@@ -929,7 +929,7 @@
         </p:nvSpPr>
         <p:spPr>
           <a:xfrm xmlns:a="http://schemas.openxmlformats.org/drawingml/2006/main">
-            <a:off x="5711190" y="2667000"/>
+            <a:off x="5711190" y="1790700"/>
             <a:ext cx="1363980" cy="133350"/>
           </a:xfrm>
           <a:prstGeom xmlns:a="http://schemas.openxmlformats.org/drawingml/2006/main" prst="rect">
@@ -967,7 +967,7 @@
         </p:nvSpPr>
         <p:spPr>
           <a:xfrm xmlns:a="http://schemas.openxmlformats.org/drawingml/2006/main">
-            <a:off x="7208520" y="2628900"/>
+            <a:off x="7208520" y="1752600"/>
             <a:ext cx="1516380" cy="209550"/>
           </a:xfrm>
           <a:prstGeom xmlns:a="http://schemas.openxmlformats.org/drawingml/2006/main" prst="rect">
@@ -1003,7 +1003,7 @@
         </p:nvSpPr>
         <p:spPr>
           <a:xfrm xmlns:a="http://schemas.openxmlformats.org/drawingml/2006/main">
-            <a:off x="7284720" y="2667000"/>
+            <a:off x="7284720" y="1790700"/>
             <a:ext cx="1363980" cy="133350"/>
           </a:xfrm>
           <a:prstGeom xmlns:a="http://schemas.openxmlformats.org/drawingml/2006/main" prst="rect">
@@ -1028,296 +1028,6 @@
                 <a:ea typeface="Inter"/>
               </a:rPr>
               <a:t>NEXT</a:t>
-            </a:r>
-            <a:endParaRPr lang="en-US"/>
-          </a:p>
-        </p:txBody>
-      </p:sp>
-      <p:sp>
-        <p:nvSpPr>
-          <p:cNvPr id="15" name="argument-top-rule"/>
-          <p:cNvSpPr/>
-          <p:nvPr/>
-        </p:nvSpPr>
-        <p:spPr>
-          <a:xfrm xmlns:a="http://schemas.openxmlformats.org/drawingml/2006/main">
-            <a:off x="838200" y="666750"/>
-            <a:ext cx="13563600" cy="0"/>
-          </a:xfrm>
-          <a:prstGeom xmlns:a="http://schemas.openxmlformats.org/drawingml/2006/main" prst="line">
-            <a:avLst/>
-          </a:prstGeom>
-          <a:noFill xmlns:a="http://schemas.openxmlformats.org/drawingml/2006/main"/>
-          <a:ln xmlns:a="http://schemas.openxmlformats.org/drawingml/2006/main" w="38100">
-            <a:solidFill>
-              <a:srgbClr val="D53A45"/>
-            </a:solidFill>
-            <a:prstDash val="solid"/>
-          </a:ln>
-        </p:spPr>
-        <p:txBody>
-          <a:bodyPr xmlns:a="http://schemas.openxmlformats.org/drawingml/2006/main" wrap="square" lIns="0" tIns="0" rIns="0" bIns="0" anchor="t"/>
-          <a:lstStyle xmlns:a="http://schemas.openxmlformats.org/drawingml/2006/main"/>
-          <a:p xmlns:a="http://schemas.openxmlformats.org/drawingml/2006/main">
-            <a:r>
-              <a:rPr lang="en-US"/>
-              <a:t/>
-            </a:r>
-            <a:endParaRPr lang="en-US"/>
-          </a:p>
-        </p:txBody>
-      </p:sp>
-      <p:sp>
-        <p:nvSpPr>
-          <p:cNvPr id="16" name="NOIR FIELD PICTORIAL · ARGUMENT"/>
-          <p:cNvSpPr txBox="1"/>
-          <p:nvPr/>
-        </p:nvSpPr>
-        <p:spPr>
-          <a:xfrm xmlns:a="http://schemas.openxmlformats.org/drawingml/2006/main">
-            <a:off x="914400" y="895350"/>
-            <a:ext cx="7239000" cy="228600"/>
-          </a:xfrm>
-          <a:prstGeom xmlns:a="http://schemas.openxmlformats.org/drawingml/2006/main" prst="rect">
-            <a:avLst/>
-          </a:prstGeom>
-          <a:noFill xmlns:a="http://schemas.openxmlformats.org/drawingml/2006/main"/>
-          <a:ln xmlns:a="http://schemas.openxmlformats.org/drawingml/2006/main" w="0">
-            <a:noFill/>
-          </a:ln>
-        </p:spPr>
-        <p:txBody>
-          <a:bodyPr xmlns:a="http://schemas.openxmlformats.org/drawingml/2006/main" wrap="square" lIns="0" tIns="0" rIns="0" bIns="0" anchor="t"/>
-          <a:lstStyle xmlns:a="http://schemas.openxmlformats.org/drawingml/2006/main"/>
-          <a:p xmlns:a="http://schemas.openxmlformats.org/drawingml/2006/main">
-            <a:r>
-              <a:rPr lang="en-US" sz="1200" b="1">
-                <a:solidFill>
-                  <a:srgbClr val="D53A45"/>
-                </a:solidFill>
-                <a:latin typeface="Inter"/>
-                <a:ea typeface="Inter"/>
-              </a:rPr>
-              <a:t>NOIR FIELD PICTORIAL · ARGUMENT</a:t>
-            </a:r>
-            <a:endParaRPr lang="en-US"/>
-          </a:p>
-        </p:txBody>
-      </p:sp>
-      <p:sp>
-        <p:nvSpPr>
-          <p:cNvPr id="17" name="argument-title"/>
-          <p:cNvSpPr txBox="1"/>
-          <p:nvPr/>
-        </p:nvSpPr>
-        <p:spPr>
-          <a:xfrm xmlns:a="http://schemas.openxmlformats.org/drawingml/2006/main">
-            <a:off x="914400" y="1314450"/>
-            <a:ext cx="6286500" cy="552450"/>
-          </a:xfrm>
-          <a:prstGeom xmlns:a="http://schemas.openxmlformats.org/drawingml/2006/main" prst="rect">
-            <a:avLst/>
-          </a:prstGeom>
-          <a:noFill xmlns:a="http://schemas.openxmlformats.org/drawingml/2006/main"/>
-          <a:ln xmlns:a="http://schemas.openxmlformats.org/drawingml/2006/main" w="0">
-            <a:noFill/>
-          </a:ln>
-        </p:spPr>
-        <p:txBody>
-          <a:bodyPr xmlns:a="http://schemas.openxmlformats.org/drawingml/2006/main" wrap="square" lIns="0" tIns="0" rIns="0" bIns="0" anchor="t"/>
-          <a:lstStyle xmlns:a="http://schemas.openxmlformats.org/drawingml/2006/main"/>
-          <a:p xmlns:a="http://schemas.openxmlformats.org/drawingml/2006/main">
-            <a:r>
-              <a:rPr lang="en-US" sz="2850" b="1">
-                <a:solidFill>
-                  <a:srgbClr val="F2F0EA"/>
-                </a:solidFill>
-                <a:latin typeface="Inter"/>
-                <a:ea typeface="Inter"/>
-              </a:rPr>
-              <a:t>The proposition is the page's visual center</a:t>
-            </a:r>
-            <a:endParaRPr lang="en-US"/>
-          </a:p>
-        </p:txBody>
-      </p:sp>
-      <p:sp>
-        <p:nvSpPr>
-          <p:cNvPr id="18" name="argument-basis"/>
-          <p:cNvSpPr txBox="1"/>
-          <p:nvPr/>
-        </p:nvSpPr>
-        <p:spPr>
-          <a:xfrm xmlns:a="http://schemas.openxmlformats.org/drawingml/2006/main">
-            <a:off x="952500" y="1981200"/>
-            <a:ext cx="6096000" cy="266700"/>
-          </a:xfrm>
-          <a:prstGeom xmlns:a="http://schemas.openxmlformats.org/drawingml/2006/main" prst="rect">
-            <a:avLst/>
-          </a:prstGeom>
-          <a:noFill xmlns:a="http://schemas.openxmlformats.org/drawingml/2006/main"/>
-          <a:ln xmlns:a="http://schemas.openxmlformats.org/drawingml/2006/main" w="0">
-            <a:noFill/>
-          </a:ln>
-        </p:spPr>
-        <p:txBody>
-          <a:bodyPr xmlns:a="http://schemas.openxmlformats.org/drawingml/2006/main" wrap="square" lIns="0" tIns="0" rIns="0" bIns="0" anchor="t"/>
-          <a:lstStyle xmlns:a="http://schemas.openxmlformats.org/drawingml/2006/main"/>
-          <a:p xmlns:a="http://schemas.openxmlformats.org/drawingml/2006/main">
-            <a:r>
-              <a:rPr lang="en-US" sz="1350">
-                <a:solidFill>
-                  <a:srgbClr val="7D7D7B"/>
-                </a:solidFill>
-                <a:latin typeface="Inter"/>
-                <a:ea typeface="Inter"/>
-              </a:rPr>
-              <a:t>Scale, crop, and color invite attention without hiding the evidence.</a:t>
-            </a:r>
-            <a:endParaRPr lang="en-US"/>
-          </a:p>
-        </p:txBody>
-      </p:sp>
-      <p:sp>
-        <p:nvSpPr>
-          <p:cNvPr id="19" name="argument-rule"/>
-          <p:cNvSpPr/>
-          <p:nvPr/>
-        </p:nvSpPr>
-        <p:spPr>
-          <a:xfrm xmlns:a="http://schemas.openxmlformats.org/drawingml/2006/main">
-            <a:off x="914400" y="2457450"/>
-            <a:ext cx="13411200" cy="0"/>
-          </a:xfrm>
-          <a:prstGeom xmlns:a="http://schemas.openxmlformats.org/drawingml/2006/main" prst="line">
-            <a:avLst/>
-          </a:prstGeom>
-          <a:noFill xmlns:a="http://schemas.openxmlformats.org/drawingml/2006/main"/>
-          <a:ln xmlns:a="http://schemas.openxmlformats.org/drawingml/2006/main" w="25400">
-            <a:solidFill>
-              <a:srgbClr val="7D7D7B"/>
-            </a:solidFill>
-            <a:prstDash val="solid"/>
-          </a:ln>
-        </p:spPr>
-        <p:txBody>
-          <a:bodyPr xmlns:a="http://schemas.openxmlformats.org/drawingml/2006/main" wrap="square" lIns="0" tIns="0" rIns="0" bIns="0" anchor="t"/>
-          <a:lstStyle xmlns:a="http://schemas.openxmlformats.org/drawingml/2006/main"/>
-          <a:p xmlns:a="http://schemas.openxmlformats.org/drawingml/2006/main">
-            <a:r>
-              <a:rPr lang="en-US"/>
-              <a:t/>
-            </a:r>
-            <a:endParaRPr lang="en-US"/>
-          </a:p>
-        </p:txBody>
-      </p:sp>
-      <p:sp>
-        <p:nvSpPr>
-          <p:cNvPr id="20" name="promotion-kicker"/>
-          <p:cNvSpPr txBox="1"/>
-          <p:nvPr/>
-        </p:nvSpPr>
-        <p:spPr>
-          <a:xfrm xmlns:a="http://schemas.openxmlformats.org/drawingml/2006/main">
-            <a:off x="1104900" y="3352800"/>
-            <a:ext cx="2857500" cy="228600"/>
-          </a:xfrm>
-          <a:prstGeom xmlns:a="http://schemas.openxmlformats.org/drawingml/2006/main" prst="rect">
-            <a:avLst/>
-          </a:prstGeom>
-          <a:noFill xmlns:a="http://schemas.openxmlformats.org/drawingml/2006/main"/>
-          <a:ln xmlns:a="http://schemas.openxmlformats.org/drawingml/2006/main" w="0">
-            <a:noFill/>
-          </a:ln>
-        </p:spPr>
-        <p:txBody>
-          <a:bodyPr xmlns:a="http://schemas.openxmlformats.org/drawingml/2006/main" wrap="square" lIns="0" tIns="0" rIns="0" bIns="0" anchor="t"/>
-          <a:lstStyle xmlns:a="http://schemas.openxmlformats.org/drawingml/2006/main"/>
-          <a:p xmlns:a="http://schemas.openxmlformats.org/drawingml/2006/main">
-            <a:r>
-              <a:rPr lang="en-US" sz="1125" b="1">
-                <a:solidFill>
-                  <a:srgbClr val="D53A45"/>
-                </a:solidFill>
-                <a:latin typeface="Inter"/>
-                <a:ea typeface="Inter"/>
-              </a:rPr>
-              <a:t>ONE PROPOSITION</a:t>
-            </a:r>
-            <a:endParaRPr lang="en-US"/>
-          </a:p>
-        </p:txBody>
-      </p:sp>
-      <p:sp>
-        <p:nvSpPr>
-          <p:cNvPr id="21" name="promotion-headline"/>
-          <p:cNvSpPr txBox="1"/>
-          <p:nvPr/>
-        </p:nvSpPr>
-        <p:spPr>
-          <a:xfrm xmlns:a="http://schemas.openxmlformats.org/drawingml/2006/main">
-            <a:off x="1104900" y="3790950"/>
-            <a:ext cx="6477000" cy="723900"/>
-          </a:xfrm>
-          <a:prstGeom xmlns:a="http://schemas.openxmlformats.org/drawingml/2006/main" prst="rect">
-            <a:avLst/>
-          </a:prstGeom>
-          <a:noFill xmlns:a="http://schemas.openxmlformats.org/drawingml/2006/main"/>
-          <a:ln xmlns:a="http://schemas.openxmlformats.org/drawingml/2006/main" w="0">
-            <a:noFill/>
-          </a:ln>
-        </p:spPr>
-        <p:txBody>
-          <a:bodyPr xmlns:a="http://schemas.openxmlformats.org/drawingml/2006/main" wrap="square" lIns="0" tIns="0" rIns="0" bIns="0" anchor="t"/>
-          <a:lstStyle xmlns:a="http://schemas.openxmlformats.org/drawingml/2006/main"/>
-          <a:p xmlns:a="http://schemas.openxmlformats.org/drawingml/2006/main">
-            <a:r>
-              <a:rPr lang="en-US" sz="2625" b="1">
-                <a:solidFill>
-                  <a:srgbClr val="F2F0EA"/>
-                </a:solidFill>
-                <a:latin typeface="Inter"/>
-                <a:ea typeface="Inter"/>
-              </a:rPr>
-              <a:t>Make the next action visible.</a:t>
-            </a:r>
-            <a:endParaRPr lang="en-US"/>
-          </a:p>
-        </p:txBody>
-      </p:sp>
-      <p:sp>
-        <p:nvSpPr>
-          <p:cNvPr id="22" name="promotion-body"/>
-          <p:cNvSpPr txBox="1"/>
-          <p:nvPr/>
-        </p:nvSpPr>
-        <p:spPr>
-          <a:xfrm xmlns:a="http://schemas.openxmlformats.org/drawingml/2006/main">
-            <a:off x="1104900" y="4762500"/>
-            <a:ext cx="6191250" cy="457200"/>
-          </a:xfrm>
-          <a:prstGeom xmlns:a="http://schemas.openxmlformats.org/drawingml/2006/main" prst="rect">
-            <a:avLst/>
-          </a:prstGeom>
-          <a:noFill xmlns:a="http://schemas.openxmlformats.org/drawingml/2006/main"/>
-          <a:ln xmlns:a="http://schemas.openxmlformats.org/drawingml/2006/main" w="0">
-            <a:noFill/>
-          </a:ln>
-        </p:spPr>
-        <p:txBody>
-          <a:bodyPr xmlns:a="http://schemas.openxmlformats.org/drawingml/2006/main" wrap="square" lIns="0" tIns="0" rIns="0" bIns="0" anchor="t"/>
-          <a:lstStyle xmlns:a="http://schemas.openxmlformats.org/drawingml/2006/main"/>
-          <a:p xmlns:a="http://schemas.openxmlformats.org/drawingml/2006/main">
-            <a:r>
-              <a:rPr lang="en-US" sz="1575">
-                <a:solidFill>
-                  <a:srgbClr val="F2F0EA"/>
-                </a:solidFill>
-                <a:latin typeface="Inter"/>
-                <a:ea typeface="Inter"/>
-              </a:rPr>
-              <a:t>A clear invitation earns attention when evidence and access arrive together.</a:t>
             </a:r>
             <a:endParaRPr lang="en-US"/>
           </a:p>
@@ -1325,7 +1035,7 @@
       </p:sp>
       <p:pic>
         <p:nvPicPr>
-          <p:cNvPr id="23" name="promotion-hero-frame">
+          <p:cNvPr id="15" name="argument-photo-band">
             <a:extLst xmlns:a="http://schemas.openxmlformats.org/drawingml/2006/main">
               <a:ext uri="{C183D7F6-B498-43B3-948B-1728B52AA6E4}">
                 <adec:decorative xmlns:adec="http://schemas.microsoft.com/office/drawing/2017/decorative" val="1"/>
@@ -1336,16 +1046,16 @@
           <p:nvPr/>
         </p:nvPicPr>
         <p:blipFill>
-          <a:blip xmlns:r="http://schemas.openxmlformats.org/officeDocument/2006/relationships" xmlns:a="http://schemas.openxmlformats.org/drawingml/2006/main" r:embed="rIdOfficeKitImageaeb6f74d36d260d0_1"/>
-          <a:srcRect xmlns:a="http://schemas.openxmlformats.org/drawingml/2006/main" l="0" t="31920" r="0" b="31920"/>
+          <a:blip xmlns:r="http://schemas.openxmlformats.org/officeDocument/2006/relationships" xmlns:a="http://schemas.openxmlformats.org/drawingml/2006/main" r:embed="rIdOfficeKitImage31956823b229fb66_1"/>
+          <a:srcRect xmlns:a="http://schemas.openxmlformats.org/drawingml/2006/main" l="0" t="47256" r="0" b="47256"/>
           <a:stretch xmlns:a="http://schemas.openxmlformats.org/drawingml/2006/main">
             <a:fillRect/>
           </a:stretch>
         </p:blipFill>
         <p:spPr>
           <a:xfrm xmlns:a="http://schemas.openxmlformats.org/drawingml/2006/main">
-            <a:off x="9525000" y="3143250"/>
-            <a:ext cx="4000500" cy="2571750"/>
+            <a:off x="0" y="0"/>
+            <a:ext cx="15240000" cy="1485900"/>
           </a:xfrm>
           <a:prstGeom xmlns:a="http://schemas.openxmlformats.org/drawingml/2006/main" prst="rect">
             <a:avLst/>
@@ -1354,14 +1064,52 @@
       </p:pic>
       <p:sp>
         <p:nvSpPr>
-          <p:cNvPr id="24" name="promotion-image-rule"/>
+          <p:cNvPr id="16" name="argument-photo-scrim"/>
           <p:cNvSpPr/>
           <p:nvPr/>
         </p:nvSpPr>
         <p:spPr>
           <a:xfrm xmlns:a="http://schemas.openxmlformats.org/drawingml/2006/main">
-            <a:off x="9525000" y="5905500"/>
-            <a:ext cx="4000500" cy="0"/>
+            <a:off x="0" y="0"/>
+            <a:ext cx="15240000" cy="1485900"/>
+          </a:xfrm>
+          <a:prstGeom xmlns:a="http://schemas.openxmlformats.org/drawingml/2006/main" prst="rect">
+            <a:avLst/>
+          </a:prstGeom>
+          <a:solidFill xmlns:a="http://schemas.openxmlformats.org/drawingml/2006/main">
+            <a:srgbClr val="F2F0EA">
+              <a:alpha val="62000"/>
+            </a:srgbClr>
+          </a:solidFill>
+          <a:ln xmlns:a="http://schemas.openxmlformats.org/drawingml/2006/main" w="0">
+            <a:solidFill>
+              <a:srgbClr val="F2F0EA"/>
+            </a:solidFill>
+            <a:prstDash val="solid"/>
+          </a:ln>
+        </p:spPr>
+        <p:txBody>
+          <a:bodyPr xmlns:a="http://schemas.openxmlformats.org/drawingml/2006/main" wrap="square" lIns="0" tIns="0" rIns="0" bIns="0" anchor="t"/>
+          <a:lstStyle xmlns:a="http://schemas.openxmlformats.org/drawingml/2006/main"/>
+          <a:p xmlns:a="http://schemas.openxmlformats.org/drawingml/2006/main">
+            <a:r>
+              <a:rPr lang="en-US"/>
+              <a:t/>
+            </a:r>
+            <a:endParaRPr lang="en-US"/>
+          </a:p>
+        </p:txBody>
+      </p:sp>
+      <p:sp>
+        <p:nvSpPr>
+          <p:cNvPr id="17" name="argument-photo-rule"/>
+          <p:cNvSpPr/>
+          <p:nvPr/>
+        </p:nvSpPr>
+        <p:spPr>
+          <a:xfrm xmlns:a="http://schemas.openxmlformats.org/drawingml/2006/main">
+            <a:off x="914400" y="1438275"/>
+            <a:ext cx="13411200" cy="0"/>
           </a:xfrm>
           <a:prstGeom xmlns:a="http://schemas.openxmlformats.org/drawingml/2006/main" prst="line">
             <a:avLst/>
@@ -1388,7 +1136,292 @@
       </p:sp>
       <p:sp>
         <p:nvSpPr>
-          <p:cNvPr id="25" name="promotion-image-label"/>
+          <p:cNvPr id="18" name="NOIR FIELD PICTORIAL · ARGUMENT"/>
+          <p:cNvSpPr txBox="1"/>
+          <p:nvPr/>
+        </p:nvSpPr>
+        <p:spPr>
+          <a:xfrm xmlns:a="http://schemas.openxmlformats.org/drawingml/2006/main">
+            <a:off x="914400" y="228600"/>
+            <a:ext cx="9525000" cy="190500"/>
+          </a:xfrm>
+          <a:prstGeom xmlns:a="http://schemas.openxmlformats.org/drawingml/2006/main" prst="rect">
+            <a:avLst/>
+          </a:prstGeom>
+          <a:noFill xmlns:a="http://schemas.openxmlformats.org/drawingml/2006/main"/>
+          <a:ln xmlns:a="http://schemas.openxmlformats.org/drawingml/2006/main" w="0">
+            <a:noFill/>
+          </a:ln>
+        </p:spPr>
+        <p:txBody>
+          <a:bodyPr xmlns:a="http://schemas.openxmlformats.org/drawingml/2006/main" wrap="square" lIns="0" tIns="0" rIns="0" bIns="0" anchor="t"/>
+          <a:lstStyle xmlns:a="http://schemas.openxmlformats.org/drawingml/2006/main"/>
+          <a:p xmlns:a="http://schemas.openxmlformats.org/drawingml/2006/main">
+            <a:r>
+              <a:rPr lang="en-US" sz="1050" b="1">
+                <a:solidFill>
+                  <a:srgbClr val="D53A45"/>
+                </a:solidFill>
+                <a:latin typeface="Inter"/>
+                <a:ea typeface="Inter"/>
+              </a:rPr>
+              <a:t>NOIR FIELD PICTORIAL · ARGUMENT</a:t>
+            </a:r>
+            <a:endParaRPr lang="en-US"/>
+          </a:p>
+        </p:txBody>
+      </p:sp>
+      <p:sp>
+        <p:nvSpPr>
+          <p:cNvPr id="19" name="argument-title"/>
+          <p:cNvSpPr txBox="1"/>
+          <p:nvPr/>
+        </p:nvSpPr>
+        <p:spPr>
+          <a:xfrm xmlns:a="http://schemas.openxmlformats.org/drawingml/2006/main">
+            <a:off x="914400" y="495300"/>
+            <a:ext cx="12001500" cy="457200"/>
+          </a:xfrm>
+          <a:prstGeom xmlns:a="http://schemas.openxmlformats.org/drawingml/2006/main" prst="rect">
+            <a:avLst/>
+          </a:prstGeom>
+          <a:noFill xmlns:a="http://schemas.openxmlformats.org/drawingml/2006/main"/>
+          <a:ln xmlns:a="http://schemas.openxmlformats.org/drawingml/2006/main" w="0">
+            <a:noFill/>
+          </a:ln>
+        </p:spPr>
+        <p:txBody>
+          <a:bodyPr xmlns:a="http://schemas.openxmlformats.org/drawingml/2006/main" wrap="square" lIns="0" tIns="0" rIns="0" bIns="0" anchor="t"/>
+          <a:lstStyle xmlns:a="http://schemas.openxmlformats.org/drawingml/2006/main"/>
+          <a:p xmlns:a="http://schemas.openxmlformats.org/drawingml/2006/main">
+            <a:r>
+              <a:rPr lang="en-US" sz="2550" b="1">
+                <a:solidFill>
+                  <a:srgbClr val="FFFFFF"/>
+                </a:solidFill>
+                <a:latin typeface="Inter"/>
+                <a:ea typeface="Inter"/>
+              </a:rPr>
+              <a:t>The proposition is the page's visual center</a:t>
+            </a:r>
+            <a:endParaRPr lang="en-US"/>
+          </a:p>
+        </p:txBody>
+      </p:sp>
+      <p:sp>
+        <p:nvSpPr>
+          <p:cNvPr id="20" name="argument-basis"/>
+          <p:cNvSpPr txBox="1"/>
+          <p:nvPr/>
+        </p:nvSpPr>
+        <p:spPr>
+          <a:xfrm xmlns:a="http://schemas.openxmlformats.org/drawingml/2006/main">
+            <a:off x="952500" y="1066800"/>
+            <a:ext cx="11049000" cy="228600"/>
+          </a:xfrm>
+          <a:prstGeom xmlns:a="http://schemas.openxmlformats.org/drawingml/2006/main" prst="rect">
+            <a:avLst/>
+          </a:prstGeom>
+          <a:noFill xmlns:a="http://schemas.openxmlformats.org/drawingml/2006/main"/>
+          <a:ln xmlns:a="http://schemas.openxmlformats.org/drawingml/2006/main" w="0">
+            <a:noFill/>
+          </a:ln>
+        </p:spPr>
+        <p:txBody>
+          <a:bodyPr xmlns:a="http://schemas.openxmlformats.org/drawingml/2006/main" wrap="square" lIns="0" tIns="0" rIns="0" bIns="0" anchor="t"/>
+          <a:lstStyle xmlns:a="http://schemas.openxmlformats.org/drawingml/2006/main"/>
+          <a:p xmlns:a="http://schemas.openxmlformats.org/drawingml/2006/main">
+            <a:r>
+              <a:rPr lang="en-US" sz="1200">
+                <a:solidFill>
+                  <a:srgbClr val="F0F3F2"/>
+                </a:solidFill>
+                <a:latin typeface="Inter"/>
+                <a:ea typeface="Inter"/>
+              </a:rPr>
+              <a:t>Scale, crop, and color invite attention without hiding the evidence.</a:t>
+            </a:r>
+            <a:endParaRPr lang="en-US"/>
+          </a:p>
+        </p:txBody>
+      </p:sp>
+      <p:sp>
+        <p:nvSpPr>
+          <p:cNvPr id="21" name="promotion-kicker"/>
+          <p:cNvSpPr txBox="1"/>
+          <p:nvPr/>
+        </p:nvSpPr>
+        <p:spPr>
+          <a:xfrm xmlns:a="http://schemas.openxmlformats.org/drawingml/2006/main">
+            <a:off x="1104900" y="3352800"/>
+            <a:ext cx="2857500" cy="228600"/>
+          </a:xfrm>
+          <a:prstGeom xmlns:a="http://schemas.openxmlformats.org/drawingml/2006/main" prst="rect">
+            <a:avLst/>
+          </a:prstGeom>
+          <a:noFill xmlns:a="http://schemas.openxmlformats.org/drawingml/2006/main"/>
+          <a:ln xmlns:a="http://schemas.openxmlformats.org/drawingml/2006/main" w="0">
+            <a:noFill/>
+          </a:ln>
+        </p:spPr>
+        <p:txBody>
+          <a:bodyPr xmlns:a="http://schemas.openxmlformats.org/drawingml/2006/main" wrap="square" lIns="0" tIns="0" rIns="0" bIns="0" anchor="t"/>
+          <a:lstStyle xmlns:a="http://schemas.openxmlformats.org/drawingml/2006/main"/>
+          <a:p xmlns:a="http://schemas.openxmlformats.org/drawingml/2006/main">
+            <a:r>
+              <a:rPr lang="en-US" sz="1125" b="1">
+                <a:solidFill>
+                  <a:srgbClr val="D53A45"/>
+                </a:solidFill>
+                <a:latin typeface="Inter"/>
+                <a:ea typeface="Inter"/>
+              </a:rPr>
+              <a:t>ONE PROPOSITION</a:t>
+            </a:r>
+            <a:endParaRPr lang="en-US"/>
+          </a:p>
+        </p:txBody>
+      </p:sp>
+      <p:sp>
+        <p:nvSpPr>
+          <p:cNvPr id="22" name="promotion-headline"/>
+          <p:cNvSpPr txBox="1"/>
+          <p:nvPr/>
+        </p:nvSpPr>
+        <p:spPr>
+          <a:xfrm xmlns:a="http://schemas.openxmlformats.org/drawingml/2006/main">
+            <a:off x="1104900" y="3790950"/>
+            <a:ext cx="6477000" cy="723900"/>
+          </a:xfrm>
+          <a:prstGeom xmlns:a="http://schemas.openxmlformats.org/drawingml/2006/main" prst="rect">
+            <a:avLst/>
+          </a:prstGeom>
+          <a:noFill xmlns:a="http://schemas.openxmlformats.org/drawingml/2006/main"/>
+          <a:ln xmlns:a="http://schemas.openxmlformats.org/drawingml/2006/main" w="0">
+            <a:noFill/>
+          </a:ln>
+        </p:spPr>
+        <p:txBody>
+          <a:bodyPr xmlns:a="http://schemas.openxmlformats.org/drawingml/2006/main" wrap="square" lIns="0" tIns="0" rIns="0" bIns="0" anchor="t"/>
+          <a:lstStyle xmlns:a="http://schemas.openxmlformats.org/drawingml/2006/main"/>
+          <a:p xmlns:a="http://schemas.openxmlformats.org/drawingml/2006/main">
+            <a:r>
+              <a:rPr lang="en-US" sz="2625" b="1">
+                <a:solidFill>
+                  <a:srgbClr val="F2F0EA"/>
+                </a:solidFill>
+                <a:latin typeface="Inter"/>
+                <a:ea typeface="Inter"/>
+              </a:rPr>
+              <a:t>Make the next action visible.</a:t>
+            </a:r>
+            <a:endParaRPr lang="en-US"/>
+          </a:p>
+        </p:txBody>
+      </p:sp>
+      <p:sp>
+        <p:nvSpPr>
+          <p:cNvPr id="23" name="promotion-body"/>
+          <p:cNvSpPr txBox="1"/>
+          <p:nvPr/>
+        </p:nvSpPr>
+        <p:spPr>
+          <a:xfrm xmlns:a="http://schemas.openxmlformats.org/drawingml/2006/main">
+            <a:off x="1104900" y="4762500"/>
+            <a:ext cx="6191250" cy="457200"/>
+          </a:xfrm>
+          <a:prstGeom xmlns:a="http://schemas.openxmlformats.org/drawingml/2006/main" prst="rect">
+            <a:avLst/>
+          </a:prstGeom>
+          <a:noFill xmlns:a="http://schemas.openxmlformats.org/drawingml/2006/main"/>
+          <a:ln xmlns:a="http://schemas.openxmlformats.org/drawingml/2006/main" w="0">
+            <a:noFill/>
+          </a:ln>
+        </p:spPr>
+        <p:txBody>
+          <a:bodyPr xmlns:a="http://schemas.openxmlformats.org/drawingml/2006/main" wrap="square" lIns="0" tIns="0" rIns="0" bIns="0" anchor="t"/>
+          <a:lstStyle xmlns:a="http://schemas.openxmlformats.org/drawingml/2006/main"/>
+          <a:p xmlns:a="http://schemas.openxmlformats.org/drawingml/2006/main">
+            <a:r>
+              <a:rPr lang="en-US" sz="1575">
+                <a:solidFill>
+                  <a:srgbClr val="F2F0EA"/>
+                </a:solidFill>
+                <a:latin typeface="Inter"/>
+                <a:ea typeface="Inter"/>
+              </a:rPr>
+              <a:t>A clear invitation earns attention when evidence and access arrive together.</a:t>
+            </a:r>
+            <a:endParaRPr lang="en-US"/>
+          </a:p>
+        </p:txBody>
+      </p:sp>
+      <p:pic>
+        <p:nvPicPr>
+          <p:cNvPr id="24" name="promotion-hero-frame">
+            <a:extLst xmlns:a="http://schemas.openxmlformats.org/drawingml/2006/main">
+              <a:ext uri="{C183D7F6-B498-43B3-948B-1728B52AA6E4}">
+                <adec:decorative xmlns:adec="http://schemas.microsoft.com/office/drawing/2017/decorative" val="1"/>
+              </a:ext>
+            </a:extLst>
+          </p:cNvPr>
+          <p:cNvPicPr/>
+          <p:nvPr/>
+        </p:nvPicPr>
+        <p:blipFill>
+          <a:blip xmlns:r="http://schemas.openxmlformats.org/officeDocument/2006/relationships" xmlns:a="http://schemas.openxmlformats.org/drawingml/2006/main" r:embed="rIdOfficeKitImage31956823b229fb66_1"/>
+          <a:srcRect xmlns:a="http://schemas.openxmlformats.org/drawingml/2006/main" l="0" t="31910" r="0" b="31910"/>
+          <a:stretch xmlns:a="http://schemas.openxmlformats.org/drawingml/2006/main">
+            <a:fillRect/>
+          </a:stretch>
+        </p:blipFill>
+        <p:spPr>
+          <a:xfrm xmlns:a="http://schemas.openxmlformats.org/drawingml/2006/main">
+            <a:off x="9525000" y="3143250"/>
+            <a:ext cx="4000500" cy="2571750"/>
+          </a:xfrm>
+          <a:prstGeom xmlns:a="http://schemas.openxmlformats.org/drawingml/2006/main" prst="rect">
+            <a:avLst/>
+          </a:prstGeom>
+        </p:spPr>
+      </p:pic>
+      <p:sp>
+        <p:nvSpPr>
+          <p:cNvPr id="25" name="promotion-image-rule"/>
+          <p:cNvSpPr/>
+          <p:nvPr/>
+        </p:nvSpPr>
+        <p:spPr>
+          <a:xfrm xmlns:a="http://schemas.openxmlformats.org/drawingml/2006/main">
+            <a:off x="9525000" y="5905500"/>
+            <a:ext cx="4000500" cy="0"/>
+          </a:xfrm>
+          <a:prstGeom xmlns:a="http://schemas.openxmlformats.org/drawingml/2006/main" prst="line">
+            <a:avLst/>
+          </a:prstGeom>
+          <a:noFill xmlns:a="http://schemas.openxmlformats.org/drawingml/2006/main"/>
+          <a:ln xmlns:a="http://schemas.openxmlformats.org/drawingml/2006/main" w="38100">
+            <a:solidFill>
+              <a:srgbClr val="D53A45"/>
+            </a:solidFill>
+            <a:prstDash val="solid"/>
+          </a:ln>
+        </p:spPr>
+        <p:txBody>
+          <a:bodyPr xmlns:a="http://schemas.openxmlformats.org/drawingml/2006/main" wrap="square" lIns="0" tIns="0" rIns="0" bIns="0" anchor="t"/>
+          <a:lstStyle xmlns:a="http://schemas.openxmlformats.org/drawingml/2006/main"/>
+          <a:p xmlns:a="http://schemas.openxmlformats.org/drawingml/2006/main">
+            <a:r>
+              <a:rPr lang="en-US"/>
+              <a:t/>
+            </a:r>
+            <a:endParaRPr lang="en-US"/>
+          </a:p>
+        </p:txBody>
+      </p:sp>
+      <p:sp>
+        <p:nvSpPr>
+          <p:cNvPr id="26" name="promotion-image-label"/>
           <p:cNvSpPr txBox="1"/>
           <p:nvPr/>
         </p:nvSpPr>
@@ -1425,7 +1458,7 @@
       </p:sp>
       <p:sp>
         <p:nvSpPr>
-          <p:cNvPr id="26" name="source"/>
+          <p:cNvPr id="27" name="source"/>
           <p:cNvSpPr txBox="1"/>
           <p:nvPr/>
         </p:nvSpPr>
@@ -1462,7 +1495,7 @@
       </p:sp>
       <p:sp>
         <p:nvSpPr>
-          <p:cNvPr id="27" name="page-number"/>
+          <p:cNvPr id="28" name="page-number"/>
           <p:cNvSpPr txBox="1"/>
           <p:nvPr/>
         </p:nvSpPr>
@@ -1536,14 +1569,14 @@
           <p:nvPr/>
         </p:nvPicPr>
         <p:blipFill>
-          <a:blip xmlns:r="http://schemas.openxmlformats.org/officeDocument/2006/relationships" xmlns:a="http://schemas.openxmlformats.org/drawingml/2006/main" r:embed="rIdOfficeKitImage13db13f70d7843cc_1"/>
-          <a:srcRect xmlns:a="http://schemas.openxmlformats.org/drawingml/2006/main" l="0" t="34180" r="0" b="34180"/>
+          <a:blip xmlns:r="http://schemas.openxmlformats.org/officeDocument/2006/relationships" xmlns:a="http://schemas.openxmlformats.org/drawingml/2006/main" r:embed="rIdOfficeKitImagec7b73f8fac405495_1"/>
+          <a:srcRect xmlns:a="http://schemas.openxmlformats.org/drawingml/2006/main" l="0" t="34171" r="0" b="34171"/>
           <a:stretch xmlns:a="http://schemas.openxmlformats.org/drawingml/2006/main">
             <a:fillRect/>
           </a:stretch>
         </p:blipFill>
         <p:spPr>
-          <a:xfrm xmlns:a="http://schemas.openxmlformats.org/drawingml/2006/main" flipH="1">
+          <a:xfrm xmlns:a="http://schemas.openxmlformats.org/drawingml/2006/main">
             <a:off x="0" y="0"/>
             <a:ext cx="15240000" cy="8572500"/>
           </a:xfrm>
@@ -1634,7 +1667,7 @@
         </p:nvSpPr>
         <p:spPr>
           <a:xfrm xmlns:a="http://schemas.openxmlformats.org/drawingml/2006/main">
-            <a:off x="914400" y="2628900"/>
+            <a:off x="914400" y="1752600"/>
             <a:ext cx="1516380" cy="209550"/>
           </a:xfrm>
           <a:prstGeom xmlns:a="http://schemas.openxmlformats.org/drawingml/2006/main" prst="rect">
@@ -1670,7 +1703,7 @@
         </p:nvSpPr>
         <p:spPr>
           <a:xfrm xmlns:a="http://schemas.openxmlformats.org/drawingml/2006/main">
-            <a:off x="990600" y="2667000"/>
+            <a:off x="990600" y="1790700"/>
             <a:ext cx="1363980" cy="133350"/>
           </a:xfrm>
           <a:prstGeom xmlns:a="http://schemas.openxmlformats.org/drawingml/2006/main" prst="rect">
@@ -1708,7 +1741,7 @@
         </p:nvSpPr>
         <p:spPr>
           <a:xfrm xmlns:a="http://schemas.openxmlformats.org/drawingml/2006/main">
-            <a:off x="2487930" y="2628900"/>
+            <a:off x="2487930" y="1752600"/>
             <a:ext cx="1516380" cy="209550"/>
           </a:xfrm>
           <a:prstGeom xmlns:a="http://schemas.openxmlformats.org/drawingml/2006/main" prst="rect">
@@ -1744,7 +1777,7 @@
         </p:nvSpPr>
         <p:spPr>
           <a:xfrm xmlns:a="http://schemas.openxmlformats.org/drawingml/2006/main">
-            <a:off x="2564130" y="2667000"/>
+            <a:off x="2564130" y="1790700"/>
             <a:ext cx="1363980" cy="133350"/>
           </a:xfrm>
           <a:prstGeom xmlns:a="http://schemas.openxmlformats.org/drawingml/2006/main" prst="rect">
@@ -1782,7 +1815,7 @@
         </p:nvSpPr>
         <p:spPr>
           <a:xfrm xmlns:a="http://schemas.openxmlformats.org/drawingml/2006/main">
-            <a:off x="4061460" y="2628900"/>
+            <a:off x="4061460" y="1752600"/>
             <a:ext cx="1516380" cy="209550"/>
           </a:xfrm>
           <a:prstGeom xmlns:a="http://schemas.openxmlformats.org/drawingml/2006/main" prst="rect">
@@ -1818,7 +1851,7 @@
         </p:nvSpPr>
         <p:spPr>
           <a:xfrm xmlns:a="http://schemas.openxmlformats.org/drawingml/2006/main">
-            <a:off x="4137660" y="2667000"/>
+            <a:off x="4137660" y="1790700"/>
             <a:ext cx="1363980" cy="133350"/>
           </a:xfrm>
           <a:prstGeom xmlns:a="http://schemas.openxmlformats.org/drawingml/2006/main" prst="rect">
@@ -1856,7 +1889,7 @@
         </p:nvSpPr>
         <p:spPr>
           <a:xfrm xmlns:a="http://schemas.openxmlformats.org/drawingml/2006/main">
-            <a:off x="5634990" y="2628900"/>
+            <a:off x="5634990" y="1752600"/>
             <a:ext cx="1516380" cy="209550"/>
           </a:xfrm>
           <a:prstGeom xmlns:a="http://schemas.openxmlformats.org/drawingml/2006/main" prst="rect">
@@ -1892,7 +1925,7 @@
         </p:nvSpPr>
         <p:spPr>
           <a:xfrm xmlns:a="http://schemas.openxmlformats.org/drawingml/2006/main">
-            <a:off x="5711190" y="2667000"/>
+            <a:off x="5711190" y="1790700"/>
             <a:ext cx="1363980" cy="133350"/>
           </a:xfrm>
           <a:prstGeom xmlns:a="http://schemas.openxmlformats.org/drawingml/2006/main" prst="rect">
@@ -1930,7 +1963,7 @@
         </p:nvSpPr>
         <p:spPr>
           <a:xfrm xmlns:a="http://schemas.openxmlformats.org/drawingml/2006/main">
-            <a:off x="7208520" y="2628900"/>
+            <a:off x="7208520" y="1752600"/>
             <a:ext cx="1516380" cy="209550"/>
           </a:xfrm>
           <a:prstGeom xmlns:a="http://schemas.openxmlformats.org/drawingml/2006/main" prst="rect">
@@ -1966,7 +1999,7 @@
         </p:nvSpPr>
         <p:spPr>
           <a:xfrm xmlns:a="http://schemas.openxmlformats.org/drawingml/2006/main">
-            <a:off x="7284720" y="2667000"/>
+            <a:off x="7284720" y="1790700"/>
             <a:ext cx="1363980" cy="133350"/>
           </a:xfrm>
           <a:prstGeom xmlns:a="http://schemas.openxmlformats.org/drawingml/2006/main" prst="rect">
@@ -1991,185 +2024,6 @@
                 <a:ea typeface="Inter"/>
               </a:rPr>
               <a:t>NEXT</a:t>
-            </a:r>
-            <a:endParaRPr lang="en-US"/>
-          </a:p>
-        </p:txBody>
-      </p:sp>
-      <p:sp>
-        <p:nvSpPr>
-          <p:cNvPr id="15" name="evidence-top-rule"/>
-          <p:cNvSpPr/>
-          <p:nvPr/>
-        </p:nvSpPr>
-        <p:spPr>
-          <a:xfrm xmlns:a="http://schemas.openxmlformats.org/drawingml/2006/main">
-            <a:off x="838200" y="666750"/>
-            <a:ext cx="13563600" cy="0"/>
-          </a:xfrm>
-          <a:prstGeom xmlns:a="http://schemas.openxmlformats.org/drawingml/2006/main" prst="line">
-            <a:avLst/>
-          </a:prstGeom>
-          <a:noFill xmlns:a="http://schemas.openxmlformats.org/drawingml/2006/main"/>
-          <a:ln xmlns:a="http://schemas.openxmlformats.org/drawingml/2006/main" w="38100">
-            <a:solidFill>
-              <a:srgbClr val="D53A45"/>
-            </a:solidFill>
-            <a:prstDash val="solid"/>
-          </a:ln>
-        </p:spPr>
-        <p:txBody>
-          <a:bodyPr xmlns:a="http://schemas.openxmlformats.org/drawingml/2006/main" wrap="square" lIns="0" tIns="0" rIns="0" bIns="0" anchor="t"/>
-          <a:lstStyle xmlns:a="http://schemas.openxmlformats.org/drawingml/2006/main"/>
-          <a:p xmlns:a="http://schemas.openxmlformats.org/drawingml/2006/main">
-            <a:r>
-              <a:rPr lang="en-US"/>
-              <a:t/>
-            </a:r>
-            <a:endParaRPr lang="en-US"/>
-          </a:p>
-        </p:txBody>
-      </p:sp>
-      <p:sp>
-        <p:nvSpPr>
-          <p:cNvPr id="16" name="NOIR FIELD PICTORIAL · EVIDENCE"/>
-          <p:cNvSpPr txBox="1"/>
-          <p:nvPr/>
-        </p:nvSpPr>
-        <p:spPr>
-          <a:xfrm xmlns:a="http://schemas.openxmlformats.org/drawingml/2006/main">
-            <a:off x="914400" y="895350"/>
-            <a:ext cx="7239000" cy="228600"/>
-          </a:xfrm>
-          <a:prstGeom xmlns:a="http://schemas.openxmlformats.org/drawingml/2006/main" prst="rect">
-            <a:avLst/>
-          </a:prstGeom>
-          <a:noFill xmlns:a="http://schemas.openxmlformats.org/drawingml/2006/main"/>
-          <a:ln xmlns:a="http://schemas.openxmlformats.org/drawingml/2006/main" w="0">
-            <a:noFill/>
-          </a:ln>
-        </p:spPr>
-        <p:txBody>
-          <a:bodyPr xmlns:a="http://schemas.openxmlformats.org/drawingml/2006/main" wrap="square" lIns="0" tIns="0" rIns="0" bIns="0" anchor="t"/>
-          <a:lstStyle xmlns:a="http://schemas.openxmlformats.org/drawingml/2006/main"/>
-          <a:p xmlns:a="http://schemas.openxmlformats.org/drawingml/2006/main">
-            <a:r>
-              <a:rPr lang="en-US" sz="1200" b="1">
-                <a:solidFill>
-                  <a:srgbClr val="D53A45"/>
-                </a:solidFill>
-                <a:latin typeface="Inter"/>
-                <a:ea typeface="Inter"/>
-              </a:rPr>
-              <a:t>NOIR FIELD PICTORIAL · EVIDENCE</a:t>
-            </a:r>
-            <a:endParaRPr lang="en-US"/>
-          </a:p>
-        </p:txBody>
-      </p:sp>
-      <p:sp>
-        <p:nvSpPr>
-          <p:cNvPr id="17" name="evidence-title"/>
-          <p:cNvSpPr txBox="1"/>
-          <p:nvPr/>
-        </p:nvSpPr>
-        <p:spPr>
-          <a:xfrm xmlns:a="http://schemas.openxmlformats.org/drawingml/2006/main">
-            <a:off x="914400" y="1314450"/>
-            <a:ext cx="6286500" cy="552450"/>
-          </a:xfrm>
-          <a:prstGeom xmlns:a="http://schemas.openxmlformats.org/drawingml/2006/main" prst="rect">
-            <a:avLst/>
-          </a:prstGeom>
-          <a:noFill xmlns:a="http://schemas.openxmlformats.org/drawingml/2006/main"/>
-          <a:ln xmlns:a="http://schemas.openxmlformats.org/drawingml/2006/main" w="0">
-            <a:noFill/>
-          </a:ln>
-        </p:spPr>
-        <p:txBody>
-          <a:bodyPr xmlns:a="http://schemas.openxmlformats.org/drawingml/2006/main" wrap="square" lIns="0" tIns="0" rIns="0" bIns="0" anchor="t"/>
-          <a:lstStyle xmlns:a="http://schemas.openxmlformats.org/drawingml/2006/main"/>
-          <a:p xmlns:a="http://schemas.openxmlformats.org/drawingml/2006/main">
-            <a:r>
-              <a:rPr lang="en-US" sz="2850" b="1">
-                <a:solidFill>
-                  <a:srgbClr val="F2F0EA"/>
-                </a:solidFill>
-                <a:latin typeface="Inter"/>
-                <a:ea typeface="Inter"/>
-              </a:rPr>
-              <a:t>The signal grows when the invitation stays measurable</a:t>
-            </a:r>
-            <a:endParaRPr lang="en-US"/>
-          </a:p>
-        </p:txBody>
-      </p:sp>
-      <p:sp>
-        <p:nvSpPr>
-          <p:cNvPr id="18" name="evidence-basis"/>
-          <p:cNvSpPr txBox="1"/>
-          <p:nvPr/>
-        </p:nvSpPr>
-        <p:spPr>
-          <a:xfrm xmlns:a="http://schemas.openxmlformats.org/drawingml/2006/main">
-            <a:off x="952500" y="1981200"/>
-            <a:ext cx="6096000" cy="266700"/>
-          </a:xfrm>
-          <a:prstGeom xmlns:a="http://schemas.openxmlformats.org/drawingml/2006/main" prst="rect">
-            <a:avLst/>
-          </a:prstGeom>
-          <a:noFill xmlns:a="http://schemas.openxmlformats.org/drawingml/2006/main"/>
-          <a:ln xmlns:a="http://schemas.openxmlformats.org/drawingml/2006/main" w="0">
-            <a:noFill/>
-          </a:ln>
-        </p:spPr>
-        <p:txBody>
-          <a:bodyPr xmlns:a="http://schemas.openxmlformats.org/drawingml/2006/main" wrap="square" lIns="0" tIns="0" rIns="0" bIns="0" anchor="t"/>
-          <a:lstStyle xmlns:a="http://schemas.openxmlformats.org/drawingml/2006/main"/>
-          <a:p xmlns:a="http://schemas.openxmlformats.org/drawingml/2006/main">
-            <a:r>
-              <a:rPr lang="en-US" sz="1350">
-                <a:solidFill>
-                  <a:srgbClr val="7D7D7B"/>
-                </a:solidFill>
-                <a:latin typeface="Inter"/>
-                <a:ea typeface="Inter"/>
-              </a:rPr>
-              <a:t>Illustrative reach and response · source and measurement convention remain attached.</a:t>
-            </a:r>
-            <a:endParaRPr lang="en-US"/>
-          </a:p>
-        </p:txBody>
-      </p:sp>
-      <p:sp>
-        <p:nvSpPr>
-          <p:cNvPr id="19" name="evidence-rule"/>
-          <p:cNvSpPr/>
-          <p:nvPr/>
-        </p:nvSpPr>
-        <p:spPr>
-          <a:xfrm xmlns:a="http://schemas.openxmlformats.org/drawingml/2006/main">
-            <a:off x="914400" y="2457450"/>
-            <a:ext cx="13411200" cy="0"/>
-          </a:xfrm>
-          <a:prstGeom xmlns:a="http://schemas.openxmlformats.org/drawingml/2006/main" prst="line">
-            <a:avLst/>
-          </a:prstGeom>
-          <a:noFill xmlns:a="http://schemas.openxmlformats.org/drawingml/2006/main"/>
-          <a:ln xmlns:a="http://schemas.openxmlformats.org/drawingml/2006/main" w="25400">
-            <a:solidFill>
-              <a:srgbClr val="7D7D7B"/>
-            </a:solidFill>
-            <a:prstDash val="solid"/>
-          </a:ln>
-        </p:spPr>
-        <p:txBody>
-          <a:bodyPr xmlns:a="http://schemas.openxmlformats.org/drawingml/2006/main" wrap="square" lIns="0" tIns="0" rIns="0" bIns="0" anchor="t"/>
-          <a:lstStyle xmlns:a="http://schemas.openxmlformats.org/drawingml/2006/main"/>
-          <a:p xmlns:a="http://schemas.openxmlformats.org/drawingml/2006/main">
-            <a:r>
-              <a:rPr lang="en-US"/>
-              <a:t/>
             </a:r>
             <a:endParaRPr lang="en-US"/>
           </a:p>
@@ -2177,7 +2031,7 @@
       </p:sp>
       <p:pic>
         <p:nvPicPr>
-          <p:cNvPr id="20" name="evidence-image-field">
+          <p:cNvPr id="15" name="evidence-photo-band">
             <a:extLst xmlns:a="http://schemas.openxmlformats.org/drawingml/2006/main">
               <a:ext uri="{C183D7F6-B498-43B3-948B-1728B52AA6E4}">
                 <adec:decorative xmlns:adec="http://schemas.microsoft.com/office/drawing/2017/decorative" val="1"/>
@@ -2188,14 +2042,226 @@
           <p:nvPr/>
         </p:nvPicPr>
         <p:blipFill>
-          <a:blip xmlns:r="http://schemas.openxmlformats.org/officeDocument/2006/relationships" xmlns:a="http://schemas.openxmlformats.org/drawingml/2006/main" r:embed="rIdOfficeKitImage13db13f70d7843cc_1"/>
-          <a:srcRect xmlns:a="http://schemas.openxmlformats.org/drawingml/2006/main" l="0" t="39326" r="0" b="39326"/>
+          <a:blip xmlns:r="http://schemas.openxmlformats.org/officeDocument/2006/relationships" xmlns:a="http://schemas.openxmlformats.org/drawingml/2006/main" r:embed="rIdOfficeKitImagec7b73f8fac405495_1"/>
+          <a:srcRect xmlns:a="http://schemas.openxmlformats.org/drawingml/2006/main" l="0" t="47256" r="0" b="47256"/>
           <a:stretch xmlns:a="http://schemas.openxmlformats.org/drawingml/2006/main">
             <a:fillRect/>
           </a:stretch>
         </p:blipFill>
         <p:spPr>
-          <a:xfrm xmlns:a="http://schemas.openxmlformats.org/drawingml/2006/main" flipH="1">
+          <a:xfrm xmlns:a="http://schemas.openxmlformats.org/drawingml/2006/main">
+            <a:off x="0" y="0"/>
+            <a:ext cx="15240000" cy="1485900"/>
+          </a:xfrm>
+          <a:prstGeom xmlns:a="http://schemas.openxmlformats.org/drawingml/2006/main" prst="rect">
+            <a:avLst/>
+          </a:prstGeom>
+        </p:spPr>
+      </p:pic>
+      <p:sp>
+        <p:nvSpPr>
+          <p:cNvPr id="16" name="evidence-photo-scrim"/>
+          <p:cNvSpPr/>
+          <p:nvPr/>
+        </p:nvSpPr>
+        <p:spPr>
+          <a:xfrm xmlns:a="http://schemas.openxmlformats.org/drawingml/2006/main">
+            <a:off x="0" y="0"/>
+            <a:ext cx="15240000" cy="1485900"/>
+          </a:xfrm>
+          <a:prstGeom xmlns:a="http://schemas.openxmlformats.org/drawingml/2006/main" prst="rect">
+            <a:avLst/>
+          </a:prstGeom>
+          <a:solidFill xmlns:a="http://schemas.openxmlformats.org/drawingml/2006/main">
+            <a:srgbClr val="F2F0EA">
+              <a:alpha val="62000"/>
+            </a:srgbClr>
+          </a:solidFill>
+          <a:ln xmlns:a="http://schemas.openxmlformats.org/drawingml/2006/main" w="0">
+            <a:solidFill>
+              <a:srgbClr val="F2F0EA"/>
+            </a:solidFill>
+            <a:prstDash val="solid"/>
+          </a:ln>
+        </p:spPr>
+        <p:txBody>
+          <a:bodyPr xmlns:a="http://schemas.openxmlformats.org/drawingml/2006/main" wrap="square" lIns="0" tIns="0" rIns="0" bIns="0" anchor="t"/>
+          <a:lstStyle xmlns:a="http://schemas.openxmlformats.org/drawingml/2006/main"/>
+          <a:p xmlns:a="http://schemas.openxmlformats.org/drawingml/2006/main">
+            <a:r>
+              <a:rPr lang="en-US"/>
+              <a:t/>
+            </a:r>
+            <a:endParaRPr lang="en-US"/>
+          </a:p>
+        </p:txBody>
+      </p:sp>
+      <p:sp>
+        <p:nvSpPr>
+          <p:cNvPr id="17" name="evidence-photo-rule"/>
+          <p:cNvSpPr/>
+          <p:nvPr/>
+        </p:nvSpPr>
+        <p:spPr>
+          <a:xfrm xmlns:a="http://schemas.openxmlformats.org/drawingml/2006/main">
+            <a:off x="914400" y="1438275"/>
+            <a:ext cx="13411200" cy="0"/>
+          </a:xfrm>
+          <a:prstGeom xmlns:a="http://schemas.openxmlformats.org/drawingml/2006/main" prst="line">
+            <a:avLst/>
+          </a:prstGeom>
+          <a:noFill xmlns:a="http://schemas.openxmlformats.org/drawingml/2006/main"/>
+          <a:ln xmlns:a="http://schemas.openxmlformats.org/drawingml/2006/main" w="38100">
+            <a:solidFill>
+              <a:srgbClr val="D53A45"/>
+            </a:solidFill>
+            <a:prstDash val="solid"/>
+          </a:ln>
+        </p:spPr>
+        <p:txBody>
+          <a:bodyPr xmlns:a="http://schemas.openxmlformats.org/drawingml/2006/main" wrap="square" lIns="0" tIns="0" rIns="0" bIns="0" anchor="t"/>
+          <a:lstStyle xmlns:a="http://schemas.openxmlformats.org/drawingml/2006/main"/>
+          <a:p xmlns:a="http://schemas.openxmlformats.org/drawingml/2006/main">
+            <a:r>
+              <a:rPr lang="en-US"/>
+              <a:t/>
+            </a:r>
+            <a:endParaRPr lang="en-US"/>
+          </a:p>
+        </p:txBody>
+      </p:sp>
+      <p:sp>
+        <p:nvSpPr>
+          <p:cNvPr id="18" name="NOIR FIELD PICTORIAL · EVIDENCE"/>
+          <p:cNvSpPr txBox="1"/>
+          <p:nvPr/>
+        </p:nvSpPr>
+        <p:spPr>
+          <a:xfrm xmlns:a="http://schemas.openxmlformats.org/drawingml/2006/main">
+            <a:off x="914400" y="228600"/>
+            <a:ext cx="9525000" cy="190500"/>
+          </a:xfrm>
+          <a:prstGeom xmlns:a="http://schemas.openxmlformats.org/drawingml/2006/main" prst="rect">
+            <a:avLst/>
+          </a:prstGeom>
+          <a:noFill xmlns:a="http://schemas.openxmlformats.org/drawingml/2006/main"/>
+          <a:ln xmlns:a="http://schemas.openxmlformats.org/drawingml/2006/main" w="0">
+            <a:noFill/>
+          </a:ln>
+        </p:spPr>
+        <p:txBody>
+          <a:bodyPr xmlns:a="http://schemas.openxmlformats.org/drawingml/2006/main" wrap="square" lIns="0" tIns="0" rIns="0" bIns="0" anchor="t"/>
+          <a:lstStyle xmlns:a="http://schemas.openxmlformats.org/drawingml/2006/main"/>
+          <a:p xmlns:a="http://schemas.openxmlformats.org/drawingml/2006/main">
+            <a:r>
+              <a:rPr lang="en-US" sz="1050" b="1">
+                <a:solidFill>
+                  <a:srgbClr val="D53A45"/>
+                </a:solidFill>
+                <a:latin typeface="Inter"/>
+                <a:ea typeface="Inter"/>
+              </a:rPr>
+              <a:t>NOIR FIELD PICTORIAL · EVIDENCE</a:t>
+            </a:r>
+            <a:endParaRPr lang="en-US"/>
+          </a:p>
+        </p:txBody>
+      </p:sp>
+      <p:sp>
+        <p:nvSpPr>
+          <p:cNvPr id="19" name="evidence-title"/>
+          <p:cNvSpPr txBox="1"/>
+          <p:nvPr/>
+        </p:nvSpPr>
+        <p:spPr>
+          <a:xfrm xmlns:a="http://schemas.openxmlformats.org/drawingml/2006/main">
+            <a:off x="914400" y="495300"/>
+            <a:ext cx="12001500" cy="457200"/>
+          </a:xfrm>
+          <a:prstGeom xmlns:a="http://schemas.openxmlformats.org/drawingml/2006/main" prst="rect">
+            <a:avLst/>
+          </a:prstGeom>
+          <a:noFill xmlns:a="http://schemas.openxmlformats.org/drawingml/2006/main"/>
+          <a:ln xmlns:a="http://schemas.openxmlformats.org/drawingml/2006/main" w="0">
+            <a:noFill/>
+          </a:ln>
+        </p:spPr>
+        <p:txBody>
+          <a:bodyPr xmlns:a="http://schemas.openxmlformats.org/drawingml/2006/main" wrap="square" lIns="0" tIns="0" rIns="0" bIns="0" anchor="t"/>
+          <a:lstStyle xmlns:a="http://schemas.openxmlformats.org/drawingml/2006/main"/>
+          <a:p xmlns:a="http://schemas.openxmlformats.org/drawingml/2006/main">
+            <a:r>
+              <a:rPr lang="en-US" sz="2550" b="1">
+                <a:solidFill>
+                  <a:srgbClr val="FFFFFF"/>
+                </a:solidFill>
+                <a:latin typeface="Inter"/>
+                <a:ea typeface="Inter"/>
+              </a:rPr>
+              <a:t>The signal grows when the invitation stays measurable</a:t>
+            </a:r>
+            <a:endParaRPr lang="en-US"/>
+          </a:p>
+        </p:txBody>
+      </p:sp>
+      <p:sp>
+        <p:nvSpPr>
+          <p:cNvPr id="20" name="evidence-basis"/>
+          <p:cNvSpPr txBox="1"/>
+          <p:nvPr/>
+        </p:nvSpPr>
+        <p:spPr>
+          <a:xfrm xmlns:a="http://schemas.openxmlformats.org/drawingml/2006/main">
+            <a:off x="952500" y="1066800"/>
+            <a:ext cx="11049000" cy="228600"/>
+          </a:xfrm>
+          <a:prstGeom xmlns:a="http://schemas.openxmlformats.org/drawingml/2006/main" prst="rect">
+            <a:avLst/>
+          </a:prstGeom>
+          <a:noFill xmlns:a="http://schemas.openxmlformats.org/drawingml/2006/main"/>
+          <a:ln xmlns:a="http://schemas.openxmlformats.org/drawingml/2006/main" w="0">
+            <a:noFill/>
+          </a:ln>
+        </p:spPr>
+        <p:txBody>
+          <a:bodyPr xmlns:a="http://schemas.openxmlformats.org/drawingml/2006/main" wrap="square" lIns="0" tIns="0" rIns="0" bIns="0" anchor="t"/>
+          <a:lstStyle xmlns:a="http://schemas.openxmlformats.org/drawingml/2006/main"/>
+          <a:p xmlns:a="http://schemas.openxmlformats.org/drawingml/2006/main">
+            <a:r>
+              <a:rPr lang="en-US" sz="1200">
+                <a:solidFill>
+                  <a:srgbClr val="F0F3F2"/>
+                </a:solidFill>
+                <a:latin typeface="Inter"/>
+                <a:ea typeface="Inter"/>
+              </a:rPr>
+              <a:t>Illustrative reach and response · source and measurement convention remain attached.</a:t>
+            </a:r>
+            <a:endParaRPr lang="en-US"/>
+          </a:p>
+        </p:txBody>
+      </p:sp>
+      <p:pic>
+        <p:nvPicPr>
+          <p:cNvPr id="21" name="evidence-image-field">
+            <a:extLst xmlns:a="http://schemas.openxmlformats.org/drawingml/2006/main">
+              <a:ext uri="{C183D7F6-B498-43B3-948B-1728B52AA6E4}">
+                <adec:decorative xmlns:adec="http://schemas.microsoft.com/office/drawing/2017/decorative" val="1"/>
+              </a:ext>
+            </a:extLst>
+          </p:cNvPr>
+          <p:cNvPicPr/>
+          <p:nvPr/>
+        </p:nvPicPr>
+        <p:blipFill>
+          <a:blip xmlns:r="http://schemas.openxmlformats.org/officeDocument/2006/relationships" xmlns:a="http://schemas.openxmlformats.org/drawingml/2006/main" r:embed="rIdOfficeKitImagec7b73f8fac405495_1"/>
+          <a:srcRect xmlns:a="http://schemas.openxmlformats.org/drawingml/2006/main" l="0" t="39320" r="0" b="39320"/>
+          <a:stretch xmlns:a="http://schemas.openxmlformats.org/drawingml/2006/main">
+            <a:fillRect/>
+          </a:stretch>
+        </p:blipFill>
+        <p:spPr>
+          <a:xfrm xmlns:a="http://schemas.openxmlformats.org/drawingml/2006/main">
             <a:off x="1047750" y="3048000"/>
             <a:ext cx="7905750" cy="3000375"/>
           </a:xfrm>
@@ -2206,7 +2272,7 @@
       </p:pic>
       <p:sp>
         <p:nvSpPr>
-          <p:cNvPr id="21" name="evidence-image-caption"/>
+          <p:cNvPr id="22" name="evidence-image-caption"/>
           <p:cNvSpPr txBox="1"/>
           <p:nvPr/>
         </p:nvSpPr>
@@ -2243,7 +2309,7 @@
       </p:sp>
       <p:sp>
         <p:nvSpPr>
-          <p:cNvPr id="22" name="evidence-image-rule"/>
+          <p:cNvPr id="23" name="evidence-image-rule"/>
           <p:cNvSpPr/>
           <p:nvPr/>
         </p:nvSpPr>
@@ -2277,7 +2343,7 @@
       </p:sp>
       <p:sp>
         <p:nvSpPr>
-          <p:cNvPr id="23" name="evidence-image-note"/>
+          <p:cNvPr id="24" name="evidence-image-note"/>
           <p:cNvSpPr txBox="1"/>
           <p:nvPr/>
         </p:nvSpPr>
@@ -2314,7 +2380,7 @@
       </p:sp>
       <p:sp>
         <p:nvSpPr>
-          <p:cNvPr id="24" name="metric"/>
+          <p:cNvPr id="25" name="metric"/>
           <p:cNvSpPr txBox="1"/>
           <p:nvPr/>
         </p:nvSpPr>
@@ -2351,7 +2417,7 @@
       </p:sp>
       <p:sp>
         <p:nvSpPr>
-          <p:cNvPr id="25" name="metric-label"/>
+          <p:cNvPr id="26" name="metric-label"/>
           <p:cNvSpPr txBox="1"/>
           <p:nvPr/>
         </p:nvSpPr>
@@ -2388,7 +2454,7 @@
       </p:sp>
       <p:sp>
         <p:nvSpPr>
-          <p:cNvPr id="26" name="rail-rule"/>
+          <p:cNvPr id="27" name="rail-rule"/>
           <p:cNvSpPr/>
           <p:nvPr/>
         </p:nvSpPr>
@@ -2422,7 +2488,7 @@
       </p:sp>
       <p:sp>
         <p:nvSpPr>
-          <p:cNvPr id="27" name="read-through"/>
+          <p:cNvPr id="28" name="read-through"/>
           <p:cNvSpPr txBox="1"/>
           <p:nvPr/>
         </p:nvSpPr>
@@ -2459,7 +2525,7 @@
       </p:sp>
       <p:sp>
         <p:nvSpPr>
-          <p:cNvPr id="28" name="evidence-band"/>
+          <p:cNvPr id="29" name="evidence-band"/>
           <p:cNvSpPr/>
           <p:nvPr/>
         </p:nvSpPr>
@@ -2495,7 +2561,7 @@
       </p:sp>
       <p:sp>
         <p:nvSpPr>
-          <p:cNvPr id="29" name="evidence-band-text"/>
+          <p:cNvPr id="30" name="evidence-band-text"/>
           <p:cNvSpPr txBox="1"/>
           <p:nvPr/>
         </p:nvSpPr>
@@ -2532,7 +2598,7 @@
       </p:sp>
       <p:sp>
         <p:nvSpPr>
-          <p:cNvPr id="30" name="source"/>
+          <p:cNvPr id="31" name="source"/>
           <p:cNvSpPr txBox="1"/>
           <p:nvPr/>
         </p:nvSpPr>
@@ -2569,7 +2635,7 @@
       </p:sp>
       <p:sp>
         <p:nvSpPr>
-          <p:cNvPr id="31" name="page-number"/>
+          <p:cNvPr id="32" name="page-number"/>
           <p:cNvSpPr txBox="1"/>
           <p:nvPr/>
         </p:nvSpPr>
@@ -2710,7 +2776,7 @@
         </p:nvSpPr>
         <p:spPr>
           <a:xfrm xmlns:a="http://schemas.openxmlformats.org/drawingml/2006/main">
-            <a:off x="914400" y="2628900"/>
+            <a:off x="914400" y="1752600"/>
             <a:ext cx="1516380" cy="209550"/>
           </a:xfrm>
           <a:prstGeom xmlns:a="http://schemas.openxmlformats.org/drawingml/2006/main" prst="rect">
@@ -2746,7 +2812,7 @@
         </p:nvSpPr>
         <p:spPr>
           <a:xfrm xmlns:a="http://schemas.openxmlformats.org/drawingml/2006/main">
-            <a:off x="990600" y="2667000"/>
+            <a:off x="990600" y="1790700"/>
             <a:ext cx="1363980" cy="133350"/>
           </a:xfrm>
           <a:prstGeom xmlns:a="http://schemas.openxmlformats.org/drawingml/2006/main" prst="rect">
@@ -2784,7 +2850,7 @@
         </p:nvSpPr>
         <p:spPr>
           <a:xfrm xmlns:a="http://schemas.openxmlformats.org/drawingml/2006/main">
-            <a:off x="2487930" y="2628900"/>
+            <a:off x="2487930" y="1752600"/>
             <a:ext cx="1516380" cy="209550"/>
           </a:xfrm>
           <a:prstGeom xmlns:a="http://schemas.openxmlformats.org/drawingml/2006/main" prst="rect">
@@ -2820,7 +2886,7 @@
         </p:nvSpPr>
         <p:spPr>
           <a:xfrm xmlns:a="http://schemas.openxmlformats.org/drawingml/2006/main">
-            <a:off x="2564130" y="2667000"/>
+            <a:off x="2564130" y="1790700"/>
             <a:ext cx="1363980" cy="133350"/>
           </a:xfrm>
           <a:prstGeom xmlns:a="http://schemas.openxmlformats.org/drawingml/2006/main" prst="rect">
@@ -2858,7 +2924,7 @@
         </p:nvSpPr>
         <p:spPr>
           <a:xfrm xmlns:a="http://schemas.openxmlformats.org/drawingml/2006/main">
-            <a:off x="4061460" y="2628900"/>
+            <a:off x="4061460" y="1752600"/>
             <a:ext cx="1516380" cy="209550"/>
           </a:xfrm>
           <a:prstGeom xmlns:a="http://schemas.openxmlformats.org/drawingml/2006/main" prst="rect">
@@ -2894,7 +2960,7 @@
         </p:nvSpPr>
         <p:spPr>
           <a:xfrm xmlns:a="http://schemas.openxmlformats.org/drawingml/2006/main">
-            <a:off x="4137660" y="2667000"/>
+            <a:off x="4137660" y="1790700"/>
             <a:ext cx="1363980" cy="133350"/>
           </a:xfrm>
           <a:prstGeom xmlns:a="http://schemas.openxmlformats.org/drawingml/2006/main" prst="rect">
@@ -2932,7 +2998,7 @@
         </p:nvSpPr>
         <p:spPr>
           <a:xfrm xmlns:a="http://schemas.openxmlformats.org/drawingml/2006/main">
-            <a:off x="5634990" y="2628900"/>
+            <a:off x="5634990" y="1752600"/>
             <a:ext cx="1516380" cy="209550"/>
           </a:xfrm>
           <a:prstGeom xmlns:a="http://schemas.openxmlformats.org/drawingml/2006/main" prst="rect">
@@ -2968,7 +3034,7 @@
         </p:nvSpPr>
         <p:spPr>
           <a:xfrm xmlns:a="http://schemas.openxmlformats.org/drawingml/2006/main">
-            <a:off x="5711190" y="2667000"/>
+            <a:off x="5711190" y="1790700"/>
             <a:ext cx="1363980" cy="133350"/>
           </a:xfrm>
           <a:prstGeom xmlns:a="http://schemas.openxmlformats.org/drawingml/2006/main" prst="rect">
@@ -3006,7 +3072,7 @@
         </p:nvSpPr>
         <p:spPr>
           <a:xfrm xmlns:a="http://schemas.openxmlformats.org/drawingml/2006/main">
-            <a:off x="7208520" y="2628900"/>
+            <a:off x="7208520" y="1752600"/>
             <a:ext cx="1516380" cy="209550"/>
           </a:xfrm>
           <a:prstGeom xmlns:a="http://schemas.openxmlformats.org/drawingml/2006/main" prst="rect">
@@ -3042,7 +3108,7 @@
         </p:nvSpPr>
         <p:spPr>
           <a:xfrm xmlns:a="http://schemas.openxmlformats.org/drawingml/2006/main">
-            <a:off x="7284720" y="2667000"/>
+            <a:off x="7284720" y="1790700"/>
             <a:ext cx="1363980" cy="133350"/>
           </a:xfrm>
           <a:prstGeom xmlns:a="http://schemas.openxmlformats.org/drawingml/2006/main" prst="rect">
@@ -3067,185 +3133,6 @@
                 <a:ea typeface="Inter"/>
               </a:rPr>
               <a:t>NEXT</a:t>
-            </a:r>
-            <a:endParaRPr lang="en-US"/>
-          </a:p>
-        </p:txBody>
-      </p:sp>
-      <p:sp>
-        <p:nvSpPr>
-          <p:cNvPr id="14" name="detail-top-rule"/>
-          <p:cNvSpPr/>
-          <p:nvPr/>
-        </p:nvSpPr>
-        <p:spPr>
-          <a:xfrm xmlns:a="http://schemas.openxmlformats.org/drawingml/2006/main">
-            <a:off x="838200" y="666750"/>
-            <a:ext cx="13563600" cy="0"/>
-          </a:xfrm>
-          <a:prstGeom xmlns:a="http://schemas.openxmlformats.org/drawingml/2006/main" prst="line">
-            <a:avLst/>
-          </a:prstGeom>
-          <a:noFill xmlns:a="http://schemas.openxmlformats.org/drawingml/2006/main"/>
-          <a:ln xmlns:a="http://schemas.openxmlformats.org/drawingml/2006/main" w="38100">
-            <a:solidFill>
-              <a:srgbClr val="D53A45"/>
-            </a:solidFill>
-            <a:prstDash val="solid"/>
-          </a:ln>
-        </p:spPr>
-        <p:txBody>
-          <a:bodyPr xmlns:a="http://schemas.openxmlformats.org/drawingml/2006/main" wrap="square" lIns="0" tIns="0" rIns="0" bIns="0" anchor="t"/>
-          <a:lstStyle xmlns:a="http://schemas.openxmlformats.org/drawingml/2006/main"/>
-          <a:p xmlns:a="http://schemas.openxmlformats.org/drawingml/2006/main">
-            <a:r>
-              <a:rPr lang="en-US"/>
-              <a:t/>
-            </a:r>
-            <a:endParaRPr lang="en-US"/>
-          </a:p>
-        </p:txBody>
-      </p:sp>
-      <p:sp>
-        <p:nvSpPr>
-          <p:cNvPr id="15" name="NOIR FIELD PICTORIAL · DETAIL"/>
-          <p:cNvSpPr txBox="1"/>
-          <p:nvPr/>
-        </p:nvSpPr>
-        <p:spPr>
-          <a:xfrm xmlns:a="http://schemas.openxmlformats.org/drawingml/2006/main">
-            <a:off x="914400" y="895350"/>
-            <a:ext cx="7239000" cy="228600"/>
-          </a:xfrm>
-          <a:prstGeom xmlns:a="http://schemas.openxmlformats.org/drawingml/2006/main" prst="rect">
-            <a:avLst/>
-          </a:prstGeom>
-          <a:noFill xmlns:a="http://schemas.openxmlformats.org/drawingml/2006/main"/>
-          <a:ln xmlns:a="http://schemas.openxmlformats.org/drawingml/2006/main" w="0">
-            <a:noFill/>
-          </a:ln>
-        </p:spPr>
-        <p:txBody>
-          <a:bodyPr xmlns:a="http://schemas.openxmlformats.org/drawingml/2006/main" wrap="square" lIns="0" tIns="0" rIns="0" bIns="0" anchor="t"/>
-          <a:lstStyle xmlns:a="http://schemas.openxmlformats.org/drawingml/2006/main"/>
-          <a:p xmlns:a="http://schemas.openxmlformats.org/drawingml/2006/main">
-            <a:r>
-              <a:rPr lang="en-US" sz="1200" b="1">
-                <a:solidFill>
-                  <a:srgbClr val="D53A45"/>
-                </a:solidFill>
-                <a:latin typeface="Inter"/>
-                <a:ea typeface="Inter"/>
-              </a:rPr>
-              <a:t>NOIR FIELD PICTORIAL · DETAIL</a:t>
-            </a:r>
-            <a:endParaRPr lang="en-US"/>
-          </a:p>
-        </p:txBody>
-      </p:sp>
-      <p:sp>
-        <p:nvSpPr>
-          <p:cNvPr id="16" name="detail-title"/>
-          <p:cNvSpPr txBox="1"/>
-          <p:nvPr/>
-        </p:nvSpPr>
-        <p:spPr>
-          <a:xfrm xmlns:a="http://schemas.openxmlformats.org/drawingml/2006/main">
-            <a:off x="914400" y="1314450"/>
-            <a:ext cx="6286500" cy="552450"/>
-          </a:xfrm>
-          <a:prstGeom xmlns:a="http://schemas.openxmlformats.org/drawingml/2006/main" prst="rect">
-            <a:avLst/>
-          </a:prstGeom>
-          <a:noFill xmlns:a="http://schemas.openxmlformats.org/drawingml/2006/main"/>
-          <a:ln xmlns:a="http://schemas.openxmlformats.org/drawingml/2006/main" w="0">
-            <a:noFill/>
-          </a:ln>
-        </p:spPr>
-        <p:txBody>
-          <a:bodyPr xmlns:a="http://schemas.openxmlformats.org/drawingml/2006/main" wrap="square" lIns="0" tIns="0" rIns="0" bIns="0" anchor="t"/>
-          <a:lstStyle xmlns:a="http://schemas.openxmlformats.org/drawingml/2006/main"/>
-          <a:p xmlns:a="http://schemas.openxmlformats.org/drawingml/2006/main">
-            <a:r>
-              <a:rPr lang="en-US" sz="2850" b="1">
-                <a:solidFill>
-                  <a:srgbClr val="F2F0EA"/>
-                </a:solidFill>
-                <a:latin typeface="Inter"/>
-                <a:ea typeface="Inter"/>
-              </a:rPr>
-              <a:t>The same idea can hold several views</a:t>
-            </a:r>
-            <a:endParaRPr lang="en-US"/>
-          </a:p>
-        </p:txBody>
-      </p:sp>
-      <p:sp>
-        <p:nvSpPr>
-          <p:cNvPr id="17" name="detail-basis"/>
-          <p:cNvSpPr txBox="1"/>
-          <p:nvPr/>
-        </p:nvSpPr>
-        <p:spPr>
-          <a:xfrm xmlns:a="http://schemas.openxmlformats.org/drawingml/2006/main">
-            <a:off x="952500" y="1981200"/>
-            <a:ext cx="6096000" cy="266700"/>
-          </a:xfrm>
-          <a:prstGeom xmlns:a="http://schemas.openxmlformats.org/drawingml/2006/main" prst="rect">
-            <a:avLst/>
-          </a:prstGeom>
-          <a:noFill xmlns:a="http://schemas.openxmlformats.org/drawingml/2006/main"/>
-          <a:ln xmlns:a="http://schemas.openxmlformats.org/drawingml/2006/main" w="0">
-            <a:noFill/>
-          </a:ln>
-        </p:spPr>
-        <p:txBody>
-          <a:bodyPr xmlns:a="http://schemas.openxmlformats.org/drawingml/2006/main" wrap="square" lIns="0" tIns="0" rIns="0" bIns="0" anchor="t"/>
-          <a:lstStyle xmlns:a="http://schemas.openxmlformats.org/drawingml/2006/main"/>
-          <a:p xmlns:a="http://schemas.openxmlformats.org/drawingml/2006/main">
-            <a:r>
-              <a:rPr lang="en-US" sz="1350">
-                <a:solidFill>
-                  <a:srgbClr val="7D7D7B"/>
-                </a:solidFill>
-                <a:latin typeface="Inter"/>
-                <a:ea typeface="Inter"/>
-              </a:rPr>
-              <a:t>Unequal image frames · visual variety without decorative filler.</a:t>
-            </a:r>
-            <a:endParaRPr lang="en-US"/>
-          </a:p>
-        </p:txBody>
-      </p:sp>
-      <p:sp>
-        <p:nvSpPr>
-          <p:cNvPr id="18" name="detail-rule"/>
-          <p:cNvSpPr/>
-          <p:nvPr/>
-        </p:nvSpPr>
-        <p:spPr>
-          <a:xfrm xmlns:a="http://schemas.openxmlformats.org/drawingml/2006/main">
-            <a:off x="914400" y="2457450"/>
-            <a:ext cx="13411200" cy="0"/>
-          </a:xfrm>
-          <a:prstGeom xmlns:a="http://schemas.openxmlformats.org/drawingml/2006/main" prst="line">
-            <a:avLst/>
-          </a:prstGeom>
-          <a:noFill xmlns:a="http://schemas.openxmlformats.org/drawingml/2006/main"/>
-          <a:ln xmlns:a="http://schemas.openxmlformats.org/drawingml/2006/main" w="25400">
-            <a:solidFill>
-              <a:srgbClr val="7D7D7B"/>
-            </a:solidFill>
-            <a:prstDash val="solid"/>
-          </a:ln>
-        </p:spPr>
-        <p:txBody>
-          <a:bodyPr xmlns:a="http://schemas.openxmlformats.org/drawingml/2006/main" wrap="square" lIns="0" tIns="0" rIns="0" bIns="0" anchor="t"/>
-          <a:lstStyle xmlns:a="http://schemas.openxmlformats.org/drawingml/2006/main"/>
-          <a:p xmlns:a="http://schemas.openxmlformats.org/drawingml/2006/main">
-            <a:r>
-              <a:rPr lang="en-US"/>
-              <a:t/>
             </a:r>
             <a:endParaRPr lang="en-US"/>
           </a:p>
@@ -3253,7 +3140,7 @@
       </p:sp>
       <p:pic>
         <p:nvPicPr>
-          <p:cNvPr id="19" name="image-evidence-0">
+          <p:cNvPr id="14" name="detail-photo-band">
             <a:extLst xmlns:a="http://schemas.openxmlformats.org/drawingml/2006/main">
               <a:ext uri="{C183D7F6-B498-43B3-948B-1728B52AA6E4}">
                 <adec:decorative xmlns:adec="http://schemas.microsoft.com/office/drawing/2017/decorative" val="1"/>
@@ -3264,25 +3151,208 @@
           <p:nvPr/>
         </p:nvPicPr>
         <p:blipFill>
-          <a:blip xmlns:r="http://schemas.openxmlformats.org/officeDocument/2006/relationships" xmlns:a="http://schemas.openxmlformats.org/drawingml/2006/main" r:embed="rIdOfficeKitImage59ee3aa5202fd02f_1"/>
-          <a:srcRect xmlns:a="http://schemas.openxmlformats.org/drawingml/2006/main" l="0" t="28365" r="0" b="28365"/>
+          <a:blip xmlns:r="http://schemas.openxmlformats.org/officeDocument/2006/relationships" xmlns:a="http://schemas.openxmlformats.org/drawingml/2006/main" r:embed="rIdOfficeKitImageaeb6f74d36d260d0_1"/>
+          <a:srcRect xmlns:a="http://schemas.openxmlformats.org/drawingml/2006/main" l="0" t="47258" r="0" b="47258"/>
           <a:stretch xmlns:a="http://schemas.openxmlformats.org/drawingml/2006/main">
             <a:fillRect/>
           </a:stretch>
         </p:blipFill>
         <p:spPr>
           <a:xfrm xmlns:a="http://schemas.openxmlformats.org/drawingml/2006/main">
-            <a:off x="990600" y="3162300"/>
-            <a:ext cx="3714750" cy="2857500"/>
+            <a:off x="0" y="0"/>
+            <a:ext cx="15240000" cy="1485900"/>
           </a:xfrm>
           <a:prstGeom xmlns:a="http://schemas.openxmlformats.org/drawingml/2006/main" prst="rect">
             <a:avLst/>
           </a:prstGeom>
         </p:spPr>
       </p:pic>
+      <p:sp>
+        <p:nvSpPr>
+          <p:cNvPr id="15" name="detail-photo-scrim"/>
+          <p:cNvSpPr/>
+          <p:nvPr/>
+        </p:nvSpPr>
+        <p:spPr>
+          <a:xfrm xmlns:a="http://schemas.openxmlformats.org/drawingml/2006/main">
+            <a:off x="0" y="0"/>
+            <a:ext cx="15240000" cy="1485900"/>
+          </a:xfrm>
+          <a:prstGeom xmlns:a="http://schemas.openxmlformats.org/drawingml/2006/main" prst="rect">
+            <a:avLst/>
+          </a:prstGeom>
+          <a:solidFill xmlns:a="http://schemas.openxmlformats.org/drawingml/2006/main">
+            <a:srgbClr val="F2F0EA">
+              <a:alpha val="62000"/>
+            </a:srgbClr>
+          </a:solidFill>
+          <a:ln xmlns:a="http://schemas.openxmlformats.org/drawingml/2006/main" w="0">
+            <a:solidFill>
+              <a:srgbClr val="F2F0EA"/>
+            </a:solidFill>
+            <a:prstDash val="solid"/>
+          </a:ln>
+        </p:spPr>
+        <p:txBody>
+          <a:bodyPr xmlns:a="http://schemas.openxmlformats.org/drawingml/2006/main" wrap="square" lIns="0" tIns="0" rIns="0" bIns="0" anchor="t"/>
+          <a:lstStyle xmlns:a="http://schemas.openxmlformats.org/drawingml/2006/main"/>
+          <a:p xmlns:a="http://schemas.openxmlformats.org/drawingml/2006/main">
+            <a:r>
+              <a:rPr lang="en-US"/>
+              <a:t/>
+            </a:r>
+            <a:endParaRPr lang="en-US"/>
+          </a:p>
+        </p:txBody>
+      </p:sp>
+      <p:sp>
+        <p:nvSpPr>
+          <p:cNvPr id="16" name="detail-photo-rule"/>
+          <p:cNvSpPr/>
+          <p:nvPr/>
+        </p:nvSpPr>
+        <p:spPr>
+          <a:xfrm xmlns:a="http://schemas.openxmlformats.org/drawingml/2006/main">
+            <a:off x="914400" y="1438275"/>
+            <a:ext cx="13411200" cy="0"/>
+          </a:xfrm>
+          <a:prstGeom xmlns:a="http://schemas.openxmlformats.org/drawingml/2006/main" prst="line">
+            <a:avLst/>
+          </a:prstGeom>
+          <a:noFill xmlns:a="http://schemas.openxmlformats.org/drawingml/2006/main"/>
+          <a:ln xmlns:a="http://schemas.openxmlformats.org/drawingml/2006/main" w="38100">
+            <a:solidFill>
+              <a:srgbClr val="D53A45"/>
+            </a:solidFill>
+            <a:prstDash val="solid"/>
+          </a:ln>
+        </p:spPr>
+        <p:txBody>
+          <a:bodyPr xmlns:a="http://schemas.openxmlformats.org/drawingml/2006/main" wrap="square" lIns="0" tIns="0" rIns="0" bIns="0" anchor="t"/>
+          <a:lstStyle xmlns:a="http://schemas.openxmlformats.org/drawingml/2006/main"/>
+          <a:p xmlns:a="http://schemas.openxmlformats.org/drawingml/2006/main">
+            <a:r>
+              <a:rPr lang="en-US"/>
+              <a:t/>
+            </a:r>
+            <a:endParaRPr lang="en-US"/>
+          </a:p>
+        </p:txBody>
+      </p:sp>
+      <p:sp>
+        <p:nvSpPr>
+          <p:cNvPr id="17" name="NOIR FIELD PICTORIAL · DETAIL"/>
+          <p:cNvSpPr txBox="1"/>
+          <p:nvPr/>
+        </p:nvSpPr>
+        <p:spPr>
+          <a:xfrm xmlns:a="http://schemas.openxmlformats.org/drawingml/2006/main">
+            <a:off x="914400" y="228600"/>
+            <a:ext cx="9525000" cy="190500"/>
+          </a:xfrm>
+          <a:prstGeom xmlns:a="http://schemas.openxmlformats.org/drawingml/2006/main" prst="rect">
+            <a:avLst/>
+          </a:prstGeom>
+          <a:noFill xmlns:a="http://schemas.openxmlformats.org/drawingml/2006/main"/>
+          <a:ln xmlns:a="http://schemas.openxmlformats.org/drawingml/2006/main" w="0">
+            <a:noFill/>
+          </a:ln>
+        </p:spPr>
+        <p:txBody>
+          <a:bodyPr xmlns:a="http://schemas.openxmlformats.org/drawingml/2006/main" wrap="square" lIns="0" tIns="0" rIns="0" bIns="0" anchor="t"/>
+          <a:lstStyle xmlns:a="http://schemas.openxmlformats.org/drawingml/2006/main"/>
+          <a:p xmlns:a="http://schemas.openxmlformats.org/drawingml/2006/main">
+            <a:r>
+              <a:rPr lang="en-US" sz="1050" b="1">
+                <a:solidFill>
+                  <a:srgbClr val="D53A45"/>
+                </a:solidFill>
+                <a:latin typeface="Inter"/>
+                <a:ea typeface="Inter"/>
+              </a:rPr>
+              <a:t>NOIR FIELD PICTORIAL · DETAIL</a:t>
+            </a:r>
+            <a:endParaRPr lang="en-US"/>
+          </a:p>
+        </p:txBody>
+      </p:sp>
+      <p:sp>
+        <p:nvSpPr>
+          <p:cNvPr id="18" name="detail-title"/>
+          <p:cNvSpPr txBox="1"/>
+          <p:nvPr/>
+        </p:nvSpPr>
+        <p:spPr>
+          <a:xfrm xmlns:a="http://schemas.openxmlformats.org/drawingml/2006/main">
+            <a:off x="914400" y="495300"/>
+            <a:ext cx="12001500" cy="457200"/>
+          </a:xfrm>
+          <a:prstGeom xmlns:a="http://schemas.openxmlformats.org/drawingml/2006/main" prst="rect">
+            <a:avLst/>
+          </a:prstGeom>
+          <a:noFill xmlns:a="http://schemas.openxmlformats.org/drawingml/2006/main"/>
+          <a:ln xmlns:a="http://schemas.openxmlformats.org/drawingml/2006/main" w="0">
+            <a:noFill/>
+          </a:ln>
+        </p:spPr>
+        <p:txBody>
+          <a:bodyPr xmlns:a="http://schemas.openxmlformats.org/drawingml/2006/main" wrap="square" lIns="0" tIns="0" rIns="0" bIns="0" anchor="t"/>
+          <a:lstStyle xmlns:a="http://schemas.openxmlformats.org/drawingml/2006/main"/>
+          <a:p xmlns:a="http://schemas.openxmlformats.org/drawingml/2006/main">
+            <a:r>
+              <a:rPr lang="en-US" sz="2550" b="1">
+                <a:solidFill>
+                  <a:srgbClr val="FFFFFF"/>
+                </a:solidFill>
+                <a:latin typeface="Inter"/>
+                <a:ea typeface="Inter"/>
+              </a:rPr>
+              <a:t>The same idea can hold several views</a:t>
+            </a:r>
+            <a:endParaRPr lang="en-US"/>
+          </a:p>
+        </p:txBody>
+      </p:sp>
+      <p:sp>
+        <p:nvSpPr>
+          <p:cNvPr id="19" name="detail-basis"/>
+          <p:cNvSpPr txBox="1"/>
+          <p:nvPr/>
+        </p:nvSpPr>
+        <p:spPr>
+          <a:xfrm xmlns:a="http://schemas.openxmlformats.org/drawingml/2006/main">
+            <a:off x="952500" y="1066800"/>
+            <a:ext cx="11049000" cy="228600"/>
+          </a:xfrm>
+          <a:prstGeom xmlns:a="http://schemas.openxmlformats.org/drawingml/2006/main" prst="rect">
+            <a:avLst/>
+          </a:prstGeom>
+          <a:noFill xmlns:a="http://schemas.openxmlformats.org/drawingml/2006/main"/>
+          <a:ln xmlns:a="http://schemas.openxmlformats.org/drawingml/2006/main" w="0">
+            <a:noFill/>
+          </a:ln>
+        </p:spPr>
+        <p:txBody>
+          <a:bodyPr xmlns:a="http://schemas.openxmlformats.org/drawingml/2006/main" wrap="square" lIns="0" tIns="0" rIns="0" bIns="0" anchor="t"/>
+          <a:lstStyle xmlns:a="http://schemas.openxmlformats.org/drawingml/2006/main"/>
+          <a:p xmlns:a="http://schemas.openxmlformats.org/drawingml/2006/main">
+            <a:r>
+              <a:rPr lang="en-US" sz="1200">
+                <a:solidFill>
+                  <a:srgbClr val="F0F3F2"/>
+                </a:solidFill>
+                <a:latin typeface="Inter"/>
+                <a:ea typeface="Inter"/>
+              </a:rPr>
+              <a:t>Unequal image frames · visual variety without decorative filler.</a:t>
+            </a:r>
+            <a:endParaRPr lang="en-US"/>
+          </a:p>
+        </p:txBody>
+      </p:sp>
       <p:pic>
         <p:nvPicPr>
-          <p:cNvPr id="20" name="image-evidence-1">
+          <p:cNvPr id="20" name="image-evidence-0">
             <a:extLst xmlns:a="http://schemas.openxmlformats.org/drawingml/2006/main">
               <a:ext uri="{C183D7F6-B498-43B3-948B-1728B52AA6E4}">
                 <adec:decorative xmlns:adec="http://schemas.microsoft.com/office/drawing/2017/decorative" val="1"/>
@@ -3294,15 +3364,15 @@
         </p:nvPicPr>
         <p:blipFill>
           <a:blip xmlns:r="http://schemas.openxmlformats.org/officeDocument/2006/relationships" xmlns:a="http://schemas.openxmlformats.org/drawingml/2006/main" r:embed="rIdOfficeKitImageaeb6f74d36d260d0_1"/>
-          <a:srcRect xmlns:a="http://schemas.openxmlformats.org/drawingml/2006/main" l="0" t="39904" r="0" b="39904"/>
+          <a:srcRect xmlns:a="http://schemas.openxmlformats.org/drawingml/2006/main" l="0" t="28365" r="0" b="28365"/>
           <a:stretch xmlns:a="http://schemas.openxmlformats.org/drawingml/2006/main">
             <a:fillRect/>
           </a:stretch>
         </p:blipFill>
         <p:spPr>
           <a:xfrm xmlns:a="http://schemas.openxmlformats.org/drawingml/2006/main">
-            <a:off x="4895850" y="3162300"/>
-            <a:ext cx="3714750" cy="1333500"/>
+            <a:off x="990600" y="3162300"/>
+            <a:ext cx="3714750" cy="2857500"/>
           </a:xfrm>
           <a:prstGeom xmlns:a="http://schemas.openxmlformats.org/drawingml/2006/main" prst="rect">
             <a:avLst/>
@@ -3311,7 +3381,7 @@
       </p:pic>
       <p:pic>
         <p:nvPicPr>
-          <p:cNvPr id="21" name="image-evidence-2">
+          <p:cNvPr id="21" name="image-evidence-1">
             <a:extLst xmlns:a="http://schemas.openxmlformats.org/drawingml/2006/main">
               <a:ext uri="{C183D7F6-B498-43B3-948B-1728B52AA6E4}">
                 <adec:decorative xmlns:adec="http://schemas.microsoft.com/office/drawing/2017/decorative" val="1"/>
@@ -3330,6 +3400,35 @@
         </p:blipFill>
         <p:spPr>
           <a:xfrm xmlns:a="http://schemas.openxmlformats.org/drawingml/2006/main" flipH="1">
+            <a:off x="4895850" y="3162300"/>
+            <a:ext cx="3714750" cy="1333500"/>
+          </a:xfrm>
+          <a:prstGeom xmlns:a="http://schemas.openxmlformats.org/drawingml/2006/main" prst="rect">
+            <a:avLst/>
+          </a:prstGeom>
+        </p:spPr>
+      </p:pic>
+      <p:pic>
+        <p:nvPicPr>
+          <p:cNvPr id="22" name="image-evidence-2">
+            <a:extLst xmlns:a="http://schemas.openxmlformats.org/drawingml/2006/main">
+              <a:ext uri="{C183D7F6-B498-43B3-948B-1728B52AA6E4}">
+                <adec:decorative xmlns:adec="http://schemas.microsoft.com/office/drawing/2017/decorative" val="1"/>
+              </a:ext>
+            </a:extLst>
+          </p:cNvPr>
+          <p:cNvPicPr/>
+          <p:nvPr/>
+        </p:nvPicPr>
+        <p:blipFill>
+          <a:blip xmlns:r="http://schemas.openxmlformats.org/officeDocument/2006/relationships" xmlns:a="http://schemas.openxmlformats.org/drawingml/2006/main" r:embed="rIdOfficeKitImage7790b68b5d8fcd92_1"/>
+          <a:srcRect xmlns:a="http://schemas.openxmlformats.org/drawingml/2006/main" l="0" t="39904" r="0" b="39904"/>
+          <a:stretch xmlns:a="http://schemas.openxmlformats.org/drawingml/2006/main">
+            <a:fillRect/>
+          </a:stretch>
+        </p:blipFill>
+        <p:spPr>
+          <a:xfrm xmlns:a="http://schemas.openxmlformats.org/drawingml/2006/main">
             <a:off x="4895850" y="4686300"/>
             <a:ext cx="3714750" cy="1333500"/>
           </a:xfrm>
@@ -3340,7 +3439,7 @@
       </p:pic>
       <p:sp>
         <p:nvSpPr>
-          <p:cNvPr id="22" name="image-matrix-label"/>
+          <p:cNvPr id="23" name="image-matrix-label"/>
           <p:cNvSpPr txBox="1"/>
           <p:nvPr/>
         </p:nvSpPr>
@@ -3377,7 +3476,7 @@
       </p:sp>
       <p:sp>
         <p:nvSpPr>
-          <p:cNvPr id="23" name="image-matrix-title"/>
+          <p:cNvPr id="24" name="image-matrix-title"/>
           <p:cNvSpPr txBox="1"/>
           <p:nvPr/>
         </p:nvSpPr>
@@ -3414,7 +3513,7 @@
       </p:sp>
       <p:sp>
         <p:nvSpPr>
-          <p:cNvPr id="24" name="image-matrix-body"/>
+          <p:cNvPr id="25" name="image-matrix-body"/>
           <p:cNvSpPr txBox="1"/>
           <p:nvPr/>
         </p:nvSpPr>
@@ -3451,7 +3550,7 @@
       </p:sp>
       <p:sp>
         <p:nvSpPr>
-          <p:cNvPr id="25" name="source"/>
+          <p:cNvPr id="26" name="source"/>
           <p:cNvSpPr txBox="1"/>
           <p:nvPr/>
         </p:nvSpPr>
@@ -3488,7 +3587,7 @@
       </p:sp>
       <p:sp>
         <p:nvSpPr>
-          <p:cNvPr id="26" name="page-number"/>
+          <p:cNvPr id="27" name="page-number"/>
           <p:cNvSpPr txBox="1"/>
           <p:nvPr/>
         </p:nvSpPr>
@@ -3562,7 +3661,7 @@
           <p:nvPr/>
         </p:nvPicPr>
         <p:blipFill>
-          <a:blip xmlns:r="http://schemas.openxmlformats.org/officeDocument/2006/relationships" xmlns:a="http://schemas.openxmlformats.org/drawingml/2006/main" r:embed="rIdOfficeKitImageaeb6f74d36d260d0_1"/>
+          <a:blip xmlns:r="http://schemas.openxmlformats.org/officeDocument/2006/relationships" xmlns:a="http://schemas.openxmlformats.org/drawingml/2006/main" r:embed="rIdOfficeKitImage59ee3aa5202fd02f_1"/>
           <a:srcRect xmlns:a="http://schemas.openxmlformats.org/drawingml/2006/main" l="0" t="34180" r="0" b="34180"/>
           <a:stretch xmlns:a="http://schemas.openxmlformats.org/drawingml/2006/main">
             <a:fillRect/>
@@ -3622,7 +3721,7 @@
         </p:nvSpPr>
         <p:spPr>
           <a:xfrm xmlns:a="http://schemas.openxmlformats.org/drawingml/2006/main">
-            <a:off x="914400" y="2628900"/>
+            <a:off x="914400" y="1752600"/>
             <a:ext cx="1516380" cy="209550"/>
           </a:xfrm>
           <a:prstGeom xmlns:a="http://schemas.openxmlformats.org/drawingml/2006/main" prst="rect">
@@ -3658,7 +3757,7 @@
         </p:nvSpPr>
         <p:spPr>
           <a:xfrm xmlns:a="http://schemas.openxmlformats.org/drawingml/2006/main">
-            <a:off x="990600" y="2667000"/>
+            <a:off x="990600" y="1790700"/>
             <a:ext cx="1363980" cy="133350"/>
           </a:xfrm>
           <a:prstGeom xmlns:a="http://schemas.openxmlformats.org/drawingml/2006/main" prst="rect">
@@ -3696,7 +3795,7 @@
         </p:nvSpPr>
         <p:spPr>
           <a:xfrm xmlns:a="http://schemas.openxmlformats.org/drawingml/2006/main">
-            <a:off x="2487930" y="2628900"/>
+            <a:off x="2487930" y="1752600"/>
             <a:ext cx="1516380" cy="209550"/>
           </a:xfrm>
           <a:prstGeom xmlns:a="http://schemas.openxmlformats.org/drawingml/2006/main" prst="rect">
@@ -3732,7 +3831,7 @@
         </p:nvSpPr>
         <p:spPr>
           <a:xfrm xmlns:a="http://schemas.openxmlformats.org/drawingml/2006/main">
-            <a:off x="2564130" y="2667000"/>
+            <a:off x="2564130" y="1790700"/>
             <a:ext cx="1363980" cy="133350"/>
           </a:xfrm>
           <a:prstGeom xmlns:a="http://schemas.openxmlformats.org/drawingml/2006/main" prst="rect">
@@ -3770,7 +3869,7 @@
         </p:nvSpPr>
         <p:spPr>
           <a:xfrm xmlns:a="http://schemas.openxmlformats.org/drawingml/2006/main">
-            <a:off x="4061460" y="2628900"/>
+            <a:off x="4061460" y="1752600"/>
             <a:ext cx="1516380" cy="209550"/>
           </a:xfrm>
           <a:prstGeom xmlns:a="http://schemas.openxmlformats.org/drawingml/2006/main" prst="rect">
@@ -3806,7 +3905,7 @@
         </p:nvSpPr>
         <p:spPr>
           <a:xfrm xmlns:a="http://schemas.openxmlformats.org/drawingml/2006/main">
-            <a:off x="4137660" y="2667000"/>
+            <a:off x="4137660" y="1790700"/>
             <a:ext cx="1363980" cy="133350"/>
           </a:xfrm>
           <a:prstGeom xmlns:a="http://schemas.openxmlformats.org/drawingml/2006/main" prst="rect">
@@ -3844,7 +3943,7 @@
         </p:nvSpPr>
         <p:spPr>
           <a:xfrm xmlns:a="http://schemas.openxmlformats.org/drawingml/2006/main">
-            <a:off x="5634990" y="2628900"/>
+            <a:off x="5634990" y="1752600"/>
             <a:ext cx="1516380" cy="209550"/>
           </a:xfrm>
           <a:prstGeom xmlns:a="http://schemas.openxmlformats.org/drawingml/2006/main" prst="rect">
@@ -3880,7 +3979,7 @@
         </p:nvSpPr>
         <p:spPr>
           <a:xfrm xmlns:a="http://schemas.openxmlformats.org/drawingml/2006/main">
-            <a:off x="5711190" y="2667000"/>
+            <a:off x="5711190" y="1790700"/>
             <a:ext cx="1363980" cy="133350"/>
           </a:xfrm>
           <a:prstGeom xmlns:a="http://schemas.openxmlformats.org/drawingml/2006/main" prst="rect">
@@ -3918,7 +4017,7 @@
         </p:nvSpPr>
         <p:spPr>
           <a:xfrm xmlns:a="http://schemas.openxmlformats.org/drawingml/2006/main">
-            <a:off x="7208520" y="2628900"/>
+            <a:off x="7208520" y="1752600"/>
             <a:ext cx="1516380" cy="209550"/>
           </a:xfrm>
           <a:prstGeom xmlns:a="http://schemas.openxmlformats.org/drawingml/2006/main" prst="rect">
@@ -3954,7 +4053,7 @@
         </p:nvSpPr>
         <p:spPr>
           <a:xfrm xmlns:a="http://schemas.openxmlformats.org/drawingml/2006/main">
-            <a:off x="7284720" y="2667000"/>
+            <a:off x="7284720" y="1790700"/>
             <a:ext cx="1363980" cy="133350"/>
           </a:xfrm>
           <a:prstGeom xmlns:a="http://schemas.openxmlformats.org/drawingml/2006/main" prst="rect">
@@ -4415,7 +4514,7 @@
         </p:nvSpPr>
         <p:spPr>
           <a:xfrm xmlns:a="http://schemas.openxmlformats.org/drawingml/2006/main">
-            <a:off x="914400" y="2628900"/>
+            <a:off x="914400" y="1752600"/>
             <a:ext cx="1516380" cy="209550"/>
           </a:xfrm>
           <a:prstGeom xmlns:a="http://schemas.openxmlformats.org/drawingml/2006/main" prst="rect">
@@ -4451,7 +4550,7 @@
         </p:nvSpPr>
         <p:spPr>
           <a:xfrm xmlns:a="http://schemas.openxmlformats.org/drawingml/2006/main">
-            <a:off x="990600" y="2667000"/>
+            <a:off x="990600" y="1790700"/>
             <a:ext cx="1363980" cy="133350"/>
           </a:xfrm>
           <a:prstGeom xmlns:a="http://schemas.openxmlformats.org/drawingml/2006/main" prst="rect">
@@ -4489,7 +4588,7 @@
         </p:nvSpPr>
         <p:spPr>
           <a:xfrm xmlns:a="http://schemas.openxmlformats.org/drawingml/2006/main">
-            <a:off x="2487930" y="2628900"/>
+            <a:off x="2487930" y="1752600"/>
             <a:ext cx="1516380" cy="209550"/>
           </a:xfrm>
           <a:prstGeom xmlns:a="http://schemas.openxmlformats.org/drawingml/2006/main" prst="rect">
@@ -4525,7 +4624,7 @@
         </p:nvSpPr>
         <p:spPr>
           <a:xfrm xmlns:a="http://schemas.openxmlformats.org/drawingml/2006/main">
-            <a:off x="2564130" y="2667000"/>
+            <a:off x="2564130" y="1790700"/>
             <a:ext cx="1363980" cy="133350"/>
           </a:xfrm>
           <a:prstGeom xmlns:a="http://schemas.openxmlformats.org/drawingml/2006/main" prst="rect">
@@ -4563,7 +4662,7 @@
         </p:nvSpPr>
         <p:spPr>
           <a:xfrm xmlns:a="http://schemas.openxmlformats.org/drawingml/2006/main">
-            <a:off x="4061460" y="2628900"/>
+            <a:off x="4061460" y="1752600"/>
             <a:ext cx="1516380" cy="209550"/>
           </a:xfrm>
           <a:prstGeom xmlns:a="http://schemas.openxmlformats.org/drawingml/2006/main" prst="rect">
@@ -4599,7 +4698,7 @@
         </p:nvSpPr>
         <p:spPr>
           <a:xfrm xmlns:a="http://schemas.openxmlformats.org/drawingml/2006/main">
-            <a:off x="4137660" y="2667000"/>
+            <a:off x="4137660" y="1790700"/>
             <a:ext cx="1363980" cy="133350"/>
           </a:xfrm>
           <a:prstGeom xmlns:a="http://schemas.openxmlformats.org/drawingml/2006/main" prst="rect">
@@ -4637,7 +4736,7 @@
         </p:nvSpPr>
         <p:spPr>
           <a:xfrm xmlns:a="http://schemas.openxmlformats.org/drawingml/2006/main">
-            <a:off x="5634990" y="2628900"/>
+            <a:off x="5634990" y="1752600"/>
             <a:ext cx="1516380" cy="209550"/>
           </a:xfrm>
           <a:prstGeom xmlns:a="http://schemas.openxmlformats.org/drawingml/2006/main" prst="rect">
@@ -4673,7 +4772,7 @@
         </p:nvSpPr>
         <p:spPr>
           <a:xfrm xmlns:a="http://schemas.openxmlformats.org/drawingml/2006/main">
-            <a:off x="5711190" y="2667000"/>
+            <a:off x="5711190" y="1790700"/>
             <a:ext cx="1363980" cy="133350"/>
           </a:xfrm>
           <a:prstGeom xmlns:a="http://schemas.openxmlformats.org/drawingml/2006/main" prst="rect">
@@ -4711,7 +4810,7 @@
         </p:nvSpPr>
         <p:spPr>
           <a:xfrm xmlns:a="http://schemas.openxmlformats.org/drawingml/2006/main">
-            <a:off x="7208520" y="2628900"/>
+            <a:off x="7208520" y="1752600"/>
             <a:ext cx="1516380" cy="209550"/>
           </a:xfrm>
           <a:prstGeom xmlns:a="http://schemas.openxmlformats.org/drawingml/2006/main" prst="rect">
@@ -4747,7 +4846,7 @@
         </p:nvSpPr>
         <p:spPr>
           <a:xfrm xmlns:a="http://schemas.openxmlformats.org/drawingml/2006/main">
-            <a:off x="7284720" y="2667000"/>
+            <a:off x="7284720" y="1790700"/>
             <a:ext cx="1363980" cy="133350"/>
           </a:xfrm>
           <a:prstGeom xmlns:a="http://schemas.openxmlformats.org/drawingml/2006/main" prst="rect">
@@ -4777,16 +4876,83 @@
           </a:p>
         </p:txBody>
       </p:sp>
-      <p:sp>
-        <p:nvSpPr>
-          <p:cNvPr id="15" name="close-top-rule"/>
+      <p:pic>
+        <p:nvPicPr>
+          <p:cNvPr id="15" name="close-photo-band">
+            <a:extLst xmlns:a="http://schemas.openxmlformats.org/drawingml/2006/main">
+              <a:ext uri="{C183D7F6-B498-43B3-948B-1728B52AA6E4}">
+                <adec:decorative xmlns:adec="http://schemas.microsoft.com/office/drawing/2017/decorative" val="1"/>
+              </a:ext>
+            </a:extLst>
+          </p:cNvPr>
+          <p:cNvPicPr/>
+          <p:nvPr/>
+        </p:nvPicPr>
+        <p:blipFill>
+          <a:blip xmlns:r="http://schemas.openxmlformats.org/officeDocument/2006/relationships" xmlns:a="http://schemas.openxmlformats.org/drawingml/2006/main" r:embed="rIdOfficeKitImage13db13f70d7843cc_1"/>
+          <a:srcRect xmlns:a="http://schemas.openxmlformats.org/drawingml/2006/main" l="0" t="47258" r="0" b="47258"/>
+          <a:stretch xmlns:a="http://schemas.openxmlformats.org/drawingml/2006/main">
+            <a:fillRect/>
+          </a:stretch>
+        </p:blipFill>
+        <p:spPr>
+          <a:xfrm xmlns:a="http://schemas.openxmlformats.org/drawingml/2006/main" flipH="1">
+            <a:off x="0" y="0"/>
+            <a:ext cx="15240000" cy="1485900"/>
+          </a:xfrm>
+          <a:prstGeom xmlns:a="http://schemas.openxmlformats.org/drawingml/2006/main" prst="rect">
+            <a:avLst/>
+          </a:prstGeom>
+        </p:spPr>
+      </p:pic>
+      <p:sp>
+        <p:nvSpPr>
+          <p:cNvPr id="16" name="close-photo-scrim"/>
           <p:cNvSpPr/>
           <p:nvPr/>
         </p:nvSpPr>
         <p:spPr>
           <a:xfrm xmlns:a="http://schemas.openxmlformats.org/drawingml/2006/main">
-            <a:off x="838200" y="666750"/>
-            <a:ext cx="13563600" cy="0"/>
+            <a:off x="0" y="0"/>
+            <a:ext cx="15240000" cy="1485900"/>
+          </a:xfrm>
+          <a:prstGeom xmlns:a="http://schemas.openxmlformats.org/drawingml/2006/main" prst="rect">
+            <a:avLst/>
+          </a:prstGeom>
+          <a:solidFill xmlns:a="http://schemas.openxmlformats.org/drawingml/2006/main">
+            <a:srgbClr val="F2F0EA">
+              <a:alpha val="62000"/>
+            </a:srgbClr>
+          </a:solidFill>
+          <a:ln xmlns:a="http://schemas.openxmlformats.org/drawingml/2006/main" w="0">
+            <a:solidFill>
+              <a:srgbClr val="F2F0EA"/>
+            </a:solidFill>
+            <a:prstDash val="solid"/>
+          </a:ln>
+        </p:spPr>
+        <p:txBody>
+          <a:bodyPr xmlns:a="http://schemas.openxmlformats.org/drawingml/2006/main" wrap="square" lIns="0" tIns="0" rIns="0" bIns="0" anchor="t"/>
+          <a:lstStyle xmlns:a="http://schemas.openxmlformats.org/drawingml/2006/main"/>
+          <a:p xmlns:a="http://schemas.openxmlformats.org/drawingml/2006/main">
+            <a:r>
+              <a:rPr lang="en-US"/>
+              <a:t/>
+            </a:r>
+            <a:endParaRPr lang="en-US"/>
+          </a:p>
+        </p:txBody>
+      </p:sp>
+      <p:sp>
+        <p:nvSpPr>
+          <p:cNvPr id="17" name="close-photo-rule"/>
+          <p:cNvSpPr/>
+          <p:nvPr/>
+        </p:nvSpPr>
+        <p:spPr>
+          <a:xfrm xmlns:a="http://schemas.openxmlformats.org/drawingml/2006/main">
+            <a:off x="914400" y="1438275"/>
+            <a:ext cx="13411200" cy="0"/>
           </a:xfrm>
           <a:prstGeom xmlns:a="http://schemas.openxmlformats.org/drawingml/2006/main" prst="line">
             <a:avLst/>
@@ -4813,29 +4979,29 @@
       </p:sp>
       <p:sp>
         <p:nvSpPr>
-          <p:cNvPr id="16" name="NOIR FIELD PICTORIAL · CLOSE"/>
-          <p:cNvSpPr txBox="1"/>
-          <p:nvPr/>
-        </p:nvSpPr>
-        <p:spPr>
-          <a:xfrm xmlns:a="http://schemas.openxmlformats.org/drawingml/2006/main">
-            <a:off x="914400" y="895350"/>
-            <a:ext cx="7239000" cy="228600"/>
-          </a:xfrm>
-          <a:prstGeom xmlns:a="http://schemas.openxmlformats.org/drawingml/2006/main" prst="rect">
-            <a:avLst/>
-          </a:prstGeom>
-          <a:noFill xmlns:a="http://schemas.openxmlformats.org/drawingml/2006/main"/>
-          <a:ln xmlns:a="http://schemas.openxmlformats.org/drawingml/2006/main" w="0">
-            <a:noFill/>
-          </a:ln>
-        </p:spPr>
-        <p:txBody>
-          <a:bodyPr xmlns:a="http://schemas.openxmlformats.org/drawingml/2006/main" wrap="square" lIns="0" tIns="0" rIns="0" bIns="0" anchor="t"/>
-          <a:lstStyle xmlns:a="http://schemas.openxmlformats.org/drawingml/2006/main"/>
-          <a:p xmlns:a="http://schemas.openxmlformats.org/drawingml/2006/main">
-            <a:r>
-              <a:rPr lang="en-US" sz="1200" b="1">
+          <p:cNvPr id="18" name="NOIR FIELD PICTORIAL · CLOSE"/>
+          <p:cNvSpPr txBox="1"/>
+          <p:nvPr/>
+        </p:nvSpPr>
+        <p:spPr>
+          <a:xfrm xmlns:a="http://schemas.openxmlformats.org/drawingml/2006/main">
+            <a:off x="914400" y="228600"/>
+            <a:ext cx="9525000" cy="190500"/>
+          </a:xfrm>
+          <a:prstGeom xmlns:a="http://schemas.openxmlformats.org/drawingml/2006/main" prst="rect">
+            <a:avLst/>
+          </a:prstGeom>
+          <a:noFill xmlns:a="http://schemas.openxmlformats.org/drawingml/2006/main"/>
+          <a:ln xmlns:a="http://schemas.openxmlformats.org/drawingml/2006/main" w="0">
+            <a:noFill/>
+          </a:ln>
+        </p:spPr>
+        <p:txBody>
+          <a:bodyPr xmlns:a="http://schemas.openxmlformats.org/drawingml/2006/main" wrap="square" lIns="0" tIns="0" rIns="0" bIns="0" anchor="t"/>
+          <a:lstStyle xmlns:a="http://schemas.openxmlformats.org/drawingml/2006/main"/>
+          <a:p xmlns:a="http://schemas.openxmlformats.org/drawingml/2006/main">
+            <a:r>
+              <a:rPr lang="en-US" sz="1050" b="1">
                 <a:solidFill>
                   <a:srgbClr val="D53A45"/>
                 </a:solidFill>
@@ -4850,31 +5016,31 @@
       </p:sp>
       <p:sp>
         <p:nvSpPr>
-          <p:cNvPr id="17" name="close-title"/>
-          <p:cNvSpPr txBox="1"/>
-          <p:nvPr/>
-        </p:nvSpPr>
-        <p:spPr>
-          <a:xfrm xmlns:a="http://schemas.openxmlformats.org/drawingml/2006/main">
-            <a:off x="914400" y="1314450"/>
-            <a:ext cx="6286500" cy="552450"/>
-          </a:xfrm>
-          <a:prstGeom xmlns:a="http://schemas.openxmlformats.org/drawingml/2006/main" prst="rect">
-            <a:avLst/>
-          </a:prstGeom>
-          <a:noFill xmlns:a="http://schemas.openxmlformats.org/drawingml/2006/main"/>
-          <a:ln xmlns:a="http://schemas.openxmlformats.org/drawingml/2006/main" w="0">
-            <a:noFill/>
-          </a:ln>
-        </p:spPr>
-        <p:txBody>
-          <a:bodyPr xmlns:a="http://schemas.openxmlformats.org/drawingml/2006/main" wrap="square" lIns="0" tIns="0" rIns="0" bIns="0" anchor="t"/>
-          <a:lstStyle xmlns:a="http://schemas.openxmlformats.org/drawingml/2006/main"/>
-          <a:p xmlns:a="http://schemas.openxmlformats.org/drawingml/2006/main">
-            <a:r>
-              <a:rPr lang="en-US" sz="2850" b="1">
-                <a:solidFill>
-                  <a:srgbClr val="F2F0EA"/>
+          <p:cNvPr id="19" name="close-title"/>
+          <p:cNvSpPr txBox="1"/>
+          <p:nvPr/>
+        </p:nvSpPr>
+        <p:spPr>
+          <a:xfrm xmlns:a="http://schemas.openxmlformats.org/drawingml/2006/main">
+            <a:off x="914400" y="495300"/>
+            <a:ext cx="12001500" cy="457200"/>
+          </a:xfrm>
+          <a:prstGeom xmlns:a="http://schemas.openxmlformats.org/drawingml/2006/main" prst="rect">
+            <a:avLst/>
+          </a:prstGeom>
+          <a:noFill xmlns:a="http://schemas.openxmlformats.org/drawingml/2006/main"/>
+          <a:ln xmlns:a="http://schemas.openxmlformats.org/drawingml/2006/main" w="0">
+            <a:noFill/>
+          </a:ln>
+        </p:spPr>
+        <p:txBody>
+          <a:bodyPr xmlns:a="http://schemas.openxmlformats.org/drawingml/2006/main" wrap="square" lIns="0" tIns="0" rIns="0" bIns="0" anchor="t"/>
+          <a:lstStyle xmlns:a="http://schemas.openxmlformats.org/drawingml/2006/main"/>
+          <a:p xmlns:a="http://schemas.openxmlformats.org/drawingml/2006/main">
+            <a:r>
+              <a:rPr lang="en-US" sz="2550" b="1">
+                <a:solidFill>
+                  <a:srgbClr val="FFFFFF"/>
                 </a:solidFill>
                 <a:latin typeface="Inter"/>
                 <a:ea typeface="Inter"/>
@@ -4887,31 +5053,31 @@
       </p:sp>
       <p:sp>
         <p:nvSpPr>
-          <p:cNvPr id="18" name="close-basis"/>
-          <p:cNvSpPr txBox="1"/>
-          <p:nvPr/>
-        </p:nvSpPr>
-        <p:spPr>
-          <a:xfrm xmlns:a="http://schemas.openxmlformats.org/drawingml/2006/main">
-            <a:off x="952500" y="1981200"/>
-            <a:ext cx="6096000" cy="266700"/>
-          </a:xfrm>
-          <a:prstGeom xmlns:a="http://schemas.openxmlformats.org/drawingml/2006/main" prst="rect">
-            <a:avLst/>
-          </a:prstGeom>
-          <a:noFill xmlns:a="http://schemas.openxmlformats.org/drawingml/2006/main"/>
-          <a:ln xmlns:a="http://schemas.openxmlformats.org/drawingml/2006/main" w="0">
-            <a:noFill/>
-          </a:ln>
-        </p:spPr>
-        <p:txBody>
-          <a:bodyPr xmlns:a="http://schemas.openxmlformats.org/drawingml/2006/main" wrap="square" lIns="0" tIns="0" rIns="0" bIns="0" anchor="t"/>
-          <a:lstStyle xmlns:a="http://schemas.openxmlformats.org/drawingml/2006/main"/>
-          <a:p xmlns:a="http://schemas.openxmlformats.org/drawingml/2006/main">
-            <a:r>
-              <a:rPr lang="en-US" sz="1350">
-                <a:solidFill>
-                  <a:srgbClr val="7D7D7B"/>
+          <p:cNvPr id="20" name="close-basis"/>
+          <p:cNvSpPr txBox="1"/>
+          <p:nvPr/>
+        </p:nvSpPr>
+        <p:spPr>
+          <a:xfrm xmlns:a="http://schemas.openxmlformats.org/drawingml/2006/main">
+            <a:off x="952500" y="1066800"/>
+            <a:ext cx="11049000" cy="228600"/>
+          </a:xfrm>
+          <a:prstGeom xmlns:a="http://schemas.openxmlformats.org/drawingml/2006/main" prst="rect">
+            <a:avLst/>
+          </a:prstGeom>
+          <a:noFill xmlns:a="http://schemas.openxmlformats.org/drawingml/2006/main"/>
+          <a:ln xmlns:a="http://schemas.openxmlformats.org/drawingml/2006/main" w="0">
+            <a:noFill/>
+          </a:ln>
+        </p:spPr>
+        <p:txBody>
+          <a:bodyPr xmlns:a="http://schemas.openxmlformats.org/drawingml/2006/main" wrap="square" lIns="0" tIns="0" rIns="0" bIns="0" anchor="t"/>
+          <a:lstStyle xmlns:a="http://schemas.openxmlformats.org/drawingml/2006/main"/>
+          <a:p xmlns:a="http://schemas.openxmlformats.org/drawingml/2006/main">
+            <a:r>
+              <a:rPr lang="en-US" sz="1200">
+                <a:solidFill>
+                  <a:srgbClr val="F0F3F2"/>
                 </a:solidFill>
                 <a:latin typeface="Inter"/>
                 <a:ea typeface="Inter"/>
@@ -4924,41 +5090,7 @@
       </p:sp>
       <p:sp>
         <p:nvSpPr>
-          <p:cNvPr id="19" name="close-rule"/>
-          <p:cNvSpPr/>
-          <p:nvPr/>
-        </p:nvSpPr>
-        <p:spPr>
-          <a:xfrm xmlns:a="http://schemas.openxmlformats.org/drawingml/2006/main">
-            <a:off x="914400" y="2457450"/>
-            <a:ext cx="13411200" cy="0"/>
-          </a:xfrm>
-          <a:prstGeom xmlns:a="http://schemas.openxmlformats.org/drawingml/2006/main" prst="line">
-            <a:avLst/>
-          </a:prstGeom>
-          <a:noFill xmlns:a="http://schemas.openxmlformats.org/drawingml/2006/main"/>
-          <a:ln xmlns:a="http://schemas.openxmlformats.org/drawingml/2006/main" w="25400">
-            <a:solidFill>
-              <a:srgbClr val="7D7D7B"/>
-            </a:solidFill>
-            <a:prstDash val="solid"/>
-          </a:ln>
-        </p:spPr>
-        <p:txBody>
-          <a:bodyPr xmlns:a="http://schemas.openxmlformats.org/drawingml/2006/main" wrap="square" lIns="0" tIns="0" rIns="0" bIns="0" anchor="t"/>
-          <a:lstStyle xmlns:a="http://schemas.openxmlformats.org/drawingml/2006/main"/>
-          <a:p xmlns:a="http://schemas.openxmlformats.org/drawingml/2006/main">
-            <a:r>
-              <a:rPr lang="en-US"/>
-              <a:t/>
-            </a:r>
-            <a:endParaRPr lang="en-US"/>
-          </a:p>
-        </p:txBody>
-      </p:sp>
-      <p:sp>
-        <p:nvSpPr>
-          <p:cNvPr id="20" name="close-number-0"/>
+          <p:cNvPr id="21" name="close-number-0"/>
           <p:cNvSpPr txBox="1"/>
           <p:nvPr/>
         </p:nvSpPr>
@@ -4995,7 +5127,7 @@
       </p:sp>
       <p:sp>
         <p:nvSpPr>
-          <p:cNvPr id="21" name="close-row-rule-0"/>
+          <p:cNvPr id="22" name="close-row-rule-0"/>
           <p:cNvSpPr/>
           <p:nvPr/>
         </p:nvSpPr>
@@ -5029,7 +5161,7 @@
       </p:sp>
       <p:sp>
         <p:nvSpPr>
-          <p:cNvPr id="22" name="close-label-0"/>
+          <p:cNvPr id="23" name="close-label-0"/>
           <p:cNvSpPr txBox="1"/>
           <p:nvPr/>
         </p:nvSpPr>
@@ -5066,7 +5198,7 @@
       </p:sp>
       <p:sp>
         <p:nvSpPr>
-          <p:cNvPr id="23" name="close-text-0"/>
+          <p:cNvPr id="24" name="close-text-0"/>
           <p:cNvSpPr txBox="1"/>
           <p:nvPr/>
         </p:nvSpPr>
@@ -5103,7 +5235,7 @@
       </p:sp>
       <p:sp>
         <p:nvSpPr>
-          <p:cNvPr id="24" name="close-number-1"/>
+          <p:cNvPr id="25" name="close-number-1"/>
           <p:cNvSpPr txBox="1"/>
           <p:nvPr/>
         </p:nvSpPr>
@@ -5140,7 +5272,7 @@
       </p:sp>
       <p:sp>
         <p:nvSpPr>
-          <p:cNvPr id="25" name="close-row-rule-1"/>
+          <p:cNvPr id="26" name="close-row-rule-1"/>
           <p:cNvSpPr/>
           <p:nvPr/>
         </p:nvSpPr>
@@ -5174,7 +5306,7 @@
       </p:sp>
       <p:sp>
         <p:nvSpPr>
-          <p:cNvPr id="26" name="close-label-1"/>
+          <p:cNvPr id="27" name="close-label-1"/>
           <p:cNvSpPr txBox="1"/>
           <p:nvPr/>
         </p:nvSpPr>
@@ -5211,7 +5343,7 @@
       </p:sp>
       <p:sp>
         <p:nvSpPr>
-          <p:cNvPr id="27" name="close-text-1"/>
+          <p:cNvPr id="28" name="close-text-1"/>
           <p:cNvSpPr txBox="1"/>
           <p:nvPr/>
         </p:nvSpPr>
@@ -5248,7 +5380,7 @@
       </p:sp>
       <p:sp>
         <p:nvSpPr>
-          <p:cNvPr id="28" name="close-number-2"/>
+          <p:cNvPr id="29" name="close-number-2"/>
           <p:cNvSpPr txBox="1"/>
           <p:nvPr/>
         </p:nvSpPr>
@@ -5285,7 +5417,7 @@
       </p:sp>
       <p:sp>
         <p:nvSpPr>
-          <p:cNvPr id="29" name="close-row-rule-2"/>
+          <p:cNvPr id="30" name="close-row-rule-2"/>
           <p:cNvSpPr/>
           <p:nvPr/>
         </p:nvSpPr>
@@ -5319,7 +5451,7 @@
       </p:sp>
       <p:sp>
         <p:nvSpPr>
-          <p:cNvPr id="30" name="close-label-2"/>
+          <p:cNvPr id="31" name="close-label-2"/>
           <p:cNvSpPr txBox="1"/>
           <p:nvPr/>
         </p:nvSpPr>
@@ -5356,7 +5488,7 @@
       </p:sp>
       <p:sp>
         <p:nvSpPr>
-          <p:cNvPr id="31" name="close-text-2"/>
+          <p:cNvPr id="32" name="close-text-2"/>
           <p:cNvSpPr txBox="1"/>
           <p:nvPr/>
         </p:nvSpPr>
@@ -5393,7 +5525,7 @@
       </p:sp>
       <p:sp>
         <p:nvSpPr>
-          <p:cNvPr id="32" name="next-rule"/>
+          <p:cNvPr id="33" name="next-rule"/>
           <p:cNvSpPr/>
           <p:nvPr/>
         </p:nvSpPr>
@@ -5427,7 +5559,7 @@
       </p:sp>
       <p:sp>
         <p:nvSpPr>
-          <p:cNvPr id="33" name="next-label"/>
+          <p:cNvPr id="34" name="next-label"/>
           <p:cNvSpPr txBox="1"/>
           <p:nvPr/>
         </p:nvSpPr>
@@ -5464,7 +5596,7 @@
       </p:sp>
       <p:sp>
         <p:nvSpPr>
-          <p:cNvPr id="34" name="next-text"/>
+          <p:cNvPr id="35" name="next-text"/>
           <p:cNvSpPr txBox="1"/>
           <p:nvPr/>
         </p:nvSpPr>
@@ -5501,7 +5633,7 @@
       </p:sp>
       <p:sp>
         <p:nvSpPr>
-          <p:cNvPr id="35" name="next-foot"/>
+          <p:cNvPr id="36" name="next-foot"/>
           <p:cNvSpPr txBox="1"/>
           <p:nvPr/>
         </p:nvSpPr>
@@ -5538,7 +5670,7 @@
       </p:sp>
       <p:sp>
         <p:nvSpPr>
-          <p:cNvPr id="36" name="source"/>
+          <p:cNvPr id="37" name="source"/>
           <p:cNvSpPr txBox="1"/>
           <p:nvPr/>
         </p:nvSpPr>
@@ -5575,7 +5707,7 @@
       </p:sp>
       <p:sp>
         <p:nvSpPr>
-          <p:cNvPr id="37" name="page-number"/>
+          <p:cNvPr id="38" name="page-number"/>
           <p:cNvSpPr txBox="1"/>
           <p:nvPr/>
         </p:nvSpPr>

--- a/skills/presentation-template-library/skills/artifact-template-noir-field-pictorial/assets/reference.pptx
+++ b/skills/presentation-template-library/skills/artifact-template-noir-field-pictorial/assets/reference.pptx
@@ -573,8 +573,8 @@
           <p:nvPr/>
         </p:nvPicPr>
         <p:blipFill>
-          <a:blip xmlns:r="http://schemas.openxmlformats.org/officeDocument/2006/relationships" xmlns:a="http://schemas.openxmlformats.org/drawingml/2006/main" r:embed="rIdOfficeKitImage31956823b229fb66_1"/>
-          <a:srcRect xmlns:a="http://schemas.openxmlformats.org/drawingml/2006/main" l="0" t="34171" r="0" b="34171"/>
+          <a:blip xmlns:r="http://schemas.openxmlformats.org/officeDocument/2006/relationships" xmlns:a="http://schemas.openxmlformats.org/drawingml/2006/main" r:embed="rIdOfficeKitImagec237998db8bee20d_1"/>
+          <a:srcRect xmlns:a="http://schemas.openxmlformats.org/drawingml/2006/main" l="0" t="34170" r="0" b="34170"/>
           <a:stretch xmlns:a="http://schemas.openxmlformats.org/drawingml/2006/main">
             <a:fillRect/>
           </a:stretch>
@@ -1046,7 +1046,7 @@
           <p:nvPr/>
         </p:nvPicPr>
         <p:blipFill>
-          <a:blip xmlns:r="http://schemas.openxmlformats.org/officeDocument/2006/relationships" xmlns:a="http://schemas.openxmlformats.org/drawingml/2006/main" r:embed="rIdOfficeKitImage31956823b229fb66_1"/>
+          <a:blip xmlns:r="http://schemas.openxmlformats.org/officeDocument/2006/relationships" xmlns:a="http://schemas.openxmlformats.org/drawingml/2006/main" r:embed="rIdOfficeKitImagec237998db8bee20d_1"/>
           <a:srcRect xmlns:a="http://schemas.openxmlformats.org/drawingml/2006/main" l="0" t="47256" r="0" b="47256"/>
           <a:stretch xmlns:a="http://schemas.openxmlformats.org/drawingml/2006/main">
             <a:fillRect/>
@@ -1369,8 +1369,8 @@
           <p:nvPr/>
         </p:nvPicPr>
         <p:blipFill>
-          <a:blip xmlns:r="http://schemas.openxmlformats.org/officeDocument/2006/relationships" xmlns:a="http://schemas.openxmlformats.org/drawingml/2006/main" r:embed="rIdOfficeKitImage31956823b229fb66_1"/>
-          <a:srcRect xmlns:a="http://schemas.openxmlformats.org/drawingml/2006/main" l="0" t="31910" r="0" b="31910"/>
+          <a:blip xmlns:r="http://schemas.openxmlformats.org/officeDocument/2006/relationships" xmlns:a="http://schemas.openxmlformats.org/drawingml/2006/main" r:embed="rIdOfficeKitImagec237998db8bee20d_1"/>
+          <a:srcRect xmlns:a="http://schemas.openxmlformats.org/drawingml/2006/main" l="0" t="31908" r="0" b="31908"/>
           <a:stretch xmlns:a="http://schemas.openxmlformats.org/drawingml/2006/main">
             <a:fillRect/>
           </a:stretch>
@@ -1569,7 +1569,7 @@
           <p:nvPr/>
         </p:nvPicPr>
         <p:blipFill>
-          <a:blip xmlns:r="http://schemas.openxmlformats.org/officeDocument/2006/relationships" xmlns:a="http://schemas.openxmlformats.org/drawingml/2006/main" r:embed="rIdOfficeKitImagec7b73f8fac405495_1"/>
+          <a:blip xmlns:r="http://schemas.openxmlformats.org/officeDocument/2006/relationships" xmlns:a="http://schemas.openxmlformats.org/drawingml/2006/main" r:embed="rIdOfficeKitImage31956823b229fb66_1"/>
           <a:srcRect xmlns:a="http://schemas.openxmlformats.org/drawingml/2006/main" l="0" t="34171" r="0" b="34171"/>
           <a:stretch xmlns:a="http://schemas.openxmlformats.org/drawingml/2006/main">
             <a:fillRect/>
@@ -2042,7 +2042,7 @@
           <p:nvPr/>
         </p:nvPicPr>
         <p:blipFill>
-          <a:blip xmlns:r="http://schemas.openxmlformats.org/officeDocument/2006/relationships" xmlns:a="http://schemas.openxmlformats.org/drawingml/2006/main" r:embed="rIdOfficeKitImagec7b73f8fac405495_1"/>
+          <a:blip xmlns:r="http://schemas.openxmlformats.org/officeDocument/2006/relationships" xmlns:a="http://schemas.openxmlformats.org/drawingml/2006/main" r:embed="rIdOfficeKitImage31956823b229fb66_1"/>
           <a:srcRect xmlns:a="http://schemas.openxmlformats.org/drawingml/2006/main" l="0" t="47256" r="0" b="47256"/>
           <a:stretch xmlns:a="http://schemas.openxmlformats.org/drawingml/2006/main">
             <a:fillRect/>
@@ -2254,7 +2254,7 @@
           <p:nvPr/>
         </p:nvPicPr>
         <p:blipFill>
-          <a:blip xmlns:r="http://schemas.openxmlformats.org/officeDocument/2006/relationships" xmlns:a="http://schemas.openxmlformats.org/drawingml/2006/main" r:embed="rIdOfficeKitImagec7b73f8fac405495_1"/>
+          <a:blip xmlns:r="http://schemas.openxmlformats.org/officeDocument/2006/relationships" xmlns:a="http://schemas.openxmlformats.org/drawingml/2006/main" r:embed="rIdOfficeKitImage31956823b229fb66_1"/>
           <a:srcRect xmlns:a="http://schemas.openxmlformats.org/drawingml/2006/main" l="0" t="39320" r="0" b="39320"/>
           <a:stretch xmlns:a="http://schemas.openxmlformats.org/drawingml/2006/main">
             <a:fillRect/>
@@ -3151,7 +3151,7 @@
           <p:nvPr/>
         </p:nvPicPr>
         <p:blipFill>
-          <a:blip xmlns:r="http://schemas.openxmlformats.org/officeDocument/2006/relationships" xmlns:a="http://schemas.openxmlformats.org/drawingml/2006/main" r:embed="rIdOfficeKitImageaeb6f74d36d260d0_1"/>
+          <a:blip xmlns:r="http://schemas.openxmlformats.org/officeDocument/2006/relationships" xmlns:a="http://schemas.openxmlformats.org/drawingml/2006/main" r:embed="rIdOfficeKitImage59ee3aa5202fd02f_1"/>
           <a:srcRect xmlns:a="http://schemas.openxmlformats.org/drawingml/2006/main" l="0" t="47258" r="0" b="47258"/>
           <a:stretch xmlns:a="http://schemas.openxmlformats.org/drawingml/2006/main">
             <a:fillRect/>
@@ -3363,7 +3363,7 @@
           <p:nvPr/>
         </p:nvPicPr>
         <p:blipFill>
-          <a:blip xmlns:r="http://schemas.openxmlformats.org/officeDocument/2006/relationships" xmlns:a="http://schemas.openxmlformats.org/drawingml/2006/main" r:embed="rIdOfficeKitImageaeb6f74d36d260d0_1"/>
+          <a:blip xmlns:r="http://schemas.openxmlformats.org/officeDocument/2006/relationships" xmlns:a="http://schemas.openxmlformats.org/drawingml/2006/main" r:embed="rIdOfficeKitImage59ee3aa5202fd02f_1"/>
           <a:srcRect xmlns:a="http://schemas.openxmlformats.org/drawingml/2006/main" l="0" t="28365" r="0" b="28365"/>
           <a:stretch xmlns:a="http://schemas.openxmlformats.org/drawingml/2006/main">
             <a:fillRect/>
@@ -3392,14 +3392,14 @@
           <p:nvPr/>
         </p:nvPicPr>
         <p:blipFill>
-          <a:blip xmlns:r="http://schemas.openxmlformats.org/officeDocument/2006/relationships" xmlns:a="http://schemas.openxmlformats.org/drawingml/2006/main" r:embed="rIdOfficeKitImage13db13f70d7843cc_1"/>
+          <a:blip xmlns:r="http://schemas.openxmlformats.org/officeDocument/2006/relationships" xmlns:a="http://schemas.openxmlformats.org/drawingml/2006/main" r:embed="rIdOfficeKitImageaeb6f74d36d260d0_1"/>
           <a:srcRect xmlns:a="http://schemas.openxmlformats.org/drawingml/2006/main" l="0" t="39904" r="0" b="39904"/>
           <a:stretch xmlns:a="http://schemas.openxmlformats.org/drawingml/2006/main">
             <a:fillRect/>
           </a:stretch>
         </p:blipFill>
         <p:spPr>
-          <a:xfrm xmlns:a="http://schemas.openxmlformats.org/drawingml/2006/main" flipH="1">
+          <a:xfrm xmlns:a="http://schemas.openxmlformats.org/drawingml/2006/main">
             <a:off x="4895850" y="3162300"/>
             <a:ext cx="3714750" cy="1333500"/>
           </a:xfrm>
@@ -3421,14 +3421,14 @@
           <p:nvPr/>
         </p:nvPicPr>
         <p:blipFill>
-          <a:blip xmlns:r="http://schemas.openxmlformats.org/officeDocument/2006/relationships" xmlns:a="http://schemas.openxmlformats.org/drawingml/2006/main" r:embed="rIdOfficeKitImage7790b68b5d8fcd92_1"/>
+          <a:blip xmlns:r="http://schemas.openxmlformats.org/officeDocument/2006/relationships" xmlns:a="http://schemas.openxmlformats.org/drawingml/2006/main" r:embed="rIdOfficeKitImage13db13f70d7843cc_1"/>
           <a:srcRect xmlns:a="http://schemas.openxmlformats.org/drawingml/2006/main" l="0" t="39904" r="0" b="39904"/>
           <a:stretch xmlns:a="http://schemas.openxmlformats.org/drawingml/2006/main">
             <a:fillRect/>
           </a:stretch>
         </p:blipFill>
         <p:spPr>
-          <a:xfrm xmlns:a="http://schemas.openxmlformats.org/drawingml/2006/main">
+          <a:xfrm xmlns:a="http://schemas.openxmlformats.org/drawingml/2006/main" flipH="1">
             <a:off x="4895850" y="4686300"/>
             <a:ext cx="3714750" cy="1333500"/>
           </a:xfrm>
@@ -3661,8 +3661,8 @@
           <p:nvPr/>
         </p:nvPicPr>
         <p:blipFill>
-          <a:blip xmlns:r="http://schemas.openxmlformats.org/officeDocument/2006/relationships" xmlns:a="http://schemas.openxmlformats.org/drawingml/2006/main" r:embed="rIdOfficeKitImage59ee3aa5202fd02f_1"/>
-          <a:srcRect xmlns:a="http://schemas.openxmlformats.org/drawingml/2006/main" l="0" t="34180" r="0" b="34180"/>
+          <a:blip xmlns:r="http://schemas.openxmlformats.org/officeDocument/2006/relationships" xmlns:a="http://schemas.openxmlformats.org/drawingml/2006/main" r:embed="rIdOfficeKitImagec7b73f8fac405495_1"/>
+          <a:srcRect xmlns:a="http://schemas.openxmlformats.org/drawingml/2006/main" l="0" t="34171" r="0" b="34171"/>
           <a:stretch xmlns:a="http://schemas.openxmlformats.org/drawingml/2006/main">
             <a:fillRect/>
           </a:stretch>
@@ -4416,14 +4416,14 @@
           <p:nvPr/>
         </p:nvPicPr>
         <p:blipFill>
-          <a:blip xmlns:r="http://schemas.openxmlformats.org/officeDocument/2006/relationships" xmlns:a="http://schemas.openxmlformats.org/drawingml/2006/main" r:embed="rIdOfficeKitImage13db13f70d7843cc_1"/>
+          <a:blip xmlns:r="http://schemas.openxmlformats.org/officeDocument/2006/relationships" xmlns:a="http://schemas.openxmlformats.org/drawingml/2006/main" r:embed="rIdOfficeKitImageaeb6f74d36d260d0_1"/>
           <a:srcRect xmlns:a="http://schemas.openxmlformats.org/drawingml/2006/main" l="0" t="34180" r="0" b="34180"/>
           <a:stretch xmlns:a="http://schemas.openxmlformats.org/drawingml/2006/main">
             <a:fillRect/>
           </a:stretch>
         </p:blipFill>
         <p:spPr>
-          <a:xfrm xmlns:a="http://schemas.openxmlformats.org/drawingml/2006/main" flipH="1">
+          <a:xfrm xmlns:a="http://schemas.openxmlformats.org/drawingml/2006/main">
             <a:off x="0" y="0"/>
             <a:ext cx="15240000" cy="8572500"/>
           </a:xfrm>
@@ -4889,14 +4889,14 @@
           <p:nvPr/>
         </p:nvPicPr>
         <p:blipFill>
-          <a:blip xmlns:r="http://schemas.openxmlformats.org/officeDocument/2006/relationships" xmlns:a="http://schemas.openxmlformats.org/drawingml/2006/main" r:embed="rIdOfficeKitImage13db13f70d7843cc_1"/>
+          <a:blip xmlns:r="http://schemas.openxmlformats.org/officeDocument/2006/relationships" xmlns:a="http://schemas.openxmlformats.org/drawingml/2006/main" r:embed="rIdOfficeKitImageaeb6f74d36d260d0_1"/>
           <a:srcRect xmlns:a="http://schemas.openxmlformats.org/drawingml/2006/main" l="0" t="47258" r="0" b="47258"/>
           <a:stretch xmlns:a="http://schemas.openxmlformats.org/drawingml/2006/main">
             <a:fillRect/>
           </a:stretch>
         </p:blipFill>
         <p:spPr>
-          <a:xfrm xmlns:a="http://schemas.openxmlformats.org/drawingml/2006/main" flipH="1">
+          <a:xfrm xmlns:a="http://schemas.openxmlformats.org/drawingml/2006/main">
             <a:off x="0" y="0"/>
             <a:ext cx="15240000" cy="1485900"/>
           </a:xfrm>

--- a/skills/presentation-template-library/skills/artifact-template-noir-field-pictorial/assets/reference.pptx
+++ b/skills/presentation-template-library/skills/artifact-template-noir-field-pictorial/assets/reference.pptx
@@ -197,6 +197,16 @@
 <file path=ppt/slides/slide1.xml><?xml version="1.0" encoding="utf-8"?>
 <p:sld xmlns:p="http://schemas.openxmlformats.org/presentationml/2006/main">
   <p:cSld name="Opening claim">
+    <p:bg>
+      <p:bgPr>
+        <a:blipFill xmlns:a="http://schemas.openxmlformats.org/drawingml/2006/main">
+          <a:blip xmlns:r="http://schemas.openxmlformats.org/officeDocument/2006/relationships" r:embed="rIdOfficeKitImage7790b68b5d8fcd92_1"/>
+          <a:stretch>
+            <a:fillRect/>
+          </a:stretch>
+        </a:blipFill>
+      </p:bgPr>
+    </p:bg>
     <p:spTree>
       <p:nvGrpSpPr>
         <p:cNvPr id="1" name=""/>
@@ -211,38 +221,9 @@
           <a:chExt cx="0" cy="0"/>
         </a:xfrm>
       </p:grpSpPr>
-      <p:pic>
-        <p:nvPicPr>
-          <p:cNvPr id="2" name="editorial-cover-field">
-            <a:extLst xmlns:a="http://schemas.openxmlformats.org/drawingml/2006/main">
-              <a:ext uri="{C183D7F6-B498-43B3-948B-1728B52AA6E4}">
-                <adec:decorative xmlns:adec="http://schemas.microsoft.com/office/drawing/2017/decorative" val="1"/>
-              </a:ext>
-            </a:extLst>
-          </p:cNvPr>
-          <p:cNvPicPr/>
-          <p:nvPr/>
-        </p:nvPicPr>
-        <p:blipFill>
-          <a:blip xmlns:r="http://schemas.openxmlformats.org/officeDocument/2006/relationships" xmlns:a="http://schemas.openxmlformats.org/drawingml/2006/main" r:embed="rIdOfficeKitImage7790b68b5d8fcd92_1"/>
-          <a:srcRect xmlns:a="http://schemas.openxmlformats.org/drawingml/2006/main" l="0" t="34180" r="0" b="34180"/>
-          <a:stretch xmlns:a="http://schemas.openxmlformats.org/drawingml/2006/main">
-            <a:fillRect/>
-          </a:stretch>
-        </p:blipFill>
-        <p:spPr>
-          <a:xfrm xmlns:a="http://schemas.openxmlformats.org/drawingml/2006/main">
-            <a:off x="0" y="0"/>
-            <a:ext cx="15240000" cy="8572500"/>
-          </a:xfrm>
-          <a:prstGeom xmlns:a="http://schemas.openxmlformats.org/drawingml/2006/main" prst="rect">
-            <a:avLst/>
-          </a:prstGeom>
-        </p:spPr>
-      </p:pic>
-      <p:sp>
-        <p:nvSpPr>
-          <p:cNvPr id="3" name="editorial-cover-scrim"/>
+      <p:sp>
+        <p:nvSpPr>
+          <p:cNvPr id="2" name="editorial-cover-scrim"/>
           <p:cNvSpPr/>
           <p:nvPr/>
         </p:nvSpPr>
@@ -280,7 +261,7 @@
       </p:sp>
       <p:sp>
         <p:nvSpPr>
-          <p:cNvPr id="4" name="eyebrow"/>
+          <p:cNvPr id="3" name="eyebrow"/>
           <p:cNvSpPr txBox="1"/>
           <p:nvPr/>
         </p:nvSpPr>
@@ -317,7 +298,7 @@
       </p:sp>
       <p:sp>
         <p:nvSpPr>
-          <p:cNvPr id="5" name="cover-title"/>
+          <p:cNvPr id="4" name="cover-title"/>
           <p:cNvSpPr txBox="1"/>
           <p:nvPr/>
         </p:nvSpPr>
@@ -354,7 +335,7 @@
       </p:sp>
       <p:sp>
         <p:nvSpPr>
-          <p:cNvPr id="6" name="cover-subtitle"/>
+          <p:cNvPr id="5" name="cover-subtitle"/>
           <p:cNvSpPr txBox="1"/>
           <p:nvPr/>
         </p:nvSpPr>
@@ -391,7 +372,7 @@
       </p:sp>
       <p:sp>
         <p:nvSpPr>
-          <p:cNvPr id="7" name="cover-photo-rule"/>
+          <p:cNvPr id="6" name="cover-photo-rule"/>
           <p:cNvSpPr/>
           <p:nvPr/>
         </p:nvSpPr>
@@ -425,7 +406,7 @@
       </p:sp>
       <p:sp>
         <p:nvSpPr>
-          <p:cNvPr id="8" name="cover-thesis"/>
+          <p:cNvPr id="7" name="cover-thesis"/>
           <p:cNvSpPr txBox="1"/>
           <p:nvPr/>
         </p:nvSpPr>
@@ -462,7 +443,7 @@
       </p:sp>
       <p:sp>
         <p:nvSpPr>
-          <p:cNvPr id="9" name="cover-source"/>
+          <p:cNvPr id="8" name="cover-source"/>
           <p:cNvSpPr txBox="1"/>
           <p:nvPr/>
         </p:nvSpPr>
@@ -499,7 +480,7 @@
       </p:sp>
       <p:sp>
         <p:nvSpPr>
-          <p:cNvPr id="10" name="page-number"/>
+          <p:cNvPr id="9" name="page-number"/>
           <p:cNvSpPr txBox="1"/>
           <p:nvPr/>
         </p:nvSpPr>
@@ -546,6 +527,16 @@
 <file path=ppt/slides/slide2.xml><?xml version="1.0" encoding="utf-8"?>
 <p:sld xmlns:p="http://schemas.openxmlformats.org/presentationml/2006/main">
   <p:cSld name="Argument">
+    <p:bg>
+      <p:bgPr>
+        <a:blipFill xmlns:a="http://schemas.openxmlformats.org/drawingml/2006/main">
+          <a:blip xmlns:r="http://schemas.openxmlformats.org/officeDocument/2006/relationships" r:embed="rIdOfficeKitImagec237998db8bee20d_1"/>
+          <a:stretch>
+            <a:fillRect/>
+          </a:stretch>
+        </a:blipFill>
+      </p:bgPr>
+    </p:bg>
     <p:spTree>
       <p:nvGrpSpPr>
         <p:cNvPr id="1" name=""/>
@@ -560,38 +551,9 @@
           <a:chExt cx="0" cy="0"/>
         </a:xfrm>
       </p:grpSpPr>
-      <p:pic>
-        <p:nvPicPr>
-          <p:cNvPr id="2" name="argument-visual-field">
-            <a:extLst xmlns:a="http://schemas.openxmlformats.org/drawingml/2006/main">
-              <a:ext uri="{C183D7F6-B498-43B3-948B-1728B52AA6E4}">
-                <adec:decorative xmlns:adec="http://schemas.microsoft.com/office/drawing/2017/decorative" val="1"/>
-              </a:ext>
-            </a:extLst>
-          </p:cNvPr>
-          <p:cNvPicPr/>
-          <p:nvPr/>
-        </p:nvPicPr>
-        <p:blipFill>
-          <a:blip xmlns:r="http://schemas.openxmlformats.org/officeDocument/2006/relationships" xmlns:a="http://schemas.openxmlformats.org/drawingml/2006/main" r:embed="rIdOfficeKitImagec237998db8bee20d_1"/>
-          <a:srcRect xmlns:a="http://schemas.openxmlformats.org/drawingml/2006/main" l="0" t="34170" r="0" b="34170"/>
-          <a:stretch xmlns:a="http://schemas.openxmlformats.org/drawingml/2006/main">
-            <a:fillRect/>
-          </a:stretch>
-        </p:blipFill>
-        <p:spPr>
-          <a:xfrm xmlns:a="http://schemas.openxmlformats.org/drawingml/2006/main">
-            <a:off x="0" y="0"/>
-            <a:ext cx="15240000" cy="8572500"/>
-          </a:xfrm>
-          <a:prstGeom xmlns:a="http://schemas.openxmlformats.org/drawingml/2006/main" prst="rect">
-            <a:avLst/>
-          </a:prstGeom>
-        </p:spPr>
-      </p:pic>
-      <p:sp>
-        <p:nvSpPr>
-          <p:cNvPr id="3" name="argument-paper-scrim"/>
+      <p:sp>
+        <p:nvSpPr>
+          <p:cNvPr id="2" name="argument-paper-scrim"/>
           <p:cNvSpPr/>
           <p:nvPr/>
         </p:nvSpPr>
@@ -629,7 +591,7 @@
       </p:sp>
       <p:sp>
         <p:nvSpPr>
-          <p:cNvPr id="4" name="fixed-rail"/>
+          <p:cNvPr id="3" name="fixed-rail"/>
           <p:cNvSpPr/>
           <p:nvPr/>
         </p:nvSpPr>
@@ -665,7 +627,7 @@
       </p:sp>
       <p:sp>
         <p:nvSpPr>
-          <p:cNvPr id="5" name="fixed-nav-0"/>
+          <p:cNvPr id="4" name="fixed-nav-0"/>
           <p:cNvSpPr/>
           <p:nvPr/>
         </p:nvSpPr>
@@ -701,7 +663,7 @@
       </p:sp>
       <p:sp>
         <p:nvSpPr>
-          <p:cNvPr id="6" name="fixed-nav-label-0"/>
+          <p:cNvPr id="5" name="fixed-nav-label-0"/>
           <p:cNvSpPr txBox="1"/>
           <p:nvPr/>
         </p:nvSpPr>
@@ -739,7 +701,7 @@
       </p:sp>
       <p:sp>
         <p:nvSpPr>
-          <p:cNvPr id="7" name="fixed-nav-1"/>
+          <p:cNvPr id="6" name="fixed-nav-1"/>
           <p:cNvSpPr/>
           <p:nvPr/>
         </p:nvSpPr>
@@ -775,7 +737,7 @@
       </p:sp>
       <p:sp>
         <p:nvSpPr>
-          <p:cNvPr id="8" name="fixed-nav-label-1"/>
+          <p:cNvPr id="7" name="fixed-nav-label-1"/>
           <p:cNvSpPr txBox="1"/>
           <p:nvPr/>
         </p:nvSpPr>
@@ -813,7 +775,7 @@
       </p:sp>
       <p:sp>
         <p:nvSpPr>
-          <p:cNvPr id="9" name="fixed-nav-2"/>
+          <p:cNvPr id="8" name="fixed-nav-2"/>
           <p:cNvSpPr/>
           <p:nvPr/>
         </p:nvSpPr>
@@ -849,7 +811,7 @@
       </p:sp>
       <p:sp>
         <p:nvSpPr>
-          <p:cNvPr id="10" name="fixed-nav-label-2"/>
+          <p:cNvPr id="9" name="fixed-nav-label-2"/>
           <p:cNvSpPr txBox="1"/>
           <p:nvPr/>
         </p:nvSpPr>
@@ -887,7 +849,7 @@
       </p:sp>
       <p:sp>
         <p:nvSpPr>
-          <p:cNvPr id="11" name="fixed-nav-3"/>
+          <p:cNvPr id="10" name="fixed-nav-3"/>
           <p:cNvSpPr/>
           <p:nvPr/>
         </p:nvSpPr>
@@ -923,7 +885,7 @@
       </p:sp>
       <p:sp>
         <p:nvSpPr>
-          <p:cNvPr id="12" name="fixed-nav-label-3"/>
+          <p:cNvPr id="11" name="fixed-nav-label-3"/>
           <p:cNvSpPr txBox="1"/>
           <p:nvPr/>
         </p:nvSpPr>
@@ -961,7 +923,7 @@
       </p:sp>
       <p:sp>
         <p:nvSpPr>
-          <p:cNvPr id="13" name="fixed-nav-4"/>
+          <p:cNvPr id="12" name="fixed-nav-4"/>
           <p:cNvSpPr/>
           <p:nvPr/>
         </p:nvSpPr>
@@ -997,7 +959,7 @@
       </p:sp>
       <p:sp>
         <p:nvSpPr>
-          <p:cNvPr id="14" name="fixed-nav-label-4"/>
+          <p:cNvPr id="13" name="fixed-nav-label-4"/>
           <p:cNvSpPr txBox="1"/>
           <p:nvPr/>
         </p:nvSpPr>
@@ -1035,7 +997,7 @@
       </p:sp>
       <p:pic>
         <p:nvPicPr>
-          <p:cNvPr id="15" name="argument-photo-band">
+          <p:cNvPr id="14" name="argument-photo-band">
             <a:extLst xmlns:a="http://schemas.openxmlformats.org/drawingml/2006/main">
               <a:ext uri="{C183D7F6-B498-43B3-948B-1728B52AA6E4}">
                 <adec:decorative xmlns:adec="http://schemas.microsoft.com/office/drawing/2017/decorative" val="1"/>
@@ -1064,7 +1026,7 @@
       </p:pic>
       <p:sp>
         <p:nvSpPr>
-          <p:cNvPr id="16" name="argument-photo-scrim"/>
+          <p:cNvPr id="15" name="argument-photo-scrim"/>
           <p:cNvSpPr/>
           <p:nvPr/>
         </p:nvSpPr>
@@ -1102,7 +1064,7 @@
       </p:sp>
       <p:sp>
         <p:nvSpPr>
-          <p:cNvPr id="17" name="argument-photo-rule"/>
+          <p:cNvPr id="16" name="argument-photo-rule"/>
           <p:cNvSpPr/>
           <p:nvPr/>
         </p:nvSpPr>
@@ -1136,7 +1098,7 @@
       </p:sp>
       <p:sp>
         <p:nvSpPr>
-          <p:cNvPr id="18" name="NOIR FIELD PICTORIAL · ARGUMENT"/>
+          <p:cNvPr id="17" name="NOIR FIELD PICTORIAL · ARGUMENT"/>
           <p:cNvSpPr txBox="1"/>
           <p:nvPr/>
         </p:nvSpPr>
@@ -1173,7 +1135,7 @@
       </p:sp>
       <p:sp>
         <p:nvSpPr>
-          <p:cNvPr id="19" name="argument-title"/>
+          <p:cNvPr id="18" name="argument-title"/>
           <p:cNvSpPr txBox="1"/>
           <p:nvPr/>
         </p:nvSpPr>
@@ -1210,7 +1172,7 @@
       </p:sp>
       <p:sp>
         <p:nvSpPr>
-          <p:cNvPr id="20" name="argument-basis"/>
+          <p:cNvPr id="19" name="argument-basis"/>
           <p:cNvSpPr txBox="1"/>
           <p:nvPr/>
         </p:nvSpPr>
@@ -1247,7 +1209,7 @@
       </p:sp>
       <p:sp>
         <p:nvSpPr>
-          <p:cNvPr id="21" name="promotion-kicker"/>
+          <p:cNvPr id="20" name="promotion-kicker"/>
           <p:cNvSpPr txBox="1"/>
           <p:nvPr/>
         </p:nvSpPr>
@@ -1284,7 +1246,7 @@
       </p:sp>
       <p:sp>
         <p:nvSpPr>
-          <p:cNvPr id="22" name="promotion-headline"/>
+          <p:cNvPr id="21" name="promotion-headline"/>
           <p:cNvSpPr txBox="1"/>
           <p:nvPr/>
         </p:nvSpPr>
@@ -1321,7 +1283,7 @@
       </p:sp>
       <p:sp>
         <p:nvSpPr>
-          <p:cNvPr id="23" name="promotion-body"/>
+          <p:cNvPr id="22" name="promotion-body"/>
           <p:cNvSpPr txBox="1"/>
           <p:nvPr/>
         </p:nvSpPr>
@@ -1358,7 +1320,7 @@
       </p:sp>
       <p:pic>
         <p:nvPicPr>
-          <p:cNvPr id="24" name="promotion-hero-frame">
+          <p:cNvPr id="23" name="promotion-hero-frame">
             <a:extLst xmlns:a="http://schemas.openxmlformats.org/drawingml/2006/main">
               <a:ext uri="{C183D7F6-B498-43B3-948B-1728B52AA6E4}">
                 <adec:decorative xmlns:adec="http://schemas.microsoft.com/office/drawing/2017/decorative" val="1"/>
@@ -1387,7 +1349,7 @@
       </p:pic>
       <p:sp>
         <p:nvSpPr>
-          <p:cNvPr id="25" name="promotion-image-rule"/>
+          <p:cNvPr id="24" name="promotion-image-rule"/>
           <p:cNvSpPr/>
           <p:nvPr/>
         </p:nvSpPr>
@@ -1421,7 +1383,7 @@
       </p:sp>
       <p:sp>
         <p:nvSpPr>
-          <p:cNvPr id="26" name="promotion-image-label"/>
+          <p:cNvPr id="25" name="promotion-image-label"/>
           <p:cNvSpPr txBox="1"/>
           <p:nvPr/>
         </p:nvSpPr>
@@ -1458,7 +1420,7 @@
       </p:sp>
       <p:sp>
         <p:nvSpPr>
-          <p:cNvPr id="27" name="source"/>
+          <p:cNvPr id="26" name="source"/>
           <p:cNvSpPr txBox="1"/>
           <p:nvPr/>
         </p:nvSpPr>
@@ -1495,7 +1457,7 @@
       </p:sp>
       <p:sp>
         <p:nvSpPr>
-          <p:cNvPr id="28" name="page-number"/>
+          <p:cNvPr id="27" name="page-number"/>
           <p:cNvSpPr txBox="1"/>
           <p:nvPr/>
         </p:nvSpPr>
@@ -1542,6 +1504,16 @@
 <file path=ppt/slides/slide3.xml><?xml version="1.0" encoding="utf-8"?>
 <p:sld xmlns:p="http://schemas.openxmlformats.org/presentationml/2006/main">
   <p:cSld name="Evidence">
+    <p:bg>
+      <p:bgPr>
+        <a:blipFill xmlns:a="http://schemas.openxmlformats.org/drawingml/2006/main">
+          <a:blip xmlns:r="http://schemas.openxmlformats.org/officeDocument/2006/relationships" r:embed="rIdOfficeKitImage31956823b229fb66_1"/>
+          <a:stretch>
+            <a:fillRect/>
+          </a:stretch>
+        </a:blipFill>
+      </p:bgPr>
+    </p:bg>
     <p:spTree>
       <p:nvGrpSpPr>
         <p:cNvPr id="1" name=""/>
@@ -1556,38 +1528,9 @@
           <a:chExt cx="0" cy="0"/>
         </a:xfrm>
       </p:grpSpPr>
-      <p:pic>
-        <p:nvPicPr>
-          <p:cNvPr id="2" name="evidence-visual-field">
-            <a:extLst xmlns:a="http://schemas.openxmlformats.org/drawingml/2006/main">
-              <a:ext uri="{C183D7F6-B498-43B3-948B-1728B52AA6E4}">
-                <adec:decorative xmlns:adec="http://schemas.microsoft.com/office/drawing/2017/decorative" val="1"/>
-              </a:ext>
-            </a:extLst>
-          </p:cNvPr>
-          <p:cNvPicPr/>
-          <p:nvPr/>
-        </p:nvPicPr>
-        <p:blipFill>
-          <a:blip xmlns:r="http://schemas.openxmlformats.org/officeDocument/2006/relationships" xmlns:a="http://schemas.openxmlformats.org/drawingml/2006/main" r:embed="rIdOfficeKitImage31956823b229fb66_1"/>
-          <a:srcRect xmlns:a="http://schemas.openxmlformats.org/drawingml/2006/main" l="0" t="34171" r="0" b="34171"/>
-          <a:stretch xmlns:a="http://schemas.openxmlformats.org/drawingml/2006/main">
-            <a:fillRect/>
-          </a:stretch>
-        </p:blipFill>
-        <p:spPr>
-          <a:xfrm xmlns:a="http://schemas.openxmlformats.org/drawingml/2006/main">
-            <a:off x="0" y="0"/>
-            <a:ext cx="15240000" cy="8572500"/>
-          </a:xfrm>
-          <a:prstGeom xmlns:a="http://schemas.openxmlformats.org/drawingml/2006/main" prst="rect">
-            <a:avLst/>
-          </a:prstGeom>
-        </p:spPr>
-      </p:pic>
-      <p:sp>
-        <p:nvSpPr>
-          <p:cNvPr id="3" name="evidence-paper-scrim"/>
+      <p:sp>
+        <p:nvSpPr>
+          <p:cNvPr id="2" name="evidence-paper-scrim"/>
           <p:cNvSpPr/>
           <p:nvPr/>
         </p:nvSpPr>
@@ -1625,7 +1568,7 @@
       </p:sp>
       <p:sp>
         <p:nvSpPr>
-          <p:cNvPr id="4" name="fixed-rail"/>
+          <p:cNvPr id="3" name="fixed-rail"/>
           <p:cNvSpPr/>
           <p:nvPr/>
         </p:nvSpPr>
@@ -1661,7 +1604,7 @@
       </p:sp>
       <p:sp>
         <p:nvSpPr>
-          <p:cNvPr id="5" name="fixed-nav-0"/>
+          <p:cNvPr id="4" name="fixed-nav-0"/>
           <p:cNvSpPr/>
           <p:nvPr/>
         </p:nvSpPr>
@@ -1697,7 +1640,7 @@
       </p:sp>
       <p:sp>
         <p:nvSpPr>
-          <p:cNvPr id="6" name="fixed-nav-label-0"/>
+          <p:cNvPr id="5" name="fixed-nav-label-0"/>
           <p:cNvSpPr txBox="1"/>
           <p:nvPr/>
         </p:nvSpPr>
@@ -1735,7 +1678,7 @@
       </p:sp>
       <p:sp>
         <p:nvSpPr>
-          <p:cNvPr id="7" name="fixed-nav-1"/>
+          <p:cNvPr id="6" name="fixed-nav-1"/>
           <p:cNvSpPr/>
           <p:nvPr/>
         </p:nvSpPr>
@@ -1771,7 +1714,7 @@
       </p:sp>
       <p:sp>
         <p:nvSpPr>
-          <p:cNvPr id="8" name="fixed-nav-label-1"/>
+          <p:cNvPr id="7" name="fixed-nav-label-1"/>
           <p:cNvSpPr txBox="1"/>
           <p:nvPr/>
         </p:nvSpPr>
@@ -1809,7 +1752,7 @@
       </p:sp>
       <p:sp>
         <p:nvSpPr>
-          <p:cNvPr id="9" name="fixed-nav-2"/>
+          <p:cNvPr id="8" name="fixed-nav-2"/>
           <p:cNvSpPr/>
           <p:nvPr/>
         </p:nvSpPr>
@@ -1845,7 +1788,7 @@
       </p:sp>
       <p:sp>
         <p:nvSpPr>
-          <p:cNvPr id="10" name="fixed-nav-label-2"/>
+          <p:cNvPr id="9" name="fixed-nav-label-2"/>
           <p:cNvSpPr txBox="1"/>
           <p:nvPr/>
         </p:nvSpPr>
@@ -1883,7 +1826,7 @@
       </p:sp>
       <p:sp>
         <p:nvSpPr>
-          <p:cNvPr id="11" name="fixed-nav-3"/>
+          <p:cNvPr id="10" name="fixed-nav-3"/>
           <p:cNvSpPr/>
           <p:nvPr/>
         </p:nvSpPr>
@@ -1919,7 +1862,7 @@
       </p:sp>
       <p:sp>
         <p:nvSpPr>
-          <p:cNvPr id="12" name="fixed-nav-label-3"/>
+          <p:cNvPr id="11" name="fixed-nav-label-3"/>
           <p:cNvSpPr txBox="1"/>
           <p:nvPr/>
         </p:nvSpPr>
@@ -1957,7 +1900,7 @@
       </p:sp>
       <p:sp>
         <p:nvSpPr>
-          <p:cNvPr id="13" name="fixed-nav-4"/>
+          <p:cNvPr id="12" name="fixed-nav-4"/>
           <p:cNvSpPr/>
           <p:nvPr/>
         </p:nvSpPr>
@@ -1993,7 +1936,7 @@
       </p:sp>
       <p:sp>
         <p:nvSpPr>
-          <p:cNvPr id="14" name="fixed-nav-label-4"/>
+          <p:cNvPr id="13" name="fixed-nav-label-4"/>
           <p:cNvSpPr txBox="1"/>
           <p:nvPr/>
         </p:nvSpPr>
@@ -2031,7 +1974,7 @@
       </p:sp>
       <p:pic>
         <p:nvPicPr>
-          <p:cNvPr id="15" name="evidence-photo-band">
+          <p:cNvPr id="14" name="evidence-photo-band">
             <a:extLst xmlns:a="http://schemas.openxmlformats.org/drawingml/2006/main">
               <a:ext uri="{C183D7F6-B498-43B3-948B-1728B52AA6E4}">
                 <adec:decorative xmlns:adec="http://schemas.microsoft.com/office/drawing/2017/decorative" val="1"/>
@@ -2060,7 +2003,7 @@
       </p:pic>
       <p:sp>
         <p:nvSpPr>
-          <p:cNvPr id="16" name="evidence-photo-scrim"/>
+          <p:cNvPr id="15" name="evidence-photo-scrim"/>
           <p:cNvSpPr/>
           <p:nvPr/>
         </p:nvSpPr>
@@ -2098,7 +2041,7 @@
       </p:sp>
       <p:sp>
         <p:nvSpPr>
-          <p:cNvPr id="17" name="evidence-photo-rule"/>
+          <p:cNvPr id="16" name="evidence-photo-rule"/>
           <p:cNvSpPr/>
           <p:nvPr/>
         </p:nvSpPr>
@@ -2132,7 +2075,7 @@
       </p:sp>
       <p:sp>
         <p:nvSpPr>
-          <p:cNvPr id="18" name="NOIR FIELD PICTORIAL · EVIDENCE"/>
+          <p:cNvPr id="17" name="NOIR FIELD PICTORIAL · EVIDENCE"/>
           <p:cNvSpPr txBox="1"/>
           <p:nvPr/>
         </p:nvSpPr>
@@ -2169,7 +2112,7 @@
       </p:sp>
       <p:sp>
         <p:nvSpPr>
-          <p:cNvPr id="19" name="evidence-title"/>
+          <p:cNvPr id="18" name="evidence-title"/>
           <p:cNvSpPr txBox="1"/>
           <p:nvPr/>
         </p:nvSpPr>
@@ -2206,7 +2149,7 @@
       </p:sp>
       <p:sp>
         <p:nvSpPr>
-          <p:cNvPr id="20" name="evidence-basis"/>
+          <p:cNvPr id="19" name="evidence-basis"/>
           <p:cNvSpPr txBox="1"/>
           <p:nvPr/>
         </p:nvSpPr>
@@ -2243,7 +2186,7 @@
       </p:sp>
       <p:pic>
         <p:nvPicPr>
-          <p:cNvPr id="21" name="evidence-image-field">
+          <p:cNvPr id="20" name="evidence-image-field">
             <a:extLst xmlns:a="http://schemas.openxmlformats.org/drawingml/2006/main">
               <a:ext uri="{C183D7F6-B498-43B3-948B-1728B52AA6E4}">
                 <adec:decorative xmlns:adec="http://schemas.microsoft.com/office/drawing/2017/decorative" val="1"/>
@@ -2272,7 +2215,7 @@
       </p:pic>
       <p:sp>
         <p:nvSpPr>
-          <p:cNvPr id="22" name="evidence-image-caption"/>
+          <p:cNvPr id="21" name="evidence-image-caption"/>
           <p:cNvSpPr txBox="1"/>
           <p:nvPr/>
         </p:nvSpPr>
@@ -2309,7 +2252,7 @@
       </p:sp>
       <p:sp>
         <p:nvSpPr>
-          <p:cNvPr id="23" name="evidence-image-rule"/>
+          <p:cNvPr id="22" name="evidence-image-rule"/>
           <p:cNvSpPr/>
           <p:nvPr/>
         </p:nvSpPr>
@@ -2343,7 +2286,7 @@
       </p:sp>
       <p:sp>
         <p:nvSpPr>
-          <p:cNvPr id="24" name="evidence-image-note"/>
+          <p:cNvPr id="23" name="evidence-image-note"/>
           <p:cNvSpPr txBox="1"/>
           <p:nvPr/>
         </p:nvSpPr>
@@ -2380,7 +2323,7 @@
       </p:sp>
       <p:sp>
         <p:nvSpPr>
-          <p:cNvPr id="25" name="metric"/>
+          <p:cNvPr id="24" name="metric"/>
           <p:cNvSpPr txBox="1"/>
           <p:nvPr/>
         </p:nvSpPr>
@@ -2417,7 +2360,7 @@
       </p:sp>
       <p:sp>
         <p:nvSpPr>
-          <p:cNvPr id="26" name="metric-label"/>
+          <p:cNvPr id="25" name="metric-label"/>
           <p:cNvSpPr txBox="1"/>
           <p:nvPr/>
         </p:nvSpPr>
@@ -2454,7 +2397,7 @@
       </p:sp>
       <p:sp>
         <p:nvSpPr>
-          <p:cNvPr id="27" name="rail-rule"/>
+          <p:cNvPr id="26" name="rail-rule"/>
           <p:cNvSpPr/>
           <p:nvPr/>
         </p:nvSpPr>
@@ -2488,7 +2431,7 @@
       </p:sp>
       <p:sp>
         <p:nvSpPr>
-          <p:cNvPr id="28" name="read-through"/>
+          <p:cNvPr id="27" name="read-through"/>
           <p:cNvSpPr txBox="1"/>
           <p:nvPr/>
         </p:nvSpPr>
@@ -2525,7 +2468,7 @@
       </p:sp>
       <p:sp>
         <p:nvSpPr>
-          <p:cNvPr id="29" name="evidence-band"/>
+          <p:cNvPr id="28" name="evidence-band"/>
           <p:cNvSpPr/>
           <p:nvPr/>
         </p:nvSpPr>
@@ -2561,7 +2504,7 @@
       </p:sp>
       <p:sp>
         <p:nvSpPr>
-          <p:cNvPr id="30" name="evidence-band-text"/>
+          <p:cNvPr id="29" name="evidence-band-text"/>
           <p:cNvSpPr txBox="1"/>
           <p:nvPr/>
         </p:nvSpPr>
@@ -2598,7 +2541,7 @@
       </p:sp>
       <p:sp>
         <p:nvSpPr>
-          <p:cNvPr id="31" name="source"/>
+          <p:cNvPr id="30" name="source"/>
           <p:cNvSpPr txBox="1"/>
           <p:nvPr/>
         </p:nvSpPr>
@@ -2635,7 +2578,7 @@
       </p:sp>
       <p:sp>
         <p:nvSpPr>
-          <p:cNvPr id="32" name="page-number"/>
+          <p:cNvPr id="31" name="page-number"/>
           <p:cNvSpPr txBox="1"/>
           <p:nvPr/>
         </p:nvSpPr>
@@ -3634,6 +3577,16 @@
 <file path=ppt/slides/slide5.xml><?xml version="1.0" encoding="utf-8"?>
 <p:sld xmlns:p="http://schemas.openxmlformats.org/presentationml/2006/main">
   <p:cSld name="Visual carrier">
+    <p:bg>
+      <p:bgPr>
+        <a:blipFill xmlns:a="http://schemas.openxmlformats.org/drawingml/2006/main">
+          <a:blip xmlns:r="http://schemas.openxmlformats.org/officeDocument/2006/relationships" r:embed="rIdOfficeKitImagec7b73f8fac405495_1"/>
+          <a:stretch>
+            <a:fillRect/>
+          </a:stretch>
+        </a:blipFill>
+      </p:bgPr>
+    </p:bg>
     <p:spTree>
       <p:nvGrpSpPr>
         <p:cNvPr id="1" name=""/>
@@ -3648,38 +3601,9 @@
           <a:chExt cx="0" cy="0"/>
         </a:xfrm>
       </p:grpSpPr>
-      <p:pic>
-        <p:nvPicPr>
-          <p:cNvPr id="2" name="visual-field">
-            <a:extLst xmlns:a="http://schemas.openxmlformats.org/drawingml/2006/main">
-              <a:ext uri="{C183D7F6-B498-43B3-948B-1728B52AA6E4}">
-                <adec:decorative xmlns:adec="http://schemas.microsoft.com/office/drawing/2017/decorative" val="1"/>
-              </a:ext>
-            </a:extLst>
-          </p:cNvPr>
-          <p:cNvPicPr/>
-          <p:nvPr/>
-        </p:nvPicPr>
-        <p:blipFill>
-          <a:blip xmlns:r="http://schemas.openxmlformats.org/officeDocument/2006/relationships" xmlns:a="http://schemas.openxmlformats.org/drawingml/2006/main" r:embed="rIdOfficeKitImagec7b73f8fac405495_1"/>
-          <a:srcRect xmlns:a="http://schemas.openxmlformats.org/drawingml/2006/main" l="0" t="34171" r="0" b="34171"/>
-          <a:stretch xmlns:a="http://schemas.openxmlformats.org/drawingml/2006/main">
-            <a:fillRect/>
-          </a:stretch>
-        </p:blipFill>
-        <p:spPr>
-          <a:xfrm xmlns:a="http://schemas.openxmlformats.org/drawingml/2006/main">
-            <a:off x="0" y="0"/>
-            <a:ext cx="15240000" cy="8572500"/>
-          </a:xfrm>
-          <a:prstGeom xmlns:a="http://schemas.openxmlformats.org/drawingml/2006/main" prst="rect">
-            <a:avLst/>
-          </a:prstGeom>
-        </p:spPr>
-      </p:pic>
-      <p:sp>
-        <p:nvSpPr>
-          <p:cNvPr id="3" name="fixed-rail"/>
+      <p:sp>
+        <p:nvSpPr>
+          <p:cNvPr id="2" name="fixed-rail"/>
           <p:cNvSpPr/>
           <p:nvPr/>
         </p:nvSpPr>
@@ -3715,7 +3639,7 @@
       </p:sp>
       <p:sp>
         <p:nvSpPr>
-          <p:cNvPr id="4" name="fixed-nav-0"/>
+          <p:cNvPr id="3" name="fixed-nav-0"/>
           <p:cNvSpPr/>
           <p:nvPr/>
         </p:nvSpPr>
@@ -3751,7 +3675,7 @@
       </p:sp>
       <p:sp>
         <p:nvSpPr>
-          <p:cNvPr id="5" name="fixed-nav-label-0"/>
+          <p:cNvPr id="4" name="fixed-nav-label-0"/>
           <p:cNvSpPr txBox="1"/>
           <p:nvPr/>
         </p:nvSpPr>
@@ -3789,7 +3713,7 @@
       </p:sp>
       <p:sp>
         <p:nvSpPr>
-          <p:cNvPr id="6" name="fixed-nav-1"/>
+          <p:cNvPr id="5" name="fixed-nav-1"/>
           <p:cNvSpPr/>
           <p:nvPr/>
         </p:nvSpPr>
@@ -3825,7 +3749,7 @@
       </p:sp>
       <p:sp>
         <p:nvSpPr>
-          <p:cNvPr id="7" name="fixed-nav-label-1"/>
+          <p:cNvPr id="6" name="fixed-nav-label-1"/>
           <p:cNvSpPr txBox="1"/>
           <p:nvPr/>
         </p:nvSpPr>
@@ -3863,7 +3787,7 @@
       </p:sp>
       <p:sp>
         <p:nvSpPr>
-          <p:cNvPr id="8" name="fixed-nav-2"/>
+          <p:cNvPr id="7" name="fixed-nav-2"/>
           <p:cNvSpPr/>
           <p:nvPr/>
         </p:nvSpPr>
@@ -3899,7 +3823,7 @@
       </p:sp>
       <p:sp>
         <p:nvSpPr>
-          <p:cNvPr id="9" name="fixed-nav-label-2"/>
+          <p:cNvPr id="8" name="fixed-nav-label-2"/>
           <p:cNvSpPr txBox="1"/>
           <p:nvPr/>
         </p:nvSpPr>
@@ -3937,7 +3861,7 @@
       </p:sp>
       <p:sp>
         <p:nvSpPr>
-          <p:cNvPr id="10" name="fixed-nav-3"/>
+          <p:cNvPr id="9" name="fixed-nav-3"/>
           <p:cNvSpPr/>
           <p:nvPr/>
         </p:nvSpPr>
@@ -3973,7 +3897,7 @@
       </p:sp>
       <p:sp>
         <p:nvSpPr>
-          <p:cNvPr id="11" name="fixed-nav-label-3"/>
+          <p:cNvPr id="10" name="fixed-nav-label-3"/>
           <p:cNvSpPr txBox="1"/>
           <p:nvPr/>
         </p:nvSpPr>
@@ -4011,7 +3935,7 @@
       </p:sp>
       <p:sp>
         <p:nvSpPr>
-          <p:cNvPr id="12" name="fixed-nav-4"/>
+          <p:cNvPr id="11" name="fixed-nav-4"/>
           <p:cNvSpPr/>
           <p:nvPr/>
         </p:nvSpPr>
@@ -4047,7 +3971,7 @@
       </p:sp>
       <p:sp>
         <p:nvSpPr>
-          <p:cNvPr id="13" name="fixed-nav-label-4"/>
+          <p:cNvPr id="12" name="fixed-nav-label-4"/>
           <p:cNvSpPr txBox="1"/>
           <p:nvPr/>
         </p:nvSpPr>
@@ -4085,7 +4009,7 @@
       </p:sp>
       <p:sp>
         <p:nvSpPr>
-          <p:cNvPr id="14" name="visual-scrim"/>
+          <p:cNvPr id="13" name="visual-scrim"/>
           <p:cNvSpPr/>
           <p:nvPr/>
         </p:nvSpPr>
@@ -4123,7 +4047,7 @@
       </p:sp>
       <p:sp>
         <p:nvSpPr>
-          <p:cNvPr id="15" name="visual-eyebrow"/>
+          <p:cNvPr id="14" name="visual-eyebrow"/>
           <p:cNvSpPr txBox="1"/>
           <p:nvPr/>
         </p:nvSpPr>
@@ -4160,7 +4084,7 @@
       </p:sp>
       <p:sp>
         <p:nvSpPr>
-          <p:cNvPr id="16" name="visual-title"/>
+          <p:cNvPr id="15" name="visual-title"/>
           <p:cNvSpPr txBox="1"/>
           <p:nvPr/>
         </p:nvSpPr>
@@ -4197,7 +4121,7 @@
       </p:sp>
       <p:sp>
         <p:nvSpPr>
-          <p:cNvPr id="17" name="visual-body"/>
+          <p:cNvPr id="16" name="visual-body"/>
           <p:cNvSpPr txBox="1"/>
           <p:nvPr/>
         </p:nvSpPr>
@@ -4234,7 +4158,7 @@
       </p:sp>
       <p:sp>
         <p:nvSpPr>
-          <p:cNvPr id="18" name="visual-rule"/>
+          <p:cNvPr id="17" name="visual-rule"/>
           <p:cNvSpPr/>
           <p:nvPr/>
         </p:nvSpPr>
@@ -4268,7 +4192,7 @@
       </p:sp>
       <p:sp>
         <p:nvSpPr>
-          <p:cNvPr id="19" name="visual-label"/>
+          <p:cNvPr id="18" name="visual-label"/>
           <p:cNvSpPr txBox="1"/>
           <p:nvPr/>
         </p:nvSpPr>
@@ -4305,7 +4229,7 @@
       </p:sp>
       <p:sp>
         <p:nvSpPr>
-          <p:cNvPr id="20" name="source"/>
+          <p:cNvPr id="19" name="source"/>
           <p:cNvSpPr txBox="1"/>
           <p:nvPr/>
         </p:nvSpPr>
@@ -4342,7 +4266,7 @@
       </p:sp>
       <p:sp>
         <p:nvSpPr>
-          <p:cNvPr id="21" name="page-number"/>
+          <p:cNvPr id="20" name="page-number"/>
           <p:cNvSpPr txBox="1"/>
           <p:nvPr/>
         </p:nvSpPr>
@@ -4389,6 +4313,16 @@
 <file path=ppt/slides/slide6.xml><?xml version="1.0" encoding="utf-8"?>
 <p:sld xmlns:p="http://schemas.openxmlformats.org/presentationml/2006/main">
   <p:cSld name="Decision close">
+    <p:bg>
+      <p:bgPr>
+        <a:blipFill xmlns:a="http://schemas.openxmlformats.org/drawingml/2006/main">
+          <a:blip xmlns:r="http://schemas.openxmlformats.org/officeDocument/2006/relationships" r:embed="rIdOfficeKitImageaeb6f74d36d260d0_1"/>
+          <a:stretch>
+            <a:fillRect/>
+          </a:stretch>
+        </a:blipFill>
+      </p:bgPr>
+    </p:bg>
     <p:spTree>
       <p:nvGrpSpPr>
         <p:cNvPr id="1" name=""/>
@@ -4403,38 +4337,9 @@
           <a:chExt cx="0" cy="0"/>
         </a:xfrm>
       </p:grpSpPr>
-      <p:pic>
-        <p:nvPicPr>
-          <p:cNvPr id="2" name="close-visual-field">
-            <a:extLst xmlns:a="http://schemas.openxmlformats.org/drawingml/2006/main">
-              <a:ext uri="{C183D7F6-B498-43B3-948B-1728B52AA6E4}">
-                <adec:decorative xmlns:adec="http://schemas.microsoft.com/office/drawing/2017/decorative" val="1"/>
-              </a:ext>
-            </a:extLst>
-          </p:cNvPr>
-          <p:cNvPicPr/>
-          <p:nvPr/>
-        </p:nvPicPr>
-        <p:blipFill>
-          <a:blip xmlns:r="http://schemas.openxmlformats.org/officeDocument/2006/relationships" xmlns:a="http://schemas.openxmlformats.org/drawingml/2006/main" r:embed="rIdOfficeKitImageaeb6f74d36d260d0_1"/>
-          <a:srcRect xmlns:a="http://schemas.openxmlformats.org/drawingml/2006/main" l="0" t="34180" r="0" b="34180"/>
-          <a:stretch xmlns:a="http://schemas.openxmlformats.org/drawingml/2006/main">
-            <a:fillRect/>
-          </a:stretch>
-        </p:blipFill>
-        <p:spPr>
-          <a:xfrm xmlns:a="http://schemas.openxmlformats.org/drawingml/2006/main">
-            <a:off x="0" y="0"/>
-            <a:ext cx="15240000" cy="8572500"/>
-          </a:xfrm>
-          <a:prstGeom xmlns:a="http://schemas.openxmlformats.org/drawingml/2006/main" prst="rect">
-            <a:avLst/>
-          </a:prstGeom>
-        </p:spPr>
-      </p:pic>
-      <p:sp>
-        <p:nvSpPr>
-          <p:cNvPr id="3" name="close-paper-scrim"/>
+      <p:sp>
+        <p:nvSpPr>
+          <p:cNvPr id="2" name="close-paper-scrim"/>
           <p:cNvSpPr/>
           <p:nvPr/>
         </p:nvSpPr>
@@ -4472,7 +4377,7 @@
       </p:sp>
       <p:sp>
         <p:nvSpPr>
-          <p:cNvPr id="4" name="fixed-rail"/>
+          <p:cNvPr id="3" name="fixed-rail"/>
           <p:cNvSpPr/>
           <p:nvPr/>
         </p:nvSpPr>
@@ -4508,7 +4413,7 @@
       </p:sp>
       <p:sp>
         <p:nvSpPr>
-          <p:cNvPr id="5" name="fixed-nav-0"/>
+          <p:cNvPr id="4" name="fixed-nav-0"/>
           <p:cNvSpPr/>
           <p:nvPr/>
         </p:nvSpPr>
@@ -4544,7 +4449,7 @@
       </p:sp>
       <p:sp>
         <p:nvSpPr>
-          <p:cNvPr id="6" name="fixed-nav-label-0"/>
+          <p:cNvPr id="5" name="fixed-nav-label-0"/>
           <p:cNvSpPr txBox="1"/>
           <p:nvPr/>
         </p:nvSpPr>
@@ -4582,7 +4487,7 @@
       </p:sp>
       <p:sp>
         <p:nvSpPr>
-          <p:cNvPr id="7" name="fixed-nav-1"/>
+          <p:cNvPr id="6" name="fixed-nav-1"/>
           <p:cNvSpPr/>
           <p:nvPr/>
         </p:nvSpPr>
@@ -4618,7 +4523,7 @@
       </p:sp>
       <p:sp>
         <p:nvSpPr>
-          <p:cNvPr id="8" name="fixed-nav-label-1"/>
+          <p:cNvPr id="7" name="fixed-nav-label-1"/>
           <p:cNvSpPr txBox="1"/>
           <p:nvPr/>
         </p:nvSpPr>
@@ -4656,7 +4561,7 @@
       </p:sp>
       <p:sp>
         <p:nvSpPr>
-          <p:cNvPr id="9" name="fixed-nav-2"/>
+          <p:cNvPr id="8" name="fixed-nav-2"/>
           <p:cNvSpPr/>
           <p:nvPr/>
         </p:nvSpPr>
@@ -4692,7 +4597,7 @@
       </p:sp>
       <p:sp>
         <p:nvSpPr>
-          <p:cNvPr id="10" name="fixed-nav-label-2"/>
+          <p:cNvPr id="9" name="fixed-nav-label-2"/>
           <p:cNvSpPr txBox="1"/>
           <p:nvPr/>
         </p:nvSpPr>
@@ -4730,7 +4635,7 @@
       </p:sp>
       <p:sp>
         <p:nvSpPr>
-          <p:cNvPr id="11" name="fixed-nav-3"/>
+          <p:cNvPr id="10" name="fixed-nav-3"/>
           <p:cNvSpPr/>
           <p:nvPr/>
         </p:nvSpPr>
@@ -4766,7 +4671,7 @@
       </p:sp>
       <p:sp>
         <p:nvSpPr>
-          <p:cNvPr id="12" name="fixed-nav-label-3"/>
+          <p:cNvPr id="11" name="fixed-nav-label-3"/>
           <p:cNvSpPr txBox="1"/>
           <p:nvPr/>
         </p:nvSpPr>
@@ -4804,7 +4709,7 @@
       </p:sp>
       <p:sp>
         <p:nvSpPr>
-          <p:cNvPr id="13" name="fixed-nav-4"/>
+          <p:cNvPr id="12" name="fixed-nav-4"/>
           <p:cNvSpPr/>
           <p:nvPr/>
         </p:nvSpPr>
@@ -4840,7 +4745,7 @@
       </p:sp>
       <p:sp>
         <p:nvSpPr>
-          <p:cNvPr id="14" name="fixed-nav-label-4"/>
+          <p:cNvPr id="13" name="fixed-nav-label-4"/>
           <p:cNvSpPr txBox="1"/>
           <p:nvPr/>
         </p:nvSpPr>
@@ -4878,7 +4783,7 @@
       </p:sp>
       <p:pic>
         <p:nvPicPr>
-          <p:cNvPr id="15" name="close-photo-band">
+          <p:cNvPr id="14" name="close-photo-band">
             <a:extLst xmlns:a="http://schemas.openxmlformats.org/drawingml/2006/main">
               <a:ext uri="{C183D7F6-B498-43B3-948B-1728B52AA6E4}">
                 <adec:decorative xmlns:adec="http://schemas.microsoft.com/office/drawing/2017/decorative" val="1"/>
@@ -4907,7 +4812,7 @@
       </p:pic>
       <p:sp>
         <p:nvSpPr>
-          <p:cNvPr id="16" name="close-photo-scrim"/>
+          <p:cNvPr id="15" name="close-photo-scrim"/>
           <p:cNvSpPr/>
           <p:nvPr/>
         </p:nvSpPr>
@@ -4945,7 +4850,7 @@
       </p:sp>
       <p:sp>
         <p:nvSpPr>
-          <p:cNvPr id="17" name="close-photo-rule"/>
+          <p:cNvPr id="16" name="close-photo-rule"/>
           <p:cNvSpPr/>
           <p:nvPr/>
         </p:nvSpPr>
@@ -4979,7 +4884,7 @@
       </p:sp>
       <p:sp>
         <p:nvSpPr>
-          <p:cNvPr id="18" name="NOIR FIELD PICTORIAL · CLOSE"/>
+          <p:cNvPr id="17" name="NOIR FIELD PICTORIAL · CLOSE"/>
           <p:cNvSpPr txBox="1"/>
           <p:nvPr/>
         </p:nvSpPr>
@@ -5016,7 +4921,7 @@
       </p:sp>
       <p:sp>
         <p:nvSpPr>
-          <p:cNvPr id="19" name="close-title"/>
+          <p:cNvPr id="18" name="close-title"/>
           <p:cNvSpPr txBox="1"/>
           <p:nvPr/>
         </p:nvSpPr>
@@ -5053,7 +4958,7 @@
       </p:sp>
       <p:sp>
         <p:nvSpPr>
-          <p:cNvPr id="20" name="close-basis"/>
+          <p:cNvPr id="19" name="close-basis"/>
           <p:cNvSpPr txBox="1"/>
           <p:nvPr/>
         </p:nvSpPr>
@@ -5090,7 +4995,7 @@
       </p:sp>
       <p:sp>
         <p:nvSpPr>
-          <p:cNvPr id="21" name="close-number-0"/>
+          <p:cNvPr id="20" name="close-number-0"/>
           <p:cNvSpPr txBox="1"/>
           <p:nvPr/>
         </p:nvSpPr>
@@ -5127,7 +5032,7 @@
       </p:sp>
       <p:sp>
         <p:nvSpPr>
-          <p:cNvPr id="22" name="close-row-rule-0"/>
+          <p:cNvPr id="21" name="close-row-rule-0"/>
           <p:cNvSpPr/>
           <p:nvPr/>
         </p:nvSpPr>
@@ -5161,7 +5066,7 @@
       </p:sp>
       <p:sp>
         <p:nvSpPr>
-          <p:cNvPr id="23" name="close-label-0"/>
+          <p:cNvPr id="22" name="close-label-0"/>
           <p:cNvSpPr txBox="1"/>
           <p:nvPr/>
         </p:nvSpPr>
@@ -5198,7 +5103,7 @@
       </p:sp>
       <p:sp>
         <p:nvSpPr>
-          <p:cNvPr id="24" name="close-text-0"/>
+          <p:cNvPr id="23" name="close-text-0"/>
           <p:cNvSpPr txBox="1"/>
           <p:nvPr/>
         </p:nvSpPr>
@@ -5235,7 +5140,7 @@
       </p:sp>
       <p:sp>
         <p:nvSpPr>
-          <p:cNvPr id="25" name="close-number-1"/>
+          <p:cNvPr id="24" name="close-number-1"/>
           <p:cNvSpPr txBox="1"/>
           <p:nvPr/>
         </p:nvSpPr>
@@ -5272,7 +5177,7 @@
       </p:sp>
       <p:sp>
         <p:nvSpPr>
-          <p:cNvPr id="26" name="close-row-rule-1"/>
+          <p:cNvPr id="25" name="close-row-rule-1"/>
           <p:cNvSpPr/>
           <p:nvPr/>
         </p:nvSpPr>
@@ -5306,7 +5211,7 @@
       </p:sp>
       <p:sp>
         <p:nvSpPr>
-          <p:cNvPr id="27" name="close-label-1"/>
+          <p:cNvPr id="26" name="close-label-1"/>
           <p:cNvSpPr txBox="1"/>
           <p:nvPr/>
         </p:nvSpPr>
@@ -5343,7 +5248,7 @@
       </p:sp>
       <p:sp>
         <p:nvSpPr>
-          <p:cNvPr id="28" name="close-text-1"/>
+          <p:cNvPr id="27" name="close-text-1"/>
           <p:cNvSpPr txBox="1"/>
           <p:nvPr/>
         </p:nvSpPr>
@@ -5380,7 +5285,7 @@
       </p:sp>
       <p:sp>
         <p:nvSpPr>
-          <p:cNvPr id="29" name="close-number-2"/>
+          <p:cNvPr id="28" name="close-number-2"/>
           <p:cNvSpPr txBox="1"/>
           <p:nvPr/>
         </p:nvSpPr>
@@ -5417,7 +5322,7 @@
       </p:sp>
       <p:sp>
         <p:nvSpPr>
-          <p:cNvPr id="30" name="close-row-rule-2"/>
+          <p:cNvPr id="29" name="close-row-rule-2"/>
           <p:cNvSpPr/>
           <p:nvPr/>
         </p:nvSpPr>
@@ -5451,7 +5356,7 @@
       </p:sp>
       <p:sp>
         <p:nvSpPr>
-          <p:cNvPr id="31" name="close-label-2"/>
+          <p:cNvPr id="30" name="close-label-2"/>
           <p:cNvSpPr txBox="1"/>
           <p:nvPr/>
         </p:nvSpPr>
@@ -5488,7 +5393,7 @@
       </p:sp>
       <p:sp>
         <p:nvSpPr>
-          <p:cNvPr id="32" name="close-text-2"/>
+          <p:cNvPr id="31" name="close-text-2"/>
           <p:cNvSpPr txBox="1"/>
           <p:nvPr/>
         </p:nvSpPr>
@@ -5525,7 +5430,7 @@
       </p:sp>
       <p:sp>
         <p:nvSpPr>
-          <p:cNvPr id="33" name="next-rule"/>
+          <p:cNvPr id="32" name="next-rule"/>
           <p:cNvSpPr/>
           <p:nvPr/>
         </p:nvSpPr>
@@ -5559,7 +5464,7 @@
       </p:sp>
       <p:sp>
         <p:nvSpPr>
-          <p:cNvPr id="34" name="next-label"/>
+          <p:cNvPr id="33" name="next-label"/>
           <p:cNvSpPr txBox="1"/>
           <p:nvPr/>
         </p:nvSpPr>
@@ -5596,7 +5501,7 @@
       </p:sp>
       <p:sp>
         <p:nvSpPr>
-          <p:cNvPr id="35" name="next-text"/>
+          <p:cNvPr id="34" name="next-text"/>
           <p:cNvSpPr txBox="1"/>
           <p:nvPr/>
         </p:nvSpPr>
@@ -5633,7 +5538,7 @@
       </p:sp>
       <p:sp>
         <p:nvSpPr>
-          <p:cNvPr id="36" name="next-foot"/>
+          <p:cNvPr id="35" name="next-foot"/>
           <p:cNvSpPr txBox="1"/>
           <p:nvPr/>
         </p:nvSpPr>
@@ -5670,7 +5575,7 @@
       </p:sp>
       <p:sp>
         <p:nvSpPr>
-          <p:cNvPr id="37" name="source"/>
+          <p:cNvPr id="36" name="source"/>
           <p:cNvSpPr txBox="1"/>
           <p:nvPr/>
         </p:nvSpPr>
@@ -5707,7 +5612,7 @@
       </p:sp>
       <p:sp>
         <p:nvSpPr>
-          <p:cNvPr id="38" name="page-number"/>
+          <p:cNvPr id="37" name="page-number"/>
           <p:cNvSpPr txBox="1"/>
           <p:nvPr/>
         </p:nvSpPr>

--- a/skills/presentation-template-library/skills/artifact-template-noir-field-pictorial/assets/reference.pptx
+++ b/skills/presentation-template-library/skills/artifact-template-noir-field-pictorial/assets/reference.pptx
@@ -1008,8 +1008,8 @@
           <p:nvPr/>
         </p:nvPicPr>
         <p:blipFill>
-          <a:blip xmlns:r="http://schemas.openxmlformats.org/officeDocument/2006/relationships" xmlns:a="http://schemas.openxmlformats.org/drawingml/2006/main" r:embed="rIdOfficeKitImagec237998db8bee20d_1"/>
-          <a:srcRect xmlns:a="http://schemas.openxmlformats.org/drawingml/2006/main" l="0" t="47256" r="0" b="47256"/>
+          <a:blip xmlns:r="http://schemas.openxmlformats.org/officeDocument/2006/relationships" xmlns:a="http://schemas.openxmlformats.org/drawingml/2006/main" r:embed="rIdOfficeKitImaged71bfa074cda59bb_1"/>
+          <a:srcRect xmlns:a="http://schemas.openxmlformats.org/drawingml/2006/main" l="0" t="47258" r="0" b="47258"/>
           <a:stretch xmlns:a="http://schemas.openxmlformats.org/drawingml/2006/main">
             <a:fillRect/>
           </a:stretch>
@@ -1331,8 +1331,8 @@
           <p:nvPr/>
         </p:nvPicPr>
         <p:blipFill>
-          <a:blip xmlns:r="http://schemas.openxmlformats.org/officeDocument/2006/relationships" xmlns:a="http://schemas.openxmlformats.org/drawingml/2006/main" r:embed="rIdOfficeKitImagec237998db8bee20d_1"/>
-          <a:srcRect xmlns:a="http://schemas.openxmlformats.org/drawingml/2006/main" l="0" t="31908" r="0" b="31908"/>
+          <a:blip xmlns:r="http://schemas.openxmlformats.org/officeDocument/2006/relationships" xmlns:a="http://schemas.openxmlformats.org/drawingml/2006/main" r:embed="rIdOfficeKitImage8fbc298f8d1b7a3c_1"/>
+          <a:srcRect xmlns:a="http://schemas.openxmlformats.org/drawingml/2006/main" l="0" t="31920" r="0" b="31920"/>
           <a:stretch xmlns:a="http://schemas.openxmlformats.org/drawingml/2006/main">
             <a:fillRect/>
           </a:stretch>
@@ -1507,7 +1507,7 @@
     <p:bg>
       <p:bgPr>
         <a:blipFill xmlns:a="http://schemas.openxmlformats.org/drawingml/2006/main">
-          <a:blip xmlns:r="http://schemas.openxmlformats.org/officeDocument/2006/relationships" r:embed="rIdOfficeKitImage31956823b229fb66_1"/>
+          <a:blip xmlns:r="http://schemas.openxmlformats.org/officeDocument/2006/relationships" r:embed="rIdOfficeKitImage6af8c9b5dff6e3a3_1"/>
           <a:stretch>
             <a:fillRect/>
           </a:stretch>
@@ -1985,7 +1985,7 @@
           <p:nvPr/>
         </p:nvPicPr>
         <p:blipFill>
-          <a:blip xmlns:r="http://schemas.openxmlformats.org/officeDocument/2006/relationships" xmlns:a="http://schemas.openxmlformats.org/drawingml/2006/main" r:embed="rIdOfficeKitImage31956823b229fb66_1"/>
+          <a:blip xmlns:r="http://schemas.openxmlformats.org/officeDocument/2006/relationships" xmlns:a="http://schemas.openxmlformats.org/drawingml/2006/main" r:embed="rIdOfficeKitImage2930549abca3ae00_1"/>
           <a:srcRect xmlns:a="http://schemas.openxmlformats.org/drawingml/2006/main" l="0" t="47256" r="0" b="47256"/>
           <a:stretch xmlns:a="http://schemas.openxmlformats.org/drawingml/2006/main">
             <a:fillRect/>
@@ -2197,8 +2197,8 @@
           <p:nvPr/>
         </p:nvPicPr>
         <p:blipFill>
-          <a:blip xmlns:r="http://schemas.openxmlformats.org/officeDocument/2006/relationships" xmlns:a="http://schemas.openxmlformats.org/drawingml/2006/main" r:embed="rIdOfficeKitImage31956823b229fb66_1"/>
-          <a:srcRect xmlns:a="http://schemas.openxmlformats.org/drawingml/2006/main" l="0" t="39320" r="0" b="39320"/>
+          <a:blip xmlns:r="http://schemas.openxmlformats.org/officeDocument/2006/relationships" xmlns:a="http://schemas.openxmlformats.org/drawingml/2006/main" r:embed="rIdOfficeKitImage33b8c33a8fc3d613_1"/>
+          <a:srcRect xmlns:a="http://schemas.openxmlformats.org/drawingml/2006/main" l="0" t="39326" r="0" b="39326"/>
           <a:stretch xmlns:a="http://schemas.openxmlformats.org/drawingml/2006/main">
             <a:fillRect/>
           </a:stretch>
@@ -2453,14 +2453,40 @@
           <a:lstStyle xmlns:a="http://schemas.openxmlformats.org/drawingml/2006/main"/>
           <a:p xmlns:a="http://schemas.openxmlformats.org/drawingml/2006/main">
             <a:r>
-              <a:rPr lang="en-US" sz="1650" b="1">
+              <a:rPr lang="en-US" sz="1350" b="1">
                 <a:solidFill>
                   <a:srgbClr val="F2F0EA"/>
                 </a:solidFill>
                 <a:latin typeface="Inter"/>
                 <a:ea typeface="Inter"/>
               </a:rPr>
-              <a:t>Reach is useful only when the audience can see and take the next step.</a:t>
+              <a:t>Reach is useful only when the</a:t>
+            </a:r>
+            <a:endParaRPr lang="en-US"/>
+          </a:p>
+          <a:p xmlns:a="http://schemas.openxmlformats.org/drawingml/2006/main">
+            <a:r>
+              <a:rPr lang="en-US" sz="1350" b="1">
+                <a:solidFill>
+                  <a:srgbClr val="F2F0EA"/>
+                </a:solidFill>
+                <a:latin typeface="Inter"/>
+                <a:ea typeface="Inter"/>
+              </a:rPr>
+              <a:t>audience can see and take the</a:t>
+            </a:r>
+            <a:endParaRPr lang="en-US"/>
+          </a:p>
+          <a:p xmlns:a="http://schemas.openxmlformats.org/drawingml/2006/main">
+            <a:r>
+              <a:rPr lang="en-US" sz="1350" b="1">
+                <a:solidFill>
+                  <a:srgbClr val="F2F0EA"/>
+                </a:solidFill>
+                <a:latin typeface="Inter"/>
+                <a:ea typeface="Inter"/>
+              </a:rPr>
+              <a:t>next step.</a:t>
             </a:r>
             <a:endParaRPr lang="en-US"/>
           </a:p>
@@ -3094,8 +3120,8 @@
           <p:nvPr/>
         </p:nvPicPr>
         <p:blipFill>
-          <a:blip xmlns:r="http://schemas.openxmlformats.org/officeDocument/2006/relationships" xmlns:a="http://schemas.openxmlformats.org/drawingml/2006/main" r:embed="rIdOfficeKitImage59ee3aa5202fd02f_1"/>
-          <a:srcRect xmlns:a="http://schemas.openxmlformats.org/drawingml/2006/main" l="0" t="47258" r="0" b="47258"/>
+          <a:blip xmlns:r="http://schemas.openxmlformats.org/officeDocument/2006/relationships" xmlns:a="http://schemas.openxmlformats.org/drawingml/2006/main" r:embed="rIdOfficeKitImage31956823b229fb66_1"/>
+          <a:srcRect xmlns:a="http://schemas.openxmlformats.org/drawingml/2006/main" l="0" t="47256" r="0" b="47256"/>
           <a:stretch xmlns:a="http://schemas.openxmlformats.org/drawingml/2006/main">
             <a:fillRect/>
           </a:stretch>
@@ -3306,8 +3332,8 @@
           <p:nvPr/>
         </p:nvPicPr>
         <p:blipFill>
-          <a:blip xmlns:r="http://schemas.openxmlformats.org/officeDocument/2006/relationships" xmlns:a="http://schemas.openxmlformats.org/drawingml/2006/main" r:embed="rIdOfficeKitImage59ee3aa5202fd02f_1"/>
-          <a:srcRect xmlns:a="http://schemas.openxmlformats.org/drawingml/2006/main" l="0" t="28365" r="0" b="28365"/>
+          <a:blip xmlns:r="http://schemas.openxmlformats.org/officeDocument/2006/relationships" xmlns:a="http://schemas.openxmlformats.org/drawingml/2006/main" r:embed="rIdOfficeKitImagec7b73f8fac405495_1"/>
+          <a:srcRect xmlns:a="http://schemas.openxmlformats.org/drawingml/2006/main" l="0" t="31962" r="0" b="31962"/>
           <a:stretch xmlns:a="http://schemas.openxmlformats.org/drawingml/2006/main">
             <a:fillRect/>
           </a:stretch>
@@ -3315,7 +3341,7 @@
         <p:spPr>
           <a:xfrm xmlns:a="http://schemas.openxmlformats.org/drawingml/2006/main">
             <a:off x="990600" y="3162300"/>
-            <a:ext cx="3714750" cy="2857500"/>
+            <a:ext cx="3714750" cy="2381250"/>
           </a:xfrm>
           <a:prstGeom xmlns:a="http://schemas.openxmlformats.org/drawingml/2006/main" prst="rect">
             <a:avLst/>
@@ -3335,8 +3361,8 @@
           <p:nvPr/>
         </p:nvPicPr>
         <p:blipFill>
-          <a:blip xmlns:r="http://schemas.openxmlformats.org/officeDocument/2006/relationships" xmlns:a="http://schemas.openxmlformats.org/drawingml/2006/main" r:embed="rIdOfficeKitImageaeb6f74d36d260d0_1"/>
-          <a:srcRect xmlns:a="http://schemas.openxmlformats.org/drawingml/2006/main" l="0" t="39904" r="0" b="39904"/>
+          <a:blip xmlns:r="http://schemas.openxmlformats.org/officeDocument/2006/relationships" xmlns:a="http://schemas.openxmlformats.org/drawingml/2006/main" r:embed="rIdOfficeKitImage59ee3aa5202fd02f_1"/>
+          <a:srcRect xmlns:a="http://schemas.openxmlformats.org/drawingml/2006/main" l="0" t="32347" r="0" b="32347"/>
           <a:stretch xmlns:a="http://schemas.openxmlformats.org/drawingml/2006/main">
             <a:fillRect/>
           </a:stretch>
@@ -3344,7 +3370,7 @@
         <p:spPr>
           <a:xfrm xmlns:a="http://schemas.openxmlformats.org/drawingml/2006/main">
             <a:off x="4895850" y="3162300"/>
-            <a:ext cx="3714750" cy="1333500"/>
+            <a:ext cx="1790700" cy="1123950"/>
           </a:xfrm>
           <a:prstGeom xmlns:a="http://schemas.openxmlformats.org/drawingml/2006/main" prst="rect">
             <a:avLst/>
@@ -3364,25 +3390,83 @@
           <p:nvPr/>
         </p:nvPicPr>
         <p:blipFill>
-          <a:blip xmlns:r="http://schemas.openxmlformats.org/officeDocument/2006/relationships" xmlns:a="http://schemas.openxmlformats.org/drawingml/2006/main" r:embed="rIdOfficeKitImage13db13f70d7843cc_1"/>
-          <a:srcRect xmlns:a="http://schemas.openxmlformats.org/drawingml/2006/main" l="0" t="39904" r="0" b="39904"/>
+          <a:blip xmlns:r="http://schemas.openxmlformats.org/officeDocument/2006/relationships" xmlns:a="http://schemas.openxmlformats.org/drawingml/2006/main" r:embed="rIdOfficeKitImageaeb6f74d36d260d0_1"/>
+          <a:srcRect xmlns:a="http://schemas.openxmlformats.org/drawingml/2006/main" l="0" t="32347" r="0" b="32347"/>
           <a:stretch xmlns:a="http://schemas.openxmlformats.org/drawingml/2006/main">
             <a:fillRect/>
           </a:stretch>
         </p:blipFill>
         <p:spPr>
+          <a:xfrm xmlns:a="http://schemas.openxmlformats.org/drawingml/2006/main">
+            <a:off x="6858000" y="3162300"/>
+            <a:ext cx="1790700" cy="1123950"/>
+          </a:xfrm>
+          <a:prstGeom xmlns:a="http://schemas.openxmlformats.org/drawingml/2006/main" prst="rect">
+            <a:avLst/>
+          </a:prstGeom>
+        </p:spPr>
+      </p:pic>
+      <p:pic>
+        <p:nvPicPr>
+          <p:cNvPr id="23" name="image-evidence-3">
+            <a:extLst xmlns:a="http://schemas.openxmlformats.org/drawingml/2006/main">
+              <a:ext uri="{C183D7F6-B498-43B3-948B-1728B52AA6E4}">
+                <adec:decorative xmlns:adec="http://schemas.microsoft.com/office/drawing/2017/decorative" val="1"/>
+              </a:ext>
+            </a:extLst>
+          </p:cNvPr>
+          <p:cNvPicPr/>
+          <p:nvPr/>
+        </p:nvPicPr>
+        <p:blipFill>
+          <a:blip xmlns:r="http://schemas.openxmlformats.org/officeDocument/2006/relationships" xmlns:a="http://schemas.openxmlformats.org/drawingml/2006/main" r:embed="rIdOfficeKitImage13db13f70d7843cc_1"/>
+          <a:srcRect xmlns:a="http://schemas.openxmlformats.org/drawingml/2006/main" l="0" t="32347" r="0" b="32347"/>
+          <a:stretch xmlns:a="http://schemas.openxmlformats.org/drawingml/2006/main">
+            <a:fillRect/>
+          </a:stretch>
+        </p:blipFill>
+        <p:spPr>
           <a:xfrm xmlns:a="http://schemas.openxmlformats.org/drawingml/2006/main" flipH="1">
-            <a:off x="4895850" y="4686300"/>
-            <a:ext cx="3714750" cy="1333500"/>
+            <a:off x="4895850" y="4457700"/>
+            <a:ext cx="1790700" cy="1123950"/>
           </a:xfrm>
           <a:prstGeom xmlns:a="http://schemas.openxmlformats.org/drawingml/2006/main" prst="rect">
             <a:avLst/>
           </a:prstGeom>
         </p:spPr>
       </p:pic>
-      <p:sp>
-        <p:nvSpPr>
-          <p:cNvPr id="23" name="image-matrix-label"/>
+      <p:pic>
+        <p:nvPicPr>
+          <p:cNvPr id="24" name="image-evidence-4">
+            <a:extLst xmlns:a="http://schemas.openxmlformats.org/drawingml/2006/main">
+              <a:ext uri="{C183D7F6-B498-43B3-948B-1728B52AA6E4}">
+                <adec:decorative xmlns:adec="http://schemas.microsoft.com/office/drawing/2017/decorative" val="1"/>
+              </a:ext>
+            </a:extLst>
+          </p:cNvPr>
+          <p:cNvPicPr/>
+          <p:nvPr/>
+        </p:nvPicPr>
+        <p:blipFill>
+          <a:blip xmlns:r="http://schemas.openxmlformats.org/officeDocument/2006/relationships" xmlns:a="http://schemas.openxmlformats.org/drawingml/2006/main" r:embed="rIdOfficeKitImage7790b68b5d8fcd92_1"/>
+          <a:srcRect xmlns:a="http://schemas.openxmlformats.org/drawingml/2006/main" l="0" t="32347" r="0" b="32347"/>
+          <a:stretch xmlns:a="http://schemas.openxmlformats.org/drawingml/2006/main">
+            <a:fillRect/>
+          </a:stretch>
+        </p:blipFill>
+        <p:spPr>
+          <a:xfrm xmlns:a="http://schemas.openxmlformats.org/drawingml/2006/main">
+            <a:off x="6858000" y="4457700"/>
+            <a:ext cx="1790700" cy="1123950"/>
+          </a:xfrm>
+          <a:prstGeom xmlns:a="http://schemas.openxmlformats.org/drawingml/2006/main" prst="rect">
+            <a:avLst/>
+          </a:prstGeom>
+        </p:spPr>
+      </p:pic>
+      <p:sp>
+        <p:nvSpPr>
+          <p:cNvPr id="25" name="image-matrix-label"/>
           <p:cNvSpPr txBox="1"/>
           <p:nvPr/>
         </p:nvSpPr>
@@ -3419,7 +3503,7 @@
       </p:sp>
       <p:sp>
         <p:nvSpPr>
-          <p:cNvPr id="24" name="image-matrix-title"/>
+          <p:cNvPr id="26" name="image-matrix-title"/>
           <p:cNvSpPr txBox="1"/>
           <p:nvPr/>
         </p:nvSpPr>
@@ -3448,52 +3532,78 @@
                 <a:latin typeface="Inter"/>
                 <a:ea typeface="Inter"/>
               </a:rPr>
-              <a:t>One subject, three ways to notice it.</a:t>
-            </a:r>
-            <a:endParaRPr lang="en-US"/>
-          </a:p>
-        </p:txBody>
-      </p:sp>
-      <p:sp>
-        <p:nvSpPr>
-          <p:cNvPr id="25" name="image-matrix-body"/>
+              <a:t>One subject, five ways to notice it.</a:t>
+            </a:r>
+            <a:endParaRPr lang="en-US"/>
+          </a:p>
+        </p:txBody>
+      </p:sp>
+      <p:sp>
+        <p:nvSpPr>
+          <p:cNvPr id="27" name="image-matrix-body"/>
           <p:cNvSpPr txBox="1"/>
           <p:nvPr/>
         </p:nvSpPr>
         <p:spPr>
           <a:xfrm xmlns:a="http://schemas.openxmlformats.org/drawingml/2006/main">
             <a:off x="9620250" y="4953000"/>
-            <a:ext cx="3524250" cy="666750"/>
-          </a:xfrm>
-          <a:prstGeom xmlns:a="http://schemas.openxmlformats.org/drawingml/2006/main" prst="rect">
-            <a:avLst/>
-          </a:prstGeom>
-          <a:noFill xmlns:a="http://schemas.openxmlformats.org/drawingml/2006/main"/>
-          <a:ln xmlns:a="http://schemas.openxmlformats.org/drawingml/2006/main" w="0">
-            <a:noFill/>
-          </a:ln>
-        </p:spPr>
-        <p:txBody>
-          <a:bodyPr xmlns:a="http://schemas.openxmlformats.org/drawingml/2006/main" wrap="square" lIns="0" tIns="0" rIns="0" bIns="0" anchor="t"/>
-          <a:lstStyle xmlns:a="http://schemas.openxmlformats.org/drawingml/2006/main"/>
-          <a:p xmlns:a="http://schemas.openxmlformats.org/drawingml/2006/main">
-            <a:r>
-              <a:rPr lang="en-US" sz="1275">
+            <a:ext cx="3524250" cy="781050"/>
+          </a:xfrm>
+          <a:prstGeom xmlns:a="http://schemas.openxmlformats.org/drawingml/2006/main" prst="rect">
+            <a:avLst/>
+          </a:prstGeom>
+          <a:noFill xmlns:a="http://schemas.openxmlformats.org/drawingml/2006/main"/>
+          <a:ln xmlns:a="http://schemas.openxmlformats.org/drawingml/2006/main" w="0">
+            <a:noFill/>
+          </a:ln>
+        </p:spPr>
+        <p:txBody>
+          <a:bodyPr xmlns:a="http://schemas.openxmlformats.org/drawingml/2006/main" wrap="square" lIns="0" tIns="0" rIns="0" bIns="0" anchor="t"/>
+          <a:lstStyle xmlns:a="http://schemas.openxmlformats.org/drawingml/2006/main"/>
+          <a:p xmlns:a="http://schemas.openxmlformats.org/drawingml/2006/main">
+            <a:r>
+              <a:rPr lang="en-US" sz="1200">
                 <a:solidFill>
                   <a:srgbClr val="7D7D7B"/>
                 </a:solidFill>
                 <a:latin typeface="Inter"/>
                 <a:ea typeface="Inter"/>
               </a:rPr>
-              <a:t>Use unequal frames to show facets of one idea. The crop carries the mood; the label carries the claim.</a:t>
-            </a:r>
-            <a:endParaRPr lang="en-US"/>
-          </a:p>
-        </p:txBody>
-      </p:sp>
-      <p:sp>
-        <p:nvSpPr>
-          <p:cNvPr id="26" name="source"/>
+              <a:t>One dominant frame plus four</a:t>
+            </a:r>
+            <a:endParaRPr lang="en-US"/>
+          </a:p>
+          <a:p xmlns:a="http://schemas.openxmlformats.org/drawingml/2006/main">
+            <a:r>
+              <a:rPr lang="en-US" sz="1200">
+                <a:solidFill>
+                  <a:srgbClr val="7D7D7B"/>
+                </a:solidFill>
+                <a:latin typeface="Inter"/>
+                <a:ea typeface="Inter"/>
+              </a:rPr>
+              <a:t>supporting crops. Image carries</a:t>
+            </a:r>
+            <a:endParaRPr lang="en-US"/>
+          </a:p>
+          <a:p xmlns:a="http://schemas.openxmlformats.org/drawingml/2006/main">
+            <a:r>
+              <a:rPr lang="en-US" sz="1200">
+                <a:solidFill>
+                  <a:srgbClr val="7D7D7B"/>
+                </a:solidFill>
+                <a:latin typeface="Inter"/>
+                <a:ea typeface="Inter"/>
+              </a:rPr>
+              <a:t>mood; labels carry the claim.</a:t>
+            </a:r>
+            <a:endParaRPr lang="en-US"/>
+          </a:p>
+        </p:txBody>
+      </p:sp>
+      <p:sp>
+        <p:nvSpPr>
+          <p:cNvPr id="28" name="source"/>
           <p:cNvSpPr txBox="1"/>
           <p:nvPr/>
         </p:nvSpPr>
@@ -3530,7 +3640,7 @@
       </p:sp>
       <p:sp>
         <p:nvSpPr>
-          <p:cNvPr id="27" name="page-number"/>
+          <p:cNvPr id="29" name="page-number"/>
           <p:cNvSpPr txBox="1"/>
           <p:nvPr/>
         </p:nvSpPr>
@@ -3580,7 +3690,7 @@
     <p:bg>
       <p:bgPr>
         <a:blipFill xmlns:a="http://schemas.openxmlformats.org/drawingml/2006/main">
-          <a:blip xmlns:r="http://schemas.openxmlformats.org/officeDocument/2006/relationships" r:embed="rIdOfficeKitImagec7b73f8fac405495_1"/>
+          <a:blip xmlns:r="http://schemas.openxmlformats.org/officeDocument/2006/relationships" r:embed="rIdOfficeKitImagec237998db8bee20d_1"/>
           <a:stretch>
             <a:fillRect/>
           </a:stretch>
@@ -4316,7 +4426,7 @@
     <p:bg>
       <p:bgPr>
         <a:blipFill xmlns:a="http://schemas.openxmlformats.org/drawingml/2006/main">
-          <a:blip xmlns:r="http://schemas.openxmlformats.org/officeDocument/2006/relationships" r:embed="rIdOfficeKitImageaeb6f74d36d260d0_1"/>
+          <a:blip xmlns:r="http://schemas.openxmlformats.org/officeDocument/2006/relationships" r:embed="rIdOfficeKitImaged71bfa074cda59bb_1"/>
           <a:stretch>
             <a:fillRect/>
           </a:stretch>
@@ -4794,7 +4904,7 @@
           <p:nvPr/>
         </p:nvPicPr>
         <p:blipFill>
-          <a:blip xmlns:r="http://schemas.openxmlformats.org/officeDocument/2006/relationships" xmlns:a="http://schemas.openxmlformats.org/drawingml/2006/main" r:embed="rIdOfficeKitImageaeb6f74d36d260d0_1"/>
+          <a:blip xmlns:r="http://schemas.openxmlformats.org/officeDocument/2006/relationships" xmlns:a="http://schemas.openxmlformats.org/drawingml/2006/main" r:embed="rIdOfficeKitImage8fbc298f8d1b7a3c_1"/>
           <a:srcRect xmlns:a="http://schemas.openxmlformats.org/drawingml/2006/main" l="0" t="47258" r="0" b="47258"/>
           <a:stretch xmlns:a="http://schemas.openxmlformats.org/drawingml/2006/main">
             <a:fillRect/>

--- a/skills/presentation-template-library/skills/artifact-template-noir-field-pictorial/assets/reference.pptx
+++ b/skills/presentation-template-library/skills/artifact-template-noir-field-pictorial/assets/reference.pptx
@@ -200,7 +200,7 @@
     <p:bg>
       <p:bgPr>
         <a:blipFill xmlns:a="http://schemas.openxmlformats.org/drawingml/2006/main">
-          <a:blip xmlns:r="http://schemas.openxmlformats.org/officeDocument/2006/relationships" r:embed="rIdOfficeKitImage7790b68b5d8fcd92_1"/>
+          <a:blip xmlns:r="http://schemas.openxmlformats.org/officeDocument/2006/relationships" r:embed="rIdOfficeKitImage8fbc298f8d1b7a3c_1"/>
           <a:stretch>
             <a:fillRect/>
           </a:stretch>
@@ -530,7 +530,7 @@
     <p:bg>
       <p:bgPr>
         <a:blipFill xmlns:a="http://schemas.openxmlformats.org/drawingml/2006/main">
-          <a:blip xmlns:r="http://schemas.openxmlformats.org/officeDocument/2006/relationships" r:embed="rIdOfficeKitImagec237998db8bee20d_1"/>
+          <a:blip xmlns:r="http://schemas.openxmlformats.org/officeDocument/2006/relationships" r:embed="rIdOfficeKitImage33b8c33a8fc3d613_1"/>
           <a:stretch>
             <a:fillRect/>
           </a:stretch>
@@ -1008,7 +1008,7 @@
           <p:nvPr/>
         </p:nvPicPr>
         <p:blipFill>
-          <a:blip xmlns:r="http://schemas.openxmlformats.org/officeDocument/2006/relationships" xmlns:a="http://schemas.openxmlformats.org/drawingml/2006/main" r:embed="rIdOfficeKitImaged71bfa074cda59bb_1"/>
+          <a:blip xmlns:r="http://schemas.openxmlformats.org/officeDocument/2006/relationships" xmlns:a="http://schemas.openxmlformats.org/drawingml/2006/main" r:embed="rIdOfficeKitImage7790b68b5d8fcd92_1"/>
           <a:srcRect xmlns:a="http://schemas.openxmlformats.org/drawingml/2006/main" l="0" t="47258" r="0" b="47258"/>
           <a:stretch xmlns:a="http://schemas.openxmlformats.org/drawingml/2006/main">
             <a:fillRect/>
@@ -1331,7 +1331,7 @@
           <p:nvPr/>
         </p:nvPicPr>
         <p:blipFill>
-          <a:blip xmlns:r="http://schemas.openxmlformats.org/officeDocument/2006/relationships" xmlns:a="http://schemas.openxmlformats.org/drawingml/2006/main" r:embed="rIdOfficeKitImage8fbc298f8d1b7a3c_1"/>
+          <a:blip xmlns:r="http://schemas.openxmlformats.org/officeDocument/2006/relationships" xmlns:a="http://schemas.openxmlformats.org/drawingml/2006/main" r:embed="rIdOfficeKitImage9df32179333a9f35_1"/>
           <a:srcRect xmlns:a="http://schemas.openxmlformats.org/drawingml/2006/main" l="0" t="31920" r="0" b="31920"/>
           <a:stretch xmlns:a="http://schemas.openxmlformats.org/drawingml/2006/main">
             <a:fillRect/>
@@ -1507,7 +1507,7 @@
     <p:bg>
       <p:bgPr>
         <a:blipFill xmlns:a="http://schemas.openxmlformats.org/drawingml/2006/main">
-          <a:blip xmlns:r="http://schemas.openxmlformats.org/officeDocument/2006/relationships" r:embed="rIdOfficeKitImage6af8c9b5dff6e3a3_1"/>
+          <a:blip xmlns:r="http://schemas.openxmlformats.org/officeDocument/2006/relationships" r:embed="rIdOfficeKitImagebdd32fb5cfa65986_1"/>
           <a:stretch>
             <a:fillRect/>
           </a:stretch>
@@ -1985,8 +1985,8 @@
           <p:nvPr/>
         </p:nvPicPr>
         <p:blipFill>
-          <a:blip xmlns:r="http://schemas.openxmlformats.org/officeDocument/2006/relationships" xmlns:a="http://schemas.openxmlformats.org/drawingml/2006/main" r:embed="rIdOfficeKitImage2930549abca3ae00_1"/>
-          <a:srcRect xmlns:a="http://schemas.openxmlformats.org/drawingml/2006/main" l="0" t="47256" r="0" b="47256"/>
+          <a:blip xmlns:r="http://schemas.openxmlformats.org/officeDocument/2006/relationships" xmlns:a="http://schemas.openxmlformats.org/drawingml/2006/main" r:embed="rIdOfficeKitImage8fbc298f8d1b7a3c_1"/>
+          <a:srcRect xmlns:a="http://schemas.openxmlformats.org/drawingml/2006/main" l="0" t="47258" r="0" b="47258"/>
           <a:stretch xmlns:a="http://schemas.openxmlformats.org/drawingml/2006/main">
             <a:fillRect/>
           </a:stretch>
@@ -3120,8 +3120,8 @@
           <p:nvPr/>
         </p:nvPicPr>
         <p:blipFill>
-          <a:blip xmlns:r="http://schemas.openxmlformats.org/officeDocument/2006/relationships" xmlns:a="http://schemas.openxmlformats.org/drawingml/2006/main" r:embed="rIdOfficeKitImage31956823b229fb66_1"/>
-          <a:srcRect xmlns:a="http://schemas.openxmlformats.org/drawingml/2006/main" l="0" t="47256" r="0" b="47256"/>
+          <a:blip xmlns:r="http://schemas.openxmlformats.org/officeDocument/2006/relationships" xmlns:a="http://schemas.openxmlformats.org/drawingml/2006/main" r:embed="rIdOfficeKitImage7790b68b5d8fcd92_1"/>
+          <a:srcRect xmlns:a="http://schemas.openxmlformats.org/drawingml/2006/main" l="0" t="47258" r="0" b="47258"/>
           <a:stretch xmlns:a="http://schemas.openxmlformats.org/drawingml/2006/main">
             <a:fillRect/>
           </a:stretch>
@@ -3332,8 +3332,8 @@
           <p:nvPr/>
         </p:nvPicPr>
         <p:blipFill>
-          <a:blip xmlns:r="http://schemas.openxmlformats.org/officeDocument/2006/relationships" xmlns:a="http://schemas.openxmlformats.org/drawingml/2006/main" r:embed="rIdOfficeKitImagec7b73f8fac405495_1"/>
-          <a:srcRect xmlns:a="http://schemas.openxmlformats.org/drawingml/2006/main" l="0" t="31962" r="0" b="31962"/>
+          <a:blip xmlns:r="http://schemas.openxmlformats.org/officeDocument/2006/relationships" xmlns:a="http://schemas.openxmlformats.org/drawingml/2006/main" r:embed="rIdOfficeKitImage9df32179333a9f35_1"/>
+          <a:srcRect xmlns:a="http://schemas.openxmlformats.org/drawingml/2006/main" l="0" t="31971" r="0" b="31971"/>
           <a:stretch xmlns:a="http://schemas.openxmlformats.org/drawingml/2006/main">
             <a:fillRect/>
           </a:stretch>
@@ -3361,7 +3361,7 @@
           <p:nvPr/>
         </p:nvPicPr>
         <p:blipFill>
-          <a:blip xmlns:r="http://schemas.openxmlformats.org/officeDocument/2006/relationships" xmlns:a="http://schemas.openxmlformats.org/drawingml/2006/main" r:embed="rIdOfficeKitImage59ee3aa5202fd02f_1"/>
+          <a:blip xmlns:r="http://schemas.openxmlformats.org/officeDocument/2006/relationships" xmlns:a="http://schemas.openxmlformats.org/drawingml/2006/main" r:embed="rIdOfficeKitImagebdd32fb5cfa65986_1"/>
           <a:srcRect xmlns:a="http://schemas.openxmlformats.org/drawingml/2006/main" l="0" t="32347" r="0" b="32347"/>
           <a:stretch xmlns:a="http://schemas.openxmlformats.org/drawingml/2006/main">
             <a:fillRect/>
@@ -3390,7 +3390,7 @@
           <p:nvPr/>
         </p:nvPicPr>
         <p:blipFill>
-          <a:blip xmlns:r="http://schemas.openxmlformats.org/officeDocument/2006/relationships" xmlns:a="http://schemas.openxmlformats.org/drawingml/2006/main" r:embed="rIdOfficeKitImageaeb6f74d36d260d0_1"/>
+          <a:blip xmlns:r="http://schemas.openxmlformats.org/officeDocument/2006/relationships" xmlns:a="http://schemas.openxmlformats.org/drawingml/2006/main" r:embed="rIdOfficeKitImage8fbc298f8d1b7a3c_1"/>
           <a:srcRect xmlns:a="http://schemas.openxmlformats.org/drawingml/2006/main" l="0" t="32347" r="0" b="32347"/>
           <a:stretch xmlns:a="http://schemas.openxmlformats.org/drawingml/2006/main">
             <a:fillRect/>
@@ -3419,14 +3419,14 @@
           <p:nvPr/>
         </p:nvPicPr>
         <p:blipFill>
-          <a:blip xmlns:r="http://schemas.openxmlformats.org/officeDocument/2006/relationships" xmlns:a="http://schemas.openxmlformats.org/drawingml/2006/main" r:embed="rIdOfficeKitImage13db13f70d7843cc_1"/>
+          <a:blip xmlns:r="http://schemas.openxmlformats.org/officeDocument/2006/relationships" xmlns:a="http://schemas.openxmlformats.org/drawingml/2006/main" r:embed="rIdOfficeKitImage33b8c33a8fc3d613_1"/>
           <a:srcRect xmlns:a="http://schemas.openxmlformats.org/drawingml/2006/main" l="0" t="32347" r="0" b="32347"/>
           <a:stretch xmlns:a="http://schemas.openxmlformats.org/drawingml/2006/main">
             <a:fillRect/>
           </a:stretch>
         </p:blipFill>
         <p:spPr>
-          <a:xfrm xmlns:a="http://schemas.openxmlformats.org/drawingml/2006/main" flipH="1">
+          <a:xfrm xmlns:a="http://schemas.openxmlformats.org/drawingml/2006/main">
             <a:off x="4895850" y="4457700"/>
             <a:ext cx="1790700" cy="1123950"/>
           </a:xfrm>
@@ -3690,7 +3690,7 @@
     <p:bg>
       <p:bgPr>
         <a:blipFill xmlns:a="http://schemas.openxmlformats.org/drawingml/2006/main">
-          <a:blip xmlns:r="http://schemas.openxmlformats.org/officeDocument/2006/relationships" r:embed="rIdOfficeKitImagec237998db8bee20d_1"/>
+          <a:blip xmlns:r="http://schemas.openxmlformats.org/officeDocument/2006/relationships" r:embed="rIdOfficeKitImage9df32179333a9f35_1"/>
           <a:stretch>
             <a:fillRect/>
           </a:stretch>
@@ -4426,7 +4426,7 @@
     <p:bg>
       <p:bgPr>
         <a:blipFill xmlns:a="http://schemas.openxmlformats.org/drawingml/2006/main">
-          <a:blip xmlns:r="http://schemas.openxmlformats.org/officeDocument/2006/relationships" r:embed="rIdOfficeKitImaged71bfa074cda59bb_1"/>
+          <a:blip xmlns:r="http://schemas.openxmlformats.org/officeDocument/2006/relationships" r:embed="rIdOfficeKitImagebdd32fb5cfa65986_1"/>
           <a:stretch>
             <a:fillRect/>
           </a:stretch>

--- a/skills/presentation-template-library/skills/artifact-template-noir-field-pictorial/assets/reference.pptx
+++ b/skills/presentation-template-library/skills/artifact-template-noir-field-pictorial/assets/reference.pptx
@@ -200,7 +200,7 @@
     <p:bg>
       <p:bgPr>
         <a:blipFill xmlns:a="http://schemas.openxmlformats.org/drawingml/2006/main">
-          <a:blip xmlns:r="http://schemas.openxmlformats.org/officeDocument/2006/relationships" r:embed="rIdOfficeKitImage8fbc298f8d1b7a3c_1"/>
+          <a:blip xmlns:r="http://schemas.openxmlformats.org/officeDocument/2006/relationships" r:embed="rIdOfficeKitImage9df32179333a9f35_1"/>
           <a:stretch>
             <a:fillRect/>
           </a:stretch>
@@ -527,983 +527,6 @@
 <file path=ppt/slides/slide2.xml><?xml version="1.0" encoding="utf-8"?>
 <p:sld xmlns:p="http://schemas.openxmlformats.org/presentationml/2006/main">
   <p:cSld name="Argument">
-    <p:bg>
-      <p:bgPr>
-        <a:blipFill xmlns:a="http://schemas.openxmlformats.org/drawingml/2006/main">
-          <a:blip xmlns:r="http://schemas.openxmlformats.org/officeDocument/2006/relationships" r:embed="rIdOfficeKitImage33b8c33a8fc3d613_1"/>
-          <a:stretch>
-            <a:fillRect/>
-          </a:stretch>
-        </a:blipFill>
-      </p:bgPr>
-    </p:bg>
-    <p:spTree>
-      <p:nvGrpSpPr>
-        <p:cNvPr id="1" name=""/>
-        <p:cNvGrpSpPr/>
-        <p:nvPr/>
-      </p:nvGrpSpPr>
-      <p:grpSpPr>
-        <a:xfrm xmlns:a="http://schemas.openxmlformats.org/drawingml/2006/main">
-          <a:off x="0" y="0"/>
-          <a:ext cx="0" cy="0"/>
-          <a:chOff x="0" y="0"/>
-          <a:chExt cx="0" cy="0"/>
-        </a:xfrm>
-      </p:grpSpPr>
-      <p:sp>
-        <p:nvSpPr>
-          <p:cNvPr id="2" name="argument-paper-scrim"/>
-          <p:cNvSpPr/>
-          <p:nvPr/>
-        </p:nvSpPr>
-        <p:spPr>
-          <a:xfrm xmlns:a="http://schemas.openxmlformats.org/drawingml/2006/main">
-            <a:off x="0" y="0"/>
-            <a:ext cx="8191500" cy="8572500"/>
-          </a:xfrm>
-          <a:prstGeom xmlns:a="http://schemas.openxmlformats.org/drawingml/2006/main" prst="rect">
-            <a:avLst/>
-          </a:prstGeom>
-          <a:solidFill xmlns:a="http://schemas.openxmlformats.org/drawingml/2006/main">
-            <a:srgbClr val="111214">
-              <a:alpha val="96000"/>
-            </a:srgbClr>
-          </a:solidFill>
-          <a:ln xmlns:a="http://schemas.openxmlformats.org/drawingml/2006/main" w="0">
-            <a:solidFill>
-              <a:srgbClr val="111214"/>
-            </a:solidFill>
-            <a:prstDash val="solid"/>
-          </a:ln>
-        </p:spPr>
-        <p:txBody>
-          <a:bodyPr xmlns:a="http://schemas.openxmlformats.org/drawingml/2006/main" wrap="square" lIns="0" tIns="0" rIns="0" bIns="0" anchor="t"/>
-          <a:lstStyle xmlns:a="http://schemas.openxmlformats.org/drawingml/2006/main"/>
-          <a:p xmlns:a="http://schemas.openxmlformats.org/drawingml/2006/main">
-            <a:r>
-              <a:rPr lang="en-US"/>
-              <a:t/>
-            </a:r>
-            <a:endParaRPr lang="en-US"/>
-          </a:p>
-        </p:txBody>
-      </p:sp>
-      <p:sp>
-        <p:nvSpPr>
-          <p:cNvPr id="3" name="fixed-rail"/>
-          <p:cNvSpPr/>
-          <p:nvPr/>
-        </p:nvSpPr>
-        <p:spPr>
-          <a:xfrm xmlns:a="http://schemas.openxmlformats.org/drawingml/2006/main">
-            <a:off x="323850" y="0"/>
-            <a:ext cx="114300" cy="8572500"/>
-          </a:xfrm>
-          <a:prstGeom xmlns:a="http://schemas.openxmlformats.org/drawingml/2006/main" prst="rect">
-            <a:avLst/>
-          </a:prstGeom>
-          <a:solidFill xmlns:a="http://schemas.openxmlformats.org/drawingml/2006/main">
-            <a:srgbClr val="D53A45"/>
-          </a:solidFill>
-          <a:ln xmlns:a="http://schemas.openxmlformats.org/drawingml/2006/main" w="0">
-            <a:solidFill>
-              <a:srgbClr val="D53A45"/>
-            </a:solidFill>
-            <a:prstDash val="solid"/>
-          </a:ln>
-        </p:spPr>
-        <p:txBody>
-          <a:bodyPr xmlns:a="http://schemas.openxmlformats.org/drawingml/2006/main" wrap="square" lIns="0" tIns="0" rIns="0" bIns="0" anchor="t"/>
-          <a:lstStyle xmlns:a="http://schemas.openxmlformats.org/drawingml/2006/main"/>
-          <a:p xmlns:a="http://schemas.openxmlformats.org/drawingml/2006/main">
-            <a:r>
-              <a:rPr lang="en-US"/>
-              <a:t/>
-            </a:r>
-            <a:endParaRPr lang="en-US"/>
-          </a:p>
-        </p:txBody>
-      </p:sp>
-      <p:sp>
-        <p:nvSpPr>
-          <p:cNvPr id="4" name="fixed-nav-0"/>
-          <p:cNvSpPr/>
-          <p:nvPr/>
-        </p:nvSpPr>
-        <p:spPr>
-          <a:xfrm xmlns:a="http://schemas.openxmlformats.org/drawingml/2006/main">
-            <a:off x="914400" y="1752600"/>
-            <a:ext cx="1516380" cy="209550"/>
-          </a:xfrm>
-          <a:prstGeom xmlns:a="http://schemas.openxmlformats.org/drawingml/2006/main" prst="rect">
-            <a:avLst/>
-          </a:prstGeom>
-          <a:solidFill xmlns:a="http://schemas.openxmlformats.org/drawingml/2006/main">
-            <a:srgbClr val="131A24"/>
-          </a:solidFill>
-          <a:ln xmlns:a="http://schemas.openxmlformats.org/drawingml/2006/main" w="0">
-            <a:solidFill>
-              <a:srgbClr val="131A24"/>
-            </a:solidFill>
-            <a:prstDash val="solid"/>
-          </a:ln>
-        </p:spPr>
-        <p:txBody>
-          <a:bodyPr xmlns:a="http://schemas.openxmlformats.org/drawingml/2006/main" wrap="square" lIns="0" tIns="0" rIns="0" bIns="0" anchor="t"/>
-          <a:lstStyle xmlns:a="http://schemas.openxmlformats.org/drawingml/2006/main"/>
-          <a:p xmlns:a="http://schemas.openxmlformats.org/drawingml/2006/main">
-            <a:r>
-              <a:rPr lang="en-US"/>
-              <a:t/>
-            </a:r>
-            <a:endParaRPr lang="en-US"/>
-          </a:p>
-        </p:txBody>
-      </p:sp>
-      <p:sp>
-        <p:nvSpPr>
-          <p:cNvPr id="5" name="fixed-nav-label-0"/>
-          <p:cNvSpPr txBox="1"/>
-          <p:nvPr/>
-        </p:nvSpPr>
-        <p:spPr>
-          <a:xfrm xmlns:a="http://schemas.openxmlformats.org/drawingml/2006/main">
-            <a:off x="990600" y="1790700"/>
-            <a:ext cx="1363980" cy="133350"/>
-          </a:xfrm>
-          <a:prstGeom xmlns:a="http://schemas.openxmlformats.org/drawingml/2006/main" prst="rect">
-            <a:avLst/>
-          </a:prstGeom>
-          <a:noFill xmlns:a="http://schemas.openxmlformats.org/drawingml/2006/main"/>
-          <a:ln xmlns:a="http://schemas.openxmlformats.org/drawingml/2006/main" w="0">
-            <a:noFill/>
-          </a:ln>
-        </p:spPr>
-        <p:txBody>
-          <a:bodyPr xmlns:a="http://schemas.openxmlformats.org/drawingml/2006/main" wrap="square" lIns="0" tIns="0" rIns="0" bIns="0" anchor="t"/>
-          <a:lstStyle xmlns:a="http://schemas.openxmlformats.org/drawingml/2006/main"/>
-          <a:p xmlns:a="http://schemas.openxmlformats.org/drawingml/2006/main">
-            <a:pPr algn="ctr"/>
-            <a:r>
-              <a:rPr lang="en-US" sz="675" b="1">
-                <a:solidFill>
-                  <a:srgbClr val="7D7D7B"/>
-                </a:solidFill>
-                <a:latin typeface="Inter"/>
-                <a:ea typeface="Inter"/>
-              </a:rPr>
-              <a:t>BRIEF</a:t>
-            </a:r>
-            <a:endParaRPr lang="en-US"/>
-          </a:p>
-        </p:txBody>
-      </p:sp>
-      <p:sp>
-        <p:nvSpPr>
-          <p:cNvPr id="6" name="fixed-nav-1"/>
-          <p:cNvSpPr/>
-          <p:nvPr/>
-        </p:nvSpPr>
-        <p:spPr>
-          <a:xfrm xmlns:a="http://schemas.openxmlformats.org/drawingml/2006/main">
-            <a:off x="2487930" y="1752600"/>
-            <a:ext cx="1516380" cy="209550"/>
-          </a:xfrm>
-          <a:prstGeom xmlns:a="http://schemas.openxmlformats.org/drawingml/2006/main" prst="rect">
-            <a:avLst/>
-          </a:prstGeom>
-          <a:solidFill xmlns:a="http://schemas.openxmlformats.org/drawingml/2006/main">
-            <a:srgbClr val="F2F0EA"/>
-          </a:solidFill>
-          <a:ln xmlns:a="http://schemas.openxmlformats.org/drawingml/2006/main" w="0">
-            <a:solidFill>
-              <a:srgbClr val="F2F0EA"/>
-            </a:solidFill>
-            <a:prstDash val="solid"/>
-          </a:ln>
-        </p:spPr>
-        <p:txBody>
-          <a:bodyPr xmlns:a="http://schemas.openxmlformats.org/drawingml/2006/main" wrap="square" lIns="0" tIns="0" rIns="0" bIns="0" anchor="t"/>
-          <a:lstStyle xmlns:a="http://schemas.openxmlformats.org/drawingml/2006/main"/>
-          <a:p xmlns:a="http://schemas.openxmlformats.org/drawingml/2006/main">
-            <a:r>
-              <a:rPr lang="en-US"/>
-              <a:t/>
-            </a:r>
-            <a:endParaRPr lang="en-US"/>
-          </a:p>
-        </p:txBody>
-      </p:sp>
-      <p:sp>
-        <p:nvSpPr>
-          <p:cNvPr id="7" name="fixed-nav-label-1"/>
-          <p:cNvSpPr txBox="1"/>
-          <p:nvPr/>
-        </p:nvSpPr>
-        <p:spPr>
-          <a:xfrm xmlns:a="http://schemas.openxmlformats.org/drawingml/2006/main">
-            <a:off x="2564130" y="1790700"/>
-            <a:ext cx="1363980" cy="133350"/>
-          </a:xfrm>
-          <a:prstGeom xmlns:a="http://schemas.openxmlformats.org/drawingml/2006/main" prst="rect">
-            <a:avLst/>
-          </a:prstGeom>
-          <a:noFill xmlns:a="http://schemas.openxmlformats.org/drawingml/2006/main"/>
-          <a:ln xmlns:a="http://schemas.openxmlformats.org/drawingml/2006/main" w="0">
-            <a:noFill/>
-          </a:ln>
-        </p:spPr>
-        <p:txBody>
-          <a:bodyPr xmlns:a="http://schemas.openxmlformats.org/drawingml/2006/main" wrap="square" lIns="0" tIns="0" rIns="0" bIns="0" anchor="t"/>
-          <a:lstStyle xmlns:a="http://schemas.openxmlformats.org/drawingml/2006/main"/>
-          <a:p xmlns:a="http://schemas.openxmlformats.org/drawingml/2006/main">
-            <a:pPr algn="ctr"/>
-            <a:r>
-              <a:rPr lang="en-US" sz="675" b="1">
-                <a:solidFill>
-                  <a:srgbClr val="202124"/>
-                </a:solidFill>
-                <a:latin typeface="Inter"/>
-                <a:ea typeface="Inter"/>
-              </a:rPr>
-              <a:t>SIGNAL</a:t>
-            </a:r>
-            <a:endParaRPr lang="en-US"/>
-          </a:p>
-        </p:txBody>
-      </p:sp>
-      <p:sp>
-        <p:nvSpPr>
-          <p:cNvPr id="8" name="fixed-nav-2"/>
-          <p:cNvSpPr/>
-          <p:nvPr/>
-        </p:nvSpPr>
-        <p:spPr>
-          <a:xfrm xmlns:a="http://schemas.openxmlformats.org/drawingml/2006/main">
-            <a:off x="4061460" y="1752600"/>
-            <a:ext cx="1516380" cy="209550"/>
-          </a:xfrm>
-          <a:prstGeom xmlns:a="http://schemas.openxmlformats.org/drawingml/2006/main" prst="rect">
-            <a:avLst/>
-          </a:prstGeom>
-          <a:solidFill xmlns:a="http://schemas.openxmlformats.org/drawingml/2006/main">
-            <a:srgbClr val="131A24"/>
-          </a:solidFill>
-          <a:ln xmlns:a="http://schemas.openxmlformats.org/drawingml/2006/main" w="0">
-            <a:solidFill>
-              <a:srgbClr val="131A24"/>
-            </a:solidFill>
-            <a:prstDash val="solid"/>
-          </a:ln>
-        </p:spPr>
-        <p:txBody>
-          <a:bodyPr xmlns:a="http://schemas.openxmlformats.org/drawingml/2006/main" wrap="square" lIns="0" tIns="0" rIns="0" bIns="0" anchor="t"/>
-          <a:lstStyle xmlns:a="http://schemas.openxmlformats.org/drawingml/2006/main"/>
-          <a:p xmlns:a="http://schemas.openxmlformats.org/drawingml/2006/main">
-            <a:r>
-              <a:rPr lang="en-US"/>
-              <a:t/>
-            </a:r>
-            <a:endParaRPr lang="en-US"/>
-          </a:p>
-        </p:txBody>
-      </p:sp>
-      <p:sp>
-        <p:nvSpPr>
-          <p:cNvPr id="9" name="fixed-nav-label-2"/>
-          <p:cNvSpPr txBox="1"/>
-          <p:nvPr/>
-        </p:nvSpPr>
-        <p:spPr>
-          <a:xfrm xmlns:a="http://schemas.openxmlformats.org/drawingml/2006/main">
-            <a:off x="4137660" y="1790700"/>
-            <a:ext cx="1363980" cy="133350"/>
-          </a:xfrm>
-          <a:prstGeom xmlns:a="http://schemas.openxmlformats.org/drawingml/2006/main" prst="rect">
-            <a:avLst/>
-          </a:prstGeom>
-          <a:noFill xmlns:a="http://schemas.openxmlformats.org/drawingml/2006/main"/>
-          <a:ln xmlns:a="http://schemas.openxmlformats.org/drawingml/2006/main" w="0">
-            <a:noFill/>
-          </a:ln>
-        </p:spPr>
-        <p:txBody>
-          <a:bodyPr xmlns:a="http://schemas.openxmlformats.org/drawingml/2006/main" wrap="square" lIns="0" tIns="0" rIns="0" bIns="0" anchor="t"/>
-          <a:lstStyle xmlns:a="http://schemas.openxmlformats.org/drawingml/2006/main"/>
-          <a:p xmlns:a="http://schemas.openxmlformats.org/drawingml/2006/main">
-            <a:pPr algn="ctr"/>
-            <a:r>
-              <a:rPr lang="en-US" sz="675" b="1">
-                <a:solidFill>
-                  <a:srgbClr val="7D7D7B"/>
-                </a:solidFill>
-                <a:latin typeface="Inter"/>
-                <a:ea typeface="Inter"/>
-              </a:rPr>
-              <a:t>EVIDENCE</a:t>
-            </a:r>
-            <a:endParaRPr lang="en-US"/>
-          </a:p>
-        </p:txBody>
-      </p:sp>
-      <p:sp>
-        <p:nvSpPr>
-          <p:cNvPr id="10" name="fixed-nav-3"/>
-          <p:cNvSpPr/>
-          <p:nvPr/>
-        </p:nvSpPr>
-        <p:spPr>
-          <a:xfrm xmlns:a="http://schemas.openxmlformats.org/drawingml/2006/main">
-            <a:off x="5634990" y="1752600"/>
-            <a:ext cx="1516380" cy="209550"/>
-          </a:xfrm>
-          <a:prstGeom xmlns:a="http://schemas.openxmlformats.org/drawingml/2006/main" prst="rect">
-            <a:avLst/>
-          </a:prstGeom>
-          <a:solidFill xmlns:a="http://schemas.openxmlformats.org/drawingml/2006/main">
-            <a:srgbClr val="131A24"/>
-          </a:solidFill>
-          <a:ln xmlns:a="http://schemas.openxmlformats.org/drawingml/2006/main" w="0">
-            <a:solidFill>
-              <a:srgbClr val="131A24"/>
-            </a:solidFill>
-            <a:prstDash val="solid"/>
-          </a:ln>
-        </p:spPr>
-        <p:txBody>
-          <a:bodyPr xmlns:a="http://schemas.openxmlformats.org/drawingml/2006/main" wrap="square" lIns="0" tIns="0" rIns="0" bIns="0" anchor="t"/>
-          <a:lstStyle xmlns:a="http://schemas.openxmlformats.org/drawingml/2006/main"/>
-          <a:p xmlns:a="http://schemas.openxmlformats.org/drawingml/2006/main">
-            <a:r>
-              <a:rPr lang="en-US"/>
-              <a:t/>
-            </a:r>
-            <a:endParaRPr lang="en-US"/>
-          </a:p>
-        </p:txBody>
-      </p:sp>
-      <p:sp>
-        <p:nvSpPr>
-          <p:cNvPr id="11" name="fixed-nav-label-3"/>
-          <p:cNvSpPr txBox="1"/>
-          <p:nvPr/>
-        </p:nvSpPr>
-        <p:spPr>
-          <a:xfrm xmlns:a="http://schemas.openxmlformats.org/drawingml/2006/main">
-            <a:off x="5711190" y="1790700"/>
-            <a:ext cx="1363980" cy="133350"/>
-          </a:xfrm>
-          <a:prstGeom xmlns:a="http://schemas.openxmlformats.org/drawingml/2006/main" prst="rect">
-            <a:avLst/>
-          </a:prstGeom>
-          <a:noFill xmlns:a="http://schemas.openxmlformats.org/drawingml/2006/main"/>
-          <a:ln xmlns:a="http://schemas.openxmlformats.org/drawingml/2006/main" w="0">
-            <a:noFill/>
-          </a:ln>
-        </p:spPr>
-        <p:txBody>
-          <a:bodyPr xmlns:a="http://schemas.openxmlformats.org/drawingml/2006/main" wrap="square" lIns="0" tIns="0" rIns="0" bIns="0" anchor="t"/>
-          <a:lstStyle xmlns:a="http://schemas.openxmlformats.org/drawingml/2006/main"/>
-          <a:p xmlns:a="http://schemas.openxmlformats.org/drawingml/2006/main">
-            <a:pPr algn="ctr"/>
-            <a:r>
-              <a:rPr lang="en-US" sz="675" b="1">
-                <a:solidFill>
-                  <a:srgbClr val="7D7D7B"/>
-                </a:solidFill>
-                <a:latin typeface="Inter"/>
-                <a:ea typeface="Inter"/>
-              </a:rPr>
-              <a:t>CHOICE</a:t>
-            </a:r>
-            <a:endParaRPr lang="en-US"/>
-          </a:p>
-        </p:txBody>
-      </p:sp>
-      <p:sp>
-        <p:nvSpPr>
-          <p:cNvPr id="12" name="fixed-nav-4"/>
-          <p:cNvSpPr/>
-          <p:nvPr/>
-        </p:nvSpPr>
-        <p:spPr>
-          <a:xfrm xmlns:a="http://schemas.openxmlformats.org/drawingml/2006/main">
-            <a:off x="7208520" y="1752600"/>
-            <a:ext cx="1516380" cy="209550"/>
-          </a:xfrm>
-          <a:prstGeom xmlns:a="http://schemas.openxmlformats.org/drawingml/2006/main" prst="rect">
-            <a:avLst/>
-          </a:prstGeom>
-          <a:solidFill xmlns:a="http://schemas.openxmlformats.org/drawingml/2006/main">
-            <a:srgbClr val="131A24"/>
-          </a:solidFill>
-          <a:ln xmlns:a="http://schemas.openxmlformats.org/drawingml/2006/main" w="0">
-            <a:solidFill>
-              <a:srgbClr val="131A24"/>
-            </a:solidFill>
-            <a:prstDash val="solid"/>
-          </a:ln>
-        </p:spPr>
-        <p:txBody>
-          <a:bodyPr xmlns:a="http://schemas.openxmlformats.org/drawingml/2006/main" wrap="square" lIns="0" tIns="0" rIns="0" bIns="0" anchor="t"/>
-          <a:lstStyle xmlns:a="http://schemas.openxmlformats.org/drawingml/2006/main"/>
-          <a:p xmlns:a="http://schemas.openxmlformats.org/drawingml/2006/main">
-            <a:r>
-              <a:rPr lang="en-US"/>
-              <a:t/>
-            </a:r>
-            <a:endParaRPr lang="en-US"/>
-          </a:p>
-        </p:txBody>
-      </p:sp>
-      <p:sp>
-        <p:nvSpPr>
-          <p:cNvPr id="13" name="fixed-nav-label-4"/>
-          <p:cNvSpPr txBox="1"/>
-          <p:nvPr/>
-        </p:nvSpPr>
-        <p:spPr>
-          <a:xfrm xmlns:a="http://schemas.openxmlformats.org/drawingml/2006/main">
-            <a:off x="7284720" y="1790700"/>
-            <a:ext cx="1363980" cy="133350"/>
-          </a:xfrm>
-          <a:prstGeom xmlns:a="http://schemas.openxmlformats.org/drawingml/2006/main" prst="rect">
-            <a:avLst/>
-          </a:prstGeom>
-          <a:noFill xmlns:a="http://schemas.openxmlformats.org/drawingml/2006/main"/>
-          <a:ln xmlns:a="http://schemas.openxmlformats.org/drawingml/2006/main" w="0">
-            <a:noFill/>
-          </a:ln>
-        </p:spPr>
-        <p:txBody>
-          <a:bodyPr xmlns:a="http://schemas.openxmlformats.org/drawingml/2006/main" wrap="square" lIns="0" tIns="0" rIns="0" bIns="0" anchor="t"/>
-          <a:lstStyle xmlns:a="http://schemas.openxmlformats.org/drawingml/2006/main"/>
-          <a:p xmlns:a="http://schemas.openxmlformats.org/drawingml/2006/main">
-            <a:pPr algn="ctr"/>
-            <a:r>
-              <a:rPr lang="en-US" sz="675" b="1">
-                <a:solidFill>
-                  <a:srgbClr val="7D7D7B"/>
-                </a:solidFill>
-                <a:latin typeface="Inter"/>
-                <a:ea typeface="Inter"/>
-              </a:rPr>
-              <a:t>NEXT</a:t>
-            </a:r>
-            <a:endParaRPr lang="en-US"/>
-          </a:p>
-        </p:txBody>
-      </p:sp>
-      <p:pic>
-        <p:nvPicPr>
-          <p:cNvPr id="14" name="argument-photo-band">
-            <a:extLst xmlns:a="http://schemas.openxmlformats.org/drawingml/2006/main">
-              <a:ext uri="{C183D7F6-B498-43B3-948B-1728B52AA6E4}">
-                <adec:decorative xmlns:adec="http://schemas.microsoft.com/office/drawing/2017/decorative" val="1"/>
-              </a:ext>
-            </a:extLst>
-          </p:cNvPr>
-          <p:cNvPicPr/>
-          <p:nvPr/>
-        </p:nvPicPr>
-        <p:blipFill>
-          <a:blip xmlns:r="http://schemas.openxmlformats.org/officeDocument/2006/relationships" xmlns:a="http://schemas.openxmlformats.org/drawingml/2006/main" r:embed="rIdOfficeKitImage7790b68b5d8fcd92_1"/>
-          <a:srcRect xmlns:a="http://schemas.openxmlformats.org/drawingml/2006/main" l="0" t="47258" r="0" b="47258"/>
-          <a:stretch xmlns:a="http://schemas.openxmlformats.org/drawingml/2006/main">
-            <a:fillRect/>
-          </a:stretch>
-        </p:blipFill>
-        <p:spPr>
-          <a:xfrm xmlns:a="http://schemas.openxmlformats.org/drawingml/2006/main">
-            <a:off x="0" y="0"/>
-            <a:ext cx="15240000" cy="1485900"/>
-          </a:xfrm>
-          <a:prstGeom xmlns:a="http://schemas.openxmlformats.org/drawingml/2006/main" prst="rect">
-            <a:avLst/>
-          </a:prstGeom>
-        </p:spPr>
-      </p:pic>
-      <p:sp>
-        <p:nvSpPr>
-          <p:cNvPr id="15" name="argument-photo-scrim"/>
-          <p:cNvSpPr/>
-          <p:nvPr/>
-        </p:nvSpPr>
-        <p:spPr>
-          <a:xfrm xmlns:a="http://schemas.openxmlformats.org/drawingml/2006/main">
-            <a:off x="0" y="0"/>
-            <a:ext cx="15240000" cy="1485900"/>
-          </a:xfrm>
-          <a:prstGeom xmlns:a="http://schemas.openxmlformats.org/drawingml/2006/main" prst="rect">
-            <a:avLst/>
-          </a:prstGeom>
-          <a:solidFill xmlns:a="http://schemas.openxmlformats.org/drawingml/2006/main">
-            <a:srgbClr val="F2F0EA">
-              <a:alpha val="62000"/>
-            </a:srgbClr>
-          </a:solidFill>
-          <a:ln xmlns:a="http://schemas.openxmlformats.org/drawingml/2006/main" w="0">
-            <a:solidFill>
-              <a:srgbClr val="F2F0EA"/>
-            </a:solidFill>
-            <a:prstDash val="solid"/>
-          </a:ln>
-        </p:spPr>
-        <p:txBody>
-          <a:bodyPr xmlns:a="http://schemas.openxmlformats.org/drawingml/2006/main" wrap="square" lIns="0" tIns="0" rIns="0" bIns="0" anchor="t"/>
-          <a:lstStyle xmlns:a="http://schemas.openxmlformats.org/drawingml/2006/main"/>
-          <a:p xmlns:a="http://schemas.openxmlformats.org/drawingml/2006/main">
-            <a:r>
-              <a:rPr lang="en-US"/>
-              <a:t/>
-            </a:r>
-            <a:endParaRPr lang="en-US"/>
-          </a:p>
-        </p:txBody>
-      </p:sp>
-      <p:sp>
-        <p:nvSpPr>
-          <p:cNvPr id="16" name="argument-photo-rule"/>
-          <p:cNvSpPr/>
-          <p:nvPr/>
-        </p:nvSpPr>
-        <p:spPr>
-          <a:xfrm xmlns:a="http://schemas.openxmlformats.org/drawingml/2006/main">
-            <a:off x="914400" y="1438275"/>
-            <a:ext cx="13411200" cy="0"/>
-          </a:xfrm>
-          <a:prstGeom xmlns:a="http://schemas.openxmlformats.org/drawingml/2006/main" prst="line">
-            <a:avLst/>
-          </a:prstGeom>
-          <a:noFill xmlns:a="http://schemas.openxmlformats.org/drawingml/2006/main"/>
-          <a:ln xmlns:a="http://schemas.openxmlformats.org/drawingml/2006/main" w="38100">
-            <a:solidFill>
-              <a:srgbClr val="D53A45"/>
-            </a:solidFill>
-            <a:prstDash val="solid"/>
-          </a:ln>
-        </p:spPr>
-        <p:txBody>
-          <a:bodyPr xmlns:a="http://schemas.openxmlformats.org/drawingml/2006/main" wrap="square" lIns="0" tIns="0" rIns="0" bIns="0" anchor="t"/>
-          <a:lstStyle xmlns:a="http://schemas.openxmlformats.org/drawingml/2006/main"/>
-          <a:p xmlns:a="http://schemas.openxmlformats.org/drawingml/2006/main">
-            <a:r>
-              <a:rPr lang="en-US"/>
-              <a:t/>
-            </a:r>
-            <a:endParaRPr lang="en-US"/>
-          </a:p>
-        </p:txBody>
-      </p:sp>
-      <p:sp>
-        <p:nvSpPr>
-          <p:cNvPr id="17" name="NOIR FIELD PICTORIAL · ARGUMENT"/>
-          <p:cNvSpPr txBox="1"/>
-          <p:nvPr/>
-        </p:nvSpPr>
-        <p:spPr>
-          <a:xfrm xmlns:a="http://schemas.openxmlformats.org/drawingml/2006/main">
-            <a:off x="914400" y="228600"/>
-            <a:ext cx="9525000" cy="190500"/>
-          </a:xfrm>
-          <a:prstGeom xmlns:a="http://schemas.openxmlformats.org/drawingml/2006/main" prst="rect">
-            <a:avLst/>
-          </a:prstGeom>
-          <a:noFill xmlns:a="http://schemas.openxmlformats.org/drawingml/2006/main"/>
-          <a:ln xmlns:a="http://schemas.openxmlformats.org/drawingml/2006/main" w="0">
-            <a:noFill/>
-          </a:ln>
-        </p:spPr>
-        <p:txBody>
-          <a:bodyPr xmlns:a="http://schemas.openxmlformats.org/drawingml/2006/main" wrap="square" lIns="0" tIns="0" rIns="0" bIns="0" anchor="t"/>
-          <a:lstStyle xmlns:a="http://schemas.openxmlformats.org/drawingml/2006/main"/>
-          <a:p xmlns:a="http://schemas.openxmlformats.org/drawingml/2006/main">
-            <a:r>
-              <a:rPr lang="en-US" sz="1050" b="1">
-                <a:solidFill>
-                  <a:srgbClr val="D53A45"/>
-                </a:solidFill>
-                <a:latin typeface="Inter"/>
-                <a:ea typeface="Inter"/>
-              </a:rPr>
-              <a:t>NOIR FIELD PICTORIAL · ARGUMENT</a:t>
-            </a:r>
-            <a:endParaRPr lang="en-US"/>
-          </a:p>
-        </p:txBody>
-      </p:sp>
-      <p:sp>
-        <p:nvSpPr>
-          <p:cNvPr id="18" name="argument-title"/>
-          <p:cNvSpPr txBox="1"/>
-          <p:nvPr/>
-        </p:nvSpPr>
-        <p:spPr>
-          <a:xfrm xmlns:a="http://schemas.openxmlformats.org/drawingml/2006/main">
-            <a:off x="914400" y="495300"/>
-            <a:ext cx="12001500" cy="457200"/>
-          </a:xfrm>
-          <a:prstGeom xmlns:a="http://schemas.openxmlformats.org/drawingml/2006/main" prst="rect">
-            <a:avLst/>
-          </a:prstGeom>
-          <a:noFill xmlns:a="http://schemas.openxmlformats.org/drawingml/2006/main"/>
-          <a:ln xmlns:a="http://schemas.openxmlformats.org/drawingml/2006/main" w="0">
-            <a:noFill/>
-          </a:ln>
-        </p:spPr>
-        <p:txBody>
-          <a:bodyPr xmlns:a="http://schemas.openxmlformats.org/drawingml/2006/main" wrap="square" lIns="0" tIns="0" rIns="0" bIns="0" anchor="t"/>
-          <a:lstStyle xmlns:a="http://schemas.openxmlformats.org/drawingml/2006/main"/>
-          <a:p xmlns:a="http://schemas.openxmlformats.org/drawingml/2006/main">
-            <a:r>
-              <a:rPr lang="en-US" sz="2550" b="1">
-                <a:solidFill>
-                  <a:srgbClr val="FFFFFF"/>
-                </a:solidFill>
-                <a:latin typeface="Inter"/>
-                <a:ea typeface="Inter"/>
-              </a:rPr>
-              <a:t>The proposition is the page's visual center</a:t>
-            </a:r>
-            <a:endParaRPr lang="en-US"/>
-          </a:p>
-        </p:txBody>
-      </p:sp>
-      <p:sp>
-        <p:nvSpPr>
-          <p:cNvPr id="19" name="argument-basis"/>
-          <p:cNvSpPr txBox="1"/>
-          <p:nvPr/>
-        </p:nvSpPr>
-        <p:spPr>
-          <a:xfrm xmlns:a="http://schemas.openxmlformats.org/drawingml/2006/main">
-            <a:off x="952500" y="1066800"/>
-            <a:ext cx="11049000" cy="228600"/>
-          </a:xfrm>
-          <a:prstGeom xmlns:a="http://schemas.openxmlformats.org/drawingml/2006/main" prst="rect">
-            <a:avLst/>
-          </a:prstGeom>
-          <a:noFill xmlns:a="http://schemas.openxmlformats.org/drawingml/2006/main"/>
-          <a:ln xmlns:a="http://schemas.openxmlformats.org/drawingml/2006/main" w="0">
-            <a:noFill/>
-          </a:ln>
-        </p:spPr>
-        <p:txBody>
-          <a:bodyPr xmlns:a="http://schemas.openxmlformats.org/drawingml/2006/main" wrap="square" lIns="0" tIns="0" rIns="0" bIns="0" anchor="t"/>
-          <a:lstStyle xmlns:a="http://schemas.openxmlformats.org/drawingml/2006/main"/>
-          <a:p xmlns:a="http://schemas.openxmlformats.org/drawingml/2006/main">
-            <a:r>
-              <a:rPr lang="en-US" sz="1200">
-                <a:solidFill>
-                  <a:srgbClr val="F0F3F2"/>
-                </a:solidFill>
-                <a:latin typeface="Inter"/>
-                <a:ea typeface="Inter"/>
-              </a:rPr>
-              <a:t>Scale, crop, and color invite attention without hiding the evidence.</a:t>
-            </a:r>
-            <a:endParaRPr lang="en-US"/>
-          </a:p>
-        </p:txBody>
-      </p:sp>
-      <p:sp>
-        <p:nvSpPr>
-          <p:cNvPr id="20" name="promotion-kicker"/>
-          <p:cNvSpPr txBox="1"/>
-          <p:nvPr/>
-        </p:nvSpPr>
-        <p:spPr>
-          <a:xfrm xmlns:a="http://schemas.openxmlformats.org/drawingml/2006/main">
-            <a:off x="1104900" y="3352800"/>
-            <a:ext cx="2857500" cy="228600"/>
-          </a:xfrm>
-          <a:prstGeom xmlns:a="http://schemas.openxmlformats.org/drawingml/2006/main" prst="rect">
-            <a:avLst/>
-          </a:prstGeom>
-          <a:noFill xmlns:a="http://schemas.openxmlformats.org/drawingml/2006/main"/>
-          <a:ln xmlns:a="http://schemas.openxmlformats.org/drawingml/2006/main" w="0">
-            <a:noFill/>
-          </a:ln>
-        </p:spPr>
-        <p:txBody>
-          <a:bodyPr xmlns:a="http://schemas.openxmlformats.org/drawingml/2006/main" wrap="square" lIns="0" tIns="0" rIns="0" bIns="0" anchor="t"/>
-          <a:lstStyle xmlns:a="http://schemas.openxmlformats.org/drawingml/2006/main"/>
-          <a:p xmlns:a="http://schemas.openxmlformats.org/drawingml/2006/main">
-            <a:r>
-              <a:rPr lang="en-US" sz="1125" b="1">
-                <a:solidFill>
-                  <a:srgbClr val="D53A45"/>
-                </a:solidFill>
-                <a:latin typeface="Inter"/>
-                <a:ea typeface="Inter"/>
-              </a:rPr>
-              <a:t>ONE PROPOSITION</a:t>
-            </a:r>
-            <a:endParaRPr lang="en-US"/>
-          </a:p>
-        </p:txBody>
-      </p:sp>
-      <p:sp>
-        <p:nvSpPr>
-          <p:cNvPr id="21" name="promotion-headline"/>
-          <p:cNvSpPr txBox="1"/>
-          <p:nvPr/>
-        </p:nvSpPr>
-        <p:spPr>
-          <a:xfrm xmlns:a="http://schemas.openxmlformats.org/drawingml/2006/main">
-            <a:off x="1104900" y="3790950"/>
-            <a:ext cx="6477000" cy="723900"/>
-          </a:xfrm>
-          <a:prstGeom xmlns:a="http://schemas.openxmlformats.org/drawingml/2006/main" prst="rect">
-            <a:avLst/>
-          </a:prstGeom>
-          <a:noFill xmlns:a="http://schemas.openxmlformats.org/drawingml/2006/main"/>
-          <a:ln xmlns:a="http://schemas.openxmlformats.org/drawingml/2006/main" w="0">
-            <a:noFill/>
-          </a:ln>
-        </p:spPr>
-        <p:txBody>
-          <a:bodyPr xmlns:a="http://schemas.openxmlformats.org/drawingml/2006/main" wrap="square" lIns="0" tIns="0" rIns="0" bIns="0" anchor="t"/>
-          <a:lstStyle xmlns:a="http://schemas.openxmlformats.org/drawingml/2006/main"/>
-          <a:p xmlns:a="http://schemas.openxmlformats.org/drawingml/2006/main">
-            <a:r>
-              <a:rPr lang="en-US" sz="2625" b="1">
-                <a:solidFill>
-                  <a:srgbClr val="F2F0EA"/>
-                </a:solidFill>
-                <a:latin typeface="Inter"/>
-                <a:ea typeface="Inter"/>
-              </a:rPr>
-              <a:t>Make the next action visible.</a:t>
-            </a:r>
-            <a:endParaRPr lang="en-US"/>
-          </a:p>
-        </p:txBody>
-      </p:sp>
-      <p:sp>
-        <p:nvSpPr>
-          <p:cNvPr id="22" name="promotion-body"/>
-          <p:cNvSpPr txBox="1"/>
-          <p:nvPr/>
-        </p:nvSpPr>
-        <p:spPr>
-          <a:xfrm xmlns:a="http://schemas.openxmlformats.org/drawingml/2006/main">
-            <a:off x="1104900" y="4762500"/>
-            <a:ext cx="6191250" cy="457200"/>
-          </a:xfrm>
-          <a:prstGeom xmlns:a="http://schemas.openxmlformats.org/drawingml/2006/main" prst="rect">
-            <a:avLst/>
-          </a:prstGeom>
-          <a:noFill xmlns:a="http://schemas.openxmlformats.org/drawingml/2006/main"/>
-          <a:ln xmlns:a="http://schemas.openxmlformats.org/drawingml/2006/main" w="0">
-            <a:noFill/>
-          </a:ln>
-        </p:spPr>
-        <p:txBody>
-          <a:bodyPr xmlns:a="http://schemas.openxmlformats.org/drawingml/2006/main" wrap="square" lIns="0" tIns="0" rIns="0" bIns="0" anchor="t"/>
-          <a:lstStyle xmlns:a="http://schemas.openxmlformats.org/drawingml/2006/main"/>
-          <a:p xmlns:a="http://schemas.openxmlformats.org/drawingml/2006/main">
-            <a:r>
-              <a:rPr lang="en-US" sz="1575">
-                <a:solidFill>
-                  <a:srgbClr val="F2F0EA"/>
-                </a:solidFill>
-                <a:latin typeface="Inter"/>
-                <a:ea typeface="Inter"/>
-              </a:rPr>
-              <a:t>A clear invitation earns attention when evidence and access arrive together.</a:t>
-            </a:r>
-            <a:endParaRPr lang="en-US"/>
-          </a:p>
-        </p:txBody>
-      </p:sp>
-      <p:pic>
-        <p:nvPicPr>
-          <p:cNvPr id="23" name="promotion-hero-frame">
-            <a:extLst xmlns:a="http://schemas.openxmlformats.org/drawingml/2006/main">
-              <a:ext uri="{C183D7F6-B498-43B3-948B-1728B52AA6E4}">
-                <adec:decorative xmlns:adec="http://schemas.microsoft.com/office/drawing/2017/decorative" val="1"/>
-              </a:ext>
-            </a:extLst>
-          </p:cNvPr>
-          <p:cNvPicPr/>
-          <p:nvPr/>
-        </p:nvPicPr>
-        <p:blipFill>
-          <a:blip xmlns:r="http://schemas.openxmlformats.org/officeDocument/2006/relationships" xmlns:a="http://schemas.openxmlformats.org/drawingml/2006/main" r:embed="rIdOfficeKitImage9df32179333a9f35_1"/>
-          <a:srcRect xmlns:a="http://schemas.openxmlformats.org/drawingml/2006/main" l="0" t="31920" r="0" b="31920"/>
-          <a:stretch xmlns:a="http://schemas.openxmlformats.org/drawingml/2006/main">
-            <a:fillRect/>
-          </a:stretch>
-        </p:blipFill>
-        <p:spPr>
-          <a:xfrm xmlns:a="http://schemas.openxmlformats.org/drawingml/2006/main">
-            <a:off x="9525000" y="3143250"/>
-            <a:ext cx="4000500" cy="2571750"/>
-          </a:xfrm>
-          <a:prstGeom xmlns:a="http://schemas.openxmlformats.org/drawingml/2006/main" prst="rect">
-            <a:avLst/>
-          </a:prstGeom>
-        </p:spPr>
-      </p:pic>
-      <p:sp>
-        <p:nvSpPr>
-          <p:cNvPr id="24" name="promotion-image-rule"/>
-          <p:cNvSpPr/>
-          <p:nvPr/>
-        </p:nvSpPr>
-        <p:spPr>
-          <a:xfrm xmlns:a="http://schemas.openxmlformats.org/drawingml/2006/main">
-            <a:off x="9525000" y="5905500"/>
-            <a:ext cx="4000500" cy="0"/>
-          </a:xfrm>
-          <a:prstGeom xmlns:a="http://schemas.openxmlformats.org/drawingml/2006/main" prst="line">
-            <a:avLst/>
-          </a:prstGeom>
-          <a:noFill xmlns:a="http://schemas.openxmlformats.org/drawingml/2006/main"/>
-          <a:ln xmlns:a="http://schemas.openxmlformats.org/drawingml/2006/main" w="38100">
-            <a:solidFill>
-              <a:srgbClr val="D53A45"/>
-            </a:solidFill>
-            <a:prstDash val="solid"/>
-          </a:ln>
-        </p:spPr>
-        <p:txBody>
-          <a:bodyPr xmlns:a="http://schemas.openxmlformats.org/drawingml/2006/main" wrap="square" lIns="0" tIns="0" rIns="0" bIns="0" anchor="t"/>
-          <a:lstStyle xmlns:a="http://schemas.openxmlformats.org/drawingml/2006/main"/>
-          <a:p xmlns:a="http://schemas.openxmlformats.org/drawingml/2006/main">
-            <a:r>
-              <a:rPr lang="en-US"/>
-              <a:t/>
-            </a:r>
-            <a:endParaRPr lang="en-US"/>
-          </a:p>
-        </p:txBody>
-      </p:sp>
-      <p:sp>
-        <p:nvSpPr>
-          <p:cNvPr id="25" name="promotion-image-label"/>
-          <p:cNvSpPr txBox="1"/>
-          <p:nvPr/>
-        </p:nvSpPr>
-        <p:spPr>
-          <a:xfrm xmlns:a="http://schemas.openxmlformats.org/drawingml/2006/main">
-            <a:off x="9525000" y="6153150"/>
-            <a:ext cx="4000500" cy="247650"/>
-          </a:xfrm>
-          <a:prstGeom xmlns:a="http://schemas.openxmlformats.org/drawingml/2006/main" prst="rect">
-            <a:avLst/>
-          </a:prstGeom>
-          <a:noFill xmlns:a="http://schemas.openxmlformats.org/drawingml/2006/main"/>
-          <a:ln xmlns:a="http://schemas.openxmlformats.org/drawingml/2006/main" w="0">
-            <a:noFill/>
-          </a:ln>
-        </p:spPr>
-        <p:txBody>
-          <a:bodyPr xmlns:a="http://schemas.openxmlformats.org/drawingml/2006/main" wrap="square" lIns="0" tIns="0" rIns="0" bIns="0" anchor="t"/>
-          <a:lstStyle xmlns:a="http://schemas.openxmlformats.org/drawingml/2006/main"/>
-          <a:p xmlns:a="http://schemas.openxmlformats.org/drawingml/2006/main">
-            <a:r>
-              <a:rPr lang="en-US" sz="1275" b="1">
-                <a:solidFill>
-                  <a:srgbClr val="D53A45"/>
-                </a:solidFill>
-                <a:latin typeface="Inter"/>
-                <a:ea typeface="Inter"/>
-              </a:rPr>
-              <a:t>INVITE · PROVE · MOVE</a:t>
-            </a:r>
-            <a:endParaRPr lang="en-US"/>
-          </a:p>
-        </p:txBody>
-      </p:sp>
-      <p:sp>
-        <p:nvSpPr>
-          <p:cNvPr id="26" name="source"/>
-          <p:cNvSpPr txBox="1"/>
-          <p:nvPr/>
-        </p:nvSpPr>
-        <p:spPr>
-          <a:xfrm xmlns:a="http://schemas.openxmlformats.org/drawingml/2006/main">
-            <a:off x="914400" y="7810500"/>
-            <a:ext cx="10953750" cy="209550"/>
-          </a:xfrm>
-          <a:prstGeom xmlns:a="http://schemas.openxmlformats.org/drawingml/2006/main" prst="rect">
-            <a:avLst/>
-          </a:prstGeom>
-          <a:noFill xmlns:a="http://schemas.openxmlformats.org/drawingml/2006/main"/>
-          <a:ln xmlns:a="http://schemas.openxmlformats.org/drawingml/2006/main" w="0">
-            <a:noFill/>
-          </a:ln>
-        </p:spPr>
-        <p:txBody>
-          <a:bodyPr xmlns:a="http://schemas.openxmlformats.org/drawingml/2006/main" wrap="square" lIns="0" tIns="0" rIns="0" bIns="0" anchor="t"/>
-          <a:lstStyle xmlns:a="http://schemas.openxmlformats.org/drawingml/2006/main"/>
-          <a:p xmlns:a="http://schemas.openxmlformats.org/drawingml/2006/main">
-            <a:r>
-              <a:rPr lang="en-US" sz="1050">
-                <a:solidFill>
-                  <a:srgbClr val="7D7D7B"/>
-                </a:solidFill>
-                <a:latin typeface="Inter"/>
-                <a:ea typeface="Inter"/>
-              </a:rPr>
-              <a:t>Source: illustrative calibration brief · every claim is fictional and bounded</a:t>
-            </a:r>
-            <a:endParaRPr lang="en-US"/>
-          </a:p>
-        </p:txBody>
-      </p:sp>
-      <p:sp>
-        <p:nvSpPr>
-          <p:cNvPr id="27" name="page-number"/>
-          <p:cNvSpPr txBox="1"/>
-          <p:nvPr/>
-        </p:nvSpPr>
-        <p:spPr>
-          <a:xfrm xmlns:a="http://schemas.openxmlformats.org/drawingml/2006/main">
-            <a:off x="13335000" y="7810500"/>
-            <a:ext cx="952500" cy="209550"/>
-          </a:xfrm>
-          <a:prstGeom xmlns:a="http://schemas.openxmlformats.org/drawingml/2006/main" prst="rect">
-            <a:avLst/>
-          </a:prstGeom>
-          <a:noFill xmlns:a="http://schemas.openxmlformats.org/drawingml/2006/main"/>
-          <a:ln xmlns:a="http://schemas.openxmlformats.org/drawingml/2006/main" w="0">
-            <a:noFill/>
-          </a:ln>
-        </p:spPr>
-        <p:txBody>
-          <a:bodyPr xmlns:a="http://schemas.openxmlformats.org/drawingml/2006/main" wrap="square" lIns="0" tIns="0" rIns="0" bIns="0" anchor="t"/>
-          <a:lstStyle xmlns:a="http://schemas.openxmlformats.org/drawingml/2006/main"/>
-          <a:p xmlns:a="http://schemas.openxmlformats.org/drawingml/2006/main">
-            <a:pPr algn="r"/>
-            <a:r>
-              <a:rPr lang="en-US" sz="1050">
-                <a:solidFill>
-                  <a:srgbClr val="7D7D7B"/>
-                </a:solidFill>
-                <a:latin typeface="Inter"/>
-                <a:ea typeface="Inter"/>
-              </a:rPr>
-              <a:t>2 / 6</a:t>
-            </a:r>
-            <a:endParaRPr lang="en-US"/>
-          </a:p>
-        </p:txBody>
-      </p:sp>
-    </p:spTree>
-  </p:cSld>
-  <p:clrMapOvr>
-    <a:masterClrMapping xmlns:a="http://schemas.openxmlformats.org/drawingml/2006/main"/>
-  </p:clrMapOvr>
-</p:sld>
-</file>
-
-<file path=ppt/slides/slide3.xml><?xml version="1.0" encoding="utf-8"?>
-<p:sld xmlns:p="http://schemas.openxmlformats.org/presentationml/2006/main">
-  <p:cSld name="Evidence">
     <p:bg>
       <p:bgPr>
         <a:blipFill xmlns:a="http://schemas.openxmlformats.org/drawingml/2006/main">
@@ -1530,6 +553,983 @@
       </p:grpSpPr>
       <p:sp>
         <p:nvSpPr>
+          <p:cNvPr id="2" name="argument-paper-scrim"/>
+          <p:cNvSpPr/>
+          <p:nvPr/>
+        </p:nvSpPr>
+        <p:spPr>
+          <a:xfrm xmlns:a="http://schemas.openxmlformats.org/drawingml/2006/main">
+            <a:off x="0" y="0"/>
+            <a:ext cx="8191500" cy="8572500"/>
+          </a:xfrm>
+          <a:prstGeom xmlns:a="http://schemas.openxmlformats.org/drawingml/2006/main" prst="rect">
+            <a:avLst/>
+          </a:prstGeom>
+          <a:solidFill xmlns:a="http://schemas.openxmlformats.org/drawingml/2006/main">
+            <a:srgbClr val="111214">
+              <a:alpha val="96000"/>
+            </a:srgbClr>
+          </a:solidFill>
+          <a:ln xmlns:a="http://schemas.openxmlformats.org/drawingml/2006/main" w="0">
+            <a:solidFill>
+              <a:srgbClr val="111214"/>
+            </a:solidFill>
+            <a:prstDash val="solid"/>
+          </a:ln>
+        </p:spPr>
+        <p:txBody>
+          <a:bodyPr xmlns:a="http://schemas.openxmlformats.org/drawingml/2006/main" wrap="square" lIns="0" tIns="0" rIns="0" bIns="0" anchor="t"/>
+          <a:lstStyle xmlns:a="http://schemas.openxmlformats.org/drawingml/2006/main"/>
+          <a:p xmlns:a="http://schemas.openxmlformats.org/drawingml/2006/main">
+            <a:r>
+              <a:rPr lang="en-US"/>
+              <a:t/>
+            </a:r>
+            <a:endParaRPr lang="en-US"/>
+          </a:p>
+        </p:txBody>
+      </p:sp>
+      <p:sp>
+        <p:nvSpPr>
+          <p:cNvPr id="3" name="fixed-rail"/>
+          <p:cNvSpPr/>
+          <p:nvPr/>
+        </p:nvSpPr>
+        <p:spPr>
+          <a:xfrm xmlns:a="http://schemas.openxmlformats.org/drawingml/2006/main">
+            <a:off x="323850" y="0"/>
+            <a:ext cx="114300" cy="8572500"/>
+          </a:xfrm>
+          <a:prstGeom xmlns:a="http://schemas.openxmlformats.org/drawingml/2006/main" prst="rect">
+            <a:avLst/>
+          </a:prstGeom>
+          <a:solidFill xmlns:a="http://schemas.openxmlformats.org/drawingml/2006/main">
+            <a:srgbClr val="D53A45"/>
+          </a:solidFill>
+          <a:ln xmlns:a="http://schemas.openxmlformats.org/drawingml/2006/main" w="0">
+            <a:solidFill>
+              <a:srgbClr val="D53A45"/>
+            </a:solidFill>
+            <a:prstDash val="solid"/>
+          </a:ln>
+        </p:spPr>
+        <p:txBody>
+          <a:bodyPr xmlns:a="http://schemas.openxmlformats.org/drawingml/2006/main" wrap="square" lIns="0" tIns="0" rIns="0" bIns="0" anchor="t"/>
+          <a:lstStyle xmlns:a="http://schemas.openxmlformats.org/drawingml/2006/main"/>
+          <a:p xmlns:a="http://schemas.openxmlformats.org/drawingml/2006/main">
+            <a:r>
+              <a:rPr lang="en-US"/>
+              <a:t/>
+            </a:r>
+            <a:endParaRPr lang="en-US"/>
+          </a:p>
+        </p:txBody>
+      </p:sp>
+      <p:sp>
+        <p:nvSpPr>
+          <p:cNvPr id="4" name="fixed-nav-0"/>
+          <p:cNvSpPr/>
+          <p:nvPr/>
+        </p:nvSpPr>
+        <p:spPr>
+          <a:xfrm xmlns:a="http://schemas.openxmlformats.org/drawingml/2006/main">
+            <a:off x="914400" y="1752600"/>
+            <a:ext cx="1516380" cy="209550"/>
+          </a:xfrm>
+          <a:prstGeom xmlns:a="http://schemas.openxmlformats.org/drawingml/2006/main" prst="rect">
+            <a:avLst/>
+          </a:prstGeom>
+          <a:solidFill xmlns:a="http://schemas.openxmlformats.org/drawingml/2006/main">
+            <a:srgbClr val="131A24"/>
+          </a:solidFill>
+          <a:ln xmlns:a="http://schemas.openxmlformats.org/drawingml/2006/main" w="0">
+            <a:solidFill>
+              <a:srgbClr val="131A24"/>
+            </a:solidFill>
+            <a:prstDash val="solid"/>
+          </a:ln>
+        </p:spPr>
+        <p:txBody>
+          <a:bodyPr xmlns:a="http://schemas.openxmlformats.org/drawingml/2006/main" wrap="square" lIns="0" tIns="0" rIns="0" bIns="0" anchor="t"/>
+          <a:lstStyle xmlns:a="http://schemas.openxmlformats.org/drawingml/2006/main"/>
+          <a:p xmlns:a="http://schemas.openxmlformats.org/drawingml/2006/main">
+            <a:r>
+              <a:rPr lang="en-US"/>
+              <a:t/>
+            </a:r>
+            <a:endParaRPr lang="en-US"/>
+          </a:p>
+        </p:txBody>
+      </p:sp>
+      <p:sp>
+        <p:nvSpPr>
+          <p:cNvPr id="5" name="fixed-nav-label-0"/>
+          <p:cNvSpPr txBox="1"/>
+          <p:nvPr/>
+        </p:nvSpPr>
+        <p:spPr>
+          <a:xfrm xmlns:a="http://schemas.openxmlformats.org/drawingml/2006/main">
+            <a:off x="990600" y="1790700"/>
+            <a:ext cx="1363980" cy="133350"/>
+          </a:xfrm>
+          <a:prstGeom xmlns:a="http://schemas.openxmlformats.org/drawingml/2006/main" prst="rect">
+            <a:avLst/>
+          </a:prstGeom>
+          <a:noFill xmlns:a="http://schemas.openxmlformats.org/drawingml/2006/main"/>
+          <a:ln xmlns:a="http://schemas.openxmlformats.org/drawingml/2006/main" w="0">
+            <a:noFill/>
+          </a:ln>
+        </p:spPr>
+        <p:txBody>
+          <a:bodyPr xmlns:a="http://schemas.openxmlformats.org/drawingml/2006/main" wrap="square" lIns="0" tIns="0" rIns="0" bIns="0" anchor="t"/>
+          <a:lstStyle xmlns:a="http://schemas.openxmlformats.org/drawingml/2006/main"/>
+          <a:p xmlns:a="http://schemas.openxmlformats.org/drawingml/2006/main">
+            <a:pPr algn="ctr"/>
+            <a:r>
+              <a:rPr lang="en-US" sz="675" b="1">
+                <a:solidFill>
+                  <a:srgbClr val="7D7D7B"/>
+                </a:solidFill>
+                <a:latin typeface="Inter"/>
+                <a:ea typeface="Inter"/>
+              </a:rPr>
+              <a:t>BRIEF</a:t>
+            </a:r>
+            <a:endParaRPr lang="en-US"/>
+          </a:p>
+        </p:txBody>
+      </p:sp>
+      <p:sp>
+        <p:nvSpPr>
+          <p:cNvPr id="6" name="fixed-nav-1"/>
+          <p:cNvSpPr/>
+          <p:nvPr/>
+        </p:nvSpPr>
+        <p:spPr>
+          <a:xfrm xmlns:a="http://schemas.openxmlformats.org/drawingml/2006/main">
+            <a:off x="2487930" y="1752600"/>
+            <a:ext cx="1516380" cy="209550"/>
+          </a:xfrm>
+          <a:prstGeom xmlns:a="http://schemas.openxmlformats.org/drawingml/2006/main" prst="rect">
+            <a:avLst/>
+          </a:prstGeom>
+          <a:solidFill xmlns:a="http://schemas.openxmlformats.org/drawingml/2006/main">
+            <a:srgbClr val="F2F0EA"/>
+          </a:solidFill>
+          <a:ln xmlns:a="http://schemas.openxmlformats.org/drawingml/2006/main" w="0">
+            <a:solidFill>
+              <a:srgbClr val="F2F0EA"/>
+            </a:solidFill>
+            <a:prstDash val="solid"/>
+          </a:ln>
+        </p:spPr>
+        <p:txBody>
+          <a:bodyPr xmlns:a="http://schemas.openxmlformats.org/drawingml/2006/main" wrap="square" lIns="0" tIns="0" rIns="0" bIns="0" anchor="t"/>
+          <a:lstStyle xmlns:a="http://schemas.openxmlformats.org/drawingml/2006/main"/>
+          <a:p xmlns:a="http://schemas.openxmlformats.org/drawingml/2006/main">
+            <a:r>
+              <a:rPr lang="en-US"/>
+              <a:t/>
+            </a:r>
+            <a:endParaRPr lang="en-US"/>
+          </a:p>
+        </p:txBody>
+      </p:sp>
+      <p:sp>
+        <p:nvSpPr>
+          <p:cNvPr id="7" name="fixed-nav-label-1"/>
+          <p:cNvSpPr txBox="1"/>
+          <p:nvPr/>
+        </p:nvSpPr>
+        <p:spPr>
+          <a:xfrm xmlns:a="http://schemas.openxmlformats.org/drawingml/2006/main">
+            <a:off x="2564130" y="1790700"/>
+            <a:ext cx="1363980" cy="133350"/>
+          </a:xfrm>
+          <a:prstGeom xmlns:a="http://schemas.openxmlformats.org/drawingml/2006/main" prst="rect">
+            <a:avLst/>
+          </a:prstGeom>
+          <a:noFill xmlns:a="http://schemas.openxmlformats.org/drawingml/2006/main"/>
+          <a:ln xmlns:a="http://schemas.openxmlformats.org/drawingml/2006/main" w="0">
+            <a:noFill/>
+          </a:ln>
+        </p:spPr>
+        <p:txBody>
+          <a:bodyPr xmlns:a="http://schemas.openxmlformats.org/drawingml/2006/main" wrap="square" lIns="0" tIns="0" rIns="0" bIns="0" anchor="t"/>
+          <a:lstStyle xmlns:a="http://schemas.openxmlformats.org/drawingml/2006/main"/>
+          <a:p xmlns:a="http://schemas.openxmlformats.org/drawingml/2006/main">
+            <a:pPr algn="ctr"/>
+            <a:r>
+              <a:rPr lang="en-US" sz="675" b="1">
+                <a:solidFill>
+                  <a:srgbClr val="202124"/>
+                </a:solidFill>
+                <a:latin typeface="Inter"/>
+                <a:ea typeface="Inter"/>
+              </a:rPr>
+              <a:t>SIGNAL</a:t>
+            </a:r>
+            <a:endParaRPr lang="en-US"/>
+          </a:p>
+        </p:txBody>
+      </p:sp>
+      <p:sp>
+        <p:nvSpPr>
+          <p:cNvPr id="8" name="fixed-nav-2"/>
+          <p:cNvSpPr/>
+          <p:nvPr/>
+        </p:nvSpPr>
+        <p:spPr>
+          <a:xfrm xmlns:a="http://schemas.openxmlformats.org/drawingml/2006/main">
+            <a:off x="4061460" y="1752600"/>
+            <a:ext cx="1516380" cy="209550"/>
+          </a:xfrm>
+          <a:prstGeom xmlns:a="http://schemas.openxmlformats.org/drawingml/2006/main" prst="rect">
+            <a:avLst/>
+          </a:prstGeom>
+          <a:solidFill xmlns:a="http://schemas.openxmlformats.org/drawingml/2006/main">
+            <a:srgbClr val="131A24"/>
+          </a:solidFill>
+          <a:ln xmlns:a="http://schemas.openxmlformats.org/drawingml/2006/main" w="0">
+            <a:solidFill>
+              <a:srgbClr val="131A24"/>
+            </a:solidFill>
+            <a:prstDash val="solid"/>
+          </a:ln>
+        </p:spPr>
+        <p:txBody>
+          <a:bodyPr xmlns:a="http://schemas.openxmlformats.org/drawingml/2006/main" wrap="square" lIns="0" tIns="0" rIns="0" bIns="0" anchor="t"/>
+          <a:lstStyle xmlns:a="http://schemas.openxmlformats.org/drawingml/2006/main"/>
+          <a:p xmlns:a="http://schemas.openxmlformats.org/drawingml/2006/main">
+            <a:r>
+              <a:rPr lang="en-US"/>
+              <a:t/>
+            </a:r>
+            <a:endParaRPr lang="en-US"/>
+          </a:p>
+        </p:txBody>
+      </p:sp>
+      <p:sp>
+        <p:nvSpPr>
+          <p:cNvPr id="9" name="fixed-nav-label-2"/>
+          <p:cNvSpPr txBox="1"/>
+          <p:nvPr/>
+        </p:nvSpPr>
+        <p:spPr>
+          <a:xfrm xmlns:a="http://schemas.openxmlformats.org/drawingml/2006/main">
+            <a:off x="4137660" y="1790700"/>
+            <a:ext cx="1363980" cy="133350"/>
+          </a:xfrm>
+          <a:prstGeom xmlns:a="http://schemas.openxmlformats.org/drawingml/2006/main" prst="rect">
+            <a:avLst/>
+          </a:prstGeom>
+          <a:noFill xmlns:a="http://schemas.openxmlformats.org/drawingml/2006/main"/>
+          <a:ln xmlns:a="http://schemas.openxmlformats.org/drawingml/2006/main" w="0">
+            <a:noFill/>
+          </a:ln>
+        </p:spPr>
+        <p:txBody>
+          <a:bodyPr xmlns:a="http://schemas.openxmlformats.org/drawingml/2006/main" wrap="square" lIns="0" tIns="0" rIns="0" bIns="0" anchor="t"/>
+          <a:lstStyle xmlns:a="http://schemas.openxmlformats.org/drawingml/2006/main"/>
+          <a:p xmlns:a="http://schemas.openxmlformats.org/drawingml/2006/main">
+            <a:pPr algn="ctr"/>
+            <a:r>
+              <a:rPr lang="en-US" sz="675" b="1">
+                <a:solidFill>
+                  <a:srgbClr val="7D7D7B"/>
+                </a:solidFill>
+                <a:latin typeface="Inter"/>
+                <a:ea typeface="Inter"/>
+              </a:rPr>
+              <a:t>EVIDENCE</a:t>
+            </a:r>
+            <a:endParaRPr lang="en-US"/>
+          </a:p>
+        </p:txBody>
+      </p:sp>
+      <p:sp>
+        <p:nvSpPr>
+          <p:cNvPr id="10" name="fixed-nav-3"/>
+          <p:cNvSpPr/>
+          <p:nvPr/>
+        </p:nvSpPr>
+        <p:spPr>
+          <a:xfrm xmlns:a="http://schemas.openxmlformats.org/drawingml/2006/main">
+            <a:off x="5634990" y="1752600"/>
+            <a:ext cx="1516380" cy="209550"/>
+          </a:xfrm>
+          <a:prstGeom xmlns:a="http://schemas.openxmlformats.org/drawingml/2006/main" prst="rect">
+            <a:avLst/>
+          </a:prstGeom>
+          <a:solidFill xmlns:a="http://schemas.openxmlformats.org/drawingml/2006/main">
+            <a:srgbClr val="131A24"/>
+          </a:solidFill>
+          <a:ln xmlns:a="http://schemas.openxmlformats.org/drawingml/2006/main" w="0">
+            <a:solidFill>
+              <a:srgbClr val="131A24"/>
+            </a:solidFill>
+            <a:prstDash val="solid"/>
+          </a:ln>
+        </p:spPr>
+        <p:txBody>
+          <a:bodyPr xmlns:a="http://schemas.openxmlformats.org/drawingml/2006/main" wrap="square" lIns="0" tIns="0" rIns="0" bIns="0" anchor="t"/>
+          <a:lstStyle xmlns:a="http://schemas.openxmlformats.org/drawingml/2006/main"/>
+          <a:p xmlns:a="http://schemas.openxmlformats.org/drawingml/2006/main">
+            <a:r>
+              <a:rPr lang="en-US"/>
+              <a:t/>
+            </a:r>
+            <a:endParaRPr lang="en-US"/>
+          </a:p>
+        </p:txBody>
+      </p:sp>
+      <p:sp>
+        <p:nvSpPr>
+          <p:cNvPr id="11" name="fixed-nav-label-3"/>
+          <p:cNvSpPr txBox="1"/>
+          <p:nvPr/>
+        </p:nvSpPr>
+        <p:spPr>
+          <a:xfrm xmlns:a="http://schemas.openxmlformats.org/drawingml/2006/main">
+            <a:off x="5711190" y="1790700"/>
+            <a:ext cx="1363980" cy="133350"/>
+          </a:xfrm>
+          <a:prstGeom xmlns:a="http://schemas.openxmlformats.org/drawingml/2006/main" prst="rect">
+            <a:avLst/>
+          </a:prstGeom>
+          <a:noFill xmlns:a="http://schemas.openxmlformats.org/drawingml/2006/main"/>
+          <a:ln xmlns:a="http://schemas.openxmlformats.org/drawingml/2006/main" w="0">
+            <a:noFill/>
+          </a:ln>
+        </p:spPr>
+        <p:txBody>
+          <a:bodyPr xmlns:a="http://schemas.openxmlformats.org/drawingml/2006/main" wrap="square" lIns="0" tIns="0" rIns="0" bIns="0" anchor="t"/>
+          <a:lstStyle xmlns:a="http://schemas.openxmlformats.org/drawingml/2006/main"/>
+          <a:p xmlns:a="http://schemas.openxmlformats.org/drawingml/2006/main">
+            <a:pPr algn="ctr"/>
+            <a:r>
+              <a:rPr lang="en-US" sz="675" b="1">
+                <a:solidFill>
+                  <a:srgbClr val="7D7D7B"/>
+                </a:solidFill>
+                <a:latin typeface="Inter"/>
+                <a:ea typeface="Inter"/>
+              </a:rPr>
+              <a:t>CHOICE</a:t>
+            </a:r>
+            <a:endParaRPr lang="en-US"/>
+          </a:p>
+        </p:txBody>
+      </p:sp>
+      <p:sp>
+        <p:nvSpPr>
+          <p:cNvPr id="12" name="fixed-nav-4"/>
+          <p:cNvSpPr/>
+          <p:nvPr/>
+        </p:nvSpPr>
+        <p:spPr>
+          <a:xfrm xmlns:a="http://schemas.openxmlformats.org/drawingml/2006/main">
+            <a:off x="7208520" y="1752600"/>
+            <a:ext cx="1516380" cy="209550"/>
+          </a:xfrm>
+          <a:prstGeom xmlns:a="http://schemas.openxmlformats.org/drawingml/2006/main" prst="rect">
+            <a:avLst/>
+          </a:prstGeom>
+          <a:solidFill xmlns:a="http://schemas.openxmlformats.org/drawingml/2006/main">
+            <a:srgbClr val="131A24"/>
+          </a:solidFill>
+          <a:ln xmlns:a="http://schemas.openxmlformats.org/drawingml/2006/main" w="0">
+            <a:solidFill>
+              <a:srgbClr val="131A24"/>
+            </a:solidFill>
+            <a:prstDash val="solid"/>
+          </a:ln>
+        </p:spPr>
+        <p:txBody>
+          <a:bodyPr xmlns:a="http://schemas.openxmlformats.org/drawingml/2006/main" wrap="square" lIns="0" tIns="0" rIns="0" bIns="0" anchor="t"/>
+          <a:lstStyle xmlns:a="http://schemas.openxmlformats.org/drawingml/2006/main"/>
+          <a:p xmlns:a="http://schemas.openxmlformats.org/drawingml/2006/main">
+            <a:r>
+              <a:rPr lang="en-US"/>
+              <a:t/>
+            </a:r>
+            <a:endParaRPr lang="en-US"/>
+          </a:p>
+        </p:txBody>
+      </p:sp>
+      <p:sp>
+        <p:nvSpPr>
+          <p:cNvPr id="13" name="fixed-nav-label-4"/>
+          <p:cNvSpPr txBox="1"/>
+          <p:nvPr/>
+        </p:nvSpPr>
+        <p:spPr>
+          <a:xfrm xmlns:a="http://schemas.openxmlformats.org/drawingml/2006/main">
+            <a:off x="7284720" y="1790700"/>
+            <a:ext cx="1363980" cy="133350"/>
+          </a:xfrm>
+          <a:prstGeom xmlns:a="http://schemas.openxmlformats.org/drawingml/2006/main" prst="rect">
+            <a:avLst/>
+          </a:prstGeom>
+          <a:noFill xmlns:a="http://schemas.openxmlformats.org/drawingml/2006/main"/>
+          <a:ln xmlns:a="http://schemas.openxmlformats.org/drawingml/2006/main" w="0">
+            <a:noFill/>
+          </a:ln>
+        </p:spPr>
+        <p:txBody>
+          <a:bodyPr xmlns:a="http://schemas.openxmlformats.org/drawingml/2006/main" wrap="square" lIns="0" tIns="0" rIns="0" bIns="0" anchor="t"/>
+          <a:lstStyle xmlns:a="http://schemas.openxmlformats.org/drawingml/2006/main"/>
+          <a:p xmlns:a="http://schemas.openxmlformats.org/drawingml/2006/main">
+            <a:pPr algn="ctr"/>
+            <a:r>
+              <a:rPr lang="en-US" sz="675" b="1">
+                <a:solidFill>
+                  <a:srgbClr val="7D7D7B"/>
+                </a:solidFill>
+                <a:latin typeface="Inter"/>
+                <a:ea typeface="Inter"/>
+              </a:rPr>
+              <a:t>NEXT</a:t>
+            </a:r>
+            <a:endParaRPr lang="en-US"/>
+          </a:p>
+        </p:txBody>
+      </p:sp>
+      <p:pic>
+        <p:nvPicPr>
+          <p:cNvPr id="14" name="argument-photo-band">
+            <a:extLst xmlns:a="http://schemas.openxmlformats.org/drawingml/2006/main">
+              <a:ext uri="{C183D7F6-B498-43B3-948B-1728B52AA6E4}">
+                <adec:decorative xmlns:adec="http://schemas.microsoft.com/office/drawing/2017/decorative" val="1"/>
+              </a:ext>
+            </a:extLst>
+          </p:cNvPr>
+          <p:cNvPicPr/>
+          <p:nvPr/>
+        </p:nvPicPr>
+        <p:blipFill>
+          <a:blip xmlns:r="http://schemas.openxmlformats.org/officeDocument/2006/relationships" xmlns:a="http://schemas.openxmlformats.org/drawingml/2006/main" r:embed="rIdOfficeKitImage8fbc298f8d1b7a3c_1"/>
+          <a:srcRect xmlns:a="http://schemas.openxmlformats.org/drawingml/2006/main" l="0" t="47258" r="0" b="47258"/>
+          <a:stretch xmlns:a="http://schemas.openxmlformats.org/drawingml/2006/main">
+            <a:fillRect/>
+          </a:stretch>
+        </p:blipFill>
+        <p:spPr>
+          <a:xfrm xmlns:a="http://schemas.openxmlformats.org/drawingml/2006/main">
+            <a:off x="0" y="0"/>
+            <a:ext cx="15240000" cy="1485900"/>
+          </a:xfrm>
+          <a:prstGeom xmlns:a="http://schemas.openxmlformats.org/drawingml/2006/main" prst="rect">
+            <a:avLst/>
+          </a:prstGeom>
+        </p:spPr>
+      </p:pic>
+      <p:sp>
+        <p:nvSpPr>
+          <p:cNvPr id="15" name="argument-photo-scrim"/>
+          <p:cNvSpPr/>
+          <p:nvPr/>
+        </p:nvSpPr>
+        <p:spPr>
+          <a:xfrm xmlns:a="http://schemas.openxmlformats.org/drawingml/2006/main">
+            <a:off x="0" y="0"/>
+            <a:ext cx="15240000" cy="1485900"/>
+          </a:xfrm>
+          <a:prstGeom xmlns:a="http://schemas.openxmlformats.org/drawingml/2006/main" prst="rect">
+            <a:avLst/>
+          </a:prstGeom>
+          <a:solidFill xmlns:a="http://schemas.openxmlformats.org/drawingml/2006/main">
+            <a:srgbClr val="F2F0EA">
+              <a:alpha val="62000"/>
+            </a:srgbClr>
+          </a:solidFill>
+          <a:ln xmlns:a="http://schemas.openxmlformats.org/drawingml/2006/main" w="0">
+            <a:solidFill>
+              <a:srgbClr val="F2F0EA"/>
+            </a:solidFill>
+            <a:prstDash val="solid"/>
+          </a:ln>
+        </p:spPr>
+        <p:txBody>
+          <a:bodyPr xmlns:a="http://schemas.openxmlformats.org/drawingml/2006/main" wrap="square" lIns="0" tIns="0" rIns="0" bIns="0" anchor="t"/>
+          <a:lstStyle xmlns:a="http://schemas.openxmlformats.org/drawingml/2006/main"/>
+          <a:p xmlns:a="http://schemas.openxmlformats.org/drawingml/2006/main">
+            <a:r>
+              <a:rPr lang="en-US"/>
+              <a:t/>
+            </a:r>
+            <a:endParaRPr lang="en-US"/>
+          </a:p>
+        </p:txBody>
+      </p:sp>
+      <p:sp>
+        <p:nvSpPr>
+          <p:cNvPr id="16" name="argument-photo-rule"/>
+          <p:cNvSpPr/>
+          <p:nvPr/>
+        </p:nvSpPr>
+        <p:spPr>
+          <a:xfrm xmlns:a="http://schemas.openxmlformats.org/drawingml/2006/main">
+            <a:off x="914400" y="1438275"/>
+            <a:ext cx="13411200" cy="0"/>
+          </a:xfrm>
+          <a:prstGeom xmlns:a="http://schemas.openxmlformats.org/drawingml/2006/main" prst="line">
+            <a:avLst/>
+          </a:prstGeom>
+          <a:noFill xmlns:a="http://schemas.openxmlformats.org/drawingml/2006/main"/>
+          <a:ln xmlns:a="http://schemas.openxmlformats.org/drawingml/2006/main" w="38100">
+            <a:solidFill>
+              <a:srgbClr val="D53A45"/>
+            </a:solidFill>
+            <a:prstDash val="solid"/>
+          </a:ln>
+        </p:spPr>
+        <p:txBody>
+          <a:bodyPr xmlns:a="http://schemas.openxmlformats.org/drawingml/2006/main" wrap="square" lIns="0" tIns="0" rIns="0" bIns="0" anchor="t"/>
+          <a:lstStyle xmlns:a="http://schemas.openxmlformats.org/drawingml/2006/main"/>
+          <a:p xmlns:a="http://schemas.openxmlformats.org/drawingml/2006/main">
+            <a:r>
+              <a:rPr lang="en-US"/>
+              <a:t/>
+            </a:r>
+            <a:endParaRPr lang="en-US"/>
+          </a:p>
+        </p:txBody>
+      </p:sp>
+      <p:sp>
+        <p:nvSpPr>
+          <p:cNvPr id="17" name="NOIR FIELD PICTORIAL · ARGUMENT"/>
+          <p:cNvSpPr txBox="1"/>
+          <p:nvPr/>
+        </p:nvSpPr>
+        <p:spPr>
+          <a:xfrm xmlns:a="http://schemas.openxmlformats.org/drawingml/2006/main">
+            <a:off x="914400" y="228600"/>
+            <a:ext cx="9525000" cy="190500"/>
+          </a:xfrm>
+          <a:prstGeom xmlns:a="http://schemas.openxmlformats.org/drawingml/2006/main" prst="rect">
+            <a:avLst/>
+          </a:prstGeom>
+          <a:noFill xmlns:a="http://schemas.openxmlformats.org/drawingml/2006/main"/>
+          <a:ln xmlns:a="http://schemas.openxmlformats.org/drawingml/2006/main" w="0">
+            <a:noFill/>
+          </a:ln>
+        </p:spPr>
+        <p:txBody>
+          <a:bodyPr xmlns:a="http://schemas.openxmlformats.org/drawingml/2006/main" wrap="square" lIns="0" tIns="0" rIns="0" bIns="0" anchor="t"/>
+          <a:lstStyle xmlns:a="http://schemas.openxmlformats.org/drawingml/2006/main"/>
+          <a:p xmlns:a="http://schemas.openxmlformats.org/drawingml/2006/main">
+            <a:r>
+              <a:rPr lang="en-US" sz="1050" b="1">
+                <a:solidFill>
+                  <a:srgbClr val="D53A45"/>
+                </a:solidFill>
+                <a:latin typeface="Inter"/>
+                <a:ea typeface="Inter"/>
+              </a:rPr>
+              <a:t>NOIR FIELD PICTORIAL · ARGUMENT</a:t>
+            </a:r>
+            <a:endParaRPr lang="en-US"/>
+          </a:p>
+        </p:txBody>
+      </p:sp>
+      <p:sp>
+        <p:nvSpPr>
+          <p:cNvPr id="18" name="argument-title"/>
+          <p:cNvSpPr txBox="1"/>
+          <p:nvPr/>
+        </p:nvSpPr>
+        <p:spPr>
+          <a:xfrm xmlns:a="http://schemas.openxmlformats.org/drawingml/2006/main">
+            <a:off x="914400" y="495300"/>
+            <a:ext cx="12001500" cy="457200"/>
+          </a:xfrm>
+          <a:prstGeom xmlns:a="http://schemas.openxmlformats.org/drawingml/2006/main" prst="rect">
+            <a:avLst/>
+          </a:prstGeom>
+          <a:noFill xmlns:a="http://schemas.openxmlformats.org/drawingml/2006/main"/>
+          <a:ln xmlns:a="http://schemas.openxmlformats.org/drawingml/2006/main" w="0">
+            <a:noFill/>
+          </a:ln>
+        </p:spPr>
+        <p:txBody>
+          <a:bodyPr xmlns:a="http://schemas.openxmlformats.org/drawingml/2006/main" wrap="square" lIns="0" tIns="0" rIns="0" bIns="0" anchor="t"/>
+          <a:lstStyle xmlns:a="http://schemas.openxmlformats.org/drawingml/2006/main"/>
+          <a:p xmlns:a="http://schemas.openxmlformats.org/drawingml/2006/main">
+            <a:r>
+              <a:rPr lang="en-US" sz="2550" b="1">
+                <a:solidFill>
+                  <a:srgbClr val="FFFFFF"/>
+                </a:solidFill>
+                <a:latin typeface="Inter"/>
+                <a:ea typeface="Inter"/>
+              </a:rPr>
+              <a:t>The proposition is the page's visual center</a:t>
+            </a:r>
+            <a:endParaRPr lang="en-US"/>
+          </a:p>
+        </p:txBody>
+      </p:sp>
+      <p:sp>
+        <p:nvSpPr>
+          <p:cNvPr id="19" name="argument-basis"/>
+          <p:cNvSpPr txBox="1"/>
+          <p:nvPr/>
+        </p:nvSpPr>
+        <p:spPr>
+          <a:xfrm xmlns:a="http://schemas.openxmlformats.org/drawingml/2006/main">
+            <a:off x="952500" y="1066800"/>
+            <a:ext cx="11049000" cy="228600"/>
+          </a:xfrm>
+          <a:prstGeom xmlns:a="http://schemas.openxmlformats.org/drawingml/2006/main" prst="rect">
+            <a:avLst/>
+          </a:prstGeom>
+          <a:noFill xmlns:a="http://schemas.openxmlformats.org/drawingml/2006/main"/>
+          <a:ln xmlns:a="http://schemas.openxmlformats.org/drawingml/2006/main" w="0">
+            <a:noFill/>
+          </a:ln>
+        </p:spPr>
+        <p:txBody>
+          <a:bodyPr xmlns:a="http://schemas.openxmlformats.org/drawingml/2006/main" wrap="square" lIns="0" tIns="0" rIns="0" bIns="0" anchor="t"/>
+          <a:lstStyle xmlns:a="http://schemas.openxmlformats.org/drawingml/2006/main"/>
+          <a:p xmlns:a="http://schemas.openxmlformats.org/drawingml/2006/main">
+            <a:r>
+              <a:rPr lang="en-US" sz="1200">
+                <a:solidFill>
+                  <a:srgbClr val="F0F3F2"/>
+                </a:solidFill>
+                <a:latin typeface="Inter"/>
+                <a:ea typeface="Inter"/>
+              </a:rPr>
+              <a:t>Scale, crop, and color invite attention without hiding the evidence.</a:t>
+            </a:r>
+            <a:endParaRPr lang="en-US"/>
+          </a:p>
+        </p:txBody>
+      </p:sp>
+      <p:sp>
+        <p:nvSpPr>
+          <p:cNvPr id="20" name="promotion-kicker"/>
+          <p:cNvSpPr txBox="1"/>
+          <p:nvPr/>
+        </p:nvSpPr>
+        <p:spPr>
+          <a:xfrm xmlns:a="http://schemas.openxmlformats.org/drawingml/2006/main">
+            <a:off x="1104900" y="3352800"/>
+            <a:ext cx="2857500" cy="228600"/>
+          </a:xfrm>
+          <a:prstGeom xmlns:a="http://schemas.openxmlformats.org/drawingml/2006/main" prst="rect">
+            <a:avLst/>
+          </a:prstGeom>
+          <a:noFill xmlns:a="http://schemas.openxmlformats.org/drawingml/2006/main"/>
+          <a:ln xmlns:a="http://schemas.openxmlformats.org/drawingml/2006/main" w="0">
+            <a:noFill/>
+          </a:ln>
+        </p:spPr>
+        <p:txBody>
+          <a:bodyPr xmlns:a="http://schemas.openxmlformats.org/drawingml/2006/main" wrap="square" lIns="0" tIns="0" rIns="0" bIns="0" anchor="t"/>
+          <a:lstStyle xmlns:a="http://schemas.openxmlformats.org/drawingml/2006/main"/>
+          <a:p xmlns:a="http://schemas.openxmlformats.org/drawingml/2006/main">
+            <a:r>
+              <a:rPr lang="en-US" sz="1125" b="1">
+                <a:solidFill>
+                  <a:srgbClr val="D53A45"/>
+                </a:solidFill>
+                <a:latin typeface="Inter"/>
+                <a:ea typeface="Inter"/>
+              </a:rPr>
+              <a:t>ONE PROPOSITION</a:t>
+            </a:r>
+            <a:endParaRPr lang="en-US"/>
+          </a:p>
+        </p:txBody>
+      </p:sp>
+      <p:sp>
+        <p:nvSpPr>
+          <p:cNvPr id="21" name="promotion-headline"/>
+          <p:cNvSpPr txBox="1"/>
+          <p:nvPr/>
+        </p:nvSpPr>
+        <p:spPr>
+          <a:xfrm xmlns:a="http://schemas.openxmlformats.org/drawingml/2006/main">
+            <a:off x="1104900" y="3790950"/>
+            <a:ext cx="6477000" cy="723900"/>
+          </a:xfrm>
+          <a:prstGeom xmlns:a="http://schemas.openxmlformats.org/drawingml/2006/main" prst="rect">
+            <a:avLst/>
+          </a:prstGeom>
+          <a:noFill xmlns:a="http://schemas.openxmlformats.org/drawingml/2006/main"/>
+          <a:ln xmlns:a="http://schemas.openxmlformats.org/drawingml/2006/main" w="0">
+            <a:noFill/>
+          </a:ln>
+        </p:spPr>
+        <p:txBody>
+          <a:bodyPr xmlns:a="http://schemas.openxmlformats.org/drawingml/2006/main" wrap="square" lIns="0" tIns="0" rIns="0" bIns="0" anchor="t"/>
+          <a:lstStyle xmlns:a="http://schemas.openxmlformats.org/drawingml/2006/main"/>
+          <a:p xmlns:a="http://schemas.openxmlformats.org/drawingml/2006/main">
+            <a:r>
+              <a:rPr lang="en-US" sz="2625" b="1">
+                <a:solidFill>
+                  <a:srgbClr val="F2F0EA"/>
+                </a:solidFill>
+                <a:latin typeface="Inter"/>
+                <a:ea typeface="Inter"/>
+              </a:rPr>
+              <a:t>Make the next action visible.</a:t>
+            </a:r>
+            <a:endParaRPr lang="en-US"/>
+          </a:p>
+        </p:txBody>
+      </p:sp>
+      <p:sp>
+        <p:nvSpPr>
+          <p:cNvPr id="22" name="promotion-body"/>
+          <p:cNvSpPr txBox="1"/>
+          <p:nvPr/>
+        </p:nvSpPr>
+        <p:spPr>
+          <a:xfrm xmlns:a="http://schemas.openxmlformats.org/drawingml/2006/main">
+            <a:off x="1104900" y="4762500"/>
+            <a:ext cx="6191250" cy="457200"/>
+          </a:xfrm>
+          <a:prstGeom xmlns:a="http://schemas.openxmlformats.org/drawingml/2006/main" prst="rect">
+            <a:avLst/>
+          </a:prstGeom>
+          <a:noFill xmlns:a="http://schemas.openxmlformats.org/drawingml/2006/main"/>
+          <a:ln xmlns:a="http://schemas.openxmlformats.org/drawingml/2006/main" w="0">
+            <a:noFill/>
+          </a:ln>
+        </p:spPr>
+        <p:txBody>
+          <a:bodyPr xmlns:a="http://schemas.openxmlformats.org/drawingml/2006/main" wrap="square" lIns="0" tIns="0" rIns="0" bIns="0" anchor="t"/>
+          <a:lstStyle xmlns:a="http://schemas.openxmlformats.org/drawingml/2006/main"/>
+          <a:p xmlns:a="http://schemas.openxmlformats.org/drawingml/2006/main">
+            <a:r>
+              <a:rPr lang="en-US" sz="1575">
+                <a:solidFill>
+                  <a:srgbClr val="F2F0EA"/>
+                </a:solidFill>
+                <a:latin typeface="Inter"/>
+                <a:ea typeface="Inter"/>
+              </a:rPr>
+              <a:t>A clear invitation earns attention when evidence and access arrive together.</a:t>
+            </a:r>
+            <a:endParaRPr lang="en-US"/>
+          </a:p>
+        </p:txBody>
+      </p:sp>
+      <p:pic>
+        <p:nvPicPr>
+          <p:cNvPr id="23" name="promotion-hero-frame">
+            <a:extLst xmlns:a="http://schemas.openxmlformats.org/drawingml/2006/main">
+              <a:ext uri="{C183D7F6-B498-43B3-948B-1728B52AA6E4}">
+                <adec:decorative xmlns:adec="http://schemas.microsoft.com/office/drawing/2017/decorative" val="1"/>
+              </a:ext>
+            </a:extLst>
+          </p:cNvPr>
+          <p:cNvPicPr/>
+          <p:nvPr/>
+        </p:nvPicPr>
+        <p:blipFill>
+          <a:blip xmlns:r="http://schemas.openxmlformats.org/officeDocument/2006/relationships" xmlns:a="http://schemas.openxmlformats.org/drawingml/2006/main" r:embed="rIdOfficeKitImage33b8c33a8fc3d613_1"/>
+          <a:srcRect xmlns:a="http://schemas.openxmlformats.org/drawingml/2006/main" l="0" t="31920" r="0" b="31920"/>
+          <a:stretch xmlns:a="http://schemas.openxmlformats.org/drawingml/2006/main">
+            <a:fillRect/>
+          </a:stretch>
+        </p:blipFill>
+        <p:spPr>
+          <a:xfrm xmlns:a="http://schemas.openxmlformats.org/drawingml/2006/main">
+            <a:off x="9525000" y="3143250"/>
+            <a:ext cx="4000500" cy="2571750"/>
+          </a:xfrm>
+          <a:prstGeom xmlns:a="http://schemas.openxmlformats.org/drawingml/2006/main" prst="rect">
+            <a:avLst/>
+          </a:prstGeom>
+        </p:spPr>
+      </p:pic>
+      <p:sp>
+        <p:nvSpPr>
+          <p:cNvPr id="24" name="promotion-image-rule"/>
+          <p:cNvSpPr/>
+          <p:nvPr/>
+        </p:nvSpPr>
+        <p:spPr>
+          <a:xfrm xmlns:a="http://schemas.openxmlformats.org/drawingml/2006/main">
+            <a:off x="9525000" y="5905500"/>
+            <a:ext cx="4000500" cy="0"/>
+          </a:xfrm>
+          <a:prstGeom xmlns:a="http://schemas.openxmlformats.org/drawingml/2006/main" prst="line">
+            <a:avLst/>
+          </a:prstGeom>
+          <a:noFill xmlns:a="http://schemas.openxmlformats.org/drawingml/2006/main"/>
+          <a:ln xmlns:a="http://schemas.openxmlformats.org/drawingml/2006/main" w="38100">
+            <a:solidFill>
+              <a:srgbClr val="D53A45"/>
+            </a:solidFill>
+            <a:prstDash val="solid"/>
+          </a:ln>
+        </p:spPr>
+        <p:txBody>
+          <a:bodyPr xmlns:a="http://schemas.openxmlformats.org/drawingml/2006/main" wrap="square" lIns="0" tIns="0" rIns="0" bIns="0" anchor="t"/>
+          <a:lstStyle xmlns:a="http://schemas.openxmlformats.org/drawingml/2006/main"/>
+          <a:p xmlns:a="http://schemas.openxmlformats.org/drawingml/2006/main">
+            <a:r>
+              <a:rPr lang="en-US"/>
+              <a:t/>
+            </a:r>
+            <a:endParaRPr lang="en-US"/>
+          </a:p>
+        </p:txBody>
+      </p:sp>
+      <p:sp>
+        <p:nvSpPr>
+          <p:cNvPr id="25" name="promotion-image-label"/>
+          <p:cNvSpPr txBox="1"/>
+          <p:nvPr/>
+        </p:nvSpPr>
+        <p:spPr>
+          <a:xfrm xmlns:a="http://schemas.openxmlformats.org/drawingml/2006/main">
+            <a:off x="9525000" y="6153150"/>
+            <a:ext cx="4000500" cy="247650"/>
+          </a:xfrm>
+          <a:prstGeom xmlns:a="http://schemas.openxmlformats.org/drawingml/2006/main" prst="rect">
+            <a:avLst/>
+          </a:prstGeom>
+          <a:noFill xmlns:a="http://schemas.openxmlformats.org/drawingml/2006/main"/>
+          <a:ln xmlns:a="http://schemas.openxmlformats.org/drawingml/2006/main" w="0">
+            <a:noFill/>
+          </a:ln>
+        </p:spPr>
+        <p:txBody>
+          <a:bodyPr xmlns:a="http://schemas.openxmlformats.org/drawingml/2006/main" wrap="square" lIns="0" tIns="0" rIns="0" bIns="0" anchor="t"/>
+          <a:lstStyle xmlns:a="http://schemas.openxmlformats.org/drawingml/2006/main"/>
+          <a:p xmlns:a="http://schemas.openxmlformats.org/drawingml/2006/main">
+            <a:r>
+              <a:rPr lang="en-US" sz="1275" b="1">
+                <a:solidFill>
+                  <a:srgbClr val="D53A45"/>
+                </a:solidFill>
+                <a:latin typeface="Inter"/>
+                <a:ea typeface="Inter"/>
+              </a:rPr>
+              <a:t>INVITE · PROVE · MOVE</a:t>
+            </a:r>
+            <a:endParaRPr lang="en-US"/>
+          </a:p>
+        </p:txBody>
+      </p:sp>
+      <p:sp>
+        <p:nvSpPr>
+          <p:cNvPr id="26" name="source"/>
+          <p:cNvSpPr txBox="1"/>
+          <p:nvPr/>
+        </p:nvSpPr>
+        <p:spPr>
+          <a:xfrm xmlns:a="http://schemas.openxmlformats.org/drawingml/2006/main">
+            <a:off x="914400" y="7810500"/>
+            <a:ext cx="10953750" cy="209550"/>
+          </a:xfrm>
+          <a:prstGeom xmlns:a="http://schemas.openxmlformats.org/drawingml/2006/main" prst="rect">
+            <a:avLst/>
+          </a:prstGeom>
+          <a:noFill xmlns:a="http://schemas.openxmlformats.org/drawingml/2006/main"/>
+          <a:ln xmlns:a="http://schemas.openxmlformats.org/drawingml/2006/main" w="0">
+            <a:noFill/>
+          </a:ln>
+        </p:spPr>
+        <p:txBody>
+          <a:bodyPr xmlns:a="http://schemas.openxmlformats.org/drawingml/2006/main" wrap="square" lIns="0" tIns="0" rIns="0" bIns="0" anchor="t"/>
+          <a:lstStyle xmlns:a="http://schemas.openxmlformats.org/drawingml/2006/main"/>
+          <a:p xmlns:a="http://schemas.openxmlformats.org/drawingml/2006/main">
+            <a:r>
+              <a:rPr lang="en-US" sz="1050">
+                <a:solidFill>
+                  <a:srgbClr val="7D7D7B"/>
+                </a:solidFill>
+                <a:latin typeface="Inter"/>
+                <a:ea typeface="Inter"/>
+              </a:rPr>
+              <a:t>Source: illustrative calibration brief · every claim is fictional and bounded</a:t>
+            </a:r>
+            <a:endParaRPr lang="en-US"/>
+          </a:p>
+        </p:txBody>
+      </p:sp>
+      <p:sp>
+        <p:nvSpPr>
+          <p:cNvPr id="27" name="page-number"/>
+          <p:cNvSpPr txBox="1"/>
+          <p:nvPr/>
+        </p:nvSpPr>
+        <p:spPr>
+          <a:xfrm xmlns:a="http://schemas.openxmlformats.org/drawingml/2006/main">
+            <a:off x="13335000" y="7810500"/>
+            <a:ext cx="952500" cy="209550"/>
+          </a:xfrm>
+          <a:prstGeom xmlns:a="http://schemas.openxmlformats.org/drawingml/2006/main" prst="rect">
+            <a:avLst/>
+          </a:prstGeom>
+          <a:noFill xmlns:a="http://schemas.openxmlformats.org/drawingml/2006/main"/>
+          <a:ln xmlns:a="http://schemas.openxmlformats.org/drawingml/2006/main" w="0">
+            <a:noFill/>
+          </a:ln>
+        </p:spPr>
+        <p:txBody>
+          <a:bodyPr xmlns:a="http://schemas.openxmlformats.org/drawingml/2006/main" wrap="square" lIns="0" tIns="0" rIns="0" bIns="0" anchor="t"/>
+          <a:lstStyle xmlns:a="http://schemas.openxmlformats.org/drawingml/2006/main"/>
+          <a:p xmlns:a="http://schemas.openxmlformats.org/drawingml/2006/main">
+            <a:pPr algn="r"/>
+            <a:r>
+              <a:rPr lang="en-US" sz="1050">
+                <a:solidFill>
+                  <a:srgbClr val="7D7D7B"/>
+                </a:solidFill>
+                <a:latin typeface="Inter"/>
+                <a:ea typeface="Inter"/>
+              </a:rPr>
+              <a:t>2 / 6</a:t>
+            </a:r>
+            <a:endParaRPr lang="en-US"/>
+          </a:p>
+        </p:txBody>
+      </p:sp>
+    </p:spTree>
+  </p:cSld>
+  <p:clrMapOvr>
+    <a:masterClrMapping xmlns:a="http://schemas.openxmlformats.org/drawingml/2006/main"/>
+  </p:clrMapOvr>
+</p:sld>
+</file>
+
+<file path=ppt/slides/slide3.xml><?xml version="1.0" encoding="utf-8"?>
+<p:sld xmlns:p="http://schemas.openxmlformats.org/presentationml/2006/main">
+  <p:cSld name="Evidence">
+    <p:bg>
+      <p:bgPr>
+        <a:blipFill xmlns:a="http://schemas.openxmlformats.org/drawingml/2006/main">
+          <a:blip xmlns:r="http://schemas.openxmlformats.org/officeDocument/2006/relationships" r:embed="rIdOfficeKitImage7790b68b5d8fcd92_1"/>
+          <a:stretch>
+            <a:fillRect/>
+          </a:stretch>
+        </a:blipFill>
+      </p:bgPr>
+    </p:bg>
+    <p:spTree>
+      <p:nvGrpSpPr>
+        <p:cNvPr id="1" name=""/>
+        <p:cNvGrpSpPr/>
+        <p:nvPr/>
+      </p:nvGrpSpPr>
+      <p:grpSpPr>
+        <a:xfrm xmlns:a="http://schemas.openxmlformats.org/drawingml/2006/main">
+          <a:off x="0" y="0"/>
+          <a:ext cx="0" cy="0"/>
+          <a:chOff x="0" y="0"/>
+          <a:chExt cx="0" cy="0"/>
+        </a:xfrm>
+      </p:grpSpPr>
+      <p:sp>
+        <p:nvSpPr>
           <p:cNvPr id="2" name="evidence-paper-scrim"/>
           <p:cNvSpPr/>
           <p:nvPr/>
@@ -1985,7 +1985,7 @@
           <p:nvPr/>
         </p:nvPicPr>
         <p:blipFill>
-          <a:blip xmlns:r="http://schemas.openxmlformats.org/officeDocument/2006/relationships" xmlns:a="http://schemas.openxmlformats.org/drawingml/2006/main" r:embed="rIdOfficeKitImage8fbc298f8d1b7a3c_1"/>
+          <a:blip xmlns:r="http://schemas.openxmlformats.org/officeDocument/2006/relationships" xmlns:a="http://schemas.openxmlformats.org/drawingml/2006/main" r:embed="rIdOfficeKitImage9df32179333a9f35_1"/>
           <a:srcRect xmlns:a="http://schemas.openxmlformats.org/drawingml/2006/main" l="0" t="47258" r="0" b="47258"/>
           <a:stretch xmlns:a="http://schemas.openxmlformats.org/drawingml/2006/main">
             <a:fillRect/>
@@ -2197,7 +2197,7 @@
           <p:nvPr/>
         </p:nvPicPr>
         <p:blipFill>
-          <a:blip xmlns:r="http://schemas.openxmlformats.org/officeDocument/2006/relationships" xmlns:a="http://schemas.openxmlformats.org/drawingml/2006/main" r:embed="rIdOfficeKitImage33b8c33a8fc3d613_1"/>
+          <a:blip xmlns:r="http://schemas.openxmlformats.org/officeDocument/2006/relationships" xmlns:a="http://schemas.openxmlformats.org/drawingml/2006/main" r:embed="rIdOfficeKitImagebdd32fb5cfa65986_1"/>
           <a:srcRect xmlns:a="http://schemas.openxmlformats.org/drawingml/2006/main" l="0" t="39326" r="0" b="39326"/>
           <a:stretch xmlns:a="http://schemas.openxmlformats.org/drawingml/2006/main">
             <a:fillRect/>
@@ -3120,7 +3120,7 @@
           <p:nvPr/>
         </p:nvPicPr>
         <p:blipFill>
-          <a:blip xmlns:r="http://schemas.openxmlformats.org/officeDocument/2006/relationships" xmlns:a="http://schemas.openxmlformats.org/drawingml/2006/main" r:embed="rIdOfficeKitImage7790b68b5d8fcd92_1"/>
+          <a:blip xmlns:r="http://schemas.openxmlformats.org/officeDocument/2006/relationships" xmlns:a="http://schemas.openxmlformats.org/drawingml/2006/main" r:embed="rIdOfficeKitImage8fbc298f8d1b7a3c_1"/>
           <a:srcRect xmlns:a="http://schemas.openxmlformats.org/drawingml/2006/main" l="0" t="47258" r="0" b="47258"/>
           <a:stretch xmlns:a="http://schemas.openxmlformats.org/drawingml/2006/main">
             <a:fillRect/>
@@ -3332,7 +3332,7 @@
           <p:nvPr/>
         </p:nvPicPr>
         <p:blipFill>
-          <a:blip xmlns:r="http://schemas.openxmlformats.org/officeDocument/2006/relationships" xmlns:a="http://schemas.openxmlformats.org/drawingml/2006/main" r:embed="rIdOfficeKitImage9df32179333a9f35_1"/>
+          <a:blip xmlns:r="http://schemas.openxmlformats.org/officeDocument/2006/relationships" xmlns:a="http://schemas.openxmlformats.org/drawingml/2006/main" r:embed="rIdOfficeKitImage33b8c33a8fc3d613_1"/>
           <a:srcRect xmlns:a="http://schemas.openxmlformats.org/drawingml/2006/main" l="0" t="31971" r="0" b="31971"/>
           <a:stretch xmlns:a="http://schemas.openxmlformats.org/drawingml/2006/main">
             <a:fillRect/>
@@ -3361,7 +3361,7 @@
           <p:nvPr/>
         </p:nvPicPr>
         <p:blipFill>
-          <a:blip xmlns:r="http://schemas.openxmlformats.org/officeDocument/2006/relationships" xmlns:a="http://schemas.openxmlformats.org/drawingml/2006/main" r:embed="rIdOfficeKitImagebdd32fb5cfa65986_1"/>
+          <a:blip xmlns:r="http://schemas.openxmlformats.org/officeDocument/2006/relationships" xmlns:a="http://schemas.openxmlformats.org/drawingml/2006/main" r:embed="rIdOfficeKitImage7790b68b5d8fcd92_1"/>
           <a:srcRect xmlns:a="http://schemas.openxmlformats.org/drawingml/2006/main" l="0" t="32347" r="0" b="32347"/>
           <a:stretch xmlns:a="http://schemas.openxmlformats.org/drawingml/2006/main">
             <a:fillRect/>
@@ -3390,7 +3390,7 @@
           <p:nvPr/>
         </p:nvPicPr>
         <p:blipFill>
-          <a:blip xmlns:r="http://schemas.openxmlformats.org/officeDocument/2006/relationships" xmlns:a="http://schemas.openxmlformats.org/drawingml/2006/main" r:embed="rIdOfficeKitImage8fbc298f8d1b7a3c_1"/>
+          <a:blip xmlns:r="http://schemas.openxmlformats.org/officeDocument/2006/relationships" xmlns:a="http://schemas.openxmlformats.org/drawingml/2006/main" r:embed="rIdOfficeKitImage9df32179333a9f35_1"/>
           <a:srcRect xmlns:a="http://schemas.openxmlformats.org/drawingml/2006/main" l="0" t="32347" r="0" b="32347"/>
           <a:stretch xmlns:a="http://schemas.openxmlformats.org/drawingml/2006/main">
             <a:fillRect/>
@@ -3419,7 +3419,7 @@
           <p:nvPr/>
         </p:nvPicPr>
         <p:blipFill>
-          <a:blip xmlns:r="http://schemas.openxmlformats.org/officeDocument/2006/relationships" xmlns:a="http://schemas.openxmlformats.org/drawingml/2006/main" r:embed="rIdOfficeKitImage33b8c33a8fc3d613_1"/>
+          <a:blip xmlns:r="http://schemas.openxmlformats.org/officeDocument/2006/relationships" xmlns:a="http://schemas.openxmlformats.org/drawingml/2006/main" r:embed="rIdOfficeKitImagebdd32fb5cfa65986_1"/>
           <a:srcRect xmlns:a="http://schemas.openxmlformats.org/drawingml/2006/main" l="0" t="32347" r="0" b="32347"/>
           <a:stretch xmlns:a="http://schemas.openxmlformats.org/drawingml/2006/main">
             <a:fillRect/>
@@ -3448,7 +3448,7 @@
           <p:nvPr/>
         </p:nvPicPr>
         <p:blipFill>
-          <a:blip xmlns:r="http://schemas.openxmlformats.org/officeDocument/2006/relationships" xmlns:a="http://schemas.openxmlformats.org/drawingml/2006/main" r:embed="rIdOfficeKitImage7790b68b5d8fcd92_1"/>
+          <a:blip xmlns:r="http://schemas.openxmlformats.org/officeDocument/2006/relationships" xmlns:a="http://schemas.openxmlformats.org/drawingml/2006/main" r:embed="rIdOfficeKitImage8fbc298f8d1b7a3c_1"/>
           <a:srcRect xmlns:a="http://schemas.openxmlformats.org/drawingml/2006/main" l="0" t="32347" r="0" b="32347"/>
           <a:stretch xmlns:a="http://schemas.openxmlformats.org/drawingml/2006/main">
             <a:fillRect/>
@@ -3690,7 +3690,7 @@
     <p:bg>
       <p:bgPr>
         <a:blipFill xmlns:a="http://schemas.openxmlformats.org/drawingml/2006/main">
-          <a:blip xmlns:r="http://schemas.openxmlformats.org/officeDocument/2006/relationships" r:embed="rIdOfficeKitImage9df32179333a9f35_1"/>
+          <a:blip xmlns:r="http://schemas.openxmlformats.org/officeDocument/2006/relationships" r:embed="rIdOfficeKitImage33b8c33a8fc3d613_1"/>
           <a:stretch>
             <a:fillRect/>
           </a:stretch>
@@ -4426,7 +4426,7 @@
     <p:bg>
       <p:bgPr>
         <a:blipFill xmlns:a="http://schemas.openxmlformats.org/drawingml/2006/main">
-          <a:blip xmlns:r="http://schemas.openxmlformats.org/officeDocument/2006/relationships" r:embed="rIdOfficeKitImagebdd32fb5cfa65986_1"/>
+          <a:blip xmlns:r="http://schemas.openxmlformats.org/officeDocument/2006/relationships" r:embed="rIdOfficeKitImage7790b68b5d8fcd92_1"/>
           <a:stretch>
             <a:fillRect/>
           </a:stretch>
@@ -4904,7 +4904,7 @@
           <p:nvPr/>
         </p:nvPicPr>
         <p:blipFill>
-          <a:blip xmlns:r="http://schemas.openxmlformats.org/officeDocument/2006/relationships" xmlns:a="http://schemas.openxmlformats.org/drawingml/2006/main" r:embed="rIdOfficeKitImage8fbc298f8d1b7a3c_1"/>
+          <a:blip xmlns:r="http://schemas.openxmlformats.org/officeDocument/2006/relationships" xmlns:a="http://schemas.openxmlformats.org/drawingml/2006/main" r:embed="rIdOfficeKitImage9df32179333a9f35_1"/>
           <a:srcRect xmlns:a="http://schemas.openxmlformats.org/drawingml/2006/main" l="0" t="47258" r="0" b="47258"/>
           <a:stretch xmlns:a="http://schemas.openxmlformats.org/drawingml/2006/main">
             <a:fillRect/>

--- a/skills/presentation-template-library/skills/artifact-template-noir-field-pictorial/assets/reference.pptx
+++ b/skills/presentation-template-library/skills/artifact-template-noir-field-pictorial/assets/reference.pptx
@@ -1985,8 +1985,8 @@
           <p:nvPr/>
         </p:nvPicPr>
         <p:blipFill>
-          <a:blip xmlns:r="http://schemas.openxmlformats.org/officeDocument/2006/relationships" xmlns:a="http://schemas.openxmlformats.org/drawingml/2006/main" r:embed="rIdOfficeKitImage9df32179333a9f35_1"/>
-          <a:srcRect xmlns:a="http://schemas.openxmlformats.org/drawingml/2006/main" l="0" t="47258" r="0" b="47258"/>
+          <a:blip xmlns:r="http://schemas.openxmlformats.org/officeDocument/2006/relationships" xmlns:a="http://schemas.openxmlformats.org/drawingml/2006/main" r:embed="rIdOfficeKitImagea86c6dad26830b61_1"/>
+          <a:srcRect xmlns:a="http://schemas.openxmlformats.org/drawingml/2006/main" l="0" t="47256" r="0" b="47256"/>
           <a:stretch xmlns:a="http://schemas.openxmlformats.org/drawingml/2006/main">
             <a:fillRect/>
           </a:stretch>
@@ -2197,7 +2197,7 @@
           <p:nvPr/>
         </p:nvPicPr>
         <p:blipFill>
-          <a:blip xmlns:r="http://schemas.openxmlformats.org/officeDocument/2006/relationships" xmlns:a="http://schemas.openxmlformats.org/drawingml/2006/main" r:embed="rIdOfficeKitImagebdd32fb5cfa65986_1"/>
+          <a:blip xmlns:r="http://schemas.openxmlformats.org/officeDocument/2006/relationships" xmlns:a="http://schemas.openxmlformats.org/drawingml/2006/main" r:embed="rIdOfficeKitImage9df32179333a9f35_1"/>
           <a:srcRect xmlns:a="http://schemas.openxmlformats.org/drawingml/2006/main" l="0" t="39326" r="0" b="39326"/>
           <a:stretch xmlns:a="http://schemas.openxmlformats.org/drawingml/2006/main">
             <a:fillRect/>
@@ -3120,7 +3120,7 @@
           <p:nvPr/>
         </p:nvPicPr>
         <p:blipFill>
-          <a:blip xmlns:r="http://schemas.openxmlformats.org/officeDocument/2006/relationships" xmlns:a="http://schemas.openxmlformats.org/drawingml/2006/main" r:embed="rIdOfficeKitImage8fbc298f8d1b7a3c_1"/>
+          <a:blip xmlns:r="http://schemas.openxmlformats.org/officeDocument/2006/relationships" xmlns:a="http://schemas.openxmlformats.org/drawingml/2006/main" r:embed="rIdOfficeKitImagebdd32fb5cfa65986_1"/>
           <a:srcRect xmlns:a="http://schemas.openxmlformats.org/drawingml/2006/main" l="0" t="47258" r="0" b="47258"/>
           <a:stretch xmlns:a="http://schemas.openxmlformats.org/drawingml/2006/main">
             <a:fillRect/>
@@ -3332,7 +3332,7 @@
           <p:nvPr/>
         </p:nvPicPr>
         <p:blipFill>
-          <a:blip xmlns:r="http://schemas.openxmlformats.org/officeDocument/2006/relationships" xmlns:a="http://schemas.openxmlformats.org/drawingml/2006/main" r:embed="rIdOfficeKitImage33b8c33a8fc3d613_1"/>
+          <a:blip xmlns:r="http://schemas.openxmlformats.org/officeDocument/2006/relationships" xmlns:a="http://schemas.openxmlformats.org/drawingml/2006/main" r:embed="rIdOfficeKitImage8fbc298f8d1b7a3c_1"/>
           <a:srcRect xmlns:a="http://schemas.openxmlformats.org/drawingml/2006/main" l="0" t="31971" r="0" b="31971"/>
           <a:stretch xmlns:a="http://schemas.openxmlformats.org/drawingml/2006/main">
             <a:fillRect/>
@@ -3361,7 +3361,7 @@
           <p:nvPr/>
         </p:nvPicPr>
         <p:blipFill>
-          <a:blip xmlns:r="http://schemas.openxmlformats.org/officeDocument/2006/relationships" xmlns:a="http://schemas.openxmlformats.org/drawingml/2006/main" r:embed="rIdOfficeKitImage7790b68b5d8fcd92_1"/>
+          <a:blip xmlns:r="http://schemas.openxmlformats.org/officeDocument/2006/relationships" xmlns:a="http://schemas.openxmlformats.org/drawingml/2006/main" r:embed="rIdOfficeKitImage33b8c33a8fc3d613_1"/>
           <a:srcRect xmlns:a="http://schemas.openxmlformats.org/drawingml/2006/main" l="0" t="32347" r="0" b="32347"/>
           <a:stretch xmlns:a="http://schemas.openxmlformats.org/drawingml/2006/main">
             <a:fillRect/>
@@ -3390,7 +3390,7 @@
           <p:nvPr/>
         </p:nvPicPr>
         <p:blipFill>
-          <a:blip xmlns:r="http://schemas.openxmlformats.org/officeDocument/2006/relationships" xmlns:a="http://schemas.openxmlformats.org/drawingml/2006/main" r:embed="rIdOfficeKitImage9df32179333a9f35_1"/>
+          <a:blip xmlns:r="http://schemas.openxmlformats.org/officeDocument/2006/relationships" xmlns:a="http://schemas.openxmlformats.org/drawingml/2006/main" r:embed="rIdOfficeKitImage7790b68b5d8fcd92_1"/>
           <a:srcRect xmlns:a="http://schemas.openxmlformats.org/drawingml/2006/main" l="0" t="32347" r="0" b="32347"/>
           <a:stretch xmlns:a="http://schemas.openxmlformats.org/drawingml/2006/main">
             <a:fillRect/>
@@ -3419,8 +3419,8 @@
           <p:nvPr/>
         </p:nvPicPr>
         <p:blipFill>
-          <a:blip xmlns:r="http://schemas.openxmlformats.org/officeDocument/2006/relationships" xmlns:a="http://schemas.openxmlformats.org/drawingml/2006/main" r:embed="rIdOfficeKitImagebdd32fb5cfa65986_1"/>
-          <a:srcRect xmlns:a="http://schemas.openxmlformats.org/drawingml/2006/main" l="0" t="32347" r="0" b="32347"/>
+          <a:blip xmlns:r="http://schemas.openxmlformats.org/officeDocument/2006/relationships" xmlns:a="http://schemas.openxmlformats.org/drawingml/2006/main" r:embed="rIdOfficeKitImagea86c6dad26830b61_1"/>
+          <a:srcRect xmlns:a="http://schemas.openxmlformats.org/drawingml/2006/main" l="0" t="32338" r="0" b="32338"/>
           <a:stretch xmlns:a="http://schemas.openxmlformats.org/drawingml/2006/main">
             <a:fillRect/>
           </a:stretch>
@@ -3448,7 +3448,7 @@
           <p:nvPr/>
         </p:nvPicPr>
         <p:blipFill>
-          <a:blip xmlns:r="http://schemas.openxmlformats.org/officeDocument/2006/relationships" xmlns:a="http://schemas.openxmlformats.org/drawingml/2006/main" r:embed="rIdOfficeKitImage8fbc298f8d1b7a3c_1"/>
+          <a:blip xmlns:r="http://schemas.openxmlformats.org/officeDocument/2006/relationships" xmlns:a="http://schemas.openxmlformats.org/drawingml/2006/main" r:embed="rIdOfficeKitImage9df32179333a9f35_1"/>
           <a:srcRect xmlns:a="http://schemas.openxmlformats.org/drawingml/2006/main" l="0" t="32347" r="0" b="32347"/>
           <a:stretch xmlns:a="http://schemas.openxmlformats.org/drawingml/2006/main">
             <a:fillRect/>
@@ -3690,7 +3690,7 @@
     <p:bg>
       <p:bgPr>
         <a:blipFill xmlns:a="http://schemas.openxmlformats.org/drawingml/2006/main">
-          <a:blip xmlns:r="http://schemas.openxmlformats.org/officeDocument/2006/relationships" r:embed="rIdOfficeKitImage33b8c33a8fc3d613_1"/>
+          <a:blip xmlns:r="http://schemas.openxmlformats.org/officeDocument/2006/relationships" r:embed="rIdOfficeKitImagebdd32fb5cfa65986_1"/>
           <a:stretch>
             <a:fillRect/>
           </a:stretch>
@@ -4426,7 +4426,7 @@
     <p:bg>
       <p:bgPr>
         <a:blipFill xmlns:a="http://schemas.openxmlformats.org/drawingml/2006/main">
-          <a:blip xmlns:r="http://schemas.openxmlformats.org/officeDocument/2006/relationships" r:embed="rIdOfficeKitImage7790b68b5d8fcd92_1"/>
+          <a:blip xmlns:r="http://schemas.openxmlformats.org/officeDocument/2006/relationships" r:embed="rIdOfficeKitImage8fbc298f8d1b7a3c_1"/>
           <a:stretch>
             <a:fillRect/>
           </a:stretch>
@@ -4904,7 +4904,7 @@
           <p:nvPr/>
         </p:nvPicPr>
         <p:blipFill>
-          <a:blip xmlns:r="http://schemas.openxmlformats.org/officeDocument/2006/relationships" xmlns:a="http://schemas.openxmlformats.org/drawingml/2006/main" r:embed="rIdOfficeKitImage9df32179333a9f35_1"/>
+          <a:blip xmlns:r="http://schemas.openxmlformats.org/officeDocument/2006/relationships" xmlns:a="http://schemas.openxmlformats.org/drawingml/2006/main" r:embed="rIdOfficeKitImage33b8c33a8fc3d613_1"/>
           <a:srcRect xmlns:a="http://schemas.openxmlformats.org/drawingml/2006/main" l="0" t="47258" r="0" b="47258"/>
           <a:stretch xmlns:a="http://schemas.openxmlformats.org/drawingml/2006/main">
             <a:fillRect/>

--- a/skills/presentation-template-library/skills/artifact-template-noir-field-pictorial/assets/reference.pptx
+++ b/skills/presentation-template-library/skills/artifact-template-noir-field-pictorial/assets/reference.pptx
@@ -236,13 +236,13 @@
             <a:avLst/>
           </a:prstGeom>
           <a:solidFill xmlns:a="http://schemas.openxmlformats.org/drawingml/2006/main">
-            <a:srgbClr val="F2F0EA">
+            <a:srgbClr val="111214">
               <a:alpha val="84000"/>
             </a:srgbClr>
           </a:solidFill>
           <a:ln xmlns:a="http://schemas.openxmlformats.org/drawingml/2006/main" w="0">
             <a:solidFill>
-              <a:srgbClr val="F2F0EA"/>
+              <a:srgbClr val="111214"/>
             </a:solidFill>
             <a:prstDash val="solid"/>
           </a:ln>
@@ -322,7 +322,7 @@
             <a:r>
               <a:rPr lang="en-US" sz="3900" b="1">
                 <a:solidFill>
-                  <a:srgbClr val="FFFFFF"/>
+                  <a:srgbClr val="F2F0EA"/>
                 </a:solidFill>
                 <a:latin typeface="Inter"/>
                 <a:ea typeface="Inter"/>
@@ -359,7 +359,7 @@
             <a:r>
               <a:rPr lang="en-US" sz="1650">
                 <a:solidFill>
-                  <a:srgbClr val="F0F2F2"/>
+                  <a:srgbClr val="F2F0EA"/>
                 </a:solidFill>
                 <a:latin typeface="Inter"/>
                 <a:ea typeface="Inter"/>
@@ -430,7 +430,7 @@
             <a:r>
               <a:rPr lang="en-US" sz="1950" b="1">
                 <a:solidFill>
-                  <a:srgbClr val="FFFFFF"/>
+                  <a:srgbClr val="F2F0EA"/>
                 </a:solidFill>
                 <a:latin typeface="Inter"/>
                 <a:ea typeface="Inter"/>
@@ -467,7 +467,7 @@
             <a:r>
               <a:rPr lang="en-US" sz="1050">
                 <a:solidFill>
-                  <a:srgbClr val="F0F2F2"/>
+                  <a:srgbClr val="F2F0EA"/>
                 </a:solidFill>
                 <a:latin typeface="Inter"/>
                 <a:ea typeface="Inter"/>
@@ -505,7 +505,7 @@
             <a:r>
               <a:rPr lang="en-US" sz="1050">
                 <a:solidFill>
-                  <a:srgbClr val="F0F2F2"/>
+                  <a:srgbClr val="F2F0EA"/>
                 </a:solidFill>
                 <a:latin typeface="Inter"/>
                 <a:ea typeface="Inter"/>
@@ -2197,7 +2197,7 @@
           <p:nvPr/>
         </p:nvPicPr>
         <p:blipFill>
-          <a:blip xmlns:r="http://schemas.openxmlformats.org/officeDocument/2006/relationships" xmlns:a="http://schemas.openxmlformats.org/drawingml/2006/main" r:embed="rIdOfficeKitImage9df32179333a9f35_1"/>
+          <a:blip xmlns:r="http://schemas.openxmlformats.org/officeDocument/2006/relationships" xmlns:a="http://schemas.openxmlformats.org/drawingml/2006/main" r:embed="rIdOfficeKitImage13db13f70d7843cc_1"/>
           <a:srcRect xmlns:a="http://schemas.openxmlformats.org/drawingml/2006/main" l="0" t="39326" r="0" b="39326"/>
           <a:stretch xmlns:a="http://schemas.openxmlformats.org/drawingml/2006/main">
             <a:fillRect/>
@@ -3120,8 +3120,8 @@
           <p:nvPr/>
         </p:nvPicPr>
         <p:blipFill>
-          <a:blip xmlns:r="http://schemas.openxmlformats.org/officeDocument/2006/relationships" xmlns:a="http://schemas.openxmlformats.org/drawingml/2006/main" r:embed="rIdOfficeKitImagebdd32fb5cfa65986_1"/>
-          <a:srcRect xmlns:a="http://schemas.openxmlformats.org/drawingml/2006/main" l="0" t="47258" r="0" b="47258"/>
+          <a:blip xmlns:r="http://schemas.openxmlformats.org/officeDocument/2006/relationships" xmlns:a="http://schemas.openxmlformats.org/drawingml/2006/main" r:embed="rIdOfficeKitImagee4bd683f73b7a543_1"/>
+          <a:srcRect xmlns:a="http://schemas.openxmlformats.org/drawingml/2006/main" l="0" t="47256" r="0" b="47256"/>
           <a:stretch xmlns:a="http://schemas.openxmlformats.org/drawingml/2006/main">
             <a:fillRect/>
           </a:stretch>
@@ -3332,8 +3332,8 @@
           <p:nvPr/>
         </p:nvPicPr>
         <p:blipFill>
-          <a:blip xmlns:r="http://schemas.openxmlformats.org/officeDocument/2006/relationships" xmlns:a="http://schemas.openxmlformats.org/drawingml/2006/main" r:embed="rIdOfficeKitImage8fbc298f8d1b7a3c_1"/>
-          <a:srcRect xmlns:a="http://schemas.openxmlformats.org/drawingml/2006/main" l="0" t="31971" r="0" b="31971"/>
+          <a:blip xmlns:r="http://schemas.openxmlformats.org/officeDocument/2006/relationships" xmlns:a="http://schemas.openxmlformats.org/drawingml/2006/main" r:embed="rIdOfficeKitImaged3d6b9bbc9872adc_1"/>
+          <a:srcRect xmlns:a="http://schemas.openxmlformats.org/drawingml/2006/main" l="0" t="31962" r="0" b="31962"/>
           <a:stretch xmlns:a="http://schemas.openxmlformats.org/drawingml/2006/main">
             <a:fillRect/>
           </a:stretch>
@@ -3361,8 +3361,8 @@
           <p:nvPr/>
         </p:nvPicPr>
         <p:blipFill>
-          <a:blip xmlns:r="http://schemas.openxmlformats.org/officeDocument/2006/relationships" xmlns:a="http://schemas.openxmlformats.org/drawingml/2006/main" r:embed="rIdOfficeKitImage33b8c33a8fc3d613_1"/>
-          <a:srcRect xmlns:a="http://schemas.openxmlformats.org/drawingml/2006/main" l="0" t="32347" r="0" b="32347"/>
+          <a:blip xmlns:r="http://schemas.openxmlformats.org/officeDocument/2006/relationships" xmlns:a="http://schemas.openxmlformats.org/drawingml/2006/main" r:embed="rIdOfficeKitImage2f5be6b798f5ce32_1"/>
+          <a:srcRect xmlns:a="http://schemas.openxmlformats.org/drawingml/2006/main" l="0" t="32338" r="0" b="32338"/>
           <a:stretch xmlns:a="http://schemas.openxmlformats.org/drawingml/2006/main">
             <a:fillRect/>
           </a:stretch>
@@ -3390,8 +3390,8 @@
           <p:nvPr/>
         </p:nvPicPr>
         <p:blipFill>
-          <a:blip xmlns:r="http://schemas.openxmlformats.org/officeDocument/2006/relationships" xmlns:a="http://schemas.openxmlformats.org/drawingml/2006/main" r:embed="rIdOfficeKitImage7790b68b5d8fcd92_1"/>
-          <a:srcRect xmlns:a="http://schemas.openxmlformats.org/drawingml/2006/main" l="0" t="32347" r="0" b="32347"/>
+          <a:blip xmlns:r="http://schemas.openxmlformats.org/officeDocument/2006/relationships" xmlns:a="http://schemas.openxmlformats.org/drawingml/2006/main" r:embed="rIdOfficeKitImagec237998db8bee20d_1"/>
+          <a:srcRect xmlns:a="http://schemas.openxmlformats.org/drawingml/2006/main" l="0" t="32336" r="0" b="32336"/>
           <a:stretch xmlns:a="http://schemas.openxmlformats.org/drawingml/2006/main">
             <a:fillRect/>
           </a:stretch>
@@ -3419,8 +3419,8 @@
           <p:nvPr/>
         </p:nvPicPr>
         <p:blipFill>
-          <a:blip xmlns:r="http://schemas.openxmlformats.org/officeDocument/2006/relationships" xmlns:a="http://schemas.openxmlformats.org/drawingml/2006/main" r:embed="rIdOfficeKitImagea86c6dad26830b61_1"/>
-          <a:srcRect xmlns:a="http://schemas.openxmlformats.org/drawingml/2006/main" l="0" t="32338" r="0" b="32338"/>
+          <a:blip xmlns:r="http://schemas.openxmlformats.org/officeDocument/2006/relationships" xmlns:a="http://schemas.openxmlformats.org/drawingml/2006/main" r:embed="rIdOfficeKitImage083106afebc7d419_1"/>
+          <a:srcRect xmlns:a="http://schemas.openxmlformats.org/drawingml/2006/main" l="0" t="32347" r="0" b="32347"/>
           <a:stretch xmlns:a="http://schemas.openxmlformats.org/drawingml/2006/main">
             <a:fillRect/>
           </a:stretch>

--- a/skills/presentation-template-library/skills/artifact-template-noir-field-pictorial/assets/reference.pptx
+++ b/skills/presentation-template-library/skills/artifact-template-noir-field-pictorial/assets/reference.pptx
@@ -200,7 +200,7 @@
     <p:bg>
       <p:bgPr>
         <a:blipFill xmlns:a="http://schemas.openxmlformats.org/drawingml/2006/main">
-          <a:blip xmlns:r="http://schemas.openxmlformats.org/officeDocument/2006/relationships" r:embed="rIdOfficeKitImage9df32179333a9f35_1"/>
+          <a:blip xmlns:r="http://schemas.openxmlformats.org/officeDocument/2006/relationships" r:embed="rIdOfficeKitImagea5c00489db854fa2_1"/>
           <a:stretch>
             <a:fillRect/>
           </a:stretch>
@@ -530,7 +530,7 @@
     <p:bg>
       <p:bgPr>
         <a:blipFill xmlns:a="http://schemas.openxmlformats.org/drawingml/2006/main">
-          <a:blip xmlns:r="http://schemas.openxmlformats.org/officeDocument/2006/relationships" r:embed="rIdOfficeKitImagebdd32fb5cfa65986_1"/>
+          <a:blip xmlns:r="http://schemas.openxmlformats.org/officeDocument/2006/relationships" r:embed="rIdOfficeKitImagea68aebf613832e5f_1"/>
           <a:stretch>
             <a:fillRect/>
           </a:stretch>
@@ -1008,7 +1008,7 @@
           <p:nvPr/>
         </p:nvPicPr>
         <p:blipFill>
-          <a:blip xmlns:r="http://schemas.openxmlformats.org/officeDocument/2006/relationships" xmlns:a="http://schemas.openxmlformats.org/drawingml/2006/main" r:embed="rIdOfficeKitImage8fbc298f8d1b7a3c_1"/>
+          <a:blip xmlns:r="http://schemas.openxmlformats.org/officeDocument/2006/relationships" xmlns:a="http://schemas.openxmlformats.org/drawingml/2006/main" r:embed="rIdOfficeKitImagee231e9493e535fbe_1"/>
           <a:srcRect xmlns:a="http://schemas.openxmlformats.org/drawingml/2006/main" l="0" t="47258" r="0" b="47258"/>
           <a:stretch xmlns:a="http://schemas.openxmlformats.org/drawingml/2006/main">
             <a:fillRect/>
@@ -1331,7 +1331,7 @@
           <p:nvPr/>
         </p:nvPicPr>
         <p:blipFill>
-          <a:blip xmlns:r="http://schemas.openxmlformats.org/officeDocument/2006/relationships" xmlns:a="http://schemas.openxmlformats.org/drawingml/2006/main" r:embed="rIdOfficeKitImage33b8c33a8fc3d613_1"/>
+          <a:blip xmlns:r="http://schemas.openxmlformats.org/officeDocument/2006/relationships" xmlns:a="http://schemas.openxmlformats.org/drawingml/2006/main" r:embed="rIdOfficeKitImageb5a7d66fe0ba8bb7_1"/>
           <a:srcRect xmlns:a="http://schemas.openxmlformats.org/drawingml/2006/main" l="0" t="31920" r="0" b="31920"/>
           <a:stretch xmlns:a="http://schemas.openxmlformats.org/drawingml/2006/main">
             <a:fillRect/>
@@ -1507,7 +1507,7 @@
     <p:bg>
       <p:bgPr>
         <a:blipFill xmlns:a="http://schemas.openxmlformats.org/drawingml/2006/main">
-          <a:blip xmlns:r="http://schemas.openxmlformats.org/officeDocument/2006/relationships" r:embed="rIdOfficeKitImage7790b68b5d8fcd92_1"/>
+          <a:blip xmlns:r="http://schemas.openxmlformats.org/officeDocument/2006/relationships" r:embed="rIdOfficeKitImage84ff976f39aab728_1"/>
           <a:stretch>
             <a:fillRect/>
           </a:stretch>
@@ -1985,7 +1985,7 @@
           <p:nvPr/>
         </p:nvPicPr>
         <p:blipFill>
-          <a:blip xmlns:r="http://schemas.openxmlformats.org/officeDocument/2006/relationships" xmlns:a="http://schemas.openxmlformats.org/drawingml/2006/main" r:embed="rIdOfficeKitImagea86c6dad26830b61_1"/>
+          <a:blip xmlns:r="http://schemas.openxmlformats.org/officeDocument/2006/relationships" xmlns:a="http://schemas.openxmlformats.org/drawingml/2006/main" r:embed="rIdOfficeKitImagefdea69a11126d29b_1"/>
           <a:srcRect xmlns:a="http://schemas.openxmlformats.org/drawingml/2006/main" l="0" t="47256" r="0" b="47256"/>
           <a:stretch xmlns:a="http://schemas.openxmlformats.org/drawingml/2006/main">
             <a:fillRect/>
@@ -2186,7 +2186,7 @@
       </p:sp>
       <p:pic>
         <p:nvPicPr>
-          <p:cNvPr id="20" name="evidence-image-field">
+          <p:cNvPr id="20" name="evidence-matrix-0">
             <a:extLst xmlns:a="http://schemas.openxmlformats.org/drawingml/2006/main">
               <a:ext uri="{C183D7F6-B498-43B3-948B-1728B52AA6E4}">
                 <adec:decorative xmlns:adec="http://schemas.microsoft.com/office/drawing/2017/decorative" val="1"/>
@@ -2197,296 +2197,244 @@
           <p:nvPr/>
         </p:nvPicPr>
         <p:blipFill>
-          <a:blip xmlns:r="http://schemas.openxmlformats.org/officeDocument/2006/relationships" xmlns:a="http://schemas.openxmlformats.org/drawingml/2006/main" r:embed="rIdOfficeKitImage13db13f70d7843cc_1"/>
-          <a:srcRect xmlns:a="http://schemas.openxmlformats.org/drawingml/2006/main" l="0" t="39326" r="0" b="39326"/>
+          <a:blip xmlns:r="http://schemas.openxmlformats.org/officeDocument/2006/relationships" xmlns:a="http://schemas.openxmlformats.org/drawingml/2006/main" r:embed="rIdOfficeKitImagedf986129197cef3b_1"/>
+          <a:srcRect xmlns:a="http://schemas.openxmlformats.org/drawingml/2006/main" l="0" t="30757" r="0" b="30757"/>
           <a:stretch xmlns:a="http://schemas.openxmlformats.org/drawingml/2006/main">
             <a:fillRect/>
           </a:stretch>
         </p:blipFill>
         <p:spPr>
           <a:xfrm xmlns:a="http://schemas.openxmlformats.org/drawingml/2006/main">
-            <a:off x="1047750" y="3048000"/>
-            <a:ext cx="7905750" cy="3000375"/>
+            <a:off x="1066800" y="3333750"/>
+            <a:ext cx="3619500" cy="2476500"/>
           </a:xfrm>
           <a:prstGeom xmlns:a="http://schemas.openxmlformats.org/drawingml/2006/main" prst="rect">
             <a:avLst/>
           </a:prstGeom>
         </p:spPr>
       </p:pic>
-      <p:sp>
-        <p:nvSpPr>
-          <p:cNvPr id="21" name="evidence-image-caption"/>
-          <p:cNvSpPr txBox="1"/>
-          <p:nvPr/>
-        </p:nvSpPr>
-        <p:spPr>
-          <a:xfrm xmlns:a="http://schemas.openxmlformats.org/drawingml/2006/main">
-            <a:off x="1333500" y="3333750"/>
-            <a:ext cx="4762500" cy="266700"/>
-          </a:xfrm>
-          <a:prstGeom xmlns:a="http://schemas.openxmlformats.org/drawingml/2006/main" prst="rect">
-            <a:avLst/>
-          </a:prstGeom>
-          <a:noFill xmlns:a="http://schemas.openxmlformats.org/drawingml/2006/main"/>
-          <a:ln xmlns:a="http://schemas.openxmlformats.org/drawingml/2006/main" w="0">
-            <a:noFill/>
-          </a:ln>
-        </p:spPr>
-        <p:txBody>
-          <a:bodyPr xmlns:a="http://schemas.openxmlformats.org/drawingml/2006/main" wrap="square" lIns="0" tIns="0" rIns="0" bIns="0" anchor="t"/>
-          <a:lstStyle xmlns:a="http://schemas.openxmlformats.org/drawingml/2006/main"/>
-          <a:p xmlns:a="http://schemas.openxmlformats.org/drawingml/2006/main">
-            <a:r>
-              <a:rPr lang="en-US" sz="1350" b="1">
-                <a:solidFill>
-                  <a:srgbClr val="FFFFFF"/>
-                </a:solidFill>
-                <a:latin typeface="Inter"/>
-                <a:ea typeface="Inter"/>
-              </a:rPr>
-              <a:t>ONE SUBJECT · THREE SIGNALS</a:t>
-            </a:r>
-            <a:endParaRPr lang="en-US"/>
-          </a:p>
-        </p:txBody>
-      </p:sp>
-      <p:sp>
-        <p:nvSpPr>
-          <p:cNvPr id="22" name="evidence-image-rule"/>
-          <p:cNvSpPr/>
-          <p:nvPr/>
-        </p:nvSpPr>
-        <p:spPr>
-          <a:xfrm xmlns:a="http://schemas.openxmlformats.org/drawingml/2006/main">
-            <a:off x="1333500" y="5619750"/>
-            <a:ext cx="6096000" cy="0"/>
-          </a:xfrm>
-          <a:prstGeom xmlns:a="http://schemas.openxmlformats.org/drawingml/2006/main" prst="line">
-            <a:avLst/>
-          </a:prstGeom>
-          <a:noFill xmlns:a="http://schemas.openxmlformats.org/drawingml/2006/main"/>
-          <a:ln xmlns:a="http://schemas.openxmlformats.org/drawingml/2006/main" w="38100">
-            <a:solidFill>
-              <a:srgbClr val="FFFFFF"/>
-            </a:solidFill>
-            <a:prstDash val="solid"/>
-          </a:ln>
-        </p:spPr>
-        <p:txBody>
-          <a:bodyPr xmlns:a="http://schemas.openxmlformats.org/drawingml/2006/main" wrap="square" lIns="0" tIns="0" rIns="0" bIns="0" anchor="t"/>
-          <a:lstStyle xmlns:a="http://schemas.openxmlformats.org/drawingml/2006/main"/>
-          <a:p xmlns:a="http://schemas.openxmlformats.org/drawingml/2006/main">
-            <a:r>
-              <a:rPr lang="en-US"/>
-              <a:t/>
-            </a:r>
-            <a:endParaRPr lang="en-US"/>
-          </a:p>
-        </p:txBody>
-      </p:sp>
-      <p:sp>
-        <p:nvSpPr>
-          <p:cNvPr id="23" name="evidence-image-note"/>
-          <p:cNvSpPr txBox="1"/>
-          <p:nvPr/>
-        </p:nvSpPr>
-        <p:spPr>
-          <a:xfrm xmlns:a="http://schemas.openxmlformats.org/drawingml/2006/main">
-            <a:off x="1333500" y="5810250"/>
-            <a:ext cx="6477000" cy="285750"/>
-          </a:xfrm>
-          <a:prstGeom xmlns:a="http://schemas.openxmlformats.org/drawingml/2006/main" prst="rect">
-            <a:avLst/>
-          </a:prstGeom>
-          <a:noFill xmlns:a="http://schemas.openxmlformats.org/drawingml/2006/main"/>
-          <a:ln xmlns:a="http://schemas.openxmlformats.org/drawingml/2006/main" w="0">
-            <a:noFill/>
-          </a:ln>
-        </p:spPr>
-        <p:txBody>
-          <a:bodyPr xmlns:a="http://schemas.openxmlformats.org/drawingml/2006/main" wrap="square" lIns="0" tIns="0" rIns="0" bIns="0" anchor="t"/>
-          <a:lstStyle xmlns:a="http://schemas.openxmlformats.org/drawingml/2006/main"/>
-          <a:p xmlns:a="http://schemas.openxmlformats.org/drawingml/2006/main">
-            <a:r>
-              <a:rPr lang="en-US" sz="1350" b="1">
-                <a:solidFill>
-                  <a:srgbClr val="FFFFFF"/>
-                </a:solidFill>
-                <a:latin typeface="Inter"/>
-                <a:ea typeface="Inter"/>
-              </a:rPr>
-              <a:t>The image carries the story; the label carries the claim.</a:t>
-            </a:r>
-            <a:endParaRPr lang="en-US"/>
-          </a:p>
-        </p:txBody>
-      </p:sp>
-      <p:sp>
-        <p:nvSpPr>
-          <p:cNvPr id="24" name="metric"/>
-          <p:cNvSpPr txBox="1"/>
-          <p:nvPr/>
-        </p:nvSpPr>
-        <p:spPr>
-          <a:xfrm xmlns:a="http://schemas.openxmlformats.org/drawingml/2006/main">
-            <a:off x="9906000" y="3333750"/>
-            <a:ext cx="2667000" cy="781050"/>
-          </a:xfrm>
-          <a:prstGeom xmlns:a="http://schemas.openxmlformats.org/drawingml/2006/main" prst="rect">
-            <a:avLst/>
-          </a:prstGeom>
-          <a:noFill xmlns:a="http://schemas.openxmlformats.org/drawingml/2006/main"/>
-          <a:ln xmlns:a="http://schemas.openxmlformats.org/drawingml/2006/main" w="0">
-            <a:noFill/>
-          </a:ln>
-        </p:spPr>
-        <p:txBody>
-          <a:bodyPr xmlns:a="http://schemas.openxmlformats.org/drawingml/2006/main" wrap="square" lIns="0" tIns="0" rIns="0" bIns="0" anchor="t"/>
-          <a:lstStyle xmlns:a="http://schemas.openxmlformats.org/drawingml/2006/main"/>
-          <a:p xmlns:a="http://schemas.openxmlformats.org/drawingml/2006/main">
-            <a:r>
-              <a:rPr lang="en-US" sz="4800" b="1">
+      <p:pic>
+        <p:nvPicPr>
+          <p:cNvPr id="21" name="evidence-matrix-1">
+            <a:extLst xmlns:a="http://schemas.openxmlformats.org/drawingml/2006/main">
+              <a:ext uri="{C183D7F6-B498-43B3-948B-1728B52AA6E4}">
+                <adec:decorative xmlns:adec="http://schemas.microsoft.com/office/drawing/2017/decorative" val="1"/>
+              </a:ext>
+            </a:extLst>
+          </p:cNvPr>
+          <p:cNvPicPr/>
+          <p:nvPr/>
+        </p:nvPicPr>
+        <p:blipFill>
+          <a:blip xmlns:r="http://schemas.openxmlformats.org/officeDocument/2006/relationships" xmlns:a="http://schemas.openxmlformats.org/drawingml/2006/main" r:embed="rIdOfficeKitImage6a3db1fe43260f32_1"/>
+          <a:srcRect xmlns:a="http://schemas.openxmlformats.org/drawingml/2006/main" l="0" t="31927" r="0" b="31927"/>
+          <a:stretch xmlns:a="http://schemas.openxmlformats.org/drawingml/2006/main">
+            <a:fillRect/>
+          </a:stretch>
+        </p:blipFill>
+        <p:spPr>
+          <a:xfrm xmlns:a="http://schemas.openxmlformats.org/drawingml/2006/main">
+            <a:off x="4895850" y="3333750"/>
+            <a:ext cx="1809750" cy="1162050"/>
+          </a:xfrm>
+          <a:prstGeom xmlns:a="http://schemas.openxmlformats.org/drawingml/2006/main" prst="rect">
+            <a:avLst/>
+          </a:prstGeom>
+        </p:spPr>
+      </p:pic>
+      <p:pic>
+        <p:nvPicPr>
+          <p:cNvPr id="22" name="evidence-matrix-2">
+            <a:extLst xmlns:a="http://schemas.openxmlformats.org/drawingml/2006/main">
+              <a:ext uri="{C183D7F6-B498-43B3-948B-1728B52AA6E4}">
+                <adec:decorative xmlns:adec="http://schemas.microsoft.com/office/drawing/2017/decorative" val="1"/>
+              </a:ext>
+            </a:extLst>
+          </p:cNvPr>
+          <p:cNvPicPr/>
+          <p:nvPr/>
+        </p:nvPicPr>
+        <p:blipFill>
+          <a:blip xmlns:r="http://schemas.openxmlformats.org/officeDocument/2006/relationships" xmlns:a="http://schemas.openxmlformats.org/drawingml/2006/main" r:embed="rIdOfficeKitImagef4419f659ab3f590_1"/>
+          <a:srcRect xmlns:a="http://schemas.openxmlformats.org/drawingml/2006/main" l="0" t="31927" r="0" b="31927"/>
+          <a:stretch xmlns:a="http://schemas.openxmlformats.org/drawingml/2006/main">
+            <a:fillRect/>
+          </a:stretch>
+        </p:blipFill>
+        <p:spPr>
+          <a:xfrm xmlns:a="http://schemas.openxmlformats.org/drawingml/2006/main">
+            <a:off x="6877050" y="3333750"/>
+            <a:ext cx="1809750" cy="1162050"/>
+          </a:xfrm>
+          <a:prstGeom xmlns:a="http://schemas.openxmlformats.org/drawingml/2006/main" prst="rect">
+            <a:avLst/>
+          </a:prstGeom>
+        </p:spPr>
+      </p:pic>
+      <p:pic>
+        <p:nvPicPr>
+          <p:cNvPr id="23" name="evidence-matrix-3">
+            <a:extLst xmlns:a="http://schemas.openxmlformats.org/drawingml/2006/main">
+              <a:ext uri="{C183D7F6-B498-43B3-948B-1728B52AA6E4}">
+                <adec:decorative xmlns:adec="http://schemas.microsoft.com/office/drawing/2017/decorative" val="1"/>
+              </a:ext>
+            </a:extLst>
+          </p:cNvPr>
+          <p:cNvPicPr/>
+          <p:nvPr/>
+        </p:nvPicPr>
+        <p:blipFill>
+          <a:blip xmlns:r="http://schemas.openxmlformats.org/officeDocument/2006/relationships" xmlns:a="http://schemas.openxmlformats.org/drawingml/2006/main" r:embed="rIdOfficeKitImagee307d6c31b3d1e07_1"/>
+          <a:srcRect xmlns:a="http://schemas.openxmlformats.org/drawingml/2006/main" l="0" t="31927" r="0" b="31927"/>
+          <a:stretch xmlns:a="http://schemas.openxmlformats.org/drawingml/2006/main">
+            <a:fillRect/>
+          </a:stretch>
+        </p:blipFill>
+        <p:spPr>
+          <a:xfrm xmlns:a="http://schemas.openxmlformats.org/drawingml/2006/main">
+            <a:off x="4895850" y="4648200"/>
+            <a:ext cx="1809750" cy="1162050"/>
+          </a:xfrm>
+          <a:prstGeom xmlns:a="http://schemas.openxmlformats.org/drawingml/2006/main" prst="rect">
+            <a:avLst/>
+          </a:prstGeom>
+        </p:spPr>
+      </p:pic>
+      <p:pic>
+        <p:nvPicPr>
+          <p:cNvPr id="24" name="evidence-matrix-4">
+            <a:extLst xmlns:a="http://schemas.openxmlformats.org/drawingml/2006/main">
+              <a:ext uri="{C183D7F6-B498-43B3-948B-1728B52AA6E4}">
+                <adec:decorative xmlns:adec="http://schemas.microsoft.com/office/drawing/2017/decorative" val="1"/>
+              </a:ext>
+            </a:extLst>
+          </p:cNvPr>
+          <p:cNvPicPr/>
+          <p:nvPr/>
+        </p:nvPicPr>
+        <p:blipFill>
+          <a:blip xmlns:r="http://schemas.openxmlformats.org/officeDocument/2006/relationships" xmlns:a="http://schemas.openxmlformats.org/drawingml/2006/main" r:embed="rIdOfficeKitImagecb4e39f1eccfa545_1"/>
+          <a:srcRect xmlns:a="http://schemas.openxmlformats.org/drawingml/2006/main" l="0" t="31927" r="0" b="31927"/>
+          <a:stretch xmlns:a="http://schemas.openxmlformats.org/drawingml/2006/main">
+            <a:fillRect/>
+          </a:stretch>
+        </p:blipFill>
+        <p:spPr>
+          <a:xfrm xmlns:a="http://schemas.openxmlformats.org/drawingml/2006/main">
+            <a:off x="6877050" y="4648200"/>
+            <a:ext cx="1809750" cy="1162050"/>
+          </a:xfrm>
+          <a:prstGeom xmlns:a="http://schemas.openxmlformats.org/drawingml/2006/main" prst="rect">
+            <a:avLst/>
+          </a:prstGeom>
+        </p:spPr>
+      </p:pic>
+      <p:sp>
+        <p:nvSpPr>
+          <p:cNvPr id="25" name="matrix-label"/>
+          <p:cNvSpPr txBox="1"/>
+          <p:nvPr/>
+        </p:nvSpPr>
+        <p:spPr>
+          <a:xfrm xmlns:a="http://schemas.openxmlformats.org/drawingml/2006/main">
+            <a:off x="9620250" y="3429000"/>
+            <a:ext cx="3429000" cy="228600"/>
+          </a:xfrm>
+          <a:prstGeom xmlns:a="http://schemas.openxmlformats.org/drawingml/2006/main" prst="rect">
+            <a:avLst/>
+          </a:prstGeom>
+          <a:noFill xmlns:a="http://schemas.openxmlformats.org/drawingml/2006/main"/>
+          <a:ln xmlns:a="http://schemas.openxmlformats.org/drawingml/2006/main" w="0">
+            <a:noFill/>
+          </a:ln>
+        </p:spPr>
+        <p:txBody>
+          <a:bodyPr xmlns:a="http://schemas.openxmlformats.org/drawingml/2006/main" wrap="square" lIns="0" tIns="0" rIns="0" bIns="0" anchor="t"/>
+          <a:lstStyle xmlns:a="http://schemas.openxmlformats.org/drawingml/2006/main"/>
+          <a:p xmlns:a="http://schemas.openxmlformats.org/drawingml/2006/main">
+            <a:r>
+              <a:rPr lang="en-US" sz="1125" b="1">
                 <a:solidFill>
                   <a:srgbClr val="D53A45"/>
                 </a:solidFill>
                 <a:latin typeface="Inter"/>
                 <a:ea typeface="Inter"/>
               </a:rPr>
-              <a:t>68</a:t>
-            </a:r>
-            <a:endParaRPr lang="en-US"/>
-          </a:p>
-        </p:txBody>
-      </p:sp>
-      <p:sp>
-        <p:nvSpPr>
-          <p:cNvPr id="25" name="metric-label"/>
-          <p:cNvSpPr txBox="1"/>
-          <p:nvPr/>
-        </p:nvSpPr>
-        <p:spPr>
-          <a:xfrm xmlns:a="http://schemas.openxmlformats.org/drawingml/2006/main">
-            <a:off x="9906000" y="4143375"/>
-            <a:ext cx="3143250" cy="285750"/>
-          </a:xfrm>
-          <a:prstGeom xmlns:a="http://schemas.openxmlformats.org/drawingml/2006/main" prst="rect">
-            <a:avLst/>
-          </a:prstGeom>
-          <a:noFill xmlns:a="http://schemas.openxmlformats.org/drawingml/2006/main"/>
-          <a:ln xmlns:a="http://schemas.openxmlformats.org/drawingml/2006/main" w="0">
-            <a:noFill/>
-          </a:ln>
-        </p:spPr>
-        <p:txBody>
-          <a:bodyPr xmlns:a="http://schemas.openxmlformats.org/drawingml/2006/main" wrap="square" lIns="0" tIns="0" rIns="0" bIns="0" anchor="t"/>
-          <a:lstStyle xmlns:a="http://schemas.openxmlformats.org/drawingml/2006/main"/>
-          <a:p xmlns:a="http://schemas.openxmlformats.org/drawingml/2006/main">
-            <a:r>
-              <a:rPr lang="en-US" sz="1350">
+              <a:t>IMAGE EVIDENCE</a:t>
+            </a:r>
+            <a:endParaRPr lang="en-US"/>
+          </a:p>
+        </p:txBody>
+      </p:sp>
+      <p:sp>
+        <p:nvSpPr>
+          <p:cNvPr id="26" name="matrix-title"/>
+          <p:cNvSpPr txBox="1"/>
+          <p:nvPr/>
+        </p:nvSpPr>
+        <p:spPr>
+          <a:xfrm xmlns:a="http://schemas.openxmlformats.org/drawingml/2006/main">
+            <a:off x="9620250" y="3943350"/>
+            <a:ext cx="3619500" cy="723900"/>
+          </a:xfrm>
+          <a:prstGeom xmlns:a="http://schemas.openxmlformats.org/drawingml/2006/main" prst="rect">
+            <a:avLst/>
+          </a:prstGeom>
+          <a:noFill xmlns:a="http://schemas.openxmlformats.org/drawingml/2006/main"/>
+          <a:ln xmlns:a="http://schemas.openxmlformats.org/drawingml/2006/main" w="0">
+            <a:noFill/>
+          </a:ln>
+        </p:spPr>
+        <p:txBody>
+          <a:bodyPr xmlns:a="http://schemas.openxmlformats.org/drawingml/2006/main" wrap="square" lIns="0" tIns="0" rIns="0" bIns="0" anchor="t"/>
+          <a:lstStyle xmlns:a="http://schemas.openxmlformats.org/drawingml/2006/main"/>
+          <a:p xmlns:a="http://schemas.openxmlformats.org/drawingml/2006/main">
+            <a:r>
+              <a:rPr lang="en-US" sz="2025" b="1">
+                <a:solidFill>
+                  <a:srgbClr val="F2F0EA"/>
+                </a:solidFill>
+                <a:latin typeface="Inter"/>
+                <a:ea typeface="Inter"/>
+              </a:rPr>
+              <a:t>The same subject can carry several proofs.</a:t>
+            </a:r>
+            <a:endParaRPr lang="en-US"/>
+          </a:p>
+        </p:txBody>
+      </p:sp>
+      <p:sp>
+        <p:nvSpPr>
+          <p:cNvPr id="27" name="matrix-body"/>
+          <p:cNvSpPr txBox="1"/>
+          <p:nvPr/>
+        </p:nvSpPr>
+        <p:spPr>
+          <a:xfrm xmlns:a="http://schemas.openxmlformats.org/drawingml/2006/main">
+            <a:off x="9620250" y="5048250"/>
+            <a:ext cx="3619500" cy="857250"/>
+          </a:xfrm>
+          <a:prstGeom xmlns:a="http://schemas.openxmlformats.org/drawingml/2006/main" prst="rect">
+            <a:avLst/>
+          </a:prstGeom>
+          <a:noFill xmlns:a="http://schemas.openxmlformats.org/drawingml/2006/main"/>
+          <a:ln xmlns:a="http://schemas.openxmlformats.org/drawingml/2006/main" w="0">
+            <a:noFill/>
+          </a:ln>
+        </p:spPr>
+        <p:txBody>
+          <a:bodyPr xmlns:a="http://schemas.openxmlformats.org/drawingml/2006/main" wrap="square" lIns="0" tIns="0" rIns="0" bIns="0" anchor="t"/>
+          <a:lstStyle xmlns:a="http://schemas.openxmlformats.org/drawingml/2006/main"/>
+          <a:p xmlns:a="http://schemas.openxmlformats.org/drawingml/2006/main">
+            <a:r>
+              <a:rPr lang="en-US" sz="1275">
                 <a:solidFill>
                   <a:srgbClr val="7D7D7B"/>
                 </a:solidFill>
                 <a:latin typeface="Inter"/>
                 <a:ea typeface="Inter"/>
               </a:rPr>
-              <a:t>qualified response · campaign close</a:t>
-            </a:r>
-            <a:endParaRPr lang="en-US"/>
-          </a:p>
-        </p:txBody>
-      </p:sp>
-      <p:sp>
-        <p:nvSpPr>
-          <p:cNvPr id="26" name="rail-rule"/>
-          <p:cNvSpPr/>
-          <p:nvPr/>
-        </p:nvSpPr>
-        <p:spPr>
-          <a:xfrm xmlns:a="http://schemas.openxmlformats.org/drawingml/2006/main">
-            <a:off x="9906000" y="4810125"/>
-            <a:ext cx="3762375" cy="0"/>
-          </a:xfrm>
-          <a:prstGeom xmlns:a="http://schemas.openxmlformats.org/drawingml/2006/main" prst="line">
-            <a:avLst/>
-          </a:prstGeom>
-          <a:noFill xmlns:a="http://schemas.openxmlformats.org/drawingml/2006/main"/>
-          <a:ln xmlns:a="http://schemas.openxmlformats.org/drawingml/2006/main" w="25400">
-            <a:solidFill>
-              <a:srgbClr val="7D7D7B"/>
-            </a:solidFill>
-            <a:prstDash val="solid"/>
-          </a:ln>
-        </p:spPr>
-        <p:txBody>
-          <a:bodyPr xmlns:a="http://schemas.openxmlformats.org/drawingml/2006/main" wrap="square" lIns="0" tIns="0" rIns="0" bIns="0" anchor="t"/>
-          <a:lstStyle xmlns:a="http://schemas.openxmlformats.org/drawingml/2006/main"/>
-          <a:p xmlns:a="http://schemas.openxmlformats.org/drawingml/2006/main">
-            <a:r>
-              <a:rPr lang="en-US"/>
-              <a:t/>
-            </a:r>
-            <a:endParaRPr lang="en-US"/>
-          </a:p>
-        </p:txBody>
-      </p:sp>
-      <p:sp>
-        <p:nvSpPr>
-          <p:cNvPr id="27" name="read-through"/>
-          <p:cNvSpPr txBox="1"/>
-          <p:nvPr/>
-        </p:nvSpPr>
-        <p:spPr>
-          <a:xfrm xmlns:a="http://schemas.openxmlformats.org/drawingml/2006/main">
-            <a:off x="9906000" y="5143500"/>
-            <a:ext cx="3429000" cy="742950"/>
-          </a:xfrm>
-          <a:prstGeom xmlns:a="http://schemas.openxmlformats.org/drawingml/2006/main" prst="rect">
-            <a:avLst/>
-          </a:prstGeom>
-          <a:noFill xmlns:a="http://schemas.openxmlformats.org/drawingml/2006/main"/>
-          <a:ln xmlns:a="http://schemas.openxmlformats.org/drawingml/2006/main" w="0">
-            <a:noFill/>
-          </a:ln>
-        </p:spPr>
-        <p:txBody>
-          <a:bodyPr xmlns:a="http://schemas.openxmlformats.org/drawingml/2006/main" wrap="square" lIns="0" tIns="0" rIns="0" bIns="0" anchor="t"/>
-          <a:lstStyle xmlns:a="http://schemas.openxmlformats.org/drawingml/2006/main"/>
-          <a:p xmlns:a="http://schemas.openxmlformats.org/drawingml/2006/main">
-            <a:r>
-              <a:rPr lang="en-US" sz="1350" b="1">
-                <a:solidFill>
-                  <a:srgbClr val="F2F0EA"/>
-                </a:solidFill>
-                <a:latin typeface="Inter"/>
-                <a:ea typeface="Inter"/>
-              </a:rPr>
-              <a:t>Reach is useful only when the</a:t>
-            </a:r>
-            <a:endParaRPr lang="en-US"/>
-          </a:p>
-          <a:p xmlns:a="http://schemas.openxmlformats.org/drawingml/2006/main">
-            <a:r>
-              <a:rPr lang="en-US" sz="1350" b="1">
-                <a:solidFill>
-                  <a:srgbClr val="F2F0EA"/>
-                </a:solidFill>
-                <a:latin typeface="Inter"/>
-                <a:ea typeface="Inter"/>
-              </a:rPr>
-              <a:t>audience can see and take the</a:t>
-            </a:r>
-            <a:endParaRPr lang="en-US"/>
-          </a:p>
-          <a:p xmlns:a="http://schemas.openxmlformats.org/drawingml/2006/main">
-            <a:r>
-              <a:rPr lang="en-US" sz="1350" b="1">
-                <a:solidFill>
-                  <a:srgbClr val="F2F0EA"/>
-                </a:solidFill>
-                <a:latin typeface="Inter"/>
-                <a:ea typeface="Inter"/>
-              </a:rPr>
-              <a:t>next step.</a:t>
+              <a:t>Use a dominant frame for context and smaller crops for comparable detail. Every image needs a role, source, and readable caption.</a:t>
             </a:r>
             <a:endParaRPr lang="en-US"/>
           </a:p>
@@ -3120,8 +3068,8 @@
           <p:nvPr/>
         </p:nvPicPr>
         <p:blipFill>
-          <a:blip xmlns:r="http://schemas.openxmlformats.org/officeDocument/2006/relationships" xmlns:a="http://schemas.openxmlformats.org/drawingml/2006/main" r:embed="rIdOfficeKitImagee4bd683f73b7a543_1"/>
-          <a:srcRect xmlns:a="http://schemas.openxmlformats.org/drawingml/2006/main" l="0" t="47256" r="0" b="47256"/>
+          <a:blip xmlns:r="http://schemas.openxmlformats.org/officeDocument/2006/relationships" xmlns:a="http://schemas.openxmlformats.org/drawingml/2006/main" r:embed="rIdOfficeKitImage10e4539a68783891_1"/>
+          <a:srcRect xmlns:a="http://schemas.openxmlformats.org/drawingml/2006/main" l="0" t="47258" r="0" b="47258"/>
           <a:stretch xmlns:a="http://schemas.openxmlformats.org/drawingml/2006/main">
             <a:fillRect/>
           </a:stretch>
@@ -3332,8 +3280,8 @@
           <p:nvPr/>
         </p:nvPicPr>
         <p:blipFill>
-          <a:blip xmlns:r="http://schemas.openxmlformats.org/officeDocument/2006/relationships" xmlns:a="http://schemas.openxmlformats.org/drawingml/2006/main" r:embed="rIdOfficeKitImaged3d6b9bbc9872adc_1"/>
-          <a:srcRect xmlns:a="http://schemas.openxmlformats.org/drawingml/2006/main" l="0" t="31962" r="0" b="31962"/>
+          <a:blip xmlns:r="http://schemas.openxmlformats.org/officeDocument/2006/relationships" xmlns:a="http://schemas.openxmlformats.org/drawingml/2006/main" r:embed="rIdOfficeKitImagea5c00489db854fa2_1"/>
+          <a:srcRect xmlns:a="http://schemas.openxmlformats.org/drawingml/2006/main" l="0" t="31971" r="0" b="31971"/>
           <a:stretch xmlns:a="http://schemas.openxmlformats.org/drawingml/2006/main">
             <a:fillRect/>
           </a:stretch>
@@ -3361,8 +3309,8 @@
           <p:nvPr/>
         </p:nvPicPr>
         <p:blipFill>
-          <a:blip xmlns:r="http://schemas.openxmlformats.org/officeDocument/2006/relationships" xmlns:a="http://schemas.openxmlformats.org/drawingml/2006/main" r:embed="rIdOfficeKitImage2f5be6b798f5ce32_1"/>
-          <a:srcRect xmlns:a="http://schemas.openxmlformats.org/drawingml/2006/main" l="0" t="32338" r="0" b="32338"/>
+          <a:blip xmlns:r="http://schemas.openxmlformats.org/officeDocument/2006/relationships" xmlns:a="http://schemas.openxmlformats.org/drawingml/2006/main" r:embed="rIdOfficeKitImagea68aebf613832e5f_1"/>
+          <a:srcRect xmlns:a="http://schemas.openxmlformats.org/drawingml/2006/main" l="0" t="32347" r="0" b="32347"/>
           <a:stretch xmlns:a="http://schemas.openxmlformats.org/drawingml/2006/main">
             <a:fillRect/>
           </a:stretch>
@@ -3390,8 +3338,8 @@
           <p:nvPr/>
         </p:nvPicPr>
         <p:blipFill>
-          <a:blip xmlns:r="http://schemas.openxmlformats.org/officeDocument/2006/relationships" xmlns:a="http://schemas.openxmlformats.org/drawingml/2006/main" r:embed="rIdOfficeKitImagec237998db8bee20d_1"/>
-          <a:srcRect xmlns:a="http://schemas.openxmlformats.org/drawingml/2006/main" l="0" t="32336" r="0" b="32336"/>
+          <a:blip xmlns:r="http://schemas.openxmlformats.org/officeDocument/2006/relationships" xmlns:a="http://schemas.openxmlformats.org/drawingml/2006/main" r:embed="rIdOfficeKitImagee231e9493e535fbe_1"/>
+          <a:srcRect xmlns:a="http://schemas.openxmlformats.org/drawingml/2006/main" l="0" t="32347" r="0" b="32347"/>
           <a:stretch xmlns:a="http://schemas.openxmlformats.org/drawingml/2006/main">
             <a:fillRect/>
           </a:stretch>
@@ -3419,7 +3367,7 @@
           <p:nvPr/>
         </p:nvPicPr>
         <p:blipFill>
-          <a:blip xmlns:r="http://schemas.openxmlformats.org/officeDocument/2006/relationships" xmlns:a="http://schemas.openxmlformats.org/drawingml/2006/main" r:embed="rIdOfficeKitImage083106afebc7d419_1"/>
+          <a:blip xmlns:r="http://schemas.openxmlformats.org/officeDocument/2006/relationships" xmlns:a="http://schemas.openxmlformats.org/drawingml/2006/main" r:embed="rIdOfficeKitImageb5a7d66fe0ba8bb7_1"/>
           <a:srcRect xmlns:a="http://schemas.openxmlformats.org/drawingml/2006/main" l="0" t="32347" r="0" b="32347"/>
           <a:stretch xmlns:a="http://schemas.openxmlformats.org/drawingml/2006/main">
             <a:fillRect/>
@@ -3448,7 +3396,7 @@
           <p:nvPr/>
         </p:nvPicPr>
         <p:blipFill>
-          <a:blip xmlns:r="http://schemas.openxmlformats.org/officeDocument/2006/relationships" xmlns:a="http://schemas.openxmlformats.org/drawingml/2006/main" r:embed="rIdOfficeKitImage9df32179333a9f35_1"/>
+          <a:blip xmlns:r="http://schemas.openxmlformats.org/officeDocument/2006/relationships" xmlns:a="http://schemas.openxmlformats.org/drawingml/2006/main" r:embed="rIdOfficeKitImage84ff976f39aab728_1"/>
           <a:srcRect xmlns:a="http://schemas.openxmlformats.org/drawingml/2006/main" l="0" t="32347" r="0" b="32347"/>
           <a:stretch xmlns:a="http://schemas.openxmlformats.org/drawingml/2006/main">
             <a:fillRect/>
@@ -3690,7 +3638,7 @@
     <p:bg>
       <p:bgPr>
         <a:blipFill xmlns:a="http://schemas.openxmlformats.org/drawingml/2006/main">
-          <a:blip xmlns:r="http://schemas.openxmlformats.org/officeDocument/2006/relationships" r:embed="rIdOfficeKitImagebdd32fb5cfa65986_1"/>
+          <a:blip xmlns:r="http://schemas.openxmlformats.org/officeDocument/2006/relationships" r:embed="rIdOfficeKitImagefdea69a11126d29b_1"/>
           <a:stretch>
             <a:fillRect/>
           </a:stretch>
@@ -4426,7 +4374,7 @@
     <p:bg>
       <p:bgPr>
         <a:blipFill xmlns:a="http://schemas.openxmlformats.org/drawingml/2006/main">
-          <a:blip xmlns:r="http://schemas.openxmlformats.org/officeDocument/2006/relationships" r:embed="rIdOfficeKitImage8fbc298f8d1b7a3c_1"/>
+          <a:blip xmlns:r="http://schemas.openxmlformats.org/officeDocument/2006/relationships" r:embed="rIdOfficeKitImagedf986129197cef3b_1"/>
           <a:stretch>
             <a:fillRect/>
           </a:stretch>
@@ -4904,8 +4852,8 @@
           <p:nvPr/>
         </p:nvPicPr>
         <p:blipFill>
-          <a:blip xmlns:r="http://schemas.openxmlformats.org/officeDocument/2006/relationships" xmlns:a="http://schemas.openxmlformats.org/drawingml/2006/main" r:embed="rIdOfficeKitImage33b8c33a8fc3d613_1"/>
-          <a:srcRect xmlns:a="http://schemas.openxmlformats.org/drawingml/2006/main" l="0" t="47258" r="0" b="47258"/>
+          <a:blip xmlns:r="http://schemas.openxmlformats.org/officeDocument/2006/relationships" xmlns:a="http://schemas.openxmlformats.org/drawingml/2006/main" r:embed="rIdOfficeKitImage6a3db1fe43260f32_1"/>
+          <a:srcRect xmlns:a="http://schemas.openxmlformats.org/drawingml/2006/main" l="0" t="47256" r="0" b="47256"/>
           <a:stretch xmlns:a="http://schemas.openxmlformats.org/drawingml/2006/main">
             <a:fillRect/>
           </a:stretch>

--- a/skills/presentation-template-library/skills/artifact-template-noir-field-pictorial/assets/reference.pptx
+++ b/skills/presentation-template-library/skills/artifact-template-noir-field-pictorial/assets/reference.pptx
@@ -1332,7 +1332,7 @@
         </p:nvPicPr>
         <p:blipFill>
           <a:blip xmlns:r="http://schemas.openxmlformats.org/officeDocument/2006/relationships" xmlns:a="http://schemas.openxmlformats.org/drawingml/2006/main" r:embed="rIdOfficeKitImageb5a7d66fe0ba8bb7_1"/>
-          <a:srcRect xmlns:a="http://schemas.openxmlformats.org/drawingml/2006/main" l="0" t="31920" r="0" b="31920"/>
+          <a:srcRect xmlns:a="http://schemas.openxmlformats.org/drawingml/2006/main" l="0" t="37411" r="0" b="37411"/>
           <a:stretch xmlns:a="http://schemas.openxmlformats.org/drawingml/2006/main">
             <a:fillRect/>
           </a:stretch>
@@ -1340,22 +1340,80 @@
         <p:spPr>
           <a:xfrm xmlns:a="http://schemas.openxmlformats.org/drawingml/2006/main">
             <a:off x="9525000" y="3143250"/>
-            <a:ext cx="4000500" cy="2571750"/>
+            <a:ext cx="4000500" cy="1790700"/>
           </a:xfrm>
           <a:prstGeom xmlns:a="http://schemas.openxmlformats.org/drawingml/2006/main" prst="rect">
             <a:avLst/>
           </a:prstGeom>
         </p:spPr>
       </p:pic>
-      <p:sp>
-        <p:nvSpPr>
-          <p:cNvPr id="24" name="promotion-image-rule"/>
+      <p:pic>
+        <p:nvPicPr>
+          <p:cNvPr id="24" name="promotion-detail-frame-one">
+            <a:extLst xmlns:a="http://schemas.openxmlformats.org/drawingml/2006/main">
+              <a:ext uri="{C183D7F6-B498-43B3-948B-1728B52AA6E4}">
+                <adec:decorative xmlns:adec="http://schemas.microsoft.com/office/drawing/2017/decorative" val="1"/>
+              </a:ext>
+            </a:extLst>
+          </p:cNvPr>
+          <p:cNvPicPr/>
+          <p:nvPr/>
+        </p:nvPicPr>
+        <p:blipFill>
+          <a:blip xmlns:r="http://schemas.openxmlformats.org/officeDocument/2006/relationships" xmlns:a="http://schemas.openxmlformats.org/drawingml/2006/main" r:embed="rIdOfficeKitImage84ff976f39aab728_1"/>
+          <a:srcRect xmlns:a="http://schemas.openxmlformats.org/drawingml/2006/main" l="0" t="34406" r="0" b="34406"/>
+          <a:stretch xmlns:a="http://schemas.openxmlformats.org/drawingml/2006/main">
+            <a:fillRect/>
+          </a:stretch>
+        </p:blipFill>
+        <p:spPr>
+          <a:xfrm xmlns:a="http://schemas.openxmlformats.org/drawingml/2006/main">
+            <a:off x="9525000" y="5162550"/>
+            <a:ext cx="1924050" cy="1066800"/>
+          </a:xfrm>
+          <a:prstGeom xmlns:a="http://schemas.openxmlformats.org/drawingml/2006/main" prst="rect">
+            <a:avLst/>
+          </a:prstGeom>
+        </p:spPr>
+      </p:pic>
+      <p:pic>
+        <p:nvPicPr>
+          <p:cNvPr id="25" name="promotion-detail-frame-two">
+            <a:extLst xmlns:a="http://schemas.openxmlformats.org/drawingml/2006/main">
+              <a:ext uri="{C183D7F6-B498-43B3-948B-1728B52AA6E4}">
+                <adec:decorative xmlns:adec="http://schemas.microsoft.com/office/drawing/2017/decorative" val="1"/>
+              </a:ext>
+            </a:extLst>
+          </p:cNvPr>
+          <p:cNvPicPr/>
+          <p:nvPr/>
+        </p:nvPicPr>
+        <p:blipFill>
+          <a:blip xmlns:r="http://schemas.openxmlformats.org/officeDocument/2006/relationships" xmlns:a="http://schemas.openxmlformats.org/drawingml/2006/main" r:embed="rIdOfficeKitImagefdea69a11126d29b_1"/>
+          <a:srcRect xmlns:a="http://schemas.openxmlformats.org/drawingml/2006/main" l="0" t="34394" r="0" b="34394"/>
+          <a:stretch xmlns:a="http://schemas.openxmlformats.org/drawingml/2006/main">
+            <a:fillRect/>
+          </a:stretch>
+        </p:blipFill>
+        <p:spPr>
+          <a:xfrm xmlns:a="http://schemas.openxmlformats.org/drawingml/2006/main">
+            <a:off x="11601450" y="5162550"/>
+            <a:ext cx="1924050" cy="1066800"/>
+          </a:xfrm>
+          <a:prstGeom xmlns:a="http://schemas.openxmlformats.org/drawingml/2006/main" prst="rect">
+            <a:avLst/>
+          </a:prstGeom>
+        </p:spPr>
+      </p:pic>
+      <p:sp>
+        <p:nvSpPr>
+          <p:cNvPr id="26" name="promotion-image-rule"/>
           <p:cNvSpPr/>
           <p:nvPr/>
         </p:nvSpPr>
         <p:spPr>
           <a:xfrm xmlns:a="http://schemas.openxmlformats.org/drawingml/2006/main">
-            <a:off x="9525000" y="5905500"/>
+            <a:off x="9525000" y="6438900"/>
             <a:ext cx="4000500" cy="0"/>
           </a:xfrm>
           <a:prstGeom xmlns:a="http://schemas.openxmlformats.org/drawingml/2006/main" prst="line">
@@ -1383,13 +1441,13 @@
       </p:sp>
       <p:sp>
         <p:nvSpPr>
-          <p:cNvPr id="25" name="promotion-image-label"/>
-          <p:cNvSpPr txBox="1"/>
-          <p:nvPr/>
-        </p:nvSpPr>
-        <p:spPr>
-          <a:xfrm xmlns:a="http://schemas.openxmlformats.org/drawingml/2006/main">
-            <a:off x="9525000" y="6153150"/>
+          <p:cNvPr id="27" name="promotion-image-label"/>
+          <p:cNvSpPr txBox="1"/>
+          <p:nvPr/>
+        </p:nvSpPr>
+        <p:spPr>
+          <a:xfrm xmlns:a="http://schemas.openxmlformats.org/drawingml/2006/main">
+            <a:off x="9525000" y="6667500"/>
             <a:ext cx="4000500" cy="247650"/>
           </a:xfrm>
           <a:prstGeom xmlns:a="http://schemas.openxmlformats.org/drawingml/2006/main" prst="rect">
@@ -1420,7 +1478,7 @@
       </p:sp>
       <p:sp>
         <p:nvSpPr>
-          <p:cNvPr id="26" name="source"/>
+          <p:cNvPr id="28" name="source"/>
           <p:cNvSpPr txBox="1"/>
           <p:nvPr/>
         </p:nvSpPr>
@@ -1457,7 +1515,7 @@
       </p:sp>
       <p:sp>
         <p:nvSpPr>
-          <p:cNvPr id="27" name="page-number"/>
+          <p:cNvPr id="29" name="page-number"/>
           <p:cNvSpPr txBox="1"/>
           <p:nvPr/>
         </p:nvSpPr>
@@ -1507,7 +1565,7 @@
     <p:bg>
       <p:bgPr>
         <a:blipFill xmlns:a="http://schemas.openxmlformats.org/drawingml/2006/main">
-          <a:blip xmlns:r="http://schemas.openxmlformats.org/officeDocument/2006/relationships" r:embed="rIdOfficeKitImage84ff976f39aab728_1"/>
+          <a:blip xmlns:r="http://schemas.openxmlformats.org/officeDocument/2006/relationships" r:embed="rIdOfficeKitImagedf986129197cef3b_1"/>
           <a:stretch>
             <a:fillRect/>
           </a:stretch>
@@ -1985,7 +2043,7 @@
           <p:nvPr/>
         </p:nvPicPr>
         <p:blipFill>
-          <a:blip xmlns:r="http://schemas.openxmlformats.org/officeDocument/2006/relationships" xmlns:a="http://schemas.openxmlformats.org/drawingml/2006/main" r:embed="rIdOfficeKitImagefdea69a11126d29b_1"/>
+          <a:blip xmlns:r="http://schemas.openxmlformats.org/officeDocument/2006/relationships" xmlns:a="http://schemas.openxmlformats.org/drawingml/2006/main" r:embed="rIdOfficeKitImage6a3db1fe43260f32_1"/>
           <a:srcRect xmlns:a="http://schemas.openxmlformats.org/drawingml/2006/main" l="0" t="47256" r="0" b="47256"/>
           <a:stretch xmlns:a="http://schemas.openxmlformats.org/drawingml/2006/main">
             <a:fillRect/>
@@ -2197,8 +2255,8 @@
           <p:nvPr/>
         </p:nvPicPr>
         <p:blipFill>
-          <a:blip xmlns:r="http://schemas.openxmlformats.org/officeDocument/2006/relationships" xmlns:a="http://schemas.openxmlformats.org/drawingml/2006/main" r:embed="rIdOfficeKitImagedf986129197cef3b_1"/>
-          <a:srcRect xmlns:a="http://schemas.openxmlformats.org/drawingml/2006/main" l="0" t="30757" r="0" b="30757"/>
+          <a:blip xmlns:r="http://schemas.openxmlformats.org/officeDocument/2006/relationships" xmlns:a="http://schemas.openxmlformats.org/drawingml/2006/main" r:embed="rIdOfficeKitImagef4419f659ab3f590_1"/>
+          <a:srcRect xmlns:a="http://schemas.openxmlformats.org/drawingml/2006/main" l="0" t="30742" r="0" b="30742"/>
           <a:stretch xmlns:a="http://schemas.openxmlformats.org/drawingml/2006/main">
             <a:fillRect/>
           </a:stretch>
@@ -2226,7 +2284,7 @@
           <p:nvPr/>
         </p:nvPicPr>
         <p:blipFill>
-          <a:blip xmlns:r="http://schemas.openxmlformats.org/officeDocument/2006/relationships" xmlns:a="http://schemas.openxmlformats.org/drawingml/2006/main" r:embed="rIdOfficeKitImage6a3db1fe43260f32_1"/>
+          <a:blip xmlns:r="http://schemas.openxmlformats.org/officeDocument/2006/relationships" xmlns:a="http://schemas.openxmlformats.org/drawingml/2006/main" r:embed="rIdOfficeKitImagee307d6c31b3d1e07_1"/>
           <a:srcRect xmlns:a="http://schemas.openxmlformats.org/drawingml/2006/main" l="0" t="31927" r="0" b="31927"/>
           <a:stretch xmlns:a="http://schemas.openxmlformats.org/drawingml/2006/main">
             <a:fillRect/>
@@ -2255,7 +2313,7 @@
           <p:nvPr/>
         </p:nvPicPr>
         <p:blipFill>
-          <a:blip xmlns:r="http://schemas.openxmlformats.org/officeDocument/2006/relationships" xmlns:a="http://schemas.openxmlformats.org/drawingml/2006/main" r:embed="rIdOfficeKitImagef4419f659ab3f590_1"/>
+          <a:blip xmlns:r="http://schemas.openxmlformats.org/officeDocument/2006/relationships" xmlns:a="http://schemas.openxmlformats.org/drawingml/2006/main" r:embed="rIdOfficeKitImagecb4e39f1eccfa545_1"/>
           <a:srcRect xmlns:a="http://schemas.openxmlformats.org/drawingml/2006/main" l="0" t="31927" r="0" b="31927"/>
           <a:stretch xmlns:a="http://schemas.openxmlformats.org/drawingml/2006/main">
             <a:fillRect/>
@@ -2284,8 +2342,8 @@
           <p:nvPr/>
         </p:nvPicPr>
         <p:blipFill>
-          <a:blip xmlns:r="http://schemas.openxmlformats.org/officeDocument/2006/relationships" xmlns:a="http://schemas.openxmlformats.org/drawingml/2006/main" r:embed="rIdOfficeKitImagee307d6c31b3d1e07_1"/>
-          <a:srcRect xmlns:a="http://schemas.openxmlformats.org/drawingml/2006/main" l="0" t="31927" r="0" b="31927"/>
+          <a:blip xmlns:r="http://schemas.openxmlformats.org/officeDocument/2006/relationships" xmlns:a="http://schemas.openxmlformats.org/drawingml/2006/main" r:embed="rIdOfficeKitImage10e4539a68783891_1"/>
+          <a:srcRect xmlns:a="http://schemas.openxmlformats.org/drawingml/2006/main" l="0" t="31941" r="0" b="31941"/>
           <a:stretch xmlns:a="http://schemas.openxmlformats.org/drawingml/2006/main">
             <a:fillRect/>
           </a:stretch>
@@ -2313,7 +2371,7 @@
           <p:nvPr/>
         </p:nvPicPr>
         <p:blipFill>
-          <a:blip xmlns:r="http://schemas.openxmlformats.org/officeDocument/2006/relationships" xmlns:a="http://schemas.openxmlformats.org/drawingml/2006/main" r:embed="rIdOfficeKitImagecb4e39f1eccfa545_1"/>
+          <a:blip xmlns:r="http://schemas.openxmlformats.org/officeDocument/2006/relationships" xmlns:a="http://schemas.openxmlformats.org/drawingml/2006/main" r:embed="rIdOfficeKitImagee977612ad933c986_1"/>
           <a:srcRect xmlns:a="http://schemas.openxmlformats.org/drawingml/2006/main" l="0" t="31927" r="0" b="31927"/>
           <a:stretch xmlns:a="http://schemas.openxmlformats.org/drawingml/2006/main">
             <a:fillRect/>
@@ -3068,8 +3126,8 @@
           <p:nvPr/>
         </p:nvPicPr>
         <p:blipFill>
-          <a:blip xmlns:r="http://schemas.openxmlformats.org/officeDocument/2006/relationships" xmlns:a="http://schemas.openxmlformats.org/drawingml/2006/main" r:embed="rIdOfficeKitImage10e4539a68783891_1"/>
-          <a:srcRect xmlns:a="http://schemas.openxmlformats.org/drawingml/2006/main" l="0" t="47258" r="0" b="47258"/>
+          <a:blip xmlns:r="http://schemas.openxmlformats.org/officeDocument/2006/relationships" xmlns:a="http://schemas.openxmlformats.org/drawingml/2006/main" r:embed="rIdOfficeKitImage6785cc6781fd2511_1"/>
+          <a:srcRect xmlns:a="http://schemas.openxmlformats.org/drawingml/2006/main" l="0" t="47256" r="0" b="47256"/>
           <a:stretch xmlns:a="http://schemas.openxmlformats.org/drawingml/2006/main">
             <a:fillRect/>
           </a:stretch>
@@ -3280,7 +3338,7 @@
           <p:nvPr/>
         </p:nvPicPr>
         <p:blipFill>
-          <a:blip xmlns:r="http://schemas.openxmlformats.org/officeDocument/2006/relationships" xmlns:a="http://schemas.openxmlformats.org/drawingml/2006/main" r:embed="rIdOfficeKitImagea5c00489db854fa2_1"/>
+          <a:blip xmlns:r="http://schemas.openxmlformats.org/officeDocument/2006/relationships" xmlns:a="http://schemas.openxmlformats.org/drawingml/2006/main" r:embed="rIdOfficeKitImaged96cedd8678b85ac_1"/>
           <a:srcRect xmlns:a="http://schemas.openxmlformats.org/drawingml/2006/main" l="0" t="31971" r="0" b="31971"/>
           <a:stretch xmlns:a="http://schemas.openxmlformats.org/drawingml/2006/main">
             <a:fillRect/>
@@ -3309,7 +3367,7 @@
           <p:nvPr/>
         </p:nvPicPr>
         <p:blipFill>
-          <a:blip xmlns:r="http://schemas.openxmlformats.org/officeDocument/2006/relationships" xmlns:a="http://schemas.openxmlformats.org/drawingml/2006/main" r:embed="rIdOfficeKitImagea68aebf613832e5f_1"/>
+          <a:blip xmlns:r="http://schemas.openxmlformats.org/officeDocument/2006/relationships" xmlns:a="http://schemas.openxmlformats.org/drawingml/2006/main" r:embed="rIdOfficeKitImage35d943dc999c7d05_1"/>
           <a:srcRect xmlns:a="http://schemas.openxmlformats.org/drawingml/2006/main" l="0" t="32347" r="0" b="32347"/>
           <a:stretch xmlns:a="http://schemas.openxmlformats.org/drawingml/2006/main">
             <a:fillRect/>
@@ -3338,7 +3396,7 @@
           <p:nvPr/>
         </p:nvPicPr>
         <p:blipFill>
-          <a:blip xmlns:r="http://schemas.openxmlformats.org/officeDocument/2006/relationships" xmlns:a="http://schemas.openxmlformats.org/drawingml/2006/main" r:embed="rIdOfficeKitImagee231e9493e535fbe_1"/>
+          <a:blip xmlns:r="http://schemas.openxmlformats.org/officeDocument/2006/relationships" xmlns:a="http://schemas.openxmlformats.org/drawingml/2006/main" r:embed="rIdOfficeKitImage06e55191024fa458_1"/>
           <a:srcRect xmlns:a="http://schemas.openxmlformats.org/drawingml/2006/main" l="0" t="32347" r="0" b="32347"/>
           <a:stretch xmlns:a="http://schemas.openxmlformats.org/drawingml/2006/main">
             <a:fillRect/>
@@ -3367,8 +3425,8 @@
           <p:nvPr/>
         </p:nvPicPr>
         <p:blipFill>
-          <a:blip xmlns:r="http://schemas.openxmlformats.org/officeDocument/2006/relationships" xmlns:a="http://schemas.openxmlformats.org/drawingml/2006/main" r:embed="rIdOfficeKitImageb5a7d66fe0ba8bb7_1"/>
-          <a:srcRect xmlns:a="http://schemas.openxmlformats.org/drawingml/2006/main" l="0" t="32347" r="0" b="32347"/>
+          <a:blip xmlns:r="http://schemas.openxmlformats.org/officeDocument/2006/relationships" xmlns:a="http://schemas.openxmlformats.org/drawingml/2006/main" r:embed="rIdOfficeKitImagefff481b85b8743d2_1"/>
+          <a:srcRect xmlns:a="http://schemas.openxmlformats.org/drawingml/2006/main" l="0" t="32333" r="0" b="32333"/>
           <a:stretch xmlns:a="http://schemas.openxmlformats.org/drawingml/2006/main">
             <a:fillRect/>
           </a:stretch>
@@ -3396,8 +3454,8 @@
           <p:nvPr/>
         </p:nvPicPr>
         <p:blipFill>
-          <a:blip xmlns:r="http://schemas.openxmlformats.org/officeDocument/2006/relationships" xmlns:a="http://schemas.openxmlformats.org/drawingml/2006/main" r:embed="rIdOfficeKitImage84ff976f39aab728_1"/>
-          <a:srcRect xmlns:a="http://schemas.openxmlformats.org/drawingml/2006/main" l="0" t="32347" r="0" b="32347"/>
+          <a:blip xmlns:r="http://schemas.openxmlformats.org/officeDocument/2006/relationships" xmlns:a="http://schemas.openxmlformats.org/drawingml/2006/main" r:embed="rIdOfficeKitImage7acdacea277813e8_1"/>
+          <a:srcRect xmlns:a="http://schemas.openxmlformats.org/drawingml/2006/main" l="0" t="32333" r="0" b="32333"/>
           <a:stretch xmlns:a="http://schemas.openxmlformats.org/drawingml/2006/main">
             <a:fillRect/>
           </a:stretch>
@@ -3638,7 +3696,7 @@
     <p:bg>
       <p:bgPr>
         <a:blipFill xmlns:a="http://schemas.openxmlformats.org/drawingml/2006/main">
-          <a:blip xmlns:r="http://schemas.openxmlformats.org/officeDocument/2006/relationships" r:embed="rIdOfficeKitImagefdea69a11126d29b_1"/>
+          <a:blip xmlns:r="http://schemas.openxmlformats.org/officeDocument/2006/relationships" r:embed="rIdOfficeKitImagee930dcb9c6b95953_1"/>
           <a:stretch>
             <a:fillRect/>
           </a:stretch>
@@ -4374,7 +4432,7 @@
     <p:bg>
       <p:bgPr>
         <a:blipFill xmlns:a="http://schemas.openxmlformats.org/drawingml/2006/main">
-          <a:blip xmlns:r="http://schemas.openxmlformats.org/officeDocument/2006/relationships" r:embed="rIdOfficeKitImagedf986129197cef3b_1"/>
+          <a:blip xmlns:r="http://schemas.openxmlformats.org/officeDocument/2006/relationships" r:embed="rIdOfficeKitImagea5c00489db854fa2_1"/>
           <a:stretch>
             <a:fillRect/>
           </a:stretch>
@@ -4852,8 +4910,8 @@
           <p:nvPr/>
         </p:nvPicPr>
         <p:blipFill>
-          <a:blip xmlns:r="http://schemas.openxmlformats.org/officeDocument/2006/relationships" xmlns:a="http://schemas.openxmlformats.org/drawingml/2006/main" r:embed="rIdOfficeKitImage6a3db1fe43260f32_1"/>
-          <a:srcRect xmlns:a="http://schemas.openxmlformats.org/drawingml/2006/main" l="0" t="47256" r="0" b="47256"/>
+          <a:blip xmlns:r="http://schemas.openxmlformats.org/officeDocument/2006/relationships" xmlns:a="http://schemas.openxmlformats.org/drawingml/2006/main" r:embed="rIdOfficeKitImagea68aebf613832e5f_1"/>
+          <a:srcRect xmlns:a="http://schemas.openxmlformats.org/drawingml/2006/main" l="0" t="47258" r="0" b="47258"/>
           <a:stretch xmlns:a="http://schemas.openxmlformats.org/drawingml/2006/main">
             <a:fillRect/>
           </a:stretch>

--- a/skills/presentation-template-library/skills/artifact-template-noir-field-pictorial/assets/reference.pptx
+++ b/skills/presentation-template-library/skills/artifact-template-noir-field-pictorial/assets/reference.pptx
@@ -2043,8 +2043,8 @@
           <p:nvPr/>
         </p:nvPicPr>
         <p:blipFill>
-          <a:blip xmlns:r="http://schemas.openxmlformats.org/officeDocument/2006/relationships" xmlns:a="http://schemas.openxmlformats.org/drawingml/2006/main" r:embed="rIdOfficeKitImage6a3db1fe43260f32_1"/>
-          <a:srcRect xmlns:a="http://schemas.openxmlformats.org/drawingml/2006/main" l="0" t="47256" r="0" b="47256"/>
+          <a:blip xmlns:r="http://schemas.openxmlformats.org/officeDocument/2006/relationships" xmlns:a="http://schemas.openxmlformats.org/drawingml/2006/main" r:embed="rIdOfficeKitImageb4650c5e003a270c_1"/>
+          <a:srcRect xmlns:a="http://schemas.openxmlformats.org/drawingml/2006/main" l="0" t="47258" r="0" b="47258"/>
           <a:stretch xmlns:a="http://schemas.openxmlformats.org/drawingml/2006/main">
             <a:fillRect/>
           </a:stretch>
@@ -2255,7 +2255,7 @@
           <p:nvPr/>
         </p:nvPicPr>
         <p:blipFill>
-          <a:blip xmlns:r="http://schemas.openxmlformats.org/officeDocument/2006/relationships" xmlns:a="http://schemas.openxmlformats.org/drawingml/2006/main" r:embed="rIdOfficeKitImagef4419f659ab3f590_1"/>
+          <a:blip xmlns:r="http://schemas.openxmlformats.org/officeDocument/2006/relationships" xmlns:a="http://schemas.openxmlformats.org/drawingml/2006/main" r:embed="rIdOfficeKitImage6a3db1fe43260f32_1"/>
           <a:srcRect xmlns:a="http://schemas.openxmlformats.org/drawingml/2006/main" l="0" t="30742" r="0" b="30742"/>
           <a:stretch xmlns:a="http://schemas.openxmlformats.org/drawingml/2006/main">
             <a:fillRect/>
@@ -2284,7 +2284,7 @@
           <p:nvPr/>
         </p:nvPicPr>
         <p:blipFill>
-          <a:blip xmlns:r="http://schemas.openxmlformats.org/officeDocument/2006/relationships" xmlns:a="http://schemas.openxmlformats.org/drawingml/2006/main" r:embed="rIdOfficeKitImagee307d6c31b3d1e07_1"/>
+          <a:blip xmlns:r="http://schemas.openxmlformats.org/officeDocument/2006/relationships" xmlns:a="http://schemas.openxmlformats.org/drawingml/2006/main" r:embed="rIdOfficeKitImagef4419f659ab3f590_1"/>
           <a:srcRect xmlns:a="http://schemas.openxmlformats.org/drawingml/2006/main" l="0" t="31927" r="0" b="31927"/>
           <a:stretch xmlns:a="http://schemas.openxmlformats.org/drawingml/2006/main">
             <a:fillRect/>
@@ -2313,7 +2313,7 @@
           <p:nvPr/>
         </p:nvPicPr>
         <p:blipFill>
-          <a:blip xmlns:r="http://schemas.openxmlformats.org/officeDocument/2006/relationships" xmlns:a="http://schemas.openxmlformats.org/drawingml/2006/main" r:embed="rIdOfficeKitImagecb4e39f1eccfa545_1"/>
+          <a:blip xmlns:r="http://schemas.openxmlformats.org/officeDocument/2006/relationships" xmlns:a="http://schemas.openxmlformats.org/drawingml/2006/main" r:embed="rIdOfficeKitImagee307d6c31b3d1e07_1"/>
           <a:srcRect xmlns:a="http://schemas.openxmlformats.org/drawingml/2006/main" l="0" t="31927" r="0" b="31927"/>
           <a:stretch xmlns:a="http://schemas.openxmlformats.org/drawingml/2006/main">
             <a:fillRect/>
@@ -2342,8 +2342,8 @@
           <p:nvPr/>
         </p:nvPicPr>
         <p:blipFill>
-          <a:blip xmlns:r="http://schemas.openxmlformats.org/officeDocument/2006/relationships" xmlns:a="http://schemas.openxmlformats.org/drawingml/2006/main" r:embed="rIdOfficeKitImage10e4539a68783891_1"/>
-          <a:srcRect xmlns:a="http://schemas.openxmlformats.org/drawingml/2006/main" l="0" t="31941" r="0" b="31941"/>
+          <a:blip xmlns:r="http://schemas.openxmlformats.org/officeDocument/2006/relationships" xmlns:a="http://schemas.openxmlformats.org/drawingml/2006/main" r:embed="rIdOfficeKitImagecb4e39f1eccfa545_1"/>
+          <a:srcRect xmlns:a="http://schemas.openxmlformats.org/drawingml/2006/main" l="0" t="31927" r="0" b="31927"/>
           <a:stretch xmlns:a="http://schemas.openxmlformats.org/drawingml/2006/main">
             <a:fillRect/>
           </a:stretch>
@@ -2371,8 +2371,8 @@
           <p:nvPr/>
         </p:nvPicPr>
         <p:blipFill>
-          <a:blip xmlns:r="http://schemas.openxmlformats.org/officeDocument/2006/relationships" xmlns:a="http://schemas.openxmlformats.org/drawingml/2006/main" r:embed="rIdOfficeKitImagee977612ad933c986_1"/>
-          <a:srcRect xmlns:a="http://schemas.openxmlformats.org/drawingml/2006/main" l="0" t="31927" r="0" b="31927"/>
+          <a:blip xmlns:r="http://schemas.openxmlformats.org/officeDocument/2006/relationships" xmlns:a="http://schemas.openxmlformats.org/drawingml/2006/main" r:embed="rIdOfficeKitImage10e4539a68783891_1"/>
+          <a:srcRect xmlns:a="http://schemas.openxmlformats.org/drawingml/2006/main" l="0" t="31941" r="0" b="31941"/>
           <a:stretch xmlns:a="http://schemas.openxmlformats.org/drawingml/2006/main">
             <a:fillRect/>
           </a:stretch>
@@ -3126,7 +3126,7 @@
           <p:nvPr/>
         </p:nvPicPr>
         <p:blipFill>
-          <a:blip xmlns:r="http://schemas.openxmlformats.org/officeDocument/2006/relationships" xmlns:a="http://schemas.openxmlformats.org/drawingml/2006/main" r:embed="rIdOfficeKitImage6785cc6781fd2511_1"/>
+          <a:blip xmlns:r="http://schemas.openxmlformats.org/officeDocument/2006/relationships" xmlns:a="http://schemas.openxmlformats.org/drawingml/2006/main" r:embed="rIdOfficeKitImagee977612ad933c986_1"/>
           <a:srcRect xmlns:a="http://schemas.openxmlformats.org/drawingml/2006/main" l="0" t="47256" r="0" b="47256"/>
           <a:stretch xmlns:a="http://schemas.openxmlformats.org/drawingml/2006/main">
             <a:fillRect/>
@@ -3338,7 +3338,7 @@
           <p:nvPr/>
         </p:nvPicPr>
         <p:blipFill>
-          <a:blip xmlns:r="http://schemas.openxmlformats.org/officeDocument/2006/relationships" xmlns:a="http://schemas.openxmlformats.org/drawingml/2006/main" r:embed="rIdOfficeKitImaged96cedd8678b85ac_1"/>
+          <a:blip xmlns:r="http://schemas.openxmlformats.org/officeDocument/2006/relationships" xmlns:a="http://schemas.openxmlformats.org/drawingml/2006/main" r:embed="rIdOfficeKitImagec49ddd99c59beda0_1"/>
           <a:srcRect xmlns:a="http://schemas.openxmlformats.org/drawingml/2006/main" l="0" t="31971" r="0" b="31971"/>
           <a:stretch xmlns:a="http://schemas.openxmlformats.org/drawingml/2006/main">
             <a:fillRect/>
@@ -3367,8 +3367,8 @@
           <p:nvPr/>
         </p:nvPicPr>
         <p:blipFill>
-          <a:blip xmlns:r="http://schemas.openxmlformats.org/officeDocument/2006/relationships" xmlns:a="http://schemas.openxmlformats.org/drawingml/2006/main" r:embed="rIdOfficeKitImage35d943dc999c7d05_1"/>
-          <a:srcRect xmlns:a="http://schemas.openxmlformats.org/drawingml/2006/main" l="0" t="32347" r="0" b="32347"/>
+          <a:blip xmlns:r="http://schemas.openxmlformats.org/officeDocument/2006/relationships" xmlns:a="http://schemas.openxmlformats.org/drawingml/2006/main" r:embed="rIdOfficeKitImage6785cc6781fd2511_1"/>
+          <a:srcRect xmlns:a="http://schemas.openxmlformats.org/drawingml/2006/main" l="0" t="32333" r="0" b="32333"/>
           <a:stretch xmlns:a="http://schemas.openxmlformats.org/drawingml/2006/main">
             <a:fillRect/>
           </a:stretch>
@@ -3396,7 +3396,7 @@
           <p:nvPr/>
         </p:nvPicPr>
         <p:blipFill>
-          <a:blip xmlns:r="http://schemas.openxmlformats.org/officeDocument/2006/relationships" xmlns:a="http://schemas.openxmlformats.org/drawingml/2006/main" r:embed="rIdOfficeKitImage06e55191024fa458_1"/>
+          <a:blip xmlns:r="http://schemas.openxmlformats.org/officeDocument/2006/relationships" xmlns:a="http://schemas.openxmlformats.org/drawingml/2006/main" r:embed="rIdOfficeKitImagefb0d559f34167a51_1"/>
           <a:srcRect xmlns:a="http://schemas.openxmlformats.org/drawingml/2006/main" l="0" t="32347" r="0" b="32347"/>
           <a:stretch xmlns:a="http://schemas.openxmlformats.org/drawingml/2006/main">
             <a:fillRect/>
@@ -3425,8 +3425,8 @@
           <p:nvPr/>
         </p:nvPicPr>
         <p:blipFill>
-          <a:blip xmlns:r="http://schemas.openxmlformats.org/officeDocument/2006/relationships" xmlns:a="http://schemas.openxmlformats.org/drawingml/2006/main" r:embed="rIdOfficeKitImagefff481b85b8743d2_1"/>
-          <a:srcRect xmlns:a="http://schemas.openxmlformats.org/drawingml/2006/main" l="0" t="32333" r="0" b="32333"/>
+          <a:blip xmlns:r="http://schemas.openxmlformats.org/officeDocument/2006/relationships" xmlns:a="http://schemas.openxmlformats.org/drawingml/2006/main" r:embed="rIdOfficeKitImaged96cedd8678b85ac_1"/>
+          <a:srcRect xmlns:a="http://schemas.openxmlformats.org/drawingml/2006/main" l="0" t="32347" r="0" b="32347"/>
           <a:stretch xmlns:a="http://schemas.openxmlformats.org/drawingml/2006/main">
             <a:fillRect/>
           </a:stretch>
@@ -3454,8 +3454,8 @@
           <p:nvPr/>
         </p:nvPicPr>
         <p:blipFill>
-          <a:blip xmlns:r="http://schemas.openxmlformats.org/officeDocument/2006/relationships" xmlns:a="http://schemas.openxmlformats.org/drawingml/2006/main" r:embed="rIdOfficeKitImage7acdacea277813e8_1"/>
-          <a:srcRect xmlns:a="http://schemas.openxmlformats.org/drawingml/2006/main" l="0" t="32333" r="0" b="32333"/>
+          <a:blip xmlns:r="http://schemas.openxmlformats.org/officeDocument/2006/relationships" xmlns:a="http://schemas.openxmlformats.org/drawingml/2006/main" r:embed="rIdOfficeKitImage35d943dc999c7d05_1"/>
+          <a:srcRect xmlns:a="http://schemas.openxmlformats.org/drawingml/2006/main" l="0" t="32347" r="0" b="32347"/>
           <a:stretch xmlns:a="http://schemas.openxmlformats.org/drawingml/2006/main">
             <a:fillRect/>
           </a:stretch>
@@ -3696,7 +3696,7 @@
     <p:bg>
       <p:bgPr>
         <a:blipFill xmlns:a="http://schemas.openxmlformats.org/drawingml/2006/main">
-          <a:blip xmlns:r="http://schemas.openxmlformats.org/officeDocument/2006/relationships" r:embed="rIdOfficeKitImagee930dcb9c6b95953_1"/>
+          <a:blip xmlns:r="http://schemas.openxmlformats.org/officeDocument/2006/relationships" r:embed="rIdOfficeKitImage06e55191024fa458_1"/>
           <a:stretch>
             <a:fillRect/>
           </a:stretch>
